--- a/UNeXt_presentation.pptx
+++ b/UNeXt_presentation.pptx
@@ -19,6 +19,8 @@
     <p:sldId id="267" r:id="rId19"/>
     <p:sldId id="268" r:id="rId20"/>
     <p:sldId id="269" r:id="rId21"/>
+    <p:sldId id="270" r:id="rId22"/>
+    <p:sldId id="271" r:id="rId23"/>
   </p:sldIdLst>
   <p:sldSz cx="12191695" cy="6858000" type="screen4x3"/>
   <p:notesSz cx="6858000" cy="9144000"/>
@@ -4012,7 +4014,7 @@
                           </a:solidFill>
                           <a:latin typeface="Calibri"/>
                         </a:rPr>
-                        <a:t>+0.006</a:t>
+                        <a:t>+0.006  (1 split)</a:t>
                       </a:r>
                     </a:p>
                   </a:txBody>
@@ -4035,7 +4037,7 @@
                           </a:solidFill>
                           <a:latin typeface="Calibri"/>
                         </a:rPr>
-                        <a:t>+0.017</a:t>
+                        <a:t>+0.013  (3 splits)</a:t>
                       </a:r>
                     </a:p>
                   </a:txBody>
@@ -4161,7 +4163,7 @@
                 </a:solidFill>
                 <a:latin typeface="Calibri"/>
               </a:rPr>
-              <a:t> — swapping Dice for Focal Tversky in the loss raised IoU by +0.017 for </a:t>
+              <a:t> — swapping Dice for Focal Tversky in the loss raised IoU by +0.013 across three splits, for </a:t>
             </a:r>
             <a:r>
               <a:rPr sz="1350" b="1" i="0">
@@ -4179,7 +4181,7 @@
                 </a:solidFill>
                 <a:latin typeface="Calibri"/>
               </a:rPr>
-              <a:t>.</a:t>
+              <a:t> (next slide).</a:t>
             </a:r>
           </a:p>
         </p:txBody>
@@ -4355,8 +4357,8 @@
           <p:nvPr/>
         </p:nvGraphicFramePr>
         <p:xfrm>
-          <a:off x="548640" y="2651760"/>
-          <a:ext cx="10241279" cy="2377440"/>
+          <a:off x="548640" y="2514600"/>
+          <a:ext cx="10607039" cy="2651760"/>
         </p:xfrm>
         <a:graphic>
           <a:graphicData uri="http://schemas.openxmlformats.org/drawingml/2006/table">
@@ -4365,11 +4367,11 @@
                 <a:tableStyleId>{5C22544A-7EE6-4342-B048-85BDC9FD1C3A}</a:tableStyleId>
               </a:tblPr>
               <a:tblGrid>
-                <a:gridCol w="4923692"/>
-                <a:gridCol w="2363372"/>
-                <a:gridCol w="2954215"/>
+                <a:gridCol w="4435671"/>
+                <a:gridCol w="2892829"/>
+                <a:gridCol w="3278539"/>
               </a:tblGrid>
-              <a:tr h="396240">
+              <a:tr h="378822">
                 <a:tc>
                   <a:txBody>
                     <a:bodyPr wrap="square"/>
@@ -4377,13 +4379,13 @@
                     <a:p>
                       <a:pPr algn="l"/>
                       <a:r>
-                        <a:rPr sz="1300" b="1" i="0">
-                          <a:solidFill>
-                            <a:srgbClr val="000000"/>
-                          </a:solidFill>
-                          <a:latin typeface="Calibri"/>
-                        </a:rPr>
-                        <a:t>Seed 43 (identical config, loss swapped)</a:t>
+                        <a:rPr sz="1200" b="1" i="0">
+                          <a:solidFill>
+                            <a:srgbClr val="000000"/>
+                          </a:solidFill>
+                          <a:latin typeface="Calibri"/>
+                        </a:rPr>
+                        <a:t>All 3 splits, on top of strong augmentation</a:t>
                       </a:r>
                     </a:p>
                   </a:txBody>
@@ -4400,7 +4402,7 @@
                     <a:p>
                       <a:pPr algn="ctr"/>
                       <a:r>
-                        <a:rPr sz="1300" b="1" i="0">
+                        <a:rPr sz="1200" b="1" i="0">
                           <a:solidFill>
                             <a:srgbClr val="000000"/>
                           </a:solidFill>
@@ -4423,7 +4425,7 @@
                     <a:p>
                       <a:pPr algn="ctr"/>
                       <a:r>
-                        <a:rPr sz="1300" b="1" i="0">
+                        <a:rPr sz="1200" b="1" i="0">
                           <a:solidFill>
                             <a:srgbClr val="000000"/>
                           </a:solidFill>
@@ -4440,7 +4442,7 @@
                   </a:tcPr>
                 </a:tc>
               </a:tr>
-              <a:tr h="396240">
+              <a:tr h="378822">
                 <a:tc>
                   <a:txBody>
                     <a:bodyPr wrap="square"/>
@@ -4448,13 +4450,13 @@
                     <a:p>
                       <a:pPr algn="l"/>
                       <a:r>
-                        <a:rPr sz="1300" b="0" i="0">
-                          <a:solidFill>
-                            <a:srgbClr val="000000"/>
-                          </a:solidFill>
-                          <a:latin typeface="Calibri"/>
-                        </a:rPr>
-                        <a:t>Best IoU</a:t>
+                        <a:rPr sz="1200" b="0" i="0">
+                          <a:solidFill>
+                            <a:srgbClr val="000000"/>
+                          </a:solidFill>
+                          <a:latin typeface="Calibri"/>
+                        </a:rPr>
+                        <a:t>seed 41 / 42 / 43 — best IoU</a:t>
                       </a:r>
                     </a:p>
                   </a:txBody>
@@ -4471,13 +4473,13 @@
                     <a:p>
                       <a:pPr algn="ctr"/>
                       <a:r>
-                        <a:rPr sz="1300" b="0" i="0">
-                          <a:solidFill>
-                            <a:srgbClr val="000000"/>
-                          </a:solidFill>
-                          <a:latin typeface="Calibri"/>
-                        </a:rPr>
-                        <a:t>0.6464</a:t>
+                        <a:rPr sz="1200" b="0" i="0">
+                          <a:solidFill>
+                            <a:srgbClr val="000000"/>
+                          </a:solidFill>
+                          <a:latin typeface="Calibri"/>
+                        </a:rPr>
+                        <a:t>0.6215 / 0.6306 / 0.6464</a:t>
                       </a:r>
                     </a:p>
                   </a:txBody>
@@ -4494,13 +4496,13 @@
                     <a:p>
                       <a:pPr algn="ctr"/>
                       <a:r>
-                        <a:rPr sz="1300" b="1" i="0">
-                          <a:solidFill>
-                            <a:srgbClr val="000000"/>
-                          </a:solidFill>
-                          <a:latin typeface="Calibri"/>
-                        </a:rPr>
-                        <a:t>0.6629  (+0.017)</a:t>
+                        <a:rPr sz="1200" b="0" i="0">
+                          <a:solidFill>
+                            <a:srgbClr val="000000"/>
+                          </a:solidFill>
+                          <a:latin typeface="Calibri"/>
+                        </a:rPr>
+                        <a:t>0.6397 / 0.6359 / 0.6629</a:t>
                       </a:r>
                     </a:p>
                   </a:txBody>
@@ -4511,7 +4513,7 @@
                   </a:tcPr>
                 </a:tc>
               </a:tr>
-              <a:tr h="396240">
+              <a:tr h="378822">
                 <a:tc>
                   <a:txBody>
                     <a:bodyPr wrap="square"/>
@@ -4519,13 +4521,13 @@
                     <a:p>
                       <a:pPr algn="l"/>
                       <a:r>
-                        <a:rPr sz="1300" b="0" i="0">
-                          <a:solidFill>
-                            <a:srgbClr val="000000"/>
-                          </a:solidFill>
-                          <a:latin typeface="Calibri"/>
-                        </a:rPr>
-                        <a:t>Dice (aggregate)</a:t>
+                        <a:rPr sz="1200" b="1" i="0">
+                          <a:solidFill>
+                            <a:srgbClr val="000000"/>
+                          </a:solidFill>
+                          <a:latin typeface="Calibri"/>
+                        </a:rPr>
+                        <a:t>Mean IoU</a:t>
                       </a:r>
                     </a:p>
                   </a:txBody>
@@ -4542,13 +4544,13 @@
                     <a:p>
                       <a:pPr algn="ctr"/>
                       <a:r>
-                        <a:rPr sz="1300" b="0" i="0">
-                          <a:solidFill>
-                            <a:srgbClr val="000000"/>
-                          </a:solidFill>
-                          <a:latin typeface="Calibri"/>
-                        </a:rPr>
-                        <a:t>0.7798</a:t>
+                        <a:rPr sz="1200" b="1" i="0">
+                          <a:solidFill>
+                            <a:srgbClr val="000000"/>
+                          </a:solidFill>
+                          <a:latin typeface="Calibri"/>
+                        </a:rPr>
+                        <a:t>0.6328 ± 0.0126</a:t>
                       </a:r>
                     </a:p>
                   </a:txBody>
@@ -4565,13 +4567,13 @@
                     <a:p>
                       <a:pPr algn="ctr"/>
                       <a:r>
-                        <a:rPr sz="1300" b="1" i="0">
-                          <a:solidFill>
-                            <a:srgbClr val="000000"/>
-                          </a:solidFill>
-                          <a:latin typeface="Calibri"/>
-                        </a:rPr>
-                        <a:t>0.7906</a:t>
+                        <a:rPr sz="1200" b="1" i="0">
+                          <a:solidFill>
+                            <a:srgbClr val="000000"/>
+                          </a:solidFill>
+                          <a:latin typeface="Calibri"/>
+                        </a:rPr>
+                        <a:t>0.6461 ± 0.0146  (+0.013)</a:t>
                       </a:r>
                     </a:p>
                   </a:txBody>
@@ -4582,7 +4584,7 @@
                   </a:tcPr>
                 </a:tc>
               </a:tr>
-              <a:tr h="396240">
+              <a:tr h="378822">
                 <a:tc>
                   <a:txBody>
                     <a:bodyPr wrap="square"/>
@@ -4590,13 +4592,13 @@
                     <a:p>
                       <a:pPr algn="l"/>
                       <a:r>
-                        <a:rPr sz="1300" b="0" i="0">
-                          <a:solidFill>
-                            <a:srgbClr val="000000"/>
-                          </a:solidFill>
-                          <a:latin typeface="Calibri"/>
-                        </a:rPr>
-                        <a:t>Recall — of true tumour pixels, fraction found</a:t>
+                        <a:rPr sz="1200" b="0" i="0">
+                          <a:solidFill>
+                            <a:srgbClr val="000000"/>
+                          </a:solidFill>
+                          <a:latin typeface="Calibri"/>
+                        </a:rPr>
+                        <a:t>Mean Dice</a:t>
                       </a:r>
                     </a:p>
                   </a:txBody>
@@ -4613,7 +4615,78 @@
                     <a:p>
                       <a:pPr algn="ctr"/>
                       <a:r>
-                        <a:rPr sz="1300" b="0" i="0">
+                        <a:rPr sz="1200" b="0" i="0">
+                          <a:solidFill>
+                            <a:srgbClr val="000000"/>
+                          </a:solidFill>
+                          <a:latin typeface="Calibri"/>
+                        </a:rPr>
+                        <a:t>0.7718 ± 0.0013</a:t>
+                      </a:r>
+                    </a:p>
+                  </a:txBody>
+                  <a:tcPr>
+                    <a:solidFill>
+                      <a:srgbClr val="FFFFFF"/>
+                    </a:solidFill>
+                  </a:tcPr>
+                </a:tc>
+                <a:tc>
+                  <a:txBody>
+                    <a:bodyPr wrap="square"/>
+                    <a:lstStyle/>
+                    <a:p>
+                      <a:pPr algn="ctr"/>
+                      <a:r>
+                        <a:rPr sz="1200" b="0" i="0">
+                          <a:solidFill>
+                            <a:srgbClr val="000000"/>
+                          </a:solidFill>
+                          <a:latin typeface="Calibri"/>
+                        </a:rPr>
+                        <a:t>0.7756 ± 0.0054  (+0.004)</a:t>
+                      </a:r>
+                    </a:p>
+                  </a:txBody>
+                  <a:tcPr>
+                    <a:solidFill>
+                      <a:srgbClr val="FFFFFF"/>
+                    </a:solidFill>
+                  </a:tcPr>
+                </a:tc>
+              </a:tr>
+              <a:tr h="378822">
+                <a:tc>
+                  <a:txBody>
+                    <a:bodyPr wrap="square"/>
+                    <a:lstStyle/>
+                    <a:p>
+                      <a:pPr algn="l"/>
+                      <a:r>
+                        <a:rPr sz="1200" b="0" i="0">
+                          <a:solidFill>
+                            <a:srgbClr val="000000"/>
+                          </a:solidFill>
+                          <a:latin typeface="Calibri"/>
+                        </a:rPr>
+                        <a:t>Recall (of true tumour pixels, fraction found)</a:t>
+                      </a:r>
+                    </a:p>
+                  </a:txBody>
+                  <a:tcPr>
+                    <a:solidFill>
+                      <a:srgbClr val="FFFFFF"/>
+                    </a:solidFill>
+                  </a:tcPr>
+                </a:tc>
+                <a:tc>
+                  <a:txBody>
+                    <a:bodyPr wrap="square"/>
+                    <a:lstStyle/>
+                    <a:p>
+                      <a:pPr algn="ctr"/>
+                      <a:r>
+                        <a:rPr sz="1200" b="0" i="0">
                           <a:solidFill>
                             <a:srgbClr val="000000"/>
                           </a:solidFill>
@@ -4636,7 +4709,7 @@
                     <a:p>
                       <a:pPr algn="ctr"/>
                       <a:r>
-                        <a:rPr sz="1300" b="1" i="0">
+                        <a:rPr sz="1200" b="1" i="0">
                           <a:solidFill>
                             <a:srgbClr val="000000"/>
                           </a:solidFill>
@@ -4653,7 +4726,7 @@
                   </a:tcPr>
                 </a:tc>
               </a:tr>
-              <a:tr h="396240">
+              <a:tr h="378822">
                 <a:tc>
                   <a:txBody>
                     <a:bodyPr wrap="square"/>
@@ -4661,13 +4734,13 @@
                     <a:p>
                       <a:pPr algn="l"/>
                       <a:r>
-                        <a:rPr sz="1300" b="0" i="0">
-                          <a:solidFill>
-                            <a:srgbClr val="000000"/>
-                          </a:solidFill>
-                          <a:latin typeface="Calibri"/>
-                        </a:rPr>
-                        <a:t>Precision — of predicted pixels, fraction correct</a:t>
+                        <a:rPr sz="1200" b="0" i="0">
+                          <a:solidFill>
+                            <a:srgbClr val="000000"/>
+                          </a:solidFill>
+                          <a:latin typeface="Calibri"/>
+                        </a:rPr>
+                        <a:t>Precision (of predicted pixels, fraction correct)</a:t>
                       </a:r>
                     </a:p>
                   </a:txBody>
@@ -4684,7 +4757,7 @@
                     <a:p>
                       <a:pPr algn="ctr"/>
                       <a:r>
-                        <a:rPr sz="1300" b="0" i="0">
+                        <a:rPr sz="1200" b="0" i="0">
                           <a:solidFill>
                             <a:srgbClr val="000000"/>
                           </a:solidFill>
@@ -4707,7 +4780,7 @@
                     <a:p>
                       <a:pPr algn="ctr"/>
                       <a:r>
-                        <a:rPr sz="1300" b="0" i="0">
+                        <a:rPr sz="1200" b="0" i="0">
                           <a:solidFill>
                             <a:srgbClr val="000000"/>
                           </a:solidFill>
@@ -4724,7 +4797,7 @@
                   </a:tcPr>
                 </a:tc>
               </a:tr>
-              <a:tr h="396240">
+              <a:tr h="378828">
                 <a:tc>
                   <a:txBody>
                     <a:bodyPr wrap="square"/>
@@ -4732,7 +4805,7 @@
                     <a:p>
                       <a:pPr algn="l"/>
                       <a:r>
-                        <a:rPr sz="1300" b="0" i="0">
+                        <a:rPr sz="1200" b="0" i="0">
                           <a:solidFill>
                             <a:srgbClr val="000000"/>
                           </a:solidFill>
@@ -4755,7 +4828,7 @@
                     <a:p>
                       <a:pPr algn="ctr"/>
                       <a:r>
-                        <a:rPr sz="1300" b="0" i="0">
+                        <a:rPr sz="1200" b="0" i="0">
                           <a:solidFill>
                             <a:srgbClr val="000000"/>
                           </a:solidFill>
@@ -4778,7 +4851,7 @@
                     <a:p>
                       <a:pPr algn="ctr"/>
                       <a:r>
-                        <a:rPr sz="1300" b="1" i="0">
+                        <a:rPr sz="1200" b="1" i="0">
                           <a:solidFill>
                             <a:srgbClr val="000000"/>
                           </a:solidFill>
@@ -4807,8 +4880,8 @@
         </p:nvSpPr>
         <p:spPr>
           <a:xfrm>
-            <a:off x="548640" y="5212080"/>
-            <a:ext cx="11094415" cy="1188720"/>
+            <a:off x="548640" y="5349240"/>
+            <a:ext cx="11094415" cy="1051560"/>
           </a:xfrm>
           <a:prstGeom prst="rect">
             <a:avLst/>
@@ -4823,42 +4896,42 @@
           <a:p>
             <a:pPr>
               <a:spcAft>
-                <a:spcPts val="600"/>
+                <a:spcPts val="500"/>
               </a:spcAft>
             </a:pPr>
             <a:r>
-              <a:rPr sz="1350" b="0" i="0">
-                <a:solidFill>
-                  <a:srgbClr val="000000"/>
-                </a:solidFill>
-                <a:latin typeface="Calibri"/>
-              </a:rPr>
-              <a:t>The mechanism worked as designed — a large recall gain for a smaller precision cost, which is the right trade when missing a tumour is worse than a false alarm.</a:t>
+              <a:rPr sz="1300" b="1" i="0">
+                <a:solidFill>
+                  <a:srgbClr val="000000"/>
+                </a:solidFill>
+                <a:latin typeface="Calibri"/>
+              </a:rPr>
+              <a:t>IoU improved on all three splits</a:t>
+            </a:r>
+            <a:r>
+              <a:rPr sz="1300" b="0" i="0">
+                <a:solidFill>
+                  <a:srgbClr val="000000"/>
+                </a:solidFill>
+                <a:latin typeface="Calibri"/>
+              </a:rPr>
+              <a:t> (+0.018, +0.005, +0.017), paired t-test p = 0.081. Consistent in direction, but the magnitude varies by split — and Dice barely moves.</a:t>
             </a:r>
           </a:p>
           <a:p>
             <a:pPr>
               <a:spcAft>
-                <a:spcPts val="600"/>
+                <a:spcPts val="500"/>
               </a:spcAft>
             </a:pPr>
             <a:r>
-              <a:rPr sz="1350" b="1" i="0">
-                <a:solidFill>
-                  <a:srgbClr val="000000"/>
-                </a:solidFill>
-                <a:latin typeface="Calibri"/>
-              </a:rPr>
-              <a:t>Caveat:</a:t>
-            </a:r>
-            <a:r>
-              <a:rPr sz="1350" b="0" i="0">
-                <a:solidFill>
-                  <a:srgbClr val="000000"/>
-                </a:solidFill>
-                <a:latin typeface="Calibri"/>
-              </a:rPr>
-              <a:t> replicated on 2 of 3 splits so far (+0.017, +0.018); the third is still running. Promising, not yet proven.</a:t>
+              <a:rPr sz="1300" b="0" i="0">
+                <a:solidFill>
+                  <a:srgbClr val="000000"/>
+                </a:solidFill>
+                <a:latin typeface="Calibri"/>
+              </a:rPr>
+              <a:t>The mechanism worked as designed: a large recall gain for a smaller precision cost — the right trade when missing a tumour is worse than a false alarm.</a:t>
             </a:r>
           </a:p>
         </p:txBody>
@@ -4918,21 +4991,56 @@
                 </a:solidFill>
                 <a:latin typeface="Calibri"/>
               </a:rPr>
-              <a:t>Challenges</a:t>
-            </a:r>
-          </a:p>
-        </p:txBody>
-      </p:sp>
-      <p:sp>
-        <p:nvSpPr>
-          <p:cNvPr id="3" name="TextBox 2"/>
+              <a:t>Both changes stack — and neither costs anything</a:t>
+            </a:r>
+          </a:p>
+          <a:p>
+            <a:r>
+              <a:rPr sz="1400" b="0" i="1">
+                <a:solidFill>
+                  <a:srgbClr val="555555"/>
+                </a:solidFill>
+                <a:latin typeface="Calibri"/>
+              </a:rPr>
+              <a:t>Paper recipe → + strong augmentation → + Focal Tversky loss, 3 splits</a:t>
+            </a:r>
+          </a:p>
+        </p:txBody>
+      </p:sp>
+      <p:pic>
+        <p:nvPicPr>
+          <p:cNvPr id="3" name="Picture 2" descr="fig6_cumulative.png"/>
+          <p:cNvPicPr>
+            <a:picLocks noChangeAspect="1"/>
+          </p:cNvPicPr>
+          <p:nvPr/>
+        </p:nvPicPr>
+        <p:blipFill>
+          <a:blip r:embed="rId2"/>
+          <a:stretch>
+            <a:fillRect/>
+          </a:stretch>
+        </p:blipFill>
+        <p:spPr>
+          <a:xfrm>
+            <a:off x="792327" y="1280160"/>
+            <a:ext cx="10607040" cy="4058346"/>
+          </a:xfrm>
+          <a:prstGeom prst="rect">
+            <a:avLst/>
+          </a:prstGeom>
+        </p:spPr>
+      </p:pic>
+      <p:sp>
+        <p:nvSpPr>
+          <p:cNvPr id="4" name="TextBox 3"/>
           <p:cNvSpPr txBox="1"/>
           <p:nvPr/>
         </p:nvSpPr>
         <p:spPr>
           <a:xfrm>
-            <a:off x="548640" y="1371600"/>
-            <a:ext cx="11094415" cy="5029200"/>
+            <a:off x="548640" y="5394960"/>
+            <a:ext cx="11094415" cy="1005840"/>
           </a:xfrm>
           <a:prstGeom prst="rect">
             <a:avLst/>
@@ -4947,119 +5055,44 @@
           <a:p>
             <a:pPr>
               <a:spcAft>
-                <a:spcPts val="1400"/>
+                <a:spcPts val="1000"/>
               </a:spcAft>
             </a:pPr>
             <a:r>
-              <a:rPr sz="1500" b="1" i="0">
-                <a:solidFill>
-                  <a:srgbClr val="000000"/>
-                </a:solidFill>
-                <a:latin typeface="Calibri"/>
-              </a:rPr>
-              <a:t>1. A real bug in the upstream code.</a:t>
-            </a:r>
-            <a:r>
-              <a:rPr sz="1500" b="0" i="0">
-                <a:solidFill>
-                  <a:srgbClr val="000000"/>
-                </a:solidFill>
-                <a:latin typeface="Calibri"/>
-              </a:rPr>
-              <a:t> dataset.py divides by 255 *after* Normalize() has already applied ImageNet statistics — squashing inputs from ±2.5 into </a:t>
-            </a:r>
-            <a:r>
-              <a:rPr sz="1500" b="1" i="0">
-                <a:solidFill>
-                  <a:srgbClr val="000000"/>
-                </a:solidFill>
-                <a:latin typeface="Calibri"/>
-              </a:rPr>
-              <a:t>±0.01</a:t>
-            </a:r>
-            <a:r>
-              <a:rPr sz="1500" b="0" i="0">
-                <a:solidFill>
-                  <a:srgbClr val="000000"/>
-                </a:solidFill>
-                <a:latin typeface="Calibri"/>
-              </a:rPr>
-              <a:t> and discarding most of the signal. Found by inspecting tensors, not from any error.</a:t>
-            </a:r>
-          </a:p>
-          <a:p>
-            <a:pPr>
-              <a:spcAft>
-                <a:spcPts val="1400"/>
-              </a:spcAft>
-            </a:pPr>
-            <a:r>
-              <a:rPr sz="1500" b="1" i="0">
-                <a:solidFill>
-                  <a:srgbClr val="000000"/>
-                </a:solidFill>
-                <a:latin typeface="Calibri"/>
-              </a:rPr>
-              <a:t>2. Frozen BatchNorm is not frozen.</a:t>
-            </a:r>
-            <a:r>
-              <a:rPr sz="1500" b="0" i="0">
-                <a:solidFill>
-                  <a:srgbClr val="000000"/>
-                </a:solidFill>
-                <a:latin typeface="Calibri"/>
-              </a:rPr>
-              <a:t> requires_grad=False stops gradients but not the running mean/variance buffers — our "frozen" backbone would have drifted silently, invalidating the attribution.</a:t>
-            </a:r>
-          </a:p>
-          <a:p>
-            <a:pPr>
-              <a:spcAft>
-                <a:spcPts val="1400"/>
-              </a:spcAft>
-            </a:pPr>
-            <a:r>
-              <a:rPr sz="1500" b="1" i="0">
-                <a:solidFill>
-                  <a:srgbClr val="000000"/>
-                </a:solidFill>
-                <a:latin typeface="Calibri"/>
-              </a:rPr>
-              <a:t>3. Identity-grafting is delicate.</a:t>
-            </a:r>
-            <a:r>
-              <a:rPr sz="1500" b="0" i="0">
-                <a:solidFill>
-                  <a:srgbClr val="000000"/>
-                </a:solidFill>
-                <a:latin typeface="Calibri"/>
-              </a:rPr>
-              <a:t> Inserting SE naively halves every activation; initialising too conservatively saturates the sigmoid so it cannot learn. Starting as an exact identity *and* staying trainable took several attempts.</a:t>
-            </a:r>
-          </a:p>
-          <a:p>
-            <a:pPr>
-              <a:spcAft>
-                <a:spcPts val="1400"/>
-              </a:spcAft>
-            </a:pPr>
-            <a:r>
-              <a:rPr sz="1500" b="1" i="0">
-                <a:solidFill>
-                  <a:srgbClr val="000000"/>
-                </a:solidFill>
-                <a:latin typeface="Calibri"/>
-              </a:rPr>
-              <a:t>4. A 2022 repo on a 2026 stack</a:t>
-            </a:r>
-            <a:r>
-              <a:rPr sz="1500" b="0" i="0">
-                <a:solidFill>
-                  <a:srgbClr val="000000"/>
-                </a:solidFill>
-                <a:latin typeface="Calibri"/>
-              </a:rPr>
-              <a:t> — dead dependencies, and no released weights to validate against.</a:t>
+              <a:rPr sz="1400" b="1" i="0">
+                <a:solidFill>
+                  <a:srgbClr val="000000"/>
+                </a:solidFill>
+                <a:latin typeface="Calibri"/>
+              </a:rPr>
+              <a:t>0.5931 → 0.6461 IoU (+0.053)</a:t>
+            </a:r>
+            <a:r>
+              <a:rPr sz="1400" b="0" i="0">
+                <a:solidFill>
+                  <a:srgbClr val="000000"/>
+                </a:solidFill>
+                <a:latin typeface="Calibri"/>
+              </a:rPr>
+              <a:t> — about </a:t>
+            </a:r>
+            <a:r>
+              <a:rPr sz="1400" b="1" i="0">
+                <a:solidFill>
+                  <a:srgbClr val="000000"/>
+                </a:solidFill>
+                <a:latin typeface="Calibri"/>
+              </a:rPr>
+              <a:t>70% of the original gap</a:t>
+            </a:r>
+            <a:r>
+              <a:rPr sz="1400" b="0" i="0">
+                <a:solidFill>
+                  <a:srgbClr val="000000"/>
+                </a:solidFill>
+                <a:latin typeface="Calibri"/>
+              </a:rPr>
+              <a:t> to the paper, with the model unchanged: still 1,471,921 parameters and 0.577 GFLOPs.</a:t>
             </a:r>
           </a:p>
         </p:txBody>
@@ -5119,7 +5152,7 @@
                 </a:solidFill>
                 <a:latin typeface="Calibri"/>
               </a:rPr>
-              <a:t>Conclusions</a:t>
+              <a:t>Challenges</a:t>
             </a:r>
           </a:p>
         </p:txBody>
@@ -5148,7 +5181,7 @@
           <a:p>
             <a:pPr>
               <a:spcAft>
-                <a:spcPts val="1100"/>
+                <a:spcPts val="1400"/>
               </a:spcAft>
             </a:pPr>
             <a:r>
@@ -5158,7 +5191,7 @@
                 </a:solidFill>
                 <a:latin typeface="Calibri"/>
               </a:rPr>
-              <a:t>What reproduced — the efficiency claims, exactly.</a:t>
+              <a:t>1. A real bug in the upstream code.</a:t>
             </a:r>
             <a:r>
               <a:rPr sz="1500" b="0" i="0">
@@ -5167,13 +5200,31 @@
                 </a:solidFill>
                 <a:latin typeface="Calibri"/>
               </a:rPr>
-              <a:t> 1,471,921 parameters (paper: 1.47 M), 0.577 GFLOPs (paper: 0.57), 12.5 ms on CPU. UNeXt really is 72× smaller than TransUNet.</a:t>
+              <a:t> dataset.py divides by 255 *after* Normalize() has already applied ImageNet statistics — squashing inputs from ±2.5 into </a:t>
+            </a:r>
+            <a:r>
+              <a:rPr sz="1500" b="1" i="0">
+                <a:solidFill>
+                  <a:srgbClr val="000000"/>
+                </a:solidFill>
+                <a:latin typeface="Calibri"/>
+              </a:rPr>
+              <a:t>±0.01</a:t>
+            </a:r>
+            <a:r>
+              <a:rPr sz="1500" b="0" i="0">
+                <a:solidFill>
+                  <a:srgbClr val="000000"/>
+                </a:solidFill>
+                <a:latin typeface="Calibri"/>
+              </a:rPr>
+              <a:t> and discarding most of the signal. Found by inspecting tensors, not from any error.</a:t>
             </a:r>
           </a:p>
           <a:p>
             <a:pPr>
               <a:spcAft>
-                <a:spcPts val="1100"/>
+                <a:spcPts val="1400"/>
               </a:spcAft>
             </a:pPr>
             <a:r>
@@ -5183,7 +5234,7 @@
                 </a:solidFill>
                 <a:latin typeface="Calibri"/>
               </a:rPr>
-              <a:t>What did not — the accuracy.</a:t>
+              <a:t>2. Frozen BatchNorm is not frozen.</a:t>
             </a:r>
             <a:r>
               <a:rPr sz="1500" b="0" i="0">
@@ -5192,20 +5243,38 @@
                 </a:solidFill>
                 <a:latin typeface="Calibri"/>
               </a:rPr>
-              <a:t> 0.593 vs 0.669 IoU, across six runs, with five explanations eliminated and no released weights to check against.</a:t>
+              <a:t> requires_grad=False stops gradients but not the running mean/variance buffers — our "frozen" backbone would have drifted silently, invalidating the attribution.</a:t>
             </a:r>
           </a:p>
           <a:p>
             <a:pPr>
               <a:spcAft>
-                <a:spcPts val="1100"/>
+                <a:spcPts val="1400"/>
               </a:spcAft>
             </a:pPr>
+            <a:r>
+              <a:rPr sz="1500" b="1" i="0">
+                <a:solidFill>
+                  <a:srgbClr val="000000"/>
+                </a:solidFill>
+                <a:latin typeface="Calibri"/>
+              </a:rPr>
+              <a:t>3. Identity-grafting is delicate.</a:t>
+            </a:r>
+            <a:r>
+              <a:rPr sz="1500" b="0" i="0">
+                <a:solidFill>
+                  <a:srgbClr val="000000"/>
+                </a:solidFill>
+                <a:latin typeface="Calibri"/>
+              </a:rPr>
+              <a:t> Inserting SE naively halves every activation; initialising too conservatively saturates the sigmoid so it cannot learn. Starting as an exact identity *and* staying trainable took several attempts.</a:t>
+            </a:r>
           </a:p>
           <a:p>
             <a:pPr>
               <a:spcAft>
-                <a:spcPts val="1100"/>
+                <a:spcPts val="1400"/>
               </a:spcAft>
             </a:pPr>
             <a:r>
@@ -5215,134 +5284,16 @@
                 </a:solidFill>
                 <a:latin typeface="Calibri"/>
               </a:rPr>
-              <a:t>What we learned:</a:t>
-            </a:r>
-          </a:p>
-          <a:p>
-            <a:pPr lvl="1">
-              <a:spcAft>
-                <a:spcPts val="1100"/>
-              </a:spcAft>
-            </a:pPr>
-            <a:r>
-              <a:rPr sz="1400" b="0" i="0">
-                <a:solidFill>
-                  <a:srgbClr val="555555"/>
-                </a:solidFill>
-                <a:latin typeface="Calibri"/>
-              </a:rPr>
-              <a:t>The likely cause is </a:t>
-            </a:r>
-            <a:r>
-              <a:rPr sz="1400" b="1" i="0">
-                <a:solidFill>
-                  <a:srgbClr val="555555"/>
-                </a:solidFill>
-                <a:latin typeface="Calibri"/>
-              </a:rPr>
-              <a:t>under-regularization</a:t>
-            </a:r>
-            <a:r>
-              <a:rPr sz="1400" b="0" i="0">
-                <a:solidFill>
-                  <a:srgbClr val="555555"/>
-                </a:solidFill>
-                <a:latin typeface="Calibri"/>
-              </a:rPr>
-              <a:t> — the paper's augmentation cannot support 518 training images, and every run overfits hard</a:t>
-            </a:r>
-          </a:p>
-          <a:p>
-            <a:pPr lvl="1">
-              <a:spcAft>
-                <a:spcPts val="1100"/>
-              </a:spcAft>
-            </a:pPr>
-            <a:r>
-              <a:rPr sz="1400" b="0" i="0">
-                <a:solidFill>
-                  <a:srgbClr val="555555"/>
-                </a:solidFill>
-                <a:latin typeface="Calibri"/>
-              </a:rPr>
-              <a:t>Fixing that recovers </a:t>
-            </a:r>
-            <a:r>
-              <a:rPr sz="1400" b="1" i="0">
-                <a:solidFill>
-                  <a:srgbClr val="555555"/>
-                </a:solidFill>
-                <a:latin typeface="Calibri"/>
-              </a:rPr>
-              <a:t>half the gap</a:t>
-            </a:r>
-            <a:r>
-              <a:rPr sz="1400" b="0" i="0">
-                <a:solidFill>
-                  <a:srgbClr val="555555"/>
-                </a:solidFill>
-                <a:latin typeface="Calibri"/>
-              </a:rPr>
-              <a:t> (+0.040 IoU, all three splits)</a:t>
-            </a:r>
-          </a:p>
-          <a:p>
-            <a:pPr lvl="1">
-              <a:spcAft>
-                <a:spcPts val="1100"/>
-              </a:spcAft>
-            </a:pPr>
-            <a:r>
-              <a:rPr sz="1400" b="0" i="0">
-                <a:solidFill>
-                  <a:srgbClr val="555555"/>
-                </a:solidFill>
-                <a:latin typeface="Calibri"/>
-              </a:rPr>
-              <a:t>The architectural modifications from follow-up papers recovered </a:t>
-            </a:r>
-            <a:r>
-              <a:rPr sz="1400" b="1" i="0">
-                <a:solidFill>
-                  <a:srgbClr val="555555"/>
-                </a:solidFill>
-                <a:latin typeface="Calibri"/>
-              </a:rPr>
-              <a:t>essentially nothing</a:t>
-            </a:r>
-          </a:p>
-        </p:txBody>
-      </p:sp>
-      <p:sp>
-        <p:nvSpPr>
-          <p:cNvPr id="4" name="TextBox 3"/>
-          <p:cNvSpPr txBox="1"/>
-          <p:nvPr/>
-        </p:nvSpPr>
-        <p:spPr>
-          <a:xfrm>
-            <a:off x="548640" y="5532120"/>
-            <a:ext cx="11094415" cy="731520"/>
-          </a:xfrm>
-          <a:prstGeom prst="rect">
-            <a:avLst/>
-          </a:prstGeom>
-          <a:noFill/>
-        </p:spPr>
-        <p:txBody>
-          <a:bodyPr wrap="square">
-            <a:spAutoFit/>
-          </a:bodyPr>
-          <a:lstStyle/>
-          <a:p>
-            <a:r>
-              <a:rPr sz="1700" b="1" i="0">
-                <a:solidFill>
-                  <a:srgbClr val="000000"/>
-                </a:solidFill>
-                <a:latin typeface="Calibri"/>
-              </a:rPr>
-              <a:t>Takeaway: for this network on this dataset, the training recipe mattered far more than the architecture.</a:t>
+              <a:t>4. A 2022 repo on a 2026 stack</a:t>
+            </a:r>
+            <a:r>
+              <a:rPr sz="1500" b="0" i="0">
+                <a:solidFill>
+                  <a:srgbClr val="000000"/>
+                </a:solidFill>
+                <a:latin typeface="Calibri"/>
+              </a:rPr>
+              <a:t> — dead dependencies, and no released weights to validate against.</a:t>
             </a:r>
           </a:p>
         </p:txBody>
@@ -5402,6 +5353,307 @@
                 </a:solidFill>
                 <a:latin typeface="Calibri"/>
               </a:rPr>
+              <a:t>Conclusions</a:t>
+            </a:r>
+          </a:p>
+        </p:txBody>
+      </p:sp>
+      <p:sp>
+        <p:nvSpPr>
+          <p:cNvPr id="3" name="TextBox 2"/>
+          <p:cNvSpPr txBox="1"/>
+          <p:nvPr/>
+        </p:nvSpPr>
+        <p:spPr>
+          <a:xfrm>
+            <a:off x="548640" y="1371600"/>
+            <a:ext cx="11094415" cy="5029200"/>
+          </a:xfrm>
+          <a:prstGeom prst="rect">
+            <a:avLst/>
+          </a:prstGeom>
+          <a:noFill/>
+        </p:spPr>
+        <p:txBody>
+          <a:bodyPr wrap="square">
+            <a:spAutoFit/>
+          </a:bodyPr>
+          <a:lstStyle/>
+          <a:p>
+            <a:pPr>
+              <a:spcAft>
+                <a:spcPts val="1100"/>
+              </a:spcAft>
+            </a:pPr>
+            <a:r>
+              <a:rPr sz="1500" b="1" i="0">
+                <a:solidFill>
+                  <a:srgbClr val="000000"/>
+                </a:solidFill>
+                <a:latin typeface="Calibri"/>
+              </a:rPr>
+              <a:t>What reproduced — the efficiency claims, exactly.</a:t>
+            </a:r>
+            <a:r>
+              <a:rPr sz="1500" b="0" i="0">
+                <a:solidFill>
+                  <a:srgbClr val="000000"/>
+                </a:solidFill>
+                <a:latin typeface="Calibri"/>
+              </a:rPr>
+              <a:t> 1,471,921 parameters (paper: 1.47 M), 0.577 GFLOPs (paper: 0.57), 12.5 ms on CPU. UNeXt really is 72× smaller than TransUNet.</a:t>
+            </a:r>
+          </a:p>
+          <a:p>
+            <a:pPr>
+              <a:spcAft>
+                <a:spcPts val="1100"/>
+              </a:spcAft>
+            </a:pPr>
+            <a:r>
+              <a:rPr sz="1500" b="1" i="0">
+                <a:solidFill>
+                  <a:srgbClr val="000000"/>
+                </a:solidFill>
+                <a:latin typeface="Calibri"/>
+              </a:rPr>
+              <a:t>What did not — the accuracy.</a:t>
+            </a:r>
+            <a:r>
+              <a:rPr sz="1500" b="0" i="0">
+                <a:solidFill>
+                  <a:srgbClr val="000000"/>
+                </a:solidFill>
+                <a:latin typeface="Calibri"/>
+              </a:rPr>
+              <a:t> 0.593 vs 0.669 IoU, across six runs, with five explanations eliminated and no released weights to check against.</a:t>
+            </a:r>
+          </a:p>
+          <a:p>
+            <a:pPr>
+              <a:spcAft>
+                <a:spcPts val="1100"/>
+              </a:spcAft>
+            </a:pPr>
+          </a:p>
+          <a:p>
+            <a:pPr>
+              <a:spcAft>
+                <a:spcPts val="1100"/>
+              </a:spcAft>
+            </a:pPr>
+            <a:r>
+              <a:rPr sz="1500" b="1" i="0">
+                <a:solidFill>
+                  <a:srgbClr val="000000"/>
+                </a:solidFill>
+                <a:latin typeface="Calibri"/>
+              </a:rPr>
+              <a:t>What we learned:</a:t>
+            </a:r>
+          </a:p>
+          <a:p>
+            <a:pPr lvl="1">
+              <a:spcAft>
+                <a:spcPts val="1100"/>
+              </a:spcAft>
+            </a:pPr>
+            <a:r>
+              <a:rPr sz="1400" b="0" i="0">
+                <a:solidFill>
+                  <a:srgbClr val="555555"/>
+                </a:solidFill>
+                <a:latin typeface="Calibri"/>
+              </a:rPr>
+              <a:t>The likely cause is </a:t>
+            </a:r>
+            <a:r>
+              <a:rPr sz="1400" b="1" i="0">
+                <a:solidFill>
+                  <a:srgbClr val="555555"/>
+                </a:solidFill>
+                <a:latin typeface="Calibri"/>
+              </a:rPr>
+              <a:t>under-regularization</a:t>
+            </a:r>
+            <a:r>
+              <a:rPr sz="1400" b="0" i="0">
+                <a:solidFill>
+                  <a:srgbClr val="555555"/>
+                </a:solidFill>
+                <a:latin typeface="Calibri"/>
+              </a:rPr>
+              <a:t> — the paper's augmentation cannot support 518 training images, and every run overfits hard</a:t>
+            </a:r>
+          </a:p>
+          <a:p>
+            <a:pPr lvl="1">
+              <a:spcAft>
+                <a:spcPts val="1100"/>
+              </a:spcAft>
+            </a:pPr>
+            <a:r>
+              <a:rPr sz="1400" b="0" i="0">
+                <a:solidFill>
+                  <a:srgbClr val="555555"/>
+                </a:solidFill>
+                <a:latin typeface="Calibri"/>
+              </a:rPr>
+              <a:t>Two </a:t>
+            </a:r>
+            <a:r>
+              <a:rPr sz="1400" b="1" i="0">
+                <a:solidFill>
+                  <a:srgbClr val="555555"/>
+                </a:solidFill>
+                <a:latin typeface="Calibri"/>
+              </a:rPr>
+              <a:t>training-recipe</a:t>
+            </a:r>
+            <a:r>
+              <a:rPr sz="1400" b="0" i="0">
+                <a:solidFill>
+                  <a:srgbClr val="555555"/>
+                </a:solidFill>
+                <a:latin typeface="Calibri"/>
+              </a:rPr>
+              <a:t> changes recover ~70% of the gap: augmentation (+0.040) then Focal Tversky loss (+0.013) — </a:t>
+            </a:r>
+            <a:r>
+              <a:rPr sz="1400" b="1" i="0">
+                <a:solidFill>
+                  <a:srgbClr val="555555"/>
+                </a:solidFill>
+                <a:latin typeface="Calibri"/>
+              </a:rPr>
+              <a:t>0.5931 → 0.6461</a:t>
+            </a:r>
+            <a:r>
+              <a:rPr sz="1400" b="0" i="0">
+                <a:solidFill>
+                  <a:srgbClr val="555555"/>
+                </a:solidFill>
+                <a:latin typeface="Calibri"/>
+              </a:rPr>
+              <a:t>, at zero added cost</a:t>
+            </a:r>
+          </a:p>
+          <a:p>
+            <a:pPr lvl="1">
+              <a:spcAft>
+                <a:spcPts val="1100"/>
+              </a:spcAft>
+            </a:pPr>
+            <a:r>
+              <a:rPr sz="1400" b="0" i="0">
+                <a:solidFill>
+                  <a:srgbClr val="555555"/>
+                </a:solidFill>
+                <a:latin typeface="Calibri"/>
+              </a:rPr>
+              <a:t>The architectural modifications from follow-up papers recovered </a:t>
+            </a:r>
+            <a:r>
+              <a:rPr sz="1400" b="1" i="0">
+                <a:solidFill>
+                  <a:srgbClr val="555555"/>
+                </a:solidFill>
+                <a:latin typeface="Calibri"/>
+              </a:rPr>
+              <a:t>essentially nothing</a:t>
+            </a:r>
+          </a:p>
+        </p:txBody>
+      </p:sp>
+      <p:sp>
+        <p:nvSpPr>
+          <p:cNvPr id="4" name="TextBox 3"/>
+          <p:cNvSpPr txBox="1"/>
+          <p:nvPr/>
+        </p:nvSpPr>
+        <p:spPr>
+          <a:xfrm>
+            <a:off x="548640" y="5532120"/>
+            <a:ext cx="11094415" cy="731520"/>
+          </a:xfrm>
+          <a:prstGeom prst="rect">
+            <a:avLst/>
+          </a:prstGeom>
+          <a:noFill/>
+        </p:spPr>
+        <p:txBody>
+          <a:bodyPr wrap="square">
+            <a:spAutoFit/>
+          </a:bodyPr>
+          <a:lstStyle/>
+          <a:p>
+            <a:r>
+              <a:rPr sz="1700" b="1" i="0">
+                <a:solidFill>
+                  <a:srgbClr val="000000"/>
+                </a:solidFill>
+                <a:latin typeface="Calibri"/>
+              </a:rPr>
+              <a:t>Takeaway: for this network on this dataset, the training recipe mattered far more than the architecture.</a:t>
+            </a:r>
+          </a:p>
+        </p:txBody>
+      </p:sp>
+    </p:spTree>
+  </p:cSld>
+  <p:clrMapOvr>
+    <a:masterClrMapping/>
+  </p:clrMapOvr>
+</p:sld>
+</file>
+
+<file path=ppt/slides/slide15.xml><?xml version="1.0" encoding="utf-8"?>
+<p:sld xmlns:a="http://schemas.openxmlformats.org/drawingml/2006/main" xmlns:p="http://schemas.openxmlformats.org/presentationml/2006/main" xmlns:r="http://schemas.openxmlformats.org/officeDocument/2006/relationships">
+  <p:cSld>
+    <p:bg>
+      <p:bgPr>
+        <a:solidFill>
+          <a:srgbClr val="FFFFFF"/>
+        </a:solidFill>
+        <a:effectLst/>
+      </p:bgPr>
+    </p:bg>
+    <p:spTree>
+      <p:nvGrpSpPr>
+        <p:cNvPr id="1" name=""/>
+        <p:cNvGrpSpPr/>
+        <p:nvPr/>
+      </p:nvGrpSpPr>
+      <p:grpSpPr/>
+      <p:sp>
+        <p:nvSpPr>
+          <p:cNvPr id="2" name="TextBox 1"/>
+          <p:cNvSpPr txBox="1"/>
+          <p:nvPr/>
+        </p:nvSpPr>
+        <p:spPr>
+          <a:xfrm>
+            <a:off x="548640" y="320040"/>
+            <a:ext cx="11094415" cy="822960"/>
+          </a:xfrm>
+          <a:prstGeom prst="rect">
+            <a:avLst/>
+          </a:prstGeom>
+          <a:noFill/>
+        </p:spPr>
+        <p:txBody>
+          <a:bodyPr wrap="square">
+            <a:spAutoFit/>
+          </a:bodyPr>
+          <a:lstStyle/>
+          <a:p>
+            <a:r>
+              <a:rPr sz="3000" b="1" i="0">
+                <a:solidFill>
+                  <a:srgbClr val="000000"/>
+                </a:solidFill>
+                <a:latin typeface="Calibri"/>
+              </a:rPr>
               <a:t>Appendix: qualitative results</a:t>
             </a:r>
           </a:p>
@@ -5434,8 +5686,8 @@
         </p:blipFill>
         <p:spPr>
           <a:xfrm>
-            <a:off x="3721924" y="1234440"/>
-            <a:ext cx="4747846" cy="4937760"/>
+            <a:off x="3717292" y="1234440"/>
+            <a:ext cx="4757110" cy="4937760"/>
           </a:xfrm>
           <a:prstGeom prst="rect">
             <a:avLst/>
@@ -5472,6 +5724,135 @@
                 <a:latin typeface="Calibri"/>
               </a:rPr>
               <a:t>The failure case (bottom): the model responds to hypoechoic regions at the top of the image while missing the small true lesion — small lesions on noisy scans remain hard.</a:t>
+            </a:r>
+          </a:p>
+        </p:txBody>
+      </p:sp>
+    </p:spTree>
+  </p:cSld>
+  <p:clrMapOvr>
+    <a:masterClrMapping/>
+  </p:clrMapOvr>
+</p:sld>
+</file>
+
+<file path=ppt/slides/slide16.xml><?xml version="1.0" encoding="utf-8"?>
+<p:sld xmlns:a="http://schemas.openxmlformats.org/drawingml/2006/main" xmlns:p="http://schemas.openxmlformats.org/presentationml/2006/main" xmlns:r="http://schemas.openxmlformats.org/officeDocument/2006/relationships">
+  <p:cSld>
+    <p:bg>
+      <p:bgPr>
+        <a:solidFill>
+          <a:srgbClr val="FFFFFF"/>
+        </a:solidFill>
+        <a:effectLst/>
+      </p:bgPr>
+    </p:bg>
+    <p:spTree>
+      <p:nvGrpSpPr>
+        <p:cNvPr id="1" name=""/>
+        <p:cNvGrpSpPr/>
+        <p:nvPr/>
+      </p:nvGrpSpPr>
+      <p:grpSpPr/>
+      <p:sp>
+        <p:nvSpPr>
+          <p:cNvPr id="2" name="TextBox 1"/>
+          <p:cNvSpPr txBox="1"/>
+          <p:nvPr/>
+        </p:nvSpPr>
+        <p:spPr>
+          <a:xfrm>
+            <a:off x="548640" y="320040"/>
+            <a:ext cx="11094415" cy="822960"/>
+          </a:xfrm>
+          <a:prstGeom prst="rect">
+            <a:avLst/>
+          </a:prstGeom>
+          <a:noFill/>
+        </p:spPr>
+        <p:txBody>
+          <a:bodyPr wrap="square">
+            <a:spAutoFit/>
+          </a:bodyPr>
+          <a:lstStyle/>
+          <a:p>
+            <a:r>
+              <a:rPr sz="3000" b="1" i="0">
+                <a:solidFill>
+                  <a:srgbClr val="000000"/>
+                </a:solidFill>
+                <a:latin typeface="Calibri"/>
+              </a:rPr>
+              <a:t>Appendix: what Focal Tversky actually changed</a:t>
+            </a:r>
+          </a:p>
+          <a:p>
+            <a:r>
+              <a:rPr sz="1400" b="0" i="1">
+                <a:solidFill>
+                  <a:srgbClr val="555555"/>
+                </a:solidFill>
+                <a:latin typeface="Calibri"/>
+              </a:rPr>
+              <a:t>The loss shifts the model toward finding tumour, at some cost in false alarms</a:t>
+            </a:r>
+          </a:p>
+        </p:txBody>
+      </p:sp>
+      <p:pic>
+        <p:nvPicPr>
+          <p:cNvPr id="3" name="Picture 2" descr="fig7_precision_recall.png"/>
+          <p:cNvPicPr>
+            <a:picLocks noChangeAspect="1"/>
+          </p:cNvPicPr>
+          <p:nvPr/>
+        </p:nvPicPr>
+        <p:blipFill>
+          <a:blip r:embed="rId2"/>
+          <a:stretch>
+            <a:fillRect/>
+          </a:stretch>
+        </p:blipFill>
+        <p:spPr>
+          <a:xfrm>
+            <a:off x="2804007" y="1371600"/>
+            <a:ext cx="6583680" cy="3931920"/>
+          </a:xfrm>
+          <a:prstGeom prst="rect">
+            <a:avLst/>
+          </a:prstGeom>
+        </p:spPr>
+      </p:pic>
+      <p:sp>
+        <p:nvSpPr>
+          <p:cNvPr id="4" name="TextBox 3"/>
+          <p:cNvSpPr txBox="1"/>
+          <p:nvPr/>
+        </p:nvSpPr>
+        <p:spPr>
+          <a:xfrm>
+            <a:off x="548640" y="6199632"/>
+            <a:ext cx="11094415" cy="457200"/>
+          </a:xfrm>
+          <a:prstGeom prst="rect">
+            <a:avLst/>
+          </a:prstGeom>
+          <a:noFill/>
+        </p:spPr>
+        <p:txBody>
+          <a:bodyPr wrap="square">
+            <a:spAutoFit/>
+          </a:bodyPr>
+          <a:lstStyle/>
+          <a:p>
+            <a:r>
+              <a:rPr sz="1200" b="0" i="1">
+                <a:solidFill>
+                  <a:srgbClr val="555555"/>
+                </a:solidFill>
+                <a:latin typeface="Calibri"/>
+              </a:rPr>
+              <a:t>Recall +0.065, precision −0.042 — the asymmetry the Tversky β&gt;α weighting was chosen to produce. Clinically the right direction: a missed tumour costs more than a second look.</a:t>
             </a:r>
           </a:p>
         </p:txBody>

--- a/UNeXt_presentation.pptx
+++ b/UNeXt_presentation.pptx
@@ -4,25 +4,28 @@
   <p:sldMasterIdLst>
     <p:sldMasterId id="2147483648" r:id="rId1"/>
   </p:sldMasterIdLst>
+  <p:notesMasterIdLst>
+    <p:notesMasterId r:id="rId18"/>
+  </p:notesMasterIdLst>
   <p:sldIdLst>
-    <p:sldId id="256" r:id="rId7"/>
-    <p:sldId id="257" r:id="rId9"/>
-    <p:sldId id="258" r:id="rId10"/>
-    <p:sldId id="259" r:id="rId11"/>
-    <p:sldId id="260" r:id="rId12"/>
-    <p:sldId id="261" r:id="rId13"/>
-    <p:sldId id="262" r:id="rId14"/>
-    <p:sldId id="263" r:id="rId15"/>
-    <p:sldId id="264" r:id="rId16"/>
-    <p:sldId id="265" r:id="rId17"/>
-    <p:sldId id="266" r:id="rId18"/>
-    <p:sldId id="267" r:id="rId19"/>
-    <p:sldId id="268" r:id="rId20"/>
-    <p:sldId id="269" r:id="rId21"/>
-    <p:sldId id="270" r:id="rId22"/>
-    <p:sldId id="271" r:id="rId23"/>
+    <p:sldId id="256" r:id="rId2"/>
+    <p:sldId id="257" r:id="rId3"/>
+    <p:sldId id="258" r:id="rId4"/>
+    <p:sldId id="259" r:id="rId5"/>
+    <p:sldId id="260" r:id="rId6"/>
+    <p:sldId id="261" r:id="rId7"/>
+    <p:sldId id="262" r:id="rId8"/>
+    <p:sldId id="263" r:id="rId9"/>
+    <p:sldId id="264" r:id="rId10"/>
+    <p:sldId id="265" r:id="rId11"/>
+    <p:sldId id="266" r:id="rId12"/>
+    <p:sldId id="267" r:id="rId13"/>
+    <p:sldId id="268" r:id="rId14"/>
+    <p:sldId id="269" r:id="rId15"/>
+    <p:sldId id="270" r:id="rId16"/>
+    <p:sldId id="271" r:id="rId17"/>
   </p:sldIdLst>
-  <p:sldSz cx="12191695" cy="6858000" type="screen4x3"/>
+  <p:sldSz cx="12192000" cy="6858000"/>
   <p:notesSz cx="6858000" cy="9144000"/>
   <p:defaultTextStyle>
     <a:defPPr>
@@ -119,6 +122,22 @@
       </a:defRPr>
     </a:lvl9pPr>
   </p:defaultTextStyle>
+  <p:extLst>
+    <p:ext uri="{EFAFB233-063F-42B5-8137-9DF3F51BA10A}">
+      <p15:sldGuideLst xmlns:p15="http://schemas.microsoft.com/office/powerpoint/2012/main">
+        <p15:guide id="1" orient="horz" pos="2160">
+          <p15:clr>
+            <a:srgbClr val="A4A3A4"/>
+          </p15:clr>
+        </p15:guide>
+        <p15:guide id="2" pos="2880">
+          <p15:clr>
+            <a:srgbClr val="A4A3A4"/>
+          </p15:clr>
+        </p15:guide>
+      </p15:sldGuideLst>
+    </p:ext>
+  </p:extLst>
 </p:presentation>
 </file>
 
@@ -160,10 +179,9 @@
           <a:lstStyle/>
           <a:p>
             <a:r>
-              <a:rPr lang="en-US" smtClean="0"/>
+              <a:rPr lang="en-US"/>
               <a:t>Click to edit Master title style</a:t>
             </a:r>
-            <a:endParaRPr lang="en-US"/>
           </a:p>
         </p:txBody>
       </p:sp>
@@ -279,10 +297,9 @@
           </a:lstStyle>
           <a:p>
             <a:r>
-              <a:rPr lang="en-US" smtClean="0"/>
+              <a:rPr lang="en-US"/>
               <a:t>Click to edit Master subtitle style</a:t>
             </a:r>
-            <a:endParaRPr lang="en-US"/>
           </a:p>
         </p:txBody>
       </p:sp>
@@ -303,7 +320,7 @@
           <a:p>
             <a:fld id="{5BCAD085-E8A6-8845-BD4E-CB4CCA059FC4}" type="datetimeFigureOut">
               <a:rPr lang="en-US" smtClean="0"/>
-              <a:t>1/27/13</a:t>
+              <a:t>8/19/2026</a:t>
             </a:fld>
             <a:endParaRPr lang="en-US"/>
           </a:p>
@@ -397,10 +414,9 @@
           <a:lstStyle/>
           <a:p>
             <a:r>
-              <a:rPr lang="en-US" smtClean="0"/>
+              <a:rPr lang="en-US"/>
               <a:t>Click to edit Master title style</a:t>
             </a:r>
-            <a:endParaRPr lang="en-US"/>
           </a:p>
         </p:txBody>
       </p:sp>
@@ -421,38 +437,37 @@
           <a:p>
             <a:pPr lvl="0"/>
             <a:r>
-              <a:rPr lang="en-US" smtClean="0"/>
+              <a:rPr lang="en-US"/>
               <a:t>Click to edit Master text styles</a:t>
             </a:r>
           </a:p>
           <a:p>
             <a:pPr lvl="1"/>
             <a:r>
-              <a:rPr lang="en-US" smtClean="0"/>
+              <a:rPr lang="en-US"/>
               <a:t>Second level</a:t>
             </a:r>
           </a:p>
           <a:p>
             <a:pPr lvl="2"/>
             <a:r>
-              <a:rPr lang="en-US" smtClean="0"/>
+              <a:rPr lang="en-US"/>
               <a:t>Third level</a:t>
             </a:r>
           </a:p>
           <a:p>
             <a:pPr lvl="3"/>
             <a:r>
-              <a:rPr lang="en-US" smtClean="0"/>
+              <a:rPr lang="en-US"/>
               <a:t>Fourth level</a:t>
             </a:r>
           </a:p>
           <a:p>
             <a:pPr lvl="4"/>
             <a:r>
-              <a:rPr lang="en-US" smtClean="0"/>
+              <a:rPr lang="en-US"/>
               <a:t>Fifth level</a:t>
             </a:r>
-            <a:endParaRPr lang="en-US"/>
           </a:p>
         </p:txBody>
       </p:sp>
@@ -473,7 +488,7 @@
           <a:p>
             <a:fld id="{5BCAD085-E8A6-8845-BD4E-CB4CCA059FC4}" type="datetimeFigureOut">
               <a:rPr lang="en-US" smtClean="0"/>
-              <a:t>1/27/13</a:t>
+              <a:t>8/19/2026</a:t>
             </a:fld>
             <a:endParaRPr lang="en-US"/>
           </a:p>
@@ -572,10 +587,9 @@
           <a:lstStyle/>
           <a:p>
             <a:r>
-              <a:rPr lang="en-US" smtClean="0"/>
+              <a:rPr lang="en-US"/>
               <a:t>Click to edit Master title style</a:t>
             </a:r>
-            <a:endParaRPr lang="en-US"/>
           </a:p>
         </p:txBody>
       </p:sp>
@@ -601,38 +615,37 @@
           <a:p>
             <a:pPr lvl="0"/>
             <a:r>
-              <a:rPr lang="en-US" smtClean="0"/>
+              <a:rPr lang="en-US"/>
               <a:t>Click to edit Master text styles</a:t>
             </a:r>
           </a:p>
           <a:p>
             <a:pPr lvl="1"/>
             <a:r>
-              <a:rPr lang="en-US" smtClean="0"/>
+              <a:rPr lang="en-US"/>
               <a:t>Second level</a:t>
             </a:r>
           </a:p>
           <a:p>
             <a:pPr lvl="2"/>
             <a:r>
-              <a:rPr lang="en-US" smtClean="0"/>
+              <a:rPr lang="en-US"/>
               <a:t>Third level</a:t>
             </a:r>
           </a:p>
           <a:p>
             <a:pPr lvl="3"/>
             <a:r>
-              <a:rPr lang="en-US" smtClean="0"/>
+              <a:rPr lang="en-US"/>
               <a:t>Fourth level</a:t>
             </a:r>
           </a:p>
           <a:p>
             <a:pPr lvl="4"/>
             <a:r>
-              <a:rPr lang="en-US" smtClean="0"/>
+              <a:rPr lang="en-US"/>
               <a:t>Fifth level</a:t>
             </a:r>
-            <a:endParaRPr lang="en-US"/>
           </a:p>
         </p:txBody>
       </p:sp>
@@ -653,7 +666,7 @@
           <a:p>
             <a:fld id="{5BCAD085-E8A6-8845-BD4E-CB4CCA059FC4}" type="datetimeFigureOut">
               <a:rPr lang="en-US" smtClean="0"/>
-              <a:t>1/27/13</a:t>
+              <a:t>8/19/2026</a:t>
             </a:fld>
             <a:endParaRPr lang="en-US"/>
           </a:p>
@@ -747,10 +760,9 @@
           <a:lstStyle/>
           <a:p>
             <a:r>
-              <a:rPr lang="en-US" smtClean="0"/>
+              <a:rPr lang="en-US"/>
               <a:t>Click to edit Master title style</a:t>
             </a:r>
-            <a:endParaRPr lang="en-US"/>
           </a:p>
         </p:txBody>
       </p:sp>
@@ -771,38 +783,37 @@
           <a:p>
             <a:pPr lvl="0"/>
             <a:r>
-              <a:rPr lang="en-US" smtClean="0"/>
+              <a:rPr lang="en-US"/>
               <a:t>Click to edit Master text styles</a:t>
             </a:r>
           </a:p>
           <a:p>
             <a:pPr lvl="1"/>
             <a:r>
-              <a:rPr lang="en-US" smtClean="0"/>
+              <a:rPr lang="en-US"/>
               <a:t>Second level</a:t>
             </a:r>
           </a:p>
           <a:p>
             <a:pPr lvl="2"/>
             <a:r>
-              <a:rPr lang="en-US" smtClean="0"/>
+              <a:rPr lang="en-US"/>
               <a:t>Third level</a:t>
             </a:r>
           </a:p>
           <a:p>
             <a:pPr lvl="3"/>
             <a:r>
-              <a:rPr lang="en-US" smtClean="0"/>
+              <a:rPr lang="en-US"/>
               <a:t>Fourth level</a:t>
             </a:r>
           </a:p>
           <a:p>
             <a:pPr lvl="4"/>
             <a:r>
-              <a:rPr lang="en-US" smtClean="0"/>
+              <a:rPr lang="en-US"/>
               <a:t>Fifth level</a:t>
             </a:r>
-            <a:endParaRPr lang="en-US"/>
           </a:p>
         </p:txBody>
       </p:sp>
@@ -823,7 +834,7 @@
           <a:p>
             <a:fld id="{5BCAD085-E8A6-8845-BD4E-CB4CCA059FC4}" type="datetimeFigureOut">
               <a:rPr lang="en-US" smtClean="0"/>
-              <a:t>1/27/13</a:t>
+              <a:t>8/19/2026</a:t>
             </a:fld>
             <a:endParaRPr lang="en-US"/>
           </a:p>
@@ -926,10 +937,9 @@
           </a:lstStyle>
           <a:p>
             <a:r>
-              <a:rPr lang="en-US" smtClean="0"/>
+              <a:rPr lang="en-US"/>
               <a:t>Click to edit Master title style</a:t>
             </a:r>
-            <a:endParaRPr lang="en-US"/>
           </a:p>
         </p:txBody>
       </p:sp>
@@ -1046,7 +1056,7 @@
           <a:p>
             <a:pPr lvl="0"/>
             <a:r>
-              <a:rPr lang="en-US" smtClean="0"/>
+              <a:rPr lang="en-US"/>
               <a:t>Click to edit Master text styles</a:t>
             </a:r>
           </a:p>
@@ -1069,7 +1079,7 @@
           <a:p>
             <a:fld id="{5BCAD085-E8A6-8845-BD4E-CB4CCA059FC4}" type="datetimeFigureOut">
               <a:rPr lang="en-US" smtClean="0"/>
-              <a:t>1/27/13</a:t>
+              <a:t>8/19/2026</a:t>
             </a:fld>
             <a:endParaRPr lang="en-US"/>
           </a:p>
@@ -1163,10 +1173,9 @@
           <a:lstStyle/>
           <a:p>
             <a:r>
-              <a:rPr lang="en-US" smtClean="0"/>
+              <a:rPr lang="en-US"/>
               <a:t>Click to edit Master title style</a:t>
             </a:r>
-            <a:endParaRPr lang="en-US"/>
           </a:p>
         </p:txBody>
       </p:sp>
@@ -1220,38 +1229,37 @@
           <a:p>
             <a:pPr lvl="0"/>
             <a:r>
-              <a:rPr lang="en-US" smtClean="0"/>
+              <a:rPr lang="en-US"/>
               <a:t>Click to edit Master text styles</a:t>
             </a:r>
           </a:p>
           <a:p>
             <a:pPr lvl="1"/>
             <a:r>
-              <a:rPr lang="en-US" smtClean="0"/>
+              <a:rPr lang="en-US"/>
               <a:t>Second level</a:t>
             </a:r>
           </a:p>
           <a:p>
             <a:pPr lvl="2"/>
             <a:r>
-              <a:rPr lang="en-US" smtClean="0"/>
+              <a:rPr lang="en-US"/>
               <a:t>Third level</a:t>
             </a:r>
           </a:p>
           <a:p>
             <a:pPr lvl="3"/>
             <a:r>
-              <a:rPr lang="en-US" smtClean="0"/>
+              <a:rPr lang="en-US"/>
               <a:t>Fourth level</a:t>
             </a:r>
           </a:p>
           <a:p>
             <a:pPr lvl="4"/>
             <a:r>
-              <a:rPr lang="en-US" smtClean="0"/>
+              <a:rPr lang="en-US"/>
               <a:t>Fifth level</a:t>
             </a:r>
-            <a:endParaRPr lang="en-US"/>
           </a:p>
         </p:txBody>
       </p:sp>
@@ -1305,38 +1313,37 @@
           <a:p>
             <a:pPr lvl="0"/>
             <a:r>
-              <a:rPr lang="en-US" smtClean="0"/>
+              <a:rPr lang="en-US"/>
               <a:t>Click to edit Master text styles</a:t>
             </a:r>
           </a:p>
           <a:p>
             <a:pPr lvl="1"/>
             <a:r>
-              <a:rPr lang="en-US" smtClean="0"/>
+              <a:rPr lang="en-US"/>
               <a:t>Second level</a:t>
             </a:r>
           </a:p>
           <a:p>
             <a:pPr lvl="2"/>
             <a:r>
-              <a:rPr lang="en-US" smtClean="0"/>
+              <a:rPr lang="en-US"/>
               <a:t>Third level</a:t>
             </a:r>
           </a:p>
           <a:p>
             <a:pPr lvl="3"/>
             <a:r>
-              <a:rPr lang="en-US" smtClean="0"/>
+              <a:rPr lang="en-US"/>
               <a:t>Fourth level</a:t>
             </a:r>
           </a:p>
           <a:p>
             <a:pPr lvl="4"/>
             <a:r>
-              <a:rPr lang="en-US" smtClean="0"/>
+              <a:rPr lang="en-US"/>
               <a:t>Fifth level</a:t>
             </a:r>
-            <a:endParaRPr lang="en-US"/>
           </a:p>
         </p:txBody>
       </p:sp>
@@ -1357,7 +1364,7 @@
           <a:p>
             <a:fld id="{5BCAD085-E8A6-8845-BD4E-CB4CCA059FC4}" type="datetimeFigureOut">
               <a:rPr lang="en-US" smtClean="0"/>
-              <a:t>1/27/13</a:t>
+              <a:t>8/19/2026</a:t>
             </a:fld>
             <a:endParaRPr lang="en-US"/>
           </a:p>
@@ -1455,10 +1462,9 @@
           </a:lstStyle>
           <a:p>
             <a:r>
-              <a:rPr lang="en-US" smtClean="0"/>
+              <a:rPr lang="en-US"/>
               <a:t>Click to edit Master title style</a:t>
             </a:r>
-            <a:endParaRPr lang="en-US"/>
           </a:p>
         </p:txBody>
       </p:sp>
@@ -1521,7 +1527,7 @@
           <a:p>
             <a:pPr lvl="0"/>
             <a:r>
-              <a:rPr lang="en-US" smtClean="0"/>
+              <a:rPr lang="en-US"/>
               <a:t>Click to edit Master text styles</a:t>
             </a:r>
           </a:p>
@@ -1577,38 +1583,37 @@
           <a:p>
             <a:pPr lvl="0"/>
             <a:r>
-              <a:rPr lang="en-US" smtClean="0"/>
+              <a:rPr lang="en-US"/>
               <a:t>Click to edit Master text styles</a:t>
             </a:r>
           </a:p>
           <a:p>
             <a:pPr lvl="1"/>
             <a:r>
-              <a:rPr lang="en-US" smtClean="0"/>
+              <a:rPr lang="en-US"/>
               <a:t>Second level</a:t>
             </a:r>
           </a:p>
           <a:p>
             <a:pPr lvl="2"/>
             <a:r>
-              <a:rPr lang="en-US" smtClean="0"/>
+              <a:rPr lang="en-US"/>
               <a:t>Third level</a:t>
             </a:r>
           </a:p>
           <a:p>
             <a:pPr lvl="3"/>
             <a:r>
-              <a:rPr lang="en-US" smtClean="0"/>
+              <a:rPr lang="en-US"/>
               <a:t>Fourth level</a:t>
             </a:r>
           </a:p>
           <a:p>
             <a:pPr lvl="4"/>
             <a:r>
-              <a:rPr lang="en-US" smtClean="0"/>
+              <a:rPr lang="en-US"/>
               <a:t>Fifth level</a:t>
             </a:r>
-            <a:endParaRPr lang="en-US"/>
           </a:p>
         </p:txBody>
       </p:sp>
@@ -1671,7 +1676,7 @@
           <a:p>
             <a:pPr lvl="0"/>
             <a:r>
-              <a:rPr lang="en-US" smtClean="0"/>
+              <a:rPr lang="en-US"/>
               <a:t>Click to edit Master text styles</a:t>
             </a:r>
           </a:p>
@@ -1727,38 +1732,37 @@
           <a:p>
             <a:pPr lvl="0"/>
             <a:r>
-              <a:rPr lang="en-US" smtClean="0"/>
+              <a:rPr lang="en-US"/>
               <a:t>Click to edit Master text styles</a:t>
             </a:r>
           </a:p>
           <a:p>
             <a:pPr lvl="1"/>
             <a:r>
-              <a:rPr lang="en-US" smtClean="0"/>
+              <a:rPr lang="en-US"/>
               <a:t>Second level</a:t>
             </a:r>
           </a:p>
           <a:p>
             <a:pPr lvl="2"/>
             <a:r>
-              <a:rPr lang="en-US" smtClean="0"/>
+              <a:rPr lang="en-US"/>
               <a:t>Third level</a:t>
             </a:r>
           </a:p>
           <a:p>
             <a:pPr lvl="3"/>
             <a:r>
-              <a:rPr lang="en-US" smtClean="0"/>
+              <a:rPr lang="en-US"/>
               <a:t>Fourth level</a:t>
             </a:r>
           </a:p>
           <a:p>
             <a:pPr lvl="4"/>
             <a:r>
-              <a:rPr lang="en-US" smtClean="0"/>
+              <a:rPr lang="en-US"/>
               <a:t>Fifth level</a:t>
             </a:r>
-            <a:endParaRPr lang="en-US"/>
           </a:p>
         </p:txBody>
       </p:sp>
@@ -1779,7 +1783,7 @@
           <a:p>
             <a:fld id="{5BCAD085-E8A6-8845-BD4E-CB4CCA059FC4}" type="datetimeFigureOut">
               <a:rPr lang="en-US" smtClean="0"/>
-              <a:t>1/27/13</a:t>
+              <a:t>8/19/2026</a:t>
             </a:fld>
             <a:endParaRPr lang="en-US"/>
           </a:p>
@@ -1873,10 +1877,9 @@
           <a:lstStyle/>
           <a:p>
             <a:r>
-              <a:rPr lang="en-US" smtClean="0"/>
+              <a:rPr lang="en-US"/>
               <a:t>Click to edit Master title style</a:t>
             </a:r>
-            <a:endParaRPr lang="en-US"/>
           </a:p>
         </p:txBody>
       </p:sp>
@@ -1897,7 +1900,7 @@
           <a:p>
             <a:fld id="{5BCAD085-E8A6-8845-BD4E-CB4CCA059FC4}" type="datetimeFigureOut">
               <a:rPr lang="en-US" smtClean="0"/>
-              <a:t>1/27/13</a:t>
+              <a:t>8/19/2026</a:t>
             </a:fld>
             <a:endParaRPr lang="en-US"/>
           </a:p>
@@ -1992,7 +1995,7 @@
           <a:p>
             <a:fld id="{5BCAD085-E8A6-8845-BD4E-CB4CCA059FC4}" type="datetimeFigureOut">
               <a:rPr lang="en-US" smtClean="0"/>
-              <a:t>1/27/13</a:t>
+              <a:t>8/19/2026</a:t>
             </a:fld>
             <a:endParaRPr lang="en-US"/>
           </a:p>
@@ -2095,10 +2098,9 @@
           </a:lstStyle>
           <a:p>
             <a:r>
-              <a:rPr lang="en-US" smtClean="0"/>
+              <a:rPr lang="en-US"/>
               <a:t>Click to edit Master title style</a:t>
             </a:r>
-            <a:endParaRPr lang="en-US"/>
           </a:p>
         </p:txBody>
       </p:sp>
@@ -2152,38 +2154,37 @@
           <a:p>
             <a:pPr lvl="0"/>
             <a:r>
-              <a:rPr lang="en-US" smtClean="0"/>
+              <a:rPr lang="en-US"/>
               <a:t>Click to edit Master text styles</a:t>
             </a:r>
           </a:p>
           <a:p>
             <a:pPr lvl="1"/>
             <a:r>
-              <a:rPr lang="en-US" smtClean="0"/>
+              <a:rPr lang="en-US"/>
               <a:t>Second level</a:t>
             </a:r>
           </a:p>
           <a:p>
             <a:pPr lvl="2"/>
             <a:r>
-              <a:rPr lang="en-US" smtClean="0"/>
+              <a:rPr lang="en-US"/>
               <a:t>Third level</a:t>
             </a:r>
           </a:p>
           <a:p>
             <a:pPr lvl="3"/>
             <a:r>
-              <a:rPr lang="en-US" smtClean="0"/>
+              <a:rPr lang="en-US"/>
               <a:t>Fourth level</a:t>
             </a:r>
           </a:p>
           <a:p>
             <a:pPr lvl="4"/>
             <a:r>
-              <a:rPr lang="en-US" smtClean="0"/>
+              <a:rPr lang="en-US"/>
               <a:t>Fifth level</a:t>
             </a:r>
-            <a:endParaRPr lang="en-US"/>
           </a:p>
         </p:txBody>
       </p:sp>
@@ -2246,7 +2247,7 @@
           <a:p>
             <a:pPr lvl="0"/>
             <a:r>
-              <a:rPr lang="en-US" smtClean="0"/>
+              <a:rPr lang="en-US"/>
               <a:t>Click to edit Master text styles</a:t>
             </a:r>
           </a:p>
@@ -2269,7 +2270,7 @@
           <a:p>
             <a:fld id="{5BCAD085-E8A6-8845-BD4E-CB4CCA059FC4}" type="datetimeFigureOut">
               <a:rPr lang="en-US" smtClean="0"/>
-              <a:t>1/27/13</a:t>
+              <a:t>8/19/2026</a:t>
             </a:fld>
             <a:endParaRPr lang="en-US"/>
           </a:p>
@@ -2372,10 +2373,9 @@
           </a:lstStyle>
           <a:p>
             <a:r>
-              <a:rPr lang="en-US" smtClean="0"/>
+              <a:rPr lang="en-US"/>
               <a:t>Click to edit Master title style</a:t>
             </a:r>
-            <a:endParaRPr lang="en-US"/>
           </a:p>
         </p:txBody>
       </p:sp>
@@ -2499,7 +2499,7 @@
           <a:p>
             <a:pPr lvl="0"/>
             <a:r>
-              <a:rPr lang="en-US" smtClean="0"/>
+              <a:rPr lang="en-US"/>
               <a:t>Click to edit Master text styles</a:t>
             </a:r>
           </a:p>
@@ -2522,7 +2522,7 @@
           <a:p>
             <a:fld id="{5BCAD085-E8A6-8845-BD4E-CB4CCA059FC4}" type="datetimeFigureOut">
               <a:rPr lang="en-US" smtClean="0"/>
-              <a:t>1/27/13</a:t>
+              <a:t>8/19/2026</a:t>
             </a:fld>
             <a:endParaRPr lang="en-US"/>
           </a:p>
@@ -2631,10 +2631,9 @@
           <a:lstStyle/>
           <a:p>
             <a:r>
-              <a:rPr lang="en-US" smtClean="0"/>
+              <a:rPr lang="en-US"/>
               <a:t>Click to edit Master title style</a:t>
             </a:r>
-            <a:endParaRPr lang="en-US"/>
           </a:p>
         </p:txBody>
       </p:sp>
@@ -2665,38 +2664,37 @@
           <a:p>
             <a:pPr lvl="0"/>
             <a:r>
-              <a:rPr lang="en-US" smtClean="0"/>
+              <a:rPr lang="en-US"/>
               <a:t>Click to edit Master text styles</a:t>
             </a:r>
           </a:p>
           <a:p>
             <a:pPr lvl="1"/>
             <a:r>
-              <a:rPr lang="en-US" smtClean="0"/>
+              <a:rPr lang="en-US"/>
               <a:t>Second level</a:t>
             </a:r>
           </a:p>
           <a:p>
             <a:pPr lvl="2"/>
             <a:r>
-              <a:rPr lang="en-US" smtClean="0"/>
+              <a:rPr lang="en-US"/>
               <a:t>Third level</a:t>
             </a:r>
           </a:p>
           <a:p>
             <a:pPr lvl="3"/>
             <a:r>
-              <a:rPr lang="en-US" smtClean="0"/>
+              <a:rPr lang="en-US"/>
               <a:t>Fourth level</a:t>
             </a:r>
           </a:p>
           <a:p>
             <a:pPr lvl="4"/>
             <a:r>
-              <a:rPr lang="en-US" smtClean="0"/>
+              <a:rPr lang="en-US"/>
               <a:t>Fifth level</a:t>
             </a:r>
-            <a:endParaRPr lang="en-US"/>
           </a:p>
         </p:txBody>
       </p:sp>
@@ -2735,7 +2733,7 @@
           <a:p>
             <a:fld id="{5BCAD085-E8A6-8845-BD4E-CB4CCA059FC4}" type="datetimeFigureOut">
               <a:rPr lang="en-US" smtClean="0"/>
-              <a:t>1/27/13</a:t>
+              <a:t>8/19/2026</a:t>
             </a:fld>
             <a:endParaRPr lang="en-US"/>
           </a:p>
@@ -3094,7 +3092,7 @@
 </file>
 
 <file path=ppt/slides/slide1.xml><?xml version="1.0" encoding="utf-8"?>
-<p:sld xmlns:a="http://schemas.openxmlformats.org/drawingml/2006/main" xmlns:p="http://schemas.openxmlformats.org/presentationml/2006/main" xmlns:r="http://schemas.openxmlformats.org/officeDocument/2006/relationships">
+<p:sld xmlns:a="http://schemas.openxmlformats.org/drawingml/2006/main" xmlns:r="http://schemas.openxmlformats.org/officeDocument/2006/relationships" xmlns:p="http://schemas.openxmlformats.org/presentationml/2006/main">
   <p:cSld>
     <p:bg>
       <p:bgPr>
@@ -3110,7 +3108,14 @@
         <p:cNvGrpSpPr/>
         <p:nvPr/>
       </p:nvGrpSpPr>
-      <p:grpSpPr/>
+      <p:grpSpPr>
+        <a:xfrm>
+          <a:off x="0" y="0"/>
+          <a:ext cx="0" cy="0"/>
+          <a:chOff x="0" y="0"/>
+          <a:chExt cx="0" cy="0"/>
+        </a:xfrm>
+      </p:grpSpPr>
       <p:sp>
         <p:nvSpPr>
           <p:cNvPr id="2" name="TextBox 1"/>
@@ -3163,7 +3168,13 @@
           <p:cNvGraphicFramePr>
             <a:graphicFrameLocks noGrp="1"/>
           </p:cNvGraphicFramePr>
-          <p:nvPr/>
+          <p:nvPr>
+            <p:extLst>
+              <p:ext uri="{D42A27DB-BD31-4B8C-83A1-F6EECF244321}">
+                <p14:modId xmlns:p14="http://schemas.microsoft.com/office/powerpoint/2010/main" val="2557416190"/>
+              </p:ext>
+            </p:extLst>
+          </p:nvPr>
         </p:nvGraphicFramePr>
         <p:xfrm>
           <a:off x="548640" y="2834640"/>
@@ -3176,13 +3187,25 @@
                 <a:tableStyleId>{5C22544A-7EE6-4342-B048-85BDC9FD1C3A}</a:tableStyleId>
               </a:tblPr>
               <a:tblGrid>
-                <a:gridCol w="3401568"/>
-                <a:gridCol w="2267712"/>
+                <a:gridCol w="3401568">
+                  <a:extLst>
+                    <a:ext uri="{9D8B030D-6E8A-4147-A177-3AD203B41FA5}">
+                      <a16:colId xmlns:a16="http://schemas.microsoft.com/office/drawing/2014/main" val="20000"/>
+                    </a:ext>
+                  </a:extLst>
+                </a:gridCol>
+                <a:gridCol w="2267712">
+                  <a:extLst>
+                    <a:ext uri="{9D8B030D-6E8A-4147-A177-3AD203B41FA5}">
+                      <a16:colId xmlns:a16="http://schemas.microsoft.com/office/drawing/2014/main" val="20001"/>
+                    </a:ext>
+                  </a:extLst>
+                </a:gridCol>
               </a:tblGrid>
               <a:tr h="434340">
                 <a:tc>
                   <a:txBody>
-                    <a:bodyPr wrap="square"/>
+                    <a:bodyPr/>
                     <a:lstStyle/>
                     <a:p>
                       <a:pPr algn="l"/>
@@ -3205,7 +3228,7 @@
                 </a:tc>
                 <a:tc>
                   <a:txBody>
-                    <a:bodyPr wrap="square"/>
+                    <a:bodyPr/>
                     <a:lstStyle/>
                     <a:p>
                       <a:pPr algn="ctr"/>
@@ -3226,150 +3249,180 @@
                     </a:solidFill>
                   </a:tcPr>
                 </a:tc>
+                <a:extLst>
+                  <a:ext uri="{0D108BD9-81ED-4DB2-BD59-A6C34878D82A}">
+                    <a16:rowId xmlns:a16="http://schemas.microsoft.com/office/drawing/2014/main" val="10000"/>
+                  </a:ext>
+                </a:extLst>
               </a:tr>
               <a:tr h="434340">
                 <a:tc>
                   <a:txBody>
-                    <a:bodyPr wrap="square"/>
+                    <a:bodyPr/>
                     <a:lstStyle/>
                     <a:p>
                       <a:pPr algn="l"/>
                       <a:r>
-                        <a:rPr sz="1400" b="0" i="0">
-                          <a:solidFill>
-                            <a:srgbClr val="000000"/>
-                          </a:solidFill>
-                          <a:latin typeface="Calibri"/>
-                        </a:rPr>
-                        <a:t>&lt;NAME 1&gt;</a:t>
-                      </a:r>
-                    </a:p>
-                  </a:txBody>
-                  <a:tcPr>
-                    <a:solidFill>
-                      <a:srgbClr val="FFFFFF"/>
-                    </a:solidFill>
-                  </a:tcPr>
-                </a:tc>
-                <a:tc>
-                  <a:txBody>
-                    <a:bodyPr wrap="square"/>
+                        <a:rPr lang="en-US" sz="1400" dirty="0"/>
+                        <a:t>Ze'ev </a:t>
+                      </a:r>
+                      <a:r>
+                        <a:rPr lang="en-US" sz="1400" dirty="0" err="1"/>
+                        <a:t>Gastevert</a:t>
+                      </a:r>
+                      <a:endParaRPr sz="1400" b="0" i="0" dirty="0">
+                        <a:solidFill>
+                          <a:srgbClr val="000000"/>
+                        </a:solidFill>
+                        <a:latin typeface="Calibri"/>
+                      </a:endParaRPr>
+                    </a:p>
+                  </a:txBody>
+                  <a:tcPr>
+                    <a:solidFill>
+                      <a:srgbClr val="FFFFFF"/>
+                    </a:solidFill>
+                  </a:tcPr>
+                </a:tc>
+                <a:tc>
+                  <a:txBody>
+                    <a:bodyPr/>
                     <a:lstStyle/>
                     <a:p>
                       <a:pPr algn="ctr"/>
                       <a:r>
-                        <a:rPr sz="1400" b="0" i="0">
-                          <a:solidFill>
-                            <a:srgbClr val="000000"/>
-                          </a:solidFill>
-                          <a:latin typeface="Calibri"/>
-                        </a:rPr>
-                        <a:t>&lt;ID 1&gt;</a:t>
-                      </a:r>
-                    </a:p>
-                  </a:txBody>
-                  <a:tcPr>
-                    <a:solidFill>
-                      <a:srgbClr val="FFFFFF"/>
-                    </a:solidFill>
-                  </a:tcPr>
-                </a:tc>
+                        <a:rPr lang="en-US" sz="1400" dirty="0"/>
+                        <a:t>—</a:t>
+                      </a:r>
+                      <a:endParaRPr sz="1400" b="0" i="0" dirty="0">
+                        <a:solidFill>
+                          <a:srgbClr val="000000"/>
+                        </a:solidFill>
+                        <a:latin typeface="Calibri"/>
+                      </a:endParaRPr>
+                    </a:p>
+                  </a:txBody>
+                  <a:tcPr>
+                    <a:solidFill>
+                      <a:srgbClr val="FFFFFF"/>
+                    </a:solidFill>
+                  </a:tcPr>
+                </a:tc>
+                <a:extLst>
+                  <a:ext uri="{0D108BD9-81ED-4DB2-BD59-A6C34878D82A}">
+                    <a16:rowId xmlns:a16="http://schemas.microsoft.com/office/drawing/2014/main" val="10001"/>
+                  </a:ext>
+                </a:extLst>
               </a:tr>
               <a:tr h="434340">
                 <a:tc>
                   <a:txBody>
-                    <a:bodyPr wrap="square"/>
+                    <a:bodyPr/>
                     <a:lstStyle/>
                     <a:p>
                       <a:pPr algn="l"/>
                       <a:r>
-                        <a:rPr sz="1400" b="0" i="0">
-                          <a:solidFill>
-                            <a:srgbClr val="000000"/>
-                          </a:solidFill>
-                          <a:latin typeface="Calibri"/>
-                        </a:rPr>
-                        <a:t>&lt;NAME 2&gt;</a:t>
-                      </a:r>
-                    </a:p>
-                  </a:txBody>
-                  <a:tcPr>
-                    <a:solidFill>
-                      <a:srgbClr val="FFFFFF"/>
-                    </a:solidFill>
-                  </a:tcPr>
-                </a:tc>
-                <a:tc>
-                  <a:txBody>
-                    <a:bodyPr wrap="square"/>
+                        <a:rPr lang="en-US" sz="1400" dirty="0"/>
+                        <a:t>Ido Leibowitz</a:t>
+                      </a:r>
+                      <a:endParaRPr sz="1400" b="0" i="0" dirty="0">
+                        <a:solidFill>
+                          <a:srgbClr val="000000"/>
+                        </a:solidFill>
+                        <a:latin typeface="Calibri"/>
+                      </a:endParaRPr>
+                    </a:p>
+                  </a:txBody>
+                  <a:tcPr>
+                    <a:solidFill>
+                      <a:srgbClr val="FFFFFF"/>
+                    </a:solidFill>
+                  </a:tcPr>
+                </a:tc>
+                <a:tc>
+                  <a:txBody>
+                    <a:bodyPr/>
                     <a:lstStyle/>
                     <a:p>
                       <a:pPr algn="ctr"/>
                       <a:r>
-                        <a:rPr sz="1400" b="0" i="0">
-                          <a:solidFill>
-                            <a:srgbClr val="000000"/>
-                          </a:solidFill>
-                          <a:latin typeface="Calibri"/>
-                        </a:rPr>
-                        <a:t>&lt;ID 2&gt;</a:t>
-                      </a:r>
-                    </a:p>
-                  </a:txBody>
-                  <a:tcPr>
-                    <a:solidFill>
-                      <a:srgbClr val="FFFFFF"/>
-                    </a:solidFill>
-                  </a:tcPr>
-                </a:tc>
+                        <a:rPr lang="en-US" sz="1400" dirty="0"/>
+                        <a:t>—</a:t>
+                      </a:r>
+                      <a:endParaRPr sz="1400" b="0" i="0" dirty="0">
+                        <a:solidFill>
+                          <a:srgbClr val="000000"/>
+                        </a:solidFill>
+                        <a:latin typeface="Calibri"/>
+                      </a:endParaRPr>
+                    </a:p>
+                  </a:txBody>
+                  <a:tcPr>
+                    <a:solidFill>
+                      <a:srgbClr val="FFFFFF"/>
+                    </a:solidFill>
+                  </a:tcPr>
+                </a:tc>
+                <a:extLst>
+                  <a:ext uri="{0D108BD9-81ED-4DB2-BD59-A6C34878D82A}">
+                    <a16:rowId xmlns:a16="http://schemas.microsoft.com/office/drawing/2014/main" val="10002"/>
+                  </a:ext>
+                </a:extLst>
               </a:tr>
               <a:tr h="434340">
                 <a:tc>
                   <a:txBody>
-                    <a:bodyPr wrap="square"/>
+                    <a:bodyPr/>
                     <a:lstStyle/>
                     <a:p>
                       <a:pPr algn="l"/>
                       <a:r>
-                        <a:rPr sz="1400" b="0" i="0">
-                          <a:solidFill>
-                            <a:srgbClr val="000000"/>
-                          </a:solidFill>
-                          <a:latin typeface="Calibri"/>
-                        </a:rPr>
-                        <a:t>&lt;NAME 3&gt;</a:t>
-                      </a:r>
-                    </a:p>
-                  </a:txBody>
-                  <a:tcPr>
-                    <a:solidFill>
-                      <a:srgbClr val="FFFFFF"/>
-                    </a:solidFill>
-                  </a:tcPr>
-                </a:tc>
-                <a:tc>
-                  <a:txBody>
-                    <a:bodyPr wrap="square"/>
+                        <a:rPr lang="en-US" sz="1400" dirty="0"/>
+                        <a:t>David Sheinenzon</a:t>
+                      </a:r>
+                      <a:endParaRPr sz="1400" b="0" i="0" dirty="0">
+                        <a:solidFill>
+                          <a:srgbClr val="000000"/>
+                        </a:solidFill>
+                        <a:latin typeface="Calibri"/>
+                      </a:endParaRPr>
+                    </a:p>
+                  </a:txBody>
+                  <a:tcPr>
+                    <a:solidFill>
+                      <a:srgbClr val="FFFFFF"/>
+                    </a:solidFill>
+                  </a:tcPr>
+                </a:tc>
+                <a:tc>
+                  <a:txBody>
+                    <a:bodyPr/>
                     <a:lstStyle/>
                     <a:p>
                       <a:pPr algn="ctr"/>
                       <a:r>
-                        <a:rPr sz="1400" b="0" i="0">
-                          <a:solidFill>
-                            <a:srgbClr val="000000"/>
-                          </a:solidFill>
-                          <a:latin typeface="Calibri"/>
-                        </a:rPr>
-                        <a:t>&lt;ID 3&gt;</a:t>
-                      </a:r>
-                    </a:p>
-                  </a:txBody>
-                  <a:tcPr>
-                    <a:solidFill>
-                      <a:srgbClr val="FFFFFF"/>
-                    </a:solidFill>
-                  </a:tcPr>
-                </a:tc>
+                        <a:rPr lang="en-US" sz="1400" dirty="0"/>
+                        <a:t>—</a:t>
+                      </a:r>
+                      <a:endParaRPr sz="1400" b="0" i="0" dirty="0">
+                        <a:solidFill>
+                          <a:srgbClr val="000000"/>
+                        </a:solidFill>
+                        <a:latin typeface="Calibri"/>
+                      </a:endParaRPr>
+                    </a:p>
+                  </a:txBody>
+                  <a:tcPr>
+                    <a:solidFill>
+                      <a:srgbClr val="FFFFFF"/>
+                    </a:solidFill>
+                  </a:tcPr>
+                </a:tc>
+                <a:extLst>
+                  <a:ext uri="{0D108BD9-81ED-4DB2-BD59-A6C34878D82A}">
+                    <a16:rowId xmlns:a16="http://schemas.microsoft.com/office/drawing/2014/main" val="10003"/>
+                  </a:ext>
+                </a:extLst>
               </a:tr>
             </a:tbl>
           </a:graphicData>
@@ -3396,7 +3449,9 @@
             <a:spAutoFit/>
           </a:bodyPr>
           <a:lstStyle/>
-          <a:p/>
+          <a:p>
+            <a:endParaRPr/>
+          </a:p>
           <a:p>
             <a:pPr>
               <a:spcAft>
@@ -3478,7 +3533,25 @@
                 </a:solidFill>
                 <a:latin typeface="Calibri"/>
               </a:rPr>
-              <a:t>Fill in all placeholders before submitting — missing items are penalised. Paste the video link in this slide's comment section as well.</a:t>
+              <a:t>Fill in all placeholders before submitting — missing items are </a:t>
+            </a:r>
+            <a:r>
+              <a:rPr sz="1200" b="0" i="1" dirty="0" err="1">
+                <a:solidFill>
+                  <a:srgbClr val="555555"/>
+                </a:solidFill>
+                <a:latin typeface="Calibri"/>
+              </a:rPr>
+              <a:t>penalised</a:t>
+            </a:r>
+            <a:r>
+              <a:rPr sz="1200" b="0" i="1" dirty="0">
+                <a:solidFill>
+                  <a:srgbClr val="555555"/>
+                </a:solidFill>
+                <a:latin typeface="Calibri"/>
+              </a:rPr>
+              <a:t>. Paste the video link in this slide's comment section as well.</a:t>
             </a:r>
           </a:p>
         </p:txBody>
@@ -3492,7 +3565,7 @@
 </file>
 
 <file path=ppt/slides/slide10.xml><?xml version="1.0" encoding="utf-8"?>
-<p:sld xmlns:a="http://schemas.openxmlformats.org/drawingml/2006/main" xmlns:p="http://schemas.openxmlformats.org/presentationml/2006/main" xmlns:r="http://schemas.openxmlformats.org/officeDocument/2006/relationships">
+<p:sld xmlns:a="http://schemas.openxmlformats.org/drawingml/2006/main" xmlns:r="http://schemas.openxmlformats.org/officeDocument/2006/relationships" xmlns:p="http://schemas.openxmlformats.org/presentationml/2006/main">
   <p:cSld>
     <p:bg>
       <p:bgPr>
@@ -3508,7 +3581,14 @@
         <p:cNvGrpSpPr/>
         <p:nvPr/>
       </p:nvGrpSpPr>
-      <p:grpSpPr/>
+      <p:grpSpPr>
+        <a:xfrm>
+          <a:off x="0" y="0"/>
+          <a:ext cx="0" cy="0"/>
+          <a:chOff x="0" y="0"/>
+          <a:chExt cx="0" cy="0"/>
+        </a:xfrm>
+      </p:grpSpPr>
       <p:sp>
         <p:nvSpPr>
           <p:cNvPr id="2" name="TextBox 1"/>
@@ -3573,38 +3653,54 @@
                 <a:tableStyleId>{5C22544A-7EE6-4342-B048-85BDC9FD1C3A}</a:tableStyleId>
               </a:tblPr>
               <a:tblGrid>
-                <a:gridCol w="2677505"/>
-                <a:gridCol w="2368562"/>
-                <a:gridCol w="2883467"/>
-                <a:gridCol w="2677505"/>
+                <a:gridCol w="2677505">
+                  <a:extLst>
+                    <a:ext uri="{9D8B030D-6E8A-4147-A177-3AD203B41FA5}">
+                      <a16:colId xmlns:a16="http://schemas.microsoft.com/office/drawing/2014/main" val="20000"/>
+                    </a:ext>
+                  </a:extLst>
+                </a:gridCol>
+                <a:gridCol w="2368562">
+                  <a:extLst>
+                    <a:ext uri="{9D8B030D-6E8A-4147-A177-3AD203B41FA5}">
+                      <a16:colId xmlns:a16="http://schemas.microsoft.com/office/drawing/2014/main" val="20001"/>
+                    </a:ext>
+                  </a:extLst>
+                </a:gridCol>
+                <a:gridCol w="2883467">
+                  <a:extLst>
+                    <a:ext uri="{9D8B030D-6E8A-4147-A177-3AD203B41FA5}">
+                      <a16:colId xmlns:a16="http://schemas.microsoft.com/office/drawing/2014/main" val="20002"/>
+                    </a:ext>
+                  </a:extLst>
+                </a:gridCol>
+                <a:gridCol w="2677505">
+                  <a:extLst>
+                    <a:ext uri="{9D8B030D-6E8A-4147-A177-3AD203B41FA5}">
+                      <a16:colId xmlns:a16="http://schemas.microsoft.com/office/drawing/2014/main" val="20003"/>
+                    </a:ext>
+                  </a:extLst>
+                </a:gridCol>
               </a:tblGrid>
               <a:tr h="402336">
                 <a:tc>
                   <a:txBody>
-                    <a:bodyPr wrap="square"/>
+                    <a:bodyPr/>
                     <a:lstStyle/>
                     <a:p>
                       <a:pPr algn="l"/>
-                      <a:r>
-                        <a:rPr sz="1250" b="1" i="0">
-                          <a:solidFill>
-                            <a:srgbClr val="000000"/>
-                          </a:solidFill>
-                          <a:latin typeface="Calibri"/>
-                        </a:rPr>
-                        <a:t/>
-                      </a:r>
-                    </a:p>
-                  </a:txBody>
-                  <a:tcPr>
-                    <a:solidFill>
-                      <a:srgbClr val="FFFFFF"/>
-                    </a:solidFill>
-                  </a:tcPr>
-                </a:tc>
-                <a:tc>
-                  <a:txBody>
-                    <a:bodyPr wrap="square"/>
+                      <a:endParaRPr/>
+                    </a:p>
+                  </a:txBody>
+                  <a:tcPr>
+                    <a:solidFill>
+                      <a:srgbClr val="FFFFFF"/>
+                    </a:solidFill>
+                  </a:tcPr>
+                </a:tc>
+                <a:tc>
+                  <a:txBody>
+                    <a:bodyPr/>
                     <a:lstStyle/>
                     <a:p>
                       <a:pPr algn="ctr"/>
@@ -3627,7 +3723,7 @@
                 </a:tc>
                 <a:tc>
                   <a:txBody>
-                    <a:bodyPr wrap="square"/>
+                    <a:bodyPr/>
                     <a:lstStyle/>
                     <a:p>
                       <a:pPr algn="ctr"/>
@@ -3650,7 +3746,7 @@
                 </a:tc>
                 <a:tc>
                   <a:txBody>
-                    <a:bodyPr wrap="square"/>
+                    <a:bodyPr/>
                     <a:lstStyle/>
                     <a:p>
                       <a:pPr algn="ctr"/>
@@ -3671,11 +3767,16 @@
                     </a:solidFill>
                   </a:tcPr>
                 </a:tc>
+                <a:extLst>
+                  <a:ext uri="{0D108BD9-81ED-4DB2-BD59-A6C34878D82A}">
+                    <a16:rowId xmlns:a16="http://schemas.microsoft.com/office/drawing/2014/main" val="10000"/>
+                  </a:ext>
+                </a:extLst>
               </a:tr>
               <a:tr h="402336">
                 <a:tc>
                   <a:txBody>
-                    <a:bodyPr wrap="square"/>
+                    <a:bodyPr/>
                     <a:lstStyle/>
                     <a:p>
                       <a:pPr algn="l"/>
@@ -3698,7 +3799,7 @@
                 </a:tc>
                 <a:tc>
                   <a:txBody>
-                    <a:bodyPr wrap="square"/>
+                    <a:bodyPr/>
                     <a:lstStyle/>
                     <a:p>
                       <a:pPr algn="ctr"/>
@@ -3721,7 +3822,7 @@
                 </a:tc>
                 <a:tc>
                   <a:txBody>
-                    <a:bodyPr wrap="square"/>
+                    <a:bodyPr/>
                     <a:lstStyle/>
                     <a:p>
                       <a:pPr algn="ctr"/>
@@ -3744,7 +3845,7 @@
                 </a:tc>
                 <a:tc>
                   <a:txBody>
-                    <a:bodyPr wrap="square"/>
+                    <a:bodyPr/>
                     <a:lstStyle/>
                     <a:p>
                       <a:pPr algn="ctr"/>
@@ -3765,11 +3866,16 @@
                     </a:solidFill>
                   </a:tcPr>
                 </a:tc>
+                <a:extLst>
+                  <a:ext uri="{0D108BD9-81ED-4DB2-BD59-A6C34878D82A}">
+                    <a16:rowId xmlns:a16="http://schemas.microsoft.com/office/drawing/2014/main" val="10001"/>
+                  </a:ext>
+                </a:extLst>
               </a:tr>
               <a:tr h="402336">
                 <a:tc>
                   <a:txBody>
-                    <a:bodyPr wrap="square"/>
+                    <a:bodyPr/>
                     <a:lstStyle/>
                     <a:p>
                       <a:pPr algn="l"/>
@@ -3792,7 +3898,7 @@
                 </a:tc>
                 <a:tc>
                   <a:txBody>
-                    <a:bodyPr wrap="square"/>
+                    <a:bodyPr/>
                     <a:lstStyle/>
                     <a:p>
                       <a:pPr algn="ctr"/>
@@ -3815,7 +3921,7 @@
                 </a:tc>
                 <a:tc>
                   <a:txBody>
-                    <a:bodyPr wrap="square"/>
+                    <a:bodyPr/>
                     <a:lstStyle/>
                     <a:p>
                       <a:pPr algn="ctr"/>
@@ -3838,7 +3944,7 @@
                 </a:tc>
                 <a:tc>
                   <a:txBody>
-                    <a:bodyPr wrap="square"/>
+                    <a:bodyPr/>
                     <a:lstStyle/>
                     <a:p>
                       <a:pPr algn="ctr"/>
@@ -3859,11 +3965,16 @@
                     </a:solidFill>
                   </a:tcPr>
                 </a:tc>
+                <a:extLst>
+                  <a:ext uri="{0D108BD9-81ED-4DB2-BD59-A6C34878D82A}">
+                    <a16:rowId xmlns:a16="http://schemas.microsoft.com/office/drawing/2014/main" val="10002"/>
+                  </a:ext>
+                </a:extLst>
               </a:tr>
               <a:tr h="402336">
                 <a:tc>
                   <a:txBody>
-                    <a:bodyPr wrap="square"/>
+                    <a:bodyPr/>
                     <a:lstStyle/>
                     <a:p>
                       <a:pPr algn="l"/>
@@ -3886,7 +3997,7 @@
                 </a:tc>
                 <a:tc>
                   <a:txBody>
-                    <a:bodyPr wrap="square"/>
+                    <a:bodyPr/>
                     <a:lstStyle/>
                     <a:p>
                       <a:pPr algn="ctr"/>
@@ -3909,7 +4020,7 @@
                 </a:tc>
                 <a:tc>
                   <a:txBody>
-                    <a:bodyPr wrap="square"/>
+                    <a:bodyPr/>
                     <a:lstStyle/>
                     <a:p>
                       <a:pPr algn="ctr"/>
@@ -3932,7 +4043,7 @@
                 </a:tc>
                 <a:tc>
                   <a:txBody>
-                    <a:bodyPr wrap="square"/>
+                    <a:bodyPr/>
                     <a:lstStyle/>
                     <a:p>
                       <a:pPr algn="ctr"/>
@@ -3953,11 +4064,16 @@
                     </a:solidFill>
                   </a:tcPr>
                 </a:tc>
+                <a:extLst>
+                  <a:ext uri="{0D108BD9-81ED-4DB2-BD59-A6C34878D82A}">
+                    <a16:rowId xmlns:a16="http://schemas.microsoft.com/office/drawing/2014/main" val="10003"/>
+                  </a:ext>
+                </a:extLst>
               </a:tr>
               <a:tr h="402336">
                 <a:tc>
                   <a:txBody>
-                    <a:bodyPr wrap="square"/>
+                    <a:bodyPr/>
                     <a:lstStyle/>
                     <a:p>
                       <a:pPr algn="l"/>
@@ -3980,7 +4096,7 @@
                 </a:tc>
                 <a:tc>
                   <a:txBody>
-                    <a:bodyPr wrap="square"/>
+                    <a:bodyPr/>
                     <a:lstStyle/>
                     <a:p>
                       <a:pPr algn="ctr"/>
@@ -4003,7 +4119,7 @@
                 </a:tc>
                 <a:tc>
                   <a:txBody>
-                    <a:bodyPr wrap="square"/>
+                    <a:bodyPr/>
                     <a:lstStyle/>
                     <a:p>
                       <a:pPr algn="ctr"/>
@@ -4026,7 +4142,7 @@
                 </a:tc>
                 <a:tc>
                   <a:txBody>
-                    <a:bodyPr wrap="square"/>
+                    <a:bodyPr/>
                     <a:lstStyle/>
                     <a:p>
                       <a:pPr algn="ctr"/>
@@ -4047,6 +4163,11 @@
                     </a:solidFill>
                   </a:tcPr>
                 </a:tc>
+                <a:extLst>
+                  <a:ext uri="{0D108BD9-81ED-4DB2-BD59-A6C34878D82A}">
+                    <a16:rowId xmlns:a16="http://schemas.microsoft.com/office/drawing/2014/main" val="10004"/>
+                  </a:ext>
+                </a:extLst>
               </a:tr>
             </a:tbl>
           </a:graphicData>
@@ -4195,7 +4316,7 @@
 </file>
 
 <file path=ppt/slides/slide11.xml><?xml version="1.0" encoding="utf-8"?>
-<p:sld xmlns:a="http://schemas.openxmlformats.org/drawingml/2006/main" xmlns:p="http://schemas.openxmlformats.org/presentationml/2006/main" xmlns:r="http://schemas.openxmlformats.org/officeDocument/2006/relationships">
+<p:sld xmlns:a="http://schemas.openxmlformats.org/drawingml/2006/main" xmlns:r="http://schemas.openxmlformats.org/officeDocument/2006/relationships" xmlns:p="http://schemas.openxmlformats.org/presentationml/2006/main">
   <p:cSld>
     <p:bg>
       <p:bgPr>
@@ -4211,7 +4332,14 @@
         <p:cNvGrpSpPr/>
         <p:nvPr/>
       </p:nvGrpSpPr>
-      <p:grpSpPr/>
+      <p:grpSpPr>
+        <a:xfrm>
+          <a:off x="0" y="0"/>
+          <a:ext cx="0" cy="0"/>
+          <a:chOff x="0" y="0"/>
+          <a:chExt cx="0" cy="0"/>
+        </a:xfrm>
+      </p:grpSpPr>
       <p:sp>
         <p:nvSpPr>
           <p:cNvPr id="2" name="TextBox 1"/>
@@ -4367,14 +4495,32 @@
                 <a:tableStyleId>{5C22544A-7EE6-4342-B048-85BDC9FD1C3A}</a:tableStyleId>
               </a:tblPr>
               <a:tblGrid>
-                <a:gridCol w="4435671"/>
-                <a:gridCol w="2892829"/>
-                <a:gridCol w="3278539"/>
+                <a:gridCol w="4435671">
+                  <a:extLst>
+                    <a:ext uri="{9D8B030D-6E8A-4147-A177-3AD203B41FA5}">
+                      <a16:colId xmlns:a16="http://schemas.microsoft.com/office/drawing/2014/main" val="20000"/>
+                    </a:ext>
+                  </a:extLst>
+                </a:gridCol>
+                <a:gridCol w="2892829">
+                  <a:extLst>
+                    <a:ext uri="{9D8B030D-6E8A-4147-A177-3AD203B41FA5}">
+                      <a16:colId xmlns:a16="http://schemas.microsoft.com/office/drawing/2014/main" val="20001"/>
+                    </a:ext>
+                  </a:extLst>
+                </a:gridCol>
+                <a:gridCol w="3278539">
+                  <a:extLst>
+                    <a:ext uri="{9D8B030D-6E8A-4147-A177-3AD203B41FA5}">
+                      <a16:colId xmlns:a16="http://schemas.microsoft.com/office/drawing/2014/main" val="20002"/>
+                    </a:ext>
+                  </a:extLst>
+                </a:gridCol>
               </a:tblGrid>
               <a:tr h="378822">
                 <a:tc>
                   <a:txBody>
-                    <a:bodyPr wrap="square"/>
+                    <a:bodyPr/>
                     <a:lstStyle/>
                     <a:p>
                       <a:pPr algn="l"/>
@@ -4397,7 +4543,7 @@
                 </a:tc>
                 <a:tc>
                   <a:txBody>
-                    <a:bodyPr wrap="square"/>
+                    <a:bodyPr/>
                     <a:lstStyle/>
                     <a:p>
                       <a:pPr algn="ctr"/>
@@ -4420,7 +4566,7 @@
                 </a:tc>
                 <a:tc>
                   <a:txBody>
-                    <a:bodyPr wrap="square"/>
+                    <a:bodyPr/>
                     <a:lstStyle/>
                     <a:p>
                       <a:pPr algn="ctr"/>
@@ -4441,11 +4587,16 @@
                     </a:solidFill>
                   </a:tcPr>
                 </a:tc>
+                <a:extLst>
+                  <a:ext uri="{0D108BD9-81ED-4DB2-BD59-A6C34878D82A}">
+                    <a16:rowId xmlns:a16="http://schemas.microsoft.com/office/drawing/2014/main" val="10000"/>
+                  </a:ext>
+                </a:extLst>
               </a:tr>
               <a:tr h="378822">
                 <a:tc>
                   <a:txBody>
-                    <a:bodyPr wrap="square"/>
+                    <a:bodyPr/>
                     <a:lstStyle/>
                     <a:p>
                       <a:pPr algn="l"/>
@@ -4468,7 +4619,7 @@
                 </a:tc>
                 <a:tc>
                   <a:txBody>
-                    <a:bodyPr wrap="square"/>
+                    <a:bodyPr/>
                     <a:lstStyle/>
                     <a:p>
                       <a:pPr algn="ctr"/>
@@ -4491,7 +4642,7 @@
                 </a:tc>
                 <a:tc>
                   <a:txBody>
-                    <a:bodyPr wrap="square"/>
+                    <a:bodyPr/>
                     <a:lstStyle/>
                     <a:p>
                       <a:pPr algn="ctr"/>
@@ -4512,11 +4663,16 @@
                     </a:solidFill>
                   </a:tcPr>
                 </a:tc>
+                <a:extLst>
+                  <a:ext uri="{0D108BD9-81ED-4DB2-BD59-A6C34878D82A}">
+                    <a16:rowId xmlns:a16="http://schemas.microsoft.com/office/drawing/2014/main" val="10001"/>
+                  </a:ext>
+                </a:extLst>
               </a:tr>
               <a:tr h="378822">
                 <a:tc>
                   <a:txBody>
-                    <a:bodyPr wrap="square"/>
+                    <a:bodyPr/>
                     <a:lstStyle/>
                     <a:p>
                       <a:pPr algn="l"/>
@@ -4539,7 +4695,7 @@
                 </a:tc>
                 <a:tc>
                   <a:txBody>
-                    <a:bodyPr wrap="square"/>
+                    <a:bodyPr/>
                     <a:lstStyle/>
                     <a:p>
                       <a:pPr algn="ctr"/>
@@ -4562,7 +4718,7 @@
                 </a:tc>
                 <a:tc>
                   <a:txBody>
-                    <a:bodyPr wrap="square"/>
+                    <a:bodyPr/>
                     <a:lstStyle/>
                     <a:p>
                       <a:pPr algn="ctr"/>
@@ -4583,11 +4739,16 @@
                     </a:solidFill>
                   </a:tcPr>
                 </a:tc>
+                <a:extLst>
+                  <a:ext uri="{0D108BD9-81ED-4DB2-BD59-A6C34878D82A}">
+                    <a16:rowId xmlns:a16="http://schemas.microsoft.com/office/drawing/2014/main" val="10002"/>
+                  </a:ext>
+                </a:extLst>
               </a:tr>
               <a:tr h="378822">
                 <a:tc>
                   <a:txBody>
-                    <a:bodyPr wrap="square"/>
+                    <a:bodyPr/>
                     <a:lstStyle/>
                     <a:p>
                       <a:pPr algn="l"/>
@@ -4610,7 +4771,7 @@
                 </a:tc>
                 <a:tc>
                   <a:txBody>
-                    <a:bodyPr wrap="square"/>
+                    <a:bodyPr/>
                     <a:lstStyle/>
                     <a:p>
                       <a:pPr algn="ctr"/>
@@ -4633,7 +4794,7 @@
                 </a:tc>
                 <a:tc>
                   <a:txBody>
-                    <a:bodyPr wrap="square"/>
+                    <a:bodyPr/>
                     <a:lstStyle/>
                     <a:p>
                       <a:pPr algn="ctr"/>
@@ -4654,11 +4815,16 @@
                     </a:solidFill>
                   </a:tcPr>
                 </a:tc>
+                <a:extLst>
+                  <a:ext uri="{0D108BD9-81ED-4DB2-BD59-A6C34878D82A}">
+                    <a16:rowId xmlns:a16="http://schemas.microsoft.com/office/drawing/2014/main" val="10003"/>
+                  </a:ext>
+                </a:extLst>
               </a:tr>
               <a:tr h="378822">
                 <a:tc>
                   <a:txBody>
-                    <a:bodyPr wrap="square"/>
+                    <a:bodyPr/>
                     <a:lstStyle/>
                     <a:p>
                       <a:pPr algn="l"/>
@@ -4681,7 +4847,7 @@
                 </a:tc>
                 <a:tc>
                   <a:txBody>
-                    <a:bodyPr wrap="square"/>
+                    <a:bodyPr/>
                     <a:lstStyle/>
                     <a:p>
                       <a:pPr algn="ctr"/>
@@ -4704,7 +4870,7 @@
                 </a:tc>
                 <a:tc>
                   <a:txBody>
-                    <a:bodyPr wrap="square"/>
+                    <a:bodyPr/>
                     <a:lstStyle/>
                     <a:p>
                       <a:pPr algn="ctr"/>
@@ -4725,11 +4891,16 @@
                     </a:solidFill>
                   </a:tcPr>
                 </a:tc>
+                <a:extLst>
+                  <a:ext uri="{0D108BD9-81ED-4DB2-BD59-A6C34878D82A}">
+                    <a16:rowId xmlns:a16="http://schemas.microsoft.com/office/drawing/2014/main" val="10004"/>
+                  </a:ext>
+                </a:extLst>
               </a:tr>
               <a:tr h="378822">
                 <a:tc>
                   <a:txBody>
-                    <a:bodyPr wrap="square"/>
+                    <a:bodyPr/>
                     <a:lstStyle/>
                     <a:p>
                       <a:pPr algn="l"/>
@@ -4752,7 +4923,7 @@
                 </a:tc>
                 <a:tc>
                   <a:txBody>
-                    <a:bodyPr wrap="square"/>
+                    <a:bodyPr/>
                     <a:lstStyle/>
                     <a:p>
                       <a:pPr algn="ctr"/>
@@ -4775,7 +4946,7 @@
                 </a:tc>
                 <a:tc>
                   <a:txBody>
-                    <a:bodyPr wrap="square"/>
+                    <a:bodyPr/>
                     <a:lstStyle/>
                     <a:p>
                       <a:pPr algn="ctr"/>
@@ -4796,11 +4967,16 @@
                     </a:solidFill>
                   </a:tcPr>
                 </a:tc>
+                <a:extLst>
+                  <a:ext uri="{0D108BD9-81ED-4DB2-BD59-A6C34878D82A}">
+                    <a16:rowId xmlns:a16="http://schemas.microsoft.com/office/drawing/2014/main" val="10005"/>
+                  </a:ext>
+                </a:extLst>
               </a:tr>
               <a:tr h="378828">
                 <a:tc>
                   <a:txBody>
-                    <a:bodyPr wrap="square"/>
+                    <a:bodyPr/>
                     <a:lstStyle/>
                     <a:p>
                       <a:pPr algn="l"/>
@@ -4823,7 +4999,7 @@
                 </a:tc>
                 <a:tc>
                   <a:txBody>
-                    <a:bodyPr wrap="square"/>
+                    <a:bodyPr/>
                     <a:lstStyle/>
                     <a:p>
                       <a:pPr algn="ctr"/>
@@ -4846,7 +5022,7 @@
                 </a:tc>
                 <a:tc>
                   <a:txBody>
-                    <a:bodyPr wrap="square"/>
+                    <a:bodyPr/>
                     <a:lstStyle/>
                     <a:p>
                       <a:pPr algn="ctr"/>
@@ -4867,6 +5043,11 @@
                     </a:solidFill>
                   </a:tcPr>
                 </a:tc>
+                <a:extLst>
+                  <a:ext uri="{0D108BD9-81ED-4DB2-BD59-A6C34878D82A}">
+                    <a16:rowId xmlns:a16="http://schemas.microsoft.com/office/drawing/2014/main" val="10006"/>
+                  </a:ext>
+                </a:extLst>
               </a:tr>
             </a:tbl>
           </a:graphicData>
@@ -4945,7 +5126,7 @@
 </file>
 
 <file path=ppt/slides/slide12.xml><?xml version="1.0" encoding="utf-8"?>
-<p:sld xmlns:a="http://schemas.openxmlformats.org/drawingml/2006/main" xmlns:p="http://schemas.openxmlformats.org/presentationml/2006/main" xmlns:r="http://schemas.openxmlformats.org/officeDocument/2006/relationships">
+<p:sld xmlns:a="http://schemas.openxmlformats.org/drawingml/2006/main" xmlns:r="http://schemas.openxmlformats.org/officeDocument/2006/relationships" xmlns:p="http://schemas.openxmlformats.org/presentationml/2006/main">
   <p:cSld>
     <p:bg>
       <p:bgPr>
@@ -4961,7 +5142,14 @@
         <p:cNvGrpSpPr/>
         <p:nvPr/>
       </p:nvGrpSpPr>
-      <p:grpSpPr/>
+      <p:grpSpPr>
+        <a:xfrm>
+          <a:off x="0" y="0"/>
+          <a:ext cx="0" cy="0"/>
+          <a:chOff x="0" y="0"/>
+          <a:chExt cx="0" cy="0"/>
+        </a:xfrm>
+      </p:grpSpPr>
       <p:sp>
         <p:nvSpPr>
           <p:cNvPr id="2" name="TextBox 1"/>
@@ -5016,7 +5204,7 @@
           <p:nvPr/>
         </p:nvPicPr>
         <p:blipFill>
-          <a:blip r:embed="rId2"/>
+          <a:blip r:embed="rId3"/>
           <a:stretch>
             <a:fillRect/>
           </a:stretch>
@@ -5106,7 +5294,7 @@
 </file>
 
 <file path=ppt/slides/slide13.xml><?xml version="1.0" encoding="utf-8"?>
-<p:sld xmlns:a="http://schemas.openxmlformats.org/drawingml/2006/main" xmlns:p="http://schemas.openxmlformats.org/presentationml/2006/main" xmlns:r="http://schemas.openxmlformats.org/officeDocument/2006/relationships">
+<p:sld xmlns:a="http://schemas.openxmlformats.org/drawingml/2006/main" xmlns:r="http://schemas.openxmlformats.org/officeDocument/2006/relationships" xmlns:p="http://schemas.openxmlformats.org/presentationml/2006/main">
   <p:cSld>
     <p:bg>
       <p:bgPr>
@@ -5122,7 +5310,14 @@
         <p:cNvGrpSpPr/>
         <p:nvPr/>
       </p:nvGrpSpPr>
-      <p:grpSpPr/>
+      <p:grpSpPr>
+        <a:xfrm>
+          <a:off x="0" y="0"/>
+          <a:ext cx="0" cy="0"/>
+          <a:chOff x="0" y="0"/>
+          <a:chExt cx="0" cy="0"/>
+        </a:xfrm>
+      </p:grpSpPr>
       <p:sp>
         <p:nvSpPr>
           <p:cNvPr id="2" name="TextBox 1"/>
@@ -5307,7 +5502,7 @@
 </file>
 
 <file path=ppt/slides/slide14.xml><?xml version="1.0" encoding="utf-8"?>
-<p:sld xmlns:a="http://schemas.openxmlformats.org/drawingml/2006/main" xmlns:p="http://schemas.openxmlformats.org/presentationml/2006/main" xmlns:r="http://schemas.openxmlformats.org/officeDocument/2006/relationships">
+<p:sld xmlns:a="http://schemas.openxmlformats.org/drawingml/2006/main" xmlns:r="http://schemas.openxmlformats.org/officeDocument/2006/relationships" xmlns:p="http://schemas.openxmlformats.org/presentationml/2006/main">
   <p:cSld>
     <p:bg>
       <p:bgPr>
@@ -5323,7 +5518,14 @@
         <p:cNvGrpSpPr/>
         <p:nvPr/>
       </p:nvGrpSpPr>
-      <p:grpSpPr/>
+      <p:grpSpPr>
+        <a:xfrm>
+          <a:off x="0" y="0"/>
+          <a:ext cx="0" cy="0"/>
+          <a:chOff x="0" y="0"/>
+          <a:chExt cx="0" cy="0"/>
+        </a:xfrm>
+      </p:grpSpPr>
       <p:sp>
         <p:nvSpPr>
           <p:cNvPr id="2" name="TextBox 1"/>
@@ -5435,6 +5637,12 @@
                 <a:spcPts val="1100"/>
               </a:spcAft>
             </a:pPr>
+            <a:endParaRPr sz="1500" b="0" i="0">
+              <a:solidFill>
+                <a:srgbClr val="000000"/>
+              </a:solidFill>
+              <a:latin typeface="Calibri"/>
+            </a:endParaRPr>
           </a:p>
           <a:p>
             <a:pPr>
@@ -5608,7 +5816,7 @@
 </file>
 
 <file path=ppt/slides/slide15.xml><?xml version="1.0" encoding="utf-8"?>
-<p:sld xmlns:a="http://schemas.openxmlformats.org/drawingml/2006/main" xmlns:p="http://schemas.openxmlformats.org/presentationml/2006/main" xmlns:r="http://schemas.openxmlformats.org/officeDocument/2006/relationships">
+<p:sld xmlns:a="http://schemas.openxmlformats.org/drawingml/2006/main" xmlns:r="http://schemas.openxmlformats.org/officeDocument/2006/relationships" xmlns:p="http://schemas.openxmlformats.org/presentationml/2006/main">
   <p:cSld>
     <p:bg>
       <p:bgPr>
@@ -5624,7 +5832,14 @@
         <p:cNvGrpSpPr/>
         <p:nvPr/>
       </p:nvGrpSpPr>
-      <p:grpSpPr/>
+      <p:grpSpPr>
+        <a:xfrm>
+          <a:off x="0" y="0"/>
+          <a:ext cx="0" cy="0"/>
+          <a:chOff x="0" y="0"/>
+          <a:chExt cx="0" cy="0"/>
+        </a:xfrm>
+      </p:grpSpPr>
       <p:sp>
         <p:nvSpPr>
           <p:cNvPr id="2" name="TextBox 1"/>
@@ -5679,7 +5894,7 @@
           <p:nvPr/>
         </p:nvPicPr>
         <p:blipFill>
-          <a:blip r:embed="rId2"/>
+          <a:blip r:embed="rId3"/>
           <a:stretch>
             <a:fillRect/>
           </a:stretch>
@@ -5737,7 +5952,7 @@
 </file>
 
 <file path=ppt/slides/slide16.xml><?xml version="1.0" encoding="utf-8"?>
-<p:sld xmlns:a="http://schemas.openxmlformats.org/drawingml/2006/main" xmlns:p="http://schemas.openxmlformats.org/presentationml/2006/main" xmlns:r="http://schemas.openxmlformats.org/officeDocument/2006/relationships">
+<p:sld xmlns:a="http://schemas.openxmlformats.org/drawingml/2006/main" xmlns:r="http://schemas.openxmlformats.org/officeDocument/2006/relationships" xmlns:p="http://schemas.openxmlformats.org/presentationml/2006/main">
   <p:cSld>
     <p:bg>
       <p:bgPr>
@@ -5753,7 +5968,14 @@
         <p:cNvGrpSpPr/>
         <p:nvPr/>
       </p:nvGrpSpPr>
-      <p:grpSpPr/>
+      <p:grpSpPr>
+        <a:xfrm>
+          <a:off x="0" y="0"/>
+          <a:ext cx="0" cy="0"/>
+          <a:chOff x="0" y="0"/>
+          <a:chExt cx="0" cy="0"/>
+        </a:xfrm>
+      </p:grpSpPr>
       <p:sp>
         <p:nvSpPr>
           <p:cNvPr id="2" name="TextBox 1"/>
@@ -5808,7 +6030,7 @@
           <p:nvPr/>
         </p:nvPicPr>
         <p:blipFill>
-          <a:blip r:embed="rId2"/>
+          <a:blip r:embed="rId3"/>
           <a:stretch>
             <a:fillRect/>
           </a:stretch>
@@ -5866,7 +6088,7 @@
 </file>
 
 <file path=ppt/slides/slide2.xml><?xml version="1.0" encoding="utf-8"?>
-<p:sld xmlns:a="http://schemas.openxmlformats.org/drawingml/2006/main" xmlns:p="http://schemas.openxmlformats.org/presentationml/2006/main" xmlns:r="http://schemas.openxmlformats.org/officeDocument/2006/relationships">
+<p:sld xmlns:a="http://schemas.openxmlformats.org/drawingml/2006/main" xmlns:r="http://schemas.openxmlformats.org/officeDocument/2006/relationships" xmlns:p="http://schemas.openxmlformats.org/presentationml/2006/main">
   <p:cSld>
     <p:bg>
       <p:bgPr>
@@ -5882,7 +6104,14 @@
         <p:cNvGrpSpPr/>
         <p:nvPr/>
       </p:nvGrpSpPr>
-      <p:grpSpPr/>
+      <p:grpSpPr>
+        <a:xfrm>
+          <a:off x="0" y="0"/>
+          <a:ext cx="0" cy="0"/>
+          <a:chOff x="0" y="0"/>
+          <a:chExt cx="0" cy="0"/>
+        </a:xfrm>
+      </p:grpSpPr>
       <p:sp>
         <p:nvSpPr>
           <p:cNvPr id="2" name="TextBox 1"/>
@@ -6083,7 +6312,7 @@
           <p:nvPr/>
         </p:nvPicPr>
         <p:blipFill>
-          <a:blip r:embed="rId2"/>
+          <a:blip r:embed="rId3"/>
           <a:stretch>
             <a:fillRect/>
           </a:stretch>
@@ -6107,7 +6336,7 @@
 </file>
 
 <file path=ppt/slides/slide3.xml><?xml version="1.0" encoding="utf-8"?>
-<p:sld xmlns:a="http://schemas.openxmlformats.org/drawingml/2006/main" xmlns:p="http://schemas.openxmlformats.org/presentationml/2006/main" xmlns:r="http://schemas.openxmlformats.org/officeDocument/2006/relationships">
+<p:sld xmlns:a="http://schemas.openxmlformats.org/drawingml/2006/main" xmlns:r="http://schemas.openxmlformats.org/officeDocument/2006/relationships" xmlns:p="http://schemas.openxmlformats.org/presentationml/2006/main">
   <p:cSld>
     <p:bg>
       <p:bgPr>
@@ -6123,7 +6352,14 @@
         <p:cNvGrpSpPr/>
         <p:nvPr/>
       </p:nvGrpSpPr>
-      <p:grpSpPr/>
+      <p:grpSpPr>
+        <a:xfrm>
+          <a:off x="0" y="0"/>
+          <a:ext cx="0" cy="0"/>
+          <a:chOff x="0" y="0"/>
+          <a:chExt cx="0" cy="0"/>
+        </a:xfrm>
+      </p:grpSpPr>
       <p:sp>
         <p:nvSpPr>
           <p:cNvPr id="2" name="TextBox 1"/>
@@ -6165,6 +6401,294 @@
                 <a:latin typeface="Calibri"/>
               </a:rPr>
               <a:t>U-Net shape — but the deep layers use MLPs, not convolution or attention</a:t>
+            </a:r>
+          </a:p>
+        </p:txBody>
+      </p:sp>
+      <p:sp>
+        <p:nvSpPr>
+          <p:cNvPr id="3" name="TextBox 2"/>
+          <p:cNvSpPr txBox="1"/>
+          <p:nvPr/>
+        </p:nvSpPr>
+        <p:spPr>
+          <a:xfrm>
+            <a:off x="548641" y="1463040"/>
+            <a:ext cx="5079162" cy="3441968"/>
+          </a:xfrm>
+          <a:prstGeom prst="rect">
+            <a:avLst/>
+          </a:prstGeom>
+          <a:noFill/>
+        </p:spPr>
+        <p:txBody>
+          <a:bodyPr wrap="square">
+            <a:spAutoFit/>
+          </a:bodyPr>
+          <a:lstStyle/>
+          <a:p>
+            <a:pPr>
+              <a:spcAft>
+                <a:spcPts val="1000"/>
+              </a:spcAft>
+            </a:pPr>
+            <a:r>
+              <a:rPr sz="1600" b="1" i="0" dirty="0">
+                <a:solidFill>
+                  <a:srgbClr val="000000"/>
+                </a:solidFill>
+                <a:latin typeface="Calibri"/>
+              </a:rPr>
+              <a:t>Conv stage</a:t>
+            </a:r>
+            <a:r>
+              <a:rPr sz="1600" b="0" i="0" dirty="0">
+                <a:solidFill>
+                  <a:srgbClr val="000000"/>
+                </a:solidFill>
+                <a:latin typeface="Calibri"/>
+              </a:rPr>
+              <a:t> (3 shallow levels) — Conv3×3 → BN → </a:t>
+            </a:r>
+            <a:r>
+              <a:rPr sz="1600" b="0" i="0" dirty="0" err="1">
+                <a:solidFill>
+                  <a:srgbClr val="000000"/>
+                </a:solidFill>
+                <a:latin typeface="Calibri"/>
+              </a:rPr>
+              <a:t>ReLU</a:t>
+            </a:r>
+            <a:r>
+              <a:rPr sz="1600" b="0" i="0" dirty="0">
+                <a:solidFill>
+                  <a:srgbClr val="000000"/>
+                </a:solidFill>
+                <a:latin typeface="Calibri"/>
+              </a:rPr>
+              <a:t>, narrow channels (16/32/128)</a:t>
+            </a:r>
+          </a:p>
+          <a:p>
+            <a:pPr>
+              <a:spcAft>
+                <a:spcPts val="1000"/>
+              </a:spcAft>
+            </a:pPr>
+            <a:r>
+              <a:rPr sz="1600" b="1" i="0" dirty="0">
+                <a:solidFill>
+                  <a:srgbClr val="000000"/>
+                </a:solidFill>
+                <a:latin typeface="Calibri"/>
+              </a:rPr>
+              <a:t>Tokenized MLP stage</a:t>
+            </a:r>
+            <a:r>
+              <a:rPr sz="1600" b="0" i="0" dirty="0">
+                <a:solidFill>
+                  <a:srgbClr val="000000"/>
+                </a:solidFill>
+                <a:latin typeface="Calibri"/>
+              </a:rPr>
+              <a:t> (2 deep levels) — features are tokenized, then passed through shifted MLPs</a:t>
+            </a:r>
+          </a:p>
+          <a:p>
+            <a:pPr>
+              <a:spcAft>
+                <a:spcPts val="1000"/>
+              </a:spcAft>
+            </a:pPr>
+            <a:r>
+              <a:rPr sz="1600" b="1" i="0" dirty="0">
+                <a:solidFill>
+                  <a:srgbClr val="000000"/>
+                </a:solidFill>
+                <a:latin typeface="Calibri"/>
+              </a:rPr>
+              <a:t>Skip connections</a:t>
+            </a:r>
+            <a:r>
+              <a:rPr sz="1600" b="0" i="0" dirty="0">
+                <a:solidFill>
+                  <a:srgbClr val="000000"/>
+                </a:solidFill>
+                <a:latin typeface="Calibri"/>
+              </a:rPr>
+              <a:t> join matching encoder and decoder levels</a:t>
+            </a:r>
+          </a:p>
+          <a:p>
+            <a:pPr>
+              <a:spcAft>
+                <a:spcPts val="1000"/>
+              </a:spcAft>
+            </a:pPr>
+            <a:endParaRPr sz="1600" b="0" i="0" dirty="0">
+              <a:solidFill>
+                <a:srgbClr val="000000"/>
+              </a:solidFill>
+              <a:latin typeface="Calibri"/>
+            </a:endParaRPr>
+          </a:p>
+          <a:p>
+            <a:pPr>
+              <a:spcAft>
+                <a:spcPts val="1000"/>
+              </a:spcAft>
+            </a:pPr>
+            <a:r>
+              <a:rPr sz="1600" b="1" i="0" dirty="0">
+                <a:solidFill>
+                  <a:srgbClr val="000000"/>
+                </a:solidFill>
+                <a:latin typeface="Calibri"/>
+              </a:rPr>
+              <a:t>Why MLPs?</a:t>
+            </a:r>
+            <a:r>
+              <a:rPr sz="1600" b="0" i="0" dirty="0">
+                <a:solidFill>
+                  <a:srgbClr val="000000"/>
+                </a:solidFill>
+                <a:latin typeface="Calibri"/>
+              </a:rPr>
+              <a:t> Self-attention costs O(n²) in the number of tokens. MLPs are plain matrix multiplies — far cheaper.</a:t>
+            </a:r>
+          </a:p>
+          <a:p>
+            <a:pPr>
+              <a:spcAft>
+                <a:spcPts val="1000"/>
+              </a:spcAft>
+            </a:pPr>
+            <a:r>
+              <a:rPr sz="1600" b="1" i="0" dirty="0">
+                <a:solidFill>
+                  <a:srgbClr val="000000"/>
+                </a:solidFill>
+                <a:latin typeface="Calibri"/>
+              </a:rPr>
+              <a:t>The catch:</a:t>
+            </a:r>
+            <a:r>
+              <a:rPr sz="1600" b="0" i="0" dirty="0">
+                <a:solidFill>
+                  <a:srgbClr val="000000"/>
+                </a:solidFill>
+                <a:latin typeface="Calibri"/>
+              </a:rPr>
+              <a:t> an MLP is spatially blind. It has no notion of "adjacent pixel".</a:t>
+            </a:r>
+          </a:p>
+        </p:txBody>
+      </p:sp>
+      <p:pic>
+        <p:nvPicPr>
+          <p:cNvPr id="5" name="Picture 4">
+            <a:extLst>
+              <a:ext uri="{FF2B5EF4-FFF2-40B4-BE49-F238E27FC236}">
+                <a16:creationId xmlns:a16="http://schemas.microsoft.com/office/drawing/2014/main" id="{70128D3F-1A8A-BBDC-6EC2-1BB30C9B608E}"/>
+              </a:ext>
+            </a:extLst>
+          </p:cNvPr>
+          <p:cNvPicPr>
+            <a:picLocks noChangeAspect="1"/>
+          </p:cNvPicPr>
+          <p:nvPr/>
+        </p:nvPicPr>
+        <p:blipFill>
+          <a:blip r:embed="rId3"/>
+          <a:srcRect b="7143"/>
+          <a:stretch>
+            <a:fillRect/>
+          </a:stretch>
+        </p:blipFill>
+        <p:spPr>
+          <a:xfrm>
+            <a:off x="5760188" y="1039305"/>
+            <a:ext cx="6254273" cy="4355655"/>
+          </a:xfrm>
+          <a:prstGeom prst="rect">
+            <a:avLst/>
+          </a:prstGeom>
+        </p:spPr>
+      </p:pic>
+    </p:spTree>
+  </p:cSld>
+  <p:clrMapOvr>
+    <a:masterClrMapping/>
+  </p:clrMapOvr>
+</p:sld>
+</file>
+
+<file path=ppt/slides/slide4.xml><?xml version="1.0" encoding="utf-8"?>
+<p:sld xmlns:a="http://schemas.openxmlformats.org/drawingml/2006/main" xmlns:r="http://schemas.openxmlformats.org/officeDocument/2006/relationships" xmlns:p="http://schemas.openxmlformats.org/presentationml/2006/main">
+  <p:cSld>
+    <p:bg>
+      <p:bgPr>
+        <a:solidFill>
+          <a:srgbClr val="FFFFFF"/>
+        </a:solidFill>
+        <a:effectLst/>
+      </p:bgPr>
+    </p:bg>
+    <p:spTree>
+      <p:nvGrpSpPr>
+        <p:cNvPr id="1" name=""/>
+        <p:cNvGrpSpPr/>
+        <p:nvPr/>
+      </p:nvGrpSpPr>
+      <p:grpSpPr>
+        <a:xfrm>
+          <a:off x="0" y="0"/>
+          <a:ext cx="0" cy="0"/>
+          <a:chOff x="0" y="0"/>
+          <a:chExt cx="0" cy="0"/>
+        </a:xfrm>
+      </p:grpSpPr>
+      <p:sp>
+        <p:nvSpPr>
+          <p:cNvPr id="2" name="TextBox 1"/>
+          <p:cNvSpPr txBox="1"/>
+          <p:nvPr/>
+        </p:nvSpPr>
+        <p:spPr>
+          <a:xfrm>
+            <a:off x="548640" y="320040"/>
+            <a:ext cx="11094415" cy="822960"/>
+          </a:xfrm>
+          <a:prstGeom prst="rect">
+            <a:avLst/>
+          </a:prstGeom>
+          <a:noFill/>
+        </p:spPr>
+        <p:txBody>
+          <a:bodyPr wrap="square">
+            <a:spAutoFit/>
+          </a:bodyPr>
+          <a:lstStyle/>
+          <a:p>
+            <a:r>
+              <a:rPr sz="3000" b="1" i="0">
+                <a:solidFill>
+                  <a:srgbClr val="000000"/>
+                </a:solidFill>
+                <a:latin typeface="Calibri"/>
+              </a:rPr>
+              <a:t>The key trick: shifted MLPs</a:t>
+            </a:r>
+          </a:p>
+          <a:p>
+            <a:r>
+              <a:rPr sz="1400" b="0" i="1">
+                <a:solidFill>
+                  <a:srgbClr val="555555"/>
+                </a:solidFill>
+                <a:latin typeface="Calibri"/>
+              </a:rPr>
+              <a:t>How UNeXt gives an MLP a sense of locality — for free</a:t>
             </a:r>
           </a:p>
         </p:txBody>
@@ -6197,266 +6721,6 @@
               </a:spcAft>
             </a:pPr>
             <a:r>
-              <a:rPr sz="1600" b="1" i="0">
-                <a:solidFill>
-                  <a:srgbClr val="000000"/>
-                </a:solidFill>
-                <a:latin typeface="Calibri"/>
-              </a:rPr>
-              <a:t>Conv stage</a:t>
-            </a:r>
-            <a:r>
-              <a:rPr sz="1600" b="0" i="0">
-                <a:solidFill>
-                  <a:srgbClr val="000000"/>
-                </a:solidFill>
-                <a:latin typeface="Calibri"/>
-              </a:rPr>
-              <a:t> (3 shallow levels) — Conv3×3 → BN → ReLU, narrow channels (16/32/128)</a:t>
-            </a:r>
-          </a:p>
-          <a:p>
-            <a:pPr>
-              <a:spcAft>
-                <a:spcPts val="1000"/>
-              </a:spcAft>
-            </a:pPr>
-            <a:r>
-              <a:rPr sz="1600" b="1" i="0">
-                <a:solidFill>
-                  <a:srgbClr val="000000"/>
-                </a:solidFill>
-                <a:latin typeface="Calibri"/>
-              </a:rPr>
-              <a:t>Tokenized MLP stage</a:t>
-            </a:r>
-            <a:r>
-              <a:rPr sz="1600" b="0" i="0">
-                <a:solidFill>
-                  <a:srgbClr val="000000"/>
-                </a:solidFill>
-                <a:latin typeface="Calibri"/>
-              </a:rPr>
-              <a:t> (2 deep levels) — features are tokenized, then passed through shifted MLPs</a:t>
-            </a:r>
-          </a:p>
-          <a:p>
-            <a:pPr>
-              <a:spcAft>
-                <a:spcPts val="1000"/>
-              </a:spcAft>
-            </a:pPr>
-            <a:r>
-              <a:rPr sz="1600" b="1" i="0">
-                <a:solidFill>
-                  <a:srgbClr val="000000"/>
-                </a:solidFill>
-                <a:latin typeface="Calibri"/>
-              </a:rPr>
-              <a:t>Skip connections</a:t>
-            </a:r>
-            <a:r>
-              <a:rPr sz="1600" b="0" i="0">
-                <a:solidFill>
-                  <a:srgbClr val="000000"/>
-                </a:solidFill>
-                <a:latin typeface="Calibri"/>
-              </a:rPr>
-              <a:t> join matching encoder and decoder levels</a:t>
-            </a:r>
-          </a:p>
-          <a:p>
-            <a:pPr>
-              <a:spcAft>
-                <a:spcPts val="1000"/>
-              </a:spcAft>
-            </a:pPr>
-          </a:p>
-          <a:p>
-            <a:pPr>
-              <a:spcAft>
-                <a:spcPts val="1000"/>
-              </a:spcAft>
-            </a:pPr>
-            <a:r>
-              <a:rPr sz="1600" b="1" i="0">
-                <a:solidFill>
-                  <a:srgbClr val="000000"/>
-                </a:solidFill>
-                <a:latin typeface="Calibri"/>
-              </a:rPr>
-              <a:t>Why MLPs?</a:t>
-            </a:r>
-            <a:r>
-              <a:rPr sz="1600" b="0" i="0">
-                <a:solidFill>
-                  <a:srgbClr val="000000"/>
-                </a:solidFill>
-                <a:latin typeface="Calibri"/>
-              </a:rPr>
-              <a:t> Self-attention costs O(n²) in the number of tokens. MLPs are plain matrix multiplies — far cheaper.</a:t>
-            </a:r>
-          </a:p>
-          <a:p>
-            <a:pPr>
-              <a:spcAft>
-                <a:spcPts val="1000"/>
-              </a:spcAft>
-            </a:pPr>
-            <a:r>
-              <a:rPr sz="1600" b="1" i="0">
-                <a:solidFill>
-                  <a:srgbClr val="000000"/>
-                </a:solidFill>
-                <a:latin typeface="Calibri"/>
-              </a:rPr>
-              <a:t>The catch:</a:t>
-            </a:r>
-            <a:r>
-              <a:rPr sz="1600" b="0" i="0">
-                <a:solidFill>
-                  <a:srgbClr val="000000"/>
-                </a:solidFill>
-                <a:latin typeface="Calibri"/>
-              </a:rPr>
-              <a:t> an MLP is spatially blind. It has no notion of "adjacent pixel".</a:t>
-            </a:r>
-          </a:p>
-        </p:txBody>
-      </p:sp>
-      <p:sp>
-        <p:nvSpPr>
-          <p:cNvPr id="4" name="TextBox 3"/>
-          <p:cNvSpPr txBox="1"/>
-          <p:nvPr/>
-        </p:nvSpPr>
-        <p:spPr>
-          <a:xfrm>
-            <a:off x="548640" y="6199632"/>
-            <a:ext cx="11094415" cy="457200"/>
-          </a:xfrm>
-          <a:prstGeom prst="rect">
-            <a:avLst/>
-          </a:prstGeom>
-          <a:noFill/>
-        </p:spPr>
-        <p:txBody>
-          <a:bodyPr wrap="square">
-            <a:spAutoFit/>
-          </a:bodyPr>
-          <a:lstStyle/>
-          <a:p>
-            <a:r>
-              <a:rPr sz="1200" b="0" i="1">
-                <a:solidFill>
-                  <a:srgbClr val="555555"/>
-                </a:solidFill>
-                <a:latin typeface="Calibri"/>
-              </a:rPr>
-              <a:t>Architecture figure: insert unext/imgs/unext.png from the official repository here.</a:t>
-            </a:r>
-          </a:p>
-        </p:txBody>
-      </p:sp>
-    </p:spTree>
-  </p:cSld>
-  <p:clrMapOvr>
-    <a:masterClrMapping/>
-  </p:clrMapOvr>
-</p:sld>
-</file>
-
-<file path=ppt/slides/slide4.xml><?xml version="1.0" encoding="utf-8"?>
-<p:sld xmlns:a="http://schemas.openxmlformats.org/drawingml/2006/main" xmlns:p="http://schemas.openxmlformats.org/presentationml/2006/main" xmlns:r="http://schemas.openxmlformats.org/officeDocument/2006/relationships">
-  <p:cSld>
-    <p:bg>
-      <p:bgPr>
-        <a:solidFill>
-          <a:srgbClr val="FFFFFF"/>
-        </a:solidFill>
-        <a:effectLst/>
-      </p:bgPr>
-    </p:bg>
-    <p:spTree>
-      <p:nvGrpSpPr>
-        <p:cNvPr id="1" name=""/>
-        <p:cNvGrpSpPr/>
-        <p:nvPr/>
-      </p:nvGrpSpPr>
-      <p:grpSpPr/>
-      <p:sp>
-        <p:nvSpPr>
-          <p:cNvPr id="2" name="TextBox 1"/>
-          <p:cNvSpPr txBox="1"/>
-          <p:nvPr/>
-        </p:nvSpPr>
-        <p:spPr>
-          <a:xfrm>
-            <a:off x="548640" y="320040"/>
-            <a:ext cx="11094415" cy="822960"/>
-          </a:xfrm>
-          <a:prstGeom prst="rect">
-            <a:avLst/>
-          </a:prstGeom>
-          <a:noFill/>
-        </p:spPr>
-        <p:txBody>
-          <a:bodyPr wrap="square">
-            <a:spAutoFit/>
-          </a:bodyPr>
-          <a:lstStyle/>
-          <a:p>
-            <a:r>
-              <a:rPr sz="3000" b="1" i="0">
-                <a:solidFill>
-                  <a:srgbClr val="000000"/>
-                </a:solidFill>
-                <a:latin typeface="Calibri"/>
-              </a:rPr>
-              <a:t>The key trick: shifted MLPs</a:t>
-            </a:r>
-          </a:p>
-          <a:p>
-            <a:r>
-              <a:rPr sz="1400" b="0" i="1">
-                <a:solidFill>
-                  <a:srgbClr val="555555"/>
-                </a:solidFill>
-                <a:latin typeface="Calibri"/>
-              </a:rPr>
-              <a:t>How UNeXt gives an MLP a sense of locality — for free</a:t>
-            </a:r>
-          </a:p>
-        </p:txBody>
-      </p:sp>
-      <p:sp>
-        <p:nvSpPr>
-          <p:cNvPr id="3" name="TextBox 2"/>
-          <p:cNvSpPr txBox="1"/>
-          <p:nvPr/>
-        </p:nvSpPr>
-        <p:spPr>
-          <a:xfrm>
-            <a:off x="548640" y="1463040"/>
-            <a:ext cx="11094415" cy="4937760"/>
-          </a:xfrm>
-          <a:prstGeom prst="rect">
-            <a:avLst/>
-          </a:prstGeom>
-          <a:noFill/>
-        </p:spPr>
-        <p:txBody>
-          <a:bodyPr wrap="square">
-            <a:spAutoFit/>
-          </a:bodyPr>
-          <a:lstStyle/>
-          <a:p>
-            <a:pPr>
-              <a:spcAft>
-                <a:spcPts val="1000"/>
-              </a:spcAft>
-            </a:pPr>
-            <a:r>
               <a:rPr sz="1500" b="0" i="0">
                 <a:solidFill>
                   <a:srgbClr val="000000"/>
@@ -6571,15 +6835,39 @@
                 <a:tableStyleId>{5C22544A-7EE6-4342-B048-85BDC9FD1C3A}</a:tableStyleId>
               </a:tblPr>
               <a:tblGrid>
-                <a:gridCol w="3698138"/>
-                <a:gridCol w="2465425"/>
-                <a:gridCol w="2465425"/>
-                <a:gridCol w="2465425"/>
+                <a:gridCol w="3698138">
+                  <a:extLst>
+                    <a:ext uri="{9D8B030D-6E8A-4147-A177-3AD203B41FA5}">
+                      <a16:colId xmlns:a16="http://schemas.microsoft.com/office/drawing/2014/main" val="20000"/>
+                    </a:ext>
+                  </a:extLst>
+                </a:gridCol>
+                <a:gridCol w="2465425">
+                  <a:extLst>
+                    <a:ext uri="{9D8B030D-6E8A-4147-A177-3AD203B41FA5}">
+                      <a16:colId xmlns:a16="http://schemas.microsoft.com/office/drawing/2014/main" val="20001"/>
+                    </a:ext>
+                  </a:extLst>
+                </a:gridCol>
+                <a:gridCol w="2465425">
+                  <a:extLst>
+                    <a:ext uri="{9D8B030D-6E8A-4147-A177-3AD203B41FA5}">
+                      <a16:colId xmlns:a16="http://schemas.microsoft.com/office/drawing/2014/main" val="20002"/>
+                    </a:ext>
+                  </a:extLst>
+                </a:gridCol>
+                <a:gridCol w="2465425">
+                  <a:extLst>
+                    <a:ext uri="{9D8B030D-6E8A-4147-A177-3AD203B41FA5}">
+                      <a16:colId xmlns:a16="http://schemas.microsoft.com/office/drawing/2014/main" val="20003"/>
+                    </a:ext>
+                  </a:extLst>
+                </a:gridCol>
               </a:tblGrid>
               <a:tr h="438912">
                 <a:tc>
                   <a:txBody>
-                    <a:bodyPr wrap="square"/>
+                    <a:bodyPr/>
                     <a:lstStyle/>
                     <a:p>
                       <a:pPr algn="l"/>
@@ -6602,7 +6890,7 @@
                 </a:tc>
                 <a:tc>
                   <a:txBody>
-                    <a:bodyPr wrap="square"/>
+                    <a:bodyPr/>
                     <a:lstStyle/>
                     <a:p>
                       <a:pPr algn="ctr"/>
@@ -6625,7 +6913,7 @@
                 </a:tc>
                 <a:tc>
                   <a:txBody>
-                    <a:bodyPr wrap="square"/>
+                    <a:bodyPr/>
                     <a:lstStyle/>
                     <a:p>
                       <a:pPr algn="ctr"/>
@@ -6648,7 +6936,7 @@
                 </a:tc>
                 <a:tc>
                   <a:txBody>
-                    <a:bodyPr wrap="square"/>
+                    <a:bodyPr/>
                     <a:lstStyle/>
                     <a:p>
                       <a:pPr algn="ctr"/>
@@ -6669,11 +6957,16 @@
                     </a:solidFill>
                   </a:tcPr>
                 </a:tc>
+                <a:extLst>
+                  <a:ext uri="{0D108BD9-81ED-4DB2-BD59-A6C34878D82A}">
+                    <a16:rowId xmlns:a16="http://schemas.microsoft.com/office/drawing/2014/main" val="10000"/>
+                  </a:ext>
+                </a:extLst>
               </a:tr>
               <a:tr h="438912">
                 <a:tc>
                   <a:txBody>
-                    <a:bodyPr wrap="square"/>
+                    <a:bodyPr/>
                     <a:lstStyle/>
                     <a:p>
                       <a:pPr algn="l"/>
@@ -6696,7 +6989,7 @@
                 </a:tc>
                 <a:tc>
                   <a:txBody>
-                    <a:bodyPr wrap="square"/>
+                    <a:bodyPr/>
                     <a:lstStyle/>
                     <a:p>
                       <a:pPr algn="ctr"/>
@@ -6719,7 +7012,7 @@
                 </a:tc>
                 <a:tc>
                   <a:txBody>
-                    <a:bodyPr wrap="square"/>
+                    <a:bodyPr/>
                     <a:lstStyle/>
                     <a:p>
                       <a:pPr algn="ctr"/>
@@ -6742,7 +7035,7 @@
                 </a:tc>
                 <a:tc>
                   <a:txBody>
-                    <a:bodyPr wrap="square"/>
+                    <a:bodyPr/>
                     <a:lstStyle/>
                     <a:p>
                       <a:pPr algn="ctr"/>
@@ -6763,11 +7056,16 @@
                     </a:solidFill>
                   </a:tcPr>
                 </a:tc>
+                <a:extLst>
+                  <a:ext uri="{0D108BD9-81ED-4DB2-BD59-A6C34878D82A}">
+                    <a16:rowId xmlns:a16="http://schemas.microsoft.com/office/drawing/2014/main" val="10001"/>
+                  </a:ext>
+                </a:extLst>
               </a:tr>
               <a:tr h="438912">
                 <a:tc>
                   <a:txBody>
-                    <a:bodyPr wrap="square"/>
+                    <a:bodyPr/>
                     <a:lstStyle/>
                     <a:p>
                       <a:pPr algn="l"/>
@@ -6790,7 +7088,7 @@
                 </a:tc>
                 <a:tc>
                   <a:txBody>
-                    <a:bodyPr wrap="square"/>
+                    <a:bodyPr/>
                     <a:lstStyle/>
                     <a:p>
                       <a:pPr algn="ctr"/>
@@ -6813,7 +7111,7 @@
                 </a:tc>
                 <a:tc>
                   <a:txBody>
-                    <a:bodyPr wrap="square"/>
+                    <a:bodyPr/>
                     <a:lstStyle/>
                     <a:p>
                       <a:pPr algn="ctr"/>
@@ -6836,7 +7134,7 @@
                 </a:tc>
                 <a:tc>
                   <a:txBody>
-                    <a:bodyPr wrap="square"/>
+                    <a:bodyPr/>
                     <a:lstStyle/>
                     <a:p>
                       <a:pPr algn="ctr"/>
@@ -6857,11 +7155,16 @@
                     </a:solidFill>
                   </a:tcPr>
                 </a:tc>
+                <a:extLst>
+                  <a:ext uri="{0D108BD9-81ED-4DB2-BD59-A6C34878D82A}">
+                    <a16:rowId xmlns:a16="http://schemas.microsoft.com/office/drawing/2014/main" val="10002"/>
+                  </a:ext>
+                </a:extLst>
               </a:tr>
               <a:tr h="438912">
                 <a:tc>
                   <a:txBody>
-                    <a:bodyPr wrap="square"/>
+                    <a:bodyPr/>
                     <a:lstStyle/>
                     <a:p>
                       <a:pPr algn="l"/>
@@ -6884,7 +7187,7 @@
                 </a:tc>
                 <a:tc>
                   <a:txBody>
-                    <a:bodyPr wrap="square"/>
+                    <a:bodyPr/>
                     <a:lstStyle/>
                     <a:p>
                       <a:pPr algn="ctr"/>
@@ -6907,7 +7210,7 @@
                 </a:tc>
                 <a:tc>
                   <a:txBody>
-                    <a:bodyPr wrap="square"/>
+                    <a:bodyPr/>
                     <a:lstStyle/>
                     <a:p>
                       <a:pPr algn="ctr"/>
@@ -6930,7 +7233,7 @@
                 </a:tc>
                 <a:tc>
                   <a:txBody>
-                    <a:bodyPr wrap="square"/>
+                    <a:bodyPr/>
                     <a:lstStyle/>
                     <a:p>
                       <a:pPr algn="ctr"/>
@@ -6951,11 +7254,16 @@
                     </a:solidFill>
                   </a:tcPr>
                 </a:tc>
+                <a:extLst>
+                  <a:ext uri="{0D108BD9-81ED-4DB2-BD59-A6C34878D82A}">
+                    <a16:rowId xmlns:a16="http://schemas.microsoft.com/office/drawing/2014/main" val="10003"/>
+                  </a:ext>
+                </a:extLst>
               </a:tr>
               <a:tr h="438912">
                 <a:tc>
                   <a:txBody>
-                    <a:bodyPr wrap="square"/>
+                    <a:bodyPr/>
                     <a:lstStyle/>
                     <a:p>
                       <a:pPr algn="l"/>
@@ -6978,7 +7286,7 @@
                 </a:tc>
                 <a:tc>
                   <a:txBody>
-                    <a:bodyPr wrap="square"/>
+                    <a:bodyPr/>
                     <a:lstStyle/>
                     <a:p>
                       <a:pPr algn="ctr"/>
@@ -7001,7 +7309,7 @@
                 </a:tc>
                 <a:tc>
                   <a:txBody>
-                    <a:bodyPr wrap="square"/>
+                    <a:bodyPr/>
                     <a:lstStyle/>
                     <a:p>
                       <a:pPr algn="ctr"/>
@@ -7024,7 +7332,7 @@
                 </a:tc>
                 <a:tc>
                   <a:txBody>
-                    <a:bodyPr wrap="square"/>
+                    <a:bodyPr/>
                     <a:lstStyle/>
                     <a:p>
                       <a:pPr algn="ctr"/>
@@ -7045,6 +7353,11 @@
                     </a:solidFill>
                   </a:tcPr>
                 </a:tc>
+                <a:extLst>
+                  <a:ext uri="{0D108BD9-81ED-4DB2-BD59-A6C34878D82A}">
+                    <a16:rowId xmlns:a16="http://schemas.microsoft.com/office/drawing/2014/main" val="10004"/>
+                  </a:ext>
+                </a:extLst>
               </a:tr>
             </a:tbl>
           </a:graphicData>
@@ -7093,7 +7406,7 @@
 </file>
 
 <file path=ppt/slides/slide5.xml><?xml version="1.0" encoding="utf-8"?>
-<p:sld xmlns:a="http://schemas.openxmlformats.org/drawingml/2006/main" xmlns:p="http://schemas.openxmlformats.org/presentationml/2006/main" xmlns:r="http://schemas.openxmlformats.org/officeDocument/2006/relationships">
+<p:sld xmlns:a="http://schemas.openxmlformats.org/drawingml/2006/main" xmlns:r="http://schemas.openxmlformats.org/officeDocument/2006/relationships" xmlns:p="http://schemas.openxmlformats.org/presentationml/2006/main">
   <p:cSld>
     <p:bg>
       <p:bgPr>
@@ -7109,7 +7422,14 @@
         <p:cNvGrpSpPr/>
         <p:nvPr/>
       </p:nvGrpSpPr>
-      <p:grpSpPr/>
+      <p:grpSpPr>
+        <a:xfrm>
+          <a:off x="0" y="0"/>
+          <a:ext cx="0" cy="0"/>
+          <a:chOff x="0" y="0"/>
+          <a:chExt cx="0" cy="0"/>
+        </a:xfrm>
+      </p:grpSpPr>
       <p:sp>
         <p:nvSpPr>
           <p:cNvPr id="2" name="TextBox 1"/>
@@ -7290,14 +7610,32 @@
                 <a:tableStyleId>{5C22544A-7EE6-4342-B048-85BDC9FD1C3A}</a:tableStyleId>
               </a:tblPr>
               <a:tblGrid>
-                <a:gridCol w="3840480"/>
-                <a:gridCol w="1920240"/>
-                <a:gridCol w="1920240"/>
+                <a:gridCol w="3840480">
+                  <a:extLst>
+                    <a:ext uri="{9D8B030D-6E8A-4147-A177-3AD203B41FA5}">
+                      <a16:colId xmlns:a16="http://schemas.microsoft.com/office/drawing/2014/main" val="20000"/>
+                    </a:ext>
+                  </a:extLst>
+                </a:gridCol>
+                <a:gridCol w="1920240">
+                  <a:extLst>
+                    <a:ext uri="{9D8B030D-6E8A-4147-A177-3AD203B41FA5}">
+                      <a16:colId xmlns:a16="http://schemas.microsoft.com/office/drawing/2014/main" val="20001"/>
+                    </a:ext>
+                  </a:extLst>
+                </a:gridCol>
+                <a:gridCol w="1920240">
+                  <a:extLst>
+                    <a:ext uri="{9D8B030D-6E8A-4147-A177-3AD203B41FA5}">
+                      <a16:colId xmlns:a16="http://schemas.microsoft.com/office/drawing/2014/main" val="20002"/>
+                    </a:ext>
+                  </a:extLst>
+                </a:gridCol>
               </a:tblGrid>
               <a:tr h="457200">
                 <a:tc>
                   <a:txBody>
-                    <a:bodyPr wrap="square"/>
+                    <a:bodyPr/>
                     <a:lstStyle/>
                     <a:p>
                       <a:pPr algn="l"/>
@@ -7320,7 +7658,7 @@
                 </a:tc>
                 <a:tc>
                   <a:txBody>
-                    <a:bodyPr wrap="square"/>
+                    <a:bodyPr/>
                     <a:lstStyle/>
                     <a:p>
                       <a:pPr algn="ctr"/>
@@ -7343,7 +7681,7 @@
                 </a:tc>
                 <a:tc>
                   <a:txBody>
-                    <a:bodyPr wrap="square"/>
+                    <a:bodyPr/>
                     <a:lstStyle/>
                     <a:p>
                       <a:pPr algn="ctr"/>
@@ -7364,11 +7702,16 @@
                     </a:solidFill>
                   </a:tcPr>
                 </a:tc>
+                <a:extLst>
+                  <a:ext uri="{0D108BD9-81ED-4DB2-BD59-A6C34878D82A}">
+                    <a16:rowId xmlns:a16="http://schemas.microsoft.com/office/drawing/2014/main" val="10000"/>
+                  </a:ext>
+                </a:extLst>
               </a:tr>
               <a:tr h="457200">
                 <a:tc>
                   <a:txBody>
-                    <a:bodyPr wrap="square"/>
+                    <a:bodyPr/>
                     <a:lstStyle/>
                     <a:p>
                       <a:pPr algn="l"/>
@@ -7391,7 +7734,7 @@
                 </a:tc>
                 <a:tc>
                   <a:txBody>
-                    <a:bodyPr wrap="square"/>
+                    <a:bodyPr/>
                     <a:lstStyle/>
                     <a:p>
                       <a:pPr algn="ctr"/>
@@ -7414,7 +7757,7 @@
                 </a:tc>
                 <a:tc>
                   <a:txBody>
-                    <a:bodyPr wrap="square"/>
+                    <a:bodyPr/>
                     <a:lstStyle/>
                     <a:p>
                       <a:pPr algn="ctr"/>
@@ -7435,11 +7778,16 @@
                     </a:solidFill>
                   </a:tcPr>
                 </a:tc>
+                <a:extLst>
+                  <a:ext uri="{0D108BD9-81ED-4DB2-BD59-A6C34878D82A}">
+                    <a16:rowId xmlns:a16="http://schemas.microsoft.com/office/drawing/2014/main" val="10001"/>
+                  </a:ext>
+                </a:extLst>
               </a:tr>
               <a:tr h="457200">
                 <a:tc>
                   <a:txBody>
-                    <a:bodyPr wrap="square"/>
+                    <a:bodyPr/>
                     <a:lstStyle/>
                     <a:p>
                       <a:pPr algn="l"/>
@@ -7462,7 +7810,7 @@
                 </a:tc>
                 <a:tc>
                   <a:txBody>
-                    <a:bodyPr wrap="square"/>
+                    <a:bodyPr/>
                     <a:lstStyle/>
                     <a:p>
                       <a:pPr algn="ctr"/>
@@ -7485,7 +7833,7 @@
                 </a:tc>
                 <a:tc>
                   <a:txBody>
-                    <a:bodyPr wrap="square"/>
+                    <a:bodyPr/>
                     <a:lstStyle/>
                     <a:p>
                       <a:pPr algn="ctr"/>
@@ -7506,11 +7854,16 @@
                     </a:solidFill>
                   </a:tcPr>
                 </a:tc>
+                <a:extLst>
+                  <a:ext uri="{0D108BD9-81ED-4DB2-BD59-A6C34878D82A}">
+                    <a16:rowId xmlns:a16="http://schemas.microsoft.com/office/drawing/2014/main" val="10002"/>
+                  </a:ext>
+                </a:extLst>
               </a:tr>
               <a:tr h="457200">
                 <a:tc>
                   <a:txBody>
-                    <a:bodyPr wrap="square"/>
+                    <a:bodyPr/>
                     <a:lstStyle/>
                     <a:p>
                       <a:pPr algn="l"/>
@@ -7533,7 +7886,7 @@
                 </a:tc>
                 <a:tc>
                   <a:txBody>
-                    <a:bodyPr wrap="square"/>
+                    <a:bodyPr/>
                     <a:lstStyle/>
                     <a:p>
                       <a:pPr algn="ctr"/>
@@ -7556,7 +7909,7 @@
                 </a:tc>
                 <a:tc>
                   <a:txBody>
-                    <a:bodyPr wrap="square"/>
+                    <a:bodyPr/>
                     <a:lstStyle/>
                     <a:p>
                       <a:pPr algn="ctr"/>
@@ -7577,6 +7930,11 @@
                     </a:solidFill>
                   </a:tcPr>
                 </a:tc>
+                <a:extLst>
+                  <a:ext uri="{0D108BD9-81ED-4DB2-BD59-A6C34878D82A}">
+                    <a16:rowId xmlns:a16="http://schemas.microsoft.com/office/drawing/2014/main" val="10003"/>
+                  </a:ext>
+                </a:extLst>
               </a:tr>
             </a:tbl>
           </a:graphicData>
@@ -7625,7 +7983,7 @@
 </file>
 
 <file path=ppt/slides/slide6.xml><?xml version="1.0" encoding="utf-8"?>
-<p:sld xmlns:a="http://schemas.openxmlformats.org/drawingml/2006/main" xmlns:p="http://schemas.openxmlformats.org/presentationml/2006/main" xmlns:r="http://schemas.openxmlformats.org/officeDocument/2006/relationships">
+<p:sld xmlns:a="http://schemas.openxmlformats.org/drawingml/2006/main" xmlns:r="http://schemas.openxmlformats.org/officeDocument/2006/relationships" xmlns:p="http://schemas.openxmlformats.org/presentationml/2006/main">
   <p:cSld>
     <p:bg>
       <p:bgPr>
@@ -7641,7 +7999,14 @@
         <p:cNvGrpSpPr/>
         <p:nvPr/>
       </p:nvGrpSpPr>
-      <p:grpSpPr/>
+      <p:grpSpPr>
+        <a:xfrm>
+          <a:off x="0" y="0"/>
+          <a:ext cx="0" cy="0"/>
+          <a:chOff x="0" y="0"/>
+          <a:chExt cx="0" cy="0"/>
+        </a:xfrm>
+      </p:grpSpPr>
       <p:sp>
         <p:nvSpPr>
           <p:cNvPr id="2" name="TextBox 1"/>
@@ -7828,7 +8193,7 @@
           <p:nvPr/>
         </p:nvPicPr>
         <p:blipFill>
-          <a:blip r:embed="rId2"/>
+          <a:blip r:embed="rId3"/>
           <a:stretch>
             <a:fillRect/>
           </a:stretch>
@@ -7886,7 +8251,7 @@
 </file>
 
 <file path=ppt/slides/slide7.xml><?xml version="1.0" encoding="utf-8"?>
-<p:sld xmlns:a="http://schemas.openxmlformats.org/drawingml/2006/main" xmlns:p="http://schemas.openxmlformats.org/presentationml/2006/main" xmlns:r="http://schemas.openxmlformats.org/officeDocument/2006/relationships">
+<p:sld xmlns:a="http://schemas.openxmlformats.org/drawingml/2006/main" xmlns:r="http://schemas.openxmlformats.org/officeDocument/2006/relationships" xmlns:p="http://schemas.openxmlformats.org/presentationml/2006/main">
   <p:cSld>
     <p:bg>
       <p:bgPr>
@@ -7902,7 +8267,14 @@
         <p:cNvGrpSpPr/>
         <p:nvPr/>
       </p:nvGrpSpPr>
-      <p:grpSpPr/>
+      <p:grpSpPr>
+        <a:xfrm>
+          <a:off x="0" y="0"/>
+          <a:ext cx="0" cy="0"/>
+          <a:chOff x="0" y="0"/>
+          <a:chExt cx="0" cy="0"/>
+        </a:xfrm>
+      </p:grpSpPr>
       <p:sp>
         <p:nvSpPr>
           <p:cNvPr id="2" name="TextBox 1"/>
@@ -7956,15 +8328,39 @@
                 <a:tableStyleId>{5C22544A-7EE6-4342-B048-85BDC9FD1C3A}</a:tableStyleId>
               </a:tblPr>
               <a:tblGrid>
-                <a:gridCol w="560323"/>
-                <a:gridCol w="3586073"/>
-                <a:gridCol w="2465425"/>
-                <a:gridCol w="4482591"/>
+                <a:gridCol w="560323">
+                  <a:extLst>
+                    <a:ext uri="{9D8B030D-6E8A-4147-A177-3AD203B41FA5}">
+                      <a16:colId xmlns:a16="http://schemas.microsoft.com/office/drawing/2014/main" val="20000"/>
+                    </a:ext>
+                  </a:extLst>
+                </a:gridCol>
+                <a:gridCol w="3586073">
+                  <a:extLst>
+                    <a:ext uri="{9D8B030D-6E8A-4147-A177-3AD203B41FA5}">
+                      <a16:colId xmlns:a16="http://schemas.microsoft.com/office/drawing/2014/main" val="20001"/>
+                    </a:ext>
+                  </a:extLst>
+                </a:gridCol>
+                <a:gridCol w="2465425">
+                  <a:extLst>
+                    <a:ext uri="{9D8B030D-6E8A-4147-A177-3AD203B41FA5}">
+                      <a16:colId xmlns:a16="http://schemas.microsoft.com/office/drawing/2014/main" val="20002"/>
+                    </a:ext>
+                  </a:extLst>
+                </a:gridCol>
+                <a:gridCol w="4482591">
+                  <a:extLst>
+                    <a:ext uri="{9D8B030D-6E8A-4147-A177-3AD203B41FA5}">
+                      <a16:colId xmlns:a16="http://schemas.microsoft.com/office/drawing/2014/main" val="20003"/>
+                    </a:ext>
+                  </a:extLst>
+                </a:gridCol>
               </a:tblGrid>
               <a:tr h="487680">
                 <a:tc>
                   <a:txBody>
-                    <a:bodyPr wrap="square"/>
+                    <a:bodyPr/>
                     <a:lstStyle/>
                     <a:p>
                       <a:pPr algn="l"/>
@@ -7987,7 +8383,7 @@
                 </a:tc>
                 <a:tc>
                   <a:txBody>
-                    <a:bodyPr wrap="square"/>
+                    <a:bodyPr/>
                     <a:lstStyle/>
                     <a:p>
                       <a:pPr algn="ctr"/>
@@ -8010,7 +8406,7 @@
                 </a:tc>
                 <a:tc>
                   <a:txBody>
-                    <a:bodyPr wrap="square"/>
+                    <a:bodyPr/>
                     <a:lstStyle/>
                     <a:p>
                       <a:pPr algn="ctr"/>
@@ -8033,7 +8429,7 @@
                 </a:tc>
                 <a:tc>
                   <a:txBody>
-                    <a:bodyPr wrap="square"/>
+                    <a:bodyPr/>
                     <a:lstStyle/>
                     <a:p>
                       <a:pPr algn="ctr"/>
@@ -8054,11 +8450,16 @@
                     </a:solidFill>
                   </a:tcPr>
                 </a:tc>
+                <a:extLst>
+                  <a:ext uri="{0D108BD9-81ED-4DB2-BD59-A6C34878D82A}">
+                    <a16:rowId xmlns:a16="http://schemas.microsoft.com/office/drawing/2014/main" val="10000"/>
+                  </a:ext>
+                </a:extLst>
               </a:tr>
               <a:tr h="487680">
                 <a:tc>
                   <a:txBody>
-                    <a:bodyPr wrap="square"/>
+                    <a:bodyPr/>
                     <a:lstStyle/>
                     <a:p>
                       <a:pPr algn="l"/>
@@ -8081,7 +8482,7 @@
                 </a:tc>
                 <a:tc>
                   <a:txBody>
-                    <a:bodyPr wrap="square"/>
+                    <a:bodyPr/>
                     <a:lstStyle/>
                     <a:p>
                       <a:pPr algn="ctr"/>
@@ -8104,7 +8505,7 @@
                 </a:tc>
                 <a:tc>
                   <a:txBody>
-                    <a:bodyPr wrap="square"/>
+                    <a:bodyPr/>
                     <a:lstStyle/>
                     <a:p>
                       <a:pPr algn="ctr"/>
@@ -8127,7 +8528,7 @@
                 </a:tc>
                 <a:tc>
                   <a:txBody>
-                    <a:bodyPr wrap="square"/>
+                    <a:bodyPr/>
                     <a:lstStyle/>
                     <a:p>
                       <a:pPr algn="ctr"/>
@@ -8148,11 +8549,16 @@
                     </a:solidFill>
                   </a:tcPr>
                 </a:tc>
+                <a:extLst>
+                  <a:ext uri="{0D108BD9-81ED-4DB2-BD59-A6C34878D82A}">
+                    <a16:rowId xmlns:a16="http://schemas.microsoft.com/office/drawing/2014/main" val="10001"/>
+                  </a:ext>
+                </a:extLst>
               </a:tr>
               <a:tr h="487680">
                 <a:tc>
                   <a:txBody>
-                    <a:bodyPr wrap="square"/>
+                    <a:bodyPr/>
                     <a:lstStyle/>
                     <a:p>
                       <a:pPr algn="l"/>
@@ -8175,7 +8581,7 @@
                 </a:tc>
                 <a:tc>
                   <a:txBody>
-                    <a:bodyPr wrap="square"/>
+                    <a:bodyPr/>
                     <a:lstStyle/>
                     <a:p>
                       <a:pPr algn="ctr"/>
@@ -8198,7 +8604,7 @@
                 </a:tc>
                 <a:tc>
                   <a:txBody>
-                    <a:bodyPr wrap="square"/>
+                    <a:bodyPr/>
                     <a:lstStyle/>
                     <a:p>
                       <a:pPr algn="ctr"/>
@@ -8221,7 +8627,7 @@
                 </a:tc>
                 <a:tc>
                   <a:txBody>
-                    <a:bodyPr wrap="square"/>
+                    <a:bodyPr/>
                     <a:lstStyle/>
                     <a:p>
                       <a:pPr algn="ctr"/>
@@ -8242,11 +8648,16 @@
                     </a:solidFill>
                   </a:tcPr>
                 </a:tc>
+                <a:extLst>
+                  <a:ext uri="{0D108BD9-81ED-4DB2-BD59-A6C34878D82A}">
+                    <a16:rowId xmlns:a16="http://schemas.microsoft.com/office/drawing/2014/main" val="10002"/>
+                  </a:ext>
+                </a:extLst>
               </a:tr>
               <a:tr h="487680">
                 <a:tc>
                   <a:txBody>
-                    <a:bodyPr wrap="square"/>
+                    <a:bodyPr/>
                     <a:lstStyle/>
                     <a:p>
                       <a:pPr algn="l"/>
@@ -8269,7 +8680,7 @@
                 </a:tc>
                 <a:tc>
                   <a:txBody>
-                    <a:bodyPr wrap="square"/>
+                    <a:bodyPr/>
                     <a:lstStyle/>
                     <a:p>
                       <a:pPr algn="ctr"/>
@@ -8292,7 +8703,7 @@
                 </a:tc>
                 <a:tc>
                   <a:txBody>
-                    <a:bodyPr wrap="square"/>
+                    <a:bodyPr/>
                     <a:lstStyle/>
                     <a:p>
                       <a:pPr algn="ctr"/>
@@ -8315,7 +8726,7 @@
                 </a:tc>
                 <a:tc>
                   <a:txBody>
-                    <a:bodyPr wrap="square"/>
+                    <a:bodyPr/>
                     <a:lstStyle/>
                     <a:p>
                       <a:pPr algn="ctr"/>
@@ -8336,11 +8747,16 @@
                     </a:solidFill>
                   </a:tcPr>
                 </a:tc>
+                <a:extLst>
+                  <a:ext uri="{0D108BD9-81ED-4DB2-BD59-A6C34878D82A}">
+                    <a16:rowId xmlns:a16="http://schemas.microsoft.com/office/drawing/2014/main" val="10003"/>
+                  </a:ext>
+                </a:extLst>
               </a:tr>
               <a:tr h="487680">
                 <a:tc>
                   <a:txBody>
-                    <a:bodyPr wrap="square"/>
+                    <a:bodyPr/>
                     <a:lstStyle/>
                     <a:p>
                       <a:pPr algn="l"/>
@@ -8363,7 +8779,7 @@
                 </a:tc>
                 <a:tc>
                   <a:txBody>
-                    <a:bodyPr wrap="square"/>
+                    <a:bodyPr/>
                     <a:lstStyle/>
                     <a:p>
                       <a:pPr algn="ctr"/>
@@ -8386,7 +8802,7 @@
                 </a:tc>
                 <a:tc>
                   <a:txBody>
-                    <a:bodyPr wrap="square"/>
+                    <a:bodyPr/>
                     <a:lstStyle/>
                     <a:p>
                       <a:pPr algn="ctr"/>
@@ -8409,7 +8825,7 @@
                 </a:tc>
                 <a:tc>
                   <a:txBody>
-                    <a:bodyPr wrap="square"/>
+                    <a:bodyPr/>
                     <a:lstStyle/>
                     <a:p>
                       <a:pPr algn="ctr"/>
@@ -8430,11 +8846,16 @@
                     </a:solidFill>
                   </a:tcPr>
                 </a:tc>
+                <a:extLst>
+                  <a:ext uri="{0D108BD9-81ED-4DB2-BD59-A6C34878D82A}">
+                    <a16:rowId xmlns:a16="http://schemas.microsoft.com/office/drawing/2014/main" val="10004"/>
+                  </a:ext>
+                </a:extLst>
               </a:tr>
               <a:tr h="487680">
                 <a:tc>
                   <a:txBody>
-                    <a:bodyPr wrap="square"/>
+                    <a:bodyPr/>
                     <a:lstStyle/>
                     <a:p>
                       <a:pPr algn="l"/>
@@ -8457,7 +8878,7 @@
                 </a:tc>
                 <a:tc>
                   <a:txBody>
-                    <a:bodyPr wrap="square"/>
+                    <a:bodyPr/>
                     <a:lstStyle/>
                     <a:p>
                       <a:pPr algn="ctr"/>
@@ -8480,7 +8901,7 @@
                 </a:tc>
                 <a:tc>
                   <a:txBody>
-                    <a:bodyPr wrap="square"/>
+                    <a:bodyPr/>
                     <a:lstStyle/>
                     <a:p>
                       <a:pPr algn="ctr"/>
@@ -8503,7 +8924,7 @@
                 </a:tc>
                 <a:tc>
                   <a:txBody>
-                    <a:bodyPr wrap="square"/>
+                    <a:bodyPr/>
                     <a:lstStyle/>
                     <a:p>
                       <a:pPr algn="ctr"/>
@@ -8524,6 +8945,11 @@
                     </a:solidFill>
                   </a:tcPr>
                 </a:tc>
+                <a:extLst>
+                  <a:ext uri="{0D108BD9-81ED-4DB2-BD59-A6C34878D82A}">
+                    <a16:rowId xmlns:a16="http://schemas.microsoft.com/office/drawing/2014/main" val="10005"/>
+                  </a:ext>
+                </a:extLst>
               </a:tr>
             </a:tbl>
           </a:graphicData>
@@ -8611,7 +9037,7 @@
 </file>
 
 <file path=ppt/slides/slide8.xml><?xml version="1.0" encoding="utf-8"?>
-<p:sld xmlns:a="http://schemas.openxmlformats.org/drawingml/2006/main" xmlns:p="http://schemas.openxmlformats.org/presentationml/2006/main" xmlns:r="http://schemas.openxmlformats.org/officeDocument/2006/relationships">
+<p:sld xmlns:a="http://schemas.openxmlformats.org/drawingml/2006/main" xmlns:r="http://schemas.openxmlformats.org/officeDocument/2006/relationships" xmlns:p="http://schemas.openxmlformats.org/presentationml/2006/main">
   <p:cSld>
     <p:bg>
       <p:bgPr>
@@ -8627,7 +9053,14 @@
         <p:cNvGrpSpPr/>
         <p:nvPr/>
       </p:nvGrpSpPr>
-      <p:grpSpPr/>
+      <p:grpSpPr>
+        <a:xfrm>
+          <a:off x="0" y="0"/>
+          <a:ext cx="0" cy="0"/>
+          <a:chOff x="0" y="0"/>
+          <a:chExt cx="0" cy="0"/>
+        </a:xfrm>
+      </p:grpSpPr>
       <p:sp>
         <p:nvSpPr>
           <p:cNvPr id="2" name="TextBox 1"/>
@@ -8823,7 +9256,7 @@
           <p:nvPr/>
         </p:nvPicPr>
         <p:blipFill>
-          <a:blip r:embed="rId2"/>
+          <a:blip r:embed="rId3"/>
           <a:stretch>
             <a:fillRect/>
           </a:stretch>
@@ -8847,7 +9280,7 @@
 </file>
 
 <file path=ppt/slides/slide9.xml><?xml version="1.0" encoding="utf-8"?>
-<p:sld xmlns:a="http://schemas.openxmlformats.org/drawingml/2006/main" xmlns:p="http://schemas.openxmlformats.org/presentationml/2006/main" xmlns:r="http://schemas.openxmlformats.org/officeDocument/2006/relationships">
+<p:sld xmlns:a="http://schemas.openxmlformats.org/drawingml/2006/main" xmlns:r="http://schemas.openxmlformats.org/officeDocument/2006/relationships" xmlns:p="http://schemas.openxmlformats.org/presentationml/2006/main">
   <p:cSld>
     <p:bg>
       <p:bgPr>
@@ -8863,7 +9296,14 @@
         <p:cNvGrpSpPr/>
         <p:nvPr/>
       </p:nvGrpSpPr>
-      <p:grpSpPr/>
+      <p:grpSpPr>
+        <a:xfrm>
+          <a:off x="0" y="0"/>
+          <a:ext cx="0" cy="0"/>
+          <a:chOff x="0" y="0"/>
+          <a:chExt cx="0" cy="0"/>
+        </a:xfrm>
+      </p:grpSpPr>
       <p:sp>
         <p:nvSpPr>
           <p:cNvPr id="2" name="TextBox 1"/>
@@ -8918,7 +9358,7 @@
           <p:nvPr/>
         </p:nvPicPr>
         <p:blipFill>
-          <a:blip r:embed="rId2"/>
+          <a:blip r:embed="rId3"/>
           <a:stretch>
             <a:fillRect/>
           </a:stretch>
@@ -8941,12 +9381,93 @@
         </p:nvSpPr>
         <p:spPr>
           <a:xfrm>
-            <a:off x="548640" y="4114800"/>
-            <a:ext cx="11094415" cy="2286000"/>
+            <a:off x="548640" y="5257799"/>
+            <a:ext cx="11094415" cy="1428161"/>
           </a:xfrm>
-          <a:prstGeom prst="rect">
+          <a:custGeom>
             <a:avLst/>
-          </a:prstGeom>
+            <a:gdLst>
+              <a:gd name="csX0" fmla="*/ 0 w 11094415"/>
+              <a:gd name="csY0" fmla="*/ 0 h 2286000"/>
+              <a:gd name="csX1" fmla="*/ 11094415 w 11094415"/>
+              <a:gd name="csY1" fmla="*/ 0 h 2286000"/>
+              <a:gd name="csX2" fmla="*/ 11094415 w 11094415"/>
+              <a:gd name="csY2" fmla="*/ 2286000 h 2286000"/>
+              <a:gd name="csX3" fmla="*/ 0 w 11094415"/>
+              <a:gd name="csY3" fmla="*/ 2286000 h 2286000"/>
+              <a:gd name="csX4" fmla="*/ 0 w 11094415"/>
+              <a:gd name="csY4" fmla="*/ 0 h 2286000"/>
+              <a:gd name="csX0" fmla="*/ 0 w 11094415"/>
+              <a:gd name="csY0" fmla="*/ 0 h 2286000"/>
+              <a:gd name="csX1" fmla="*/ 11094415 w 11094415"/>
+              <a:gd name="csY1" fmla="*/ 0 h 2286000"/>
+              <a:gd name="csX2" fmla="*/ 11009573 w 11094415"/>
+              <a:gd name="csY2" fmla="*/ 1362173 h 2286000"/>
+              <a:gd name="csX3" fmla="*/ 0 w 11094415"/>
+              <a:gd name="csY3" fmla="*/ 2286000 h 2286000"/>
+              <a:gd name="csX4" fmla="*/ 0 w 11094415"/>
+              <a:gd name="csY4" fmla="*/ 0 h 2286000"/>
+              <a:gd name="csX0" fmla="*/ 0 w 11094415"/>
+              <a:gd name="csY0" fmla="*/ 0 h 2286000"/>
+              <a:gd name="csX1" fmla="*/ 11094415 w 11094415"/>
+              <a:gd name="csY1" fmla="*/ 0 h 2286000"/>
+              <a:gd name="csX2" fmla="*/ 11075560 w 11094415"/>
+              <a:gd name="csY2" fmla="*/ 1428161 h 2286000"/>
+              <a:gd name="csX3" fmla="*/ 0 w 11094415"/>
+              <a:gd name="csY3" fmla="*/ 2286000 h 2286000"/>
+              <a:gd name="csX4" fmla="*/ 0 w 11094415"/>
+              <a:gd name="csY4" fmla="*/ 0 h 2286000"/>
+              <a:gd name="csX0" fmla="*/ 0 w 11094415"/>
+              <a:gd name="csY0" fmla="*/ 0 h 1428161"/>
+              <a:gd name="csX1" fmla="*/ 11094415 w 11094415"/>
+              <a:gd name="csY1" fmla="*/ 0 h 1428161"/>
+              <a:gd name="csX2" fmla="*/ 11075560 w 11094415"/>
+              <a:gd name="csY2" fmla="*/ 1428161 h 1428161"/>
+              <a:gd name="csX3" fmla="*/ 0 w 11094415"/>
+              <a:gd name="csY3" fmla="*/ 1428160 h 1428161"/>
+              <a:gd name="csX4" fmla="*/ 0 w 11094415"/>
+              <a:gd name="csY4" fmla="*/ 0 h 1428161"/>
+            </a:gdLst>
+            <a:ahLst/>
+            <a:cxnLst>
+              <a:cxn ang="0">
+                <a:pos x="csX0" y="csY0"/>
+              </a:cxn>
+              <a:cxn ang="0">
+                <a:pos x="csX1" y="csY1"/>
+              </a:cxn>
+              <a:cxn ang="0">
+                <a:pos x="csX2" y="csY2"/>
+              </a:cxn>
+              <a:cxn ang="0">
+                <a:pos x="csX3" y="csY3"/>
+              </a:cxn>
+              <a:cxn ang="0">
+                <a:pos x="csX4" y="csY4"/>
+              </a:cxn>
+            </a:cxnLst>
+            <a:rect l="l" t="t" r="r" b="b"/>
+            <a:pathLst>
+              <a:path w="11094415" h="1428161">
+                <a:moveTo>
+                  <a:pt x="0" y="0"/>
+                </a:moveTo>
+                <a:lnTo>
+                  <a:pt x="11094415" y="0"/>
+                </a:lnTo>
+                <a:lnTo>
+                  <a:pt x="11075560" y="1428161"/>
+                </a:lnTo>
+                <a:lnTo>
+                  <a:pt x="0" y="1428160"/>
+                </a:lnTo>
+                <a:lnTo>
+                  <a:pt x="0" y="0"/>
+                </a:lnTo>
+                <a:close/>
+              </a:path>
+            </a:pathLst>
+          </a:custGeom>
           <a:noFill/>
         </p:spPr>
         <p:txBody>
@@ -8961,16 +9482,34 @@
               </a:spcAft>
             </a:pPr>
             <a:r>
-              <a:rPr sz="1400" b="1" i="0">
-                <a:solidFill>
-                  <a:srgbClr val="000000"/>
-                </a:solidFill>
-                <a:latin typeface="Calibri"/>
-              </a:rPr>
-              <a:t>Mean IoU 0.5931 → 0.6328 (+0.040).</a:t>
-            </a:r>
-            <a:r>
-              <a:rPr sz="1400" b="0" i="0">
+              <a:rPr sz="1400" b="1" i="0" dirty="0">
+                <a:solidFill>
+                  <a:srgbClr val="000000"/>
+                </a:solidFill>
+                <a:latin typeface="Calibri"/>
+              </a:rPr>
+              <a:t>Mean </a:t>
+            </a:r>
+            <a:r>
+              <a:rPr sz="1400" b="1" i="0" dirty="0" err="1">
+                <a:solidFill>
+                  <a:srgbClr val="000000"/>
+                </a:solidFill>
+                <a:latin typeface="Calibri"/>
+              </a:rPr>
+              <a:t>IoU</a:t>
+            </a:r>
+            <a:r>
+              <a:rPr sz="1400" b="1" i="0" dirty="0">
+                <a:solidFill>
+                  <a:srgbClr val="000000"/>
+                </a:solidFill>
+                <a:latin typeface="Calibri"/>
+              </a:rPr>
+              <a:t> 0.5931 → 0.6328 (+0.040).</a:t>
+            </a:r>
+            <a:r>
+              <a:rPr sz="1400" b="0" i="0" dirty="0">
                 <a:solidFill>
                   <a:srgbClr val="000000"/>
                 </a:solidFill>
@@ -8986,7 +9525,7 @@
               </a:spcAft>
             </a:pPr>
             <a:r>
-              <a:rPr sz="1400" b="0" i="0">
+              <a:rPr sz="1400" b="0" i="0" dirty="0">
                 <a:solidFill>
                   <a:srgbClr val="000000"/>
                 </a:solidFill>
@@ -8995,7 +9534,7 @@
               <a:t>Overfitting gap cut </a:t>
             </a:r>
             <a:r>
-              <a:rPr sz="1400" b="1" i="0">
+              <a:rPr sz="1400" b="1" i="0" dirty="0">
                 <a:solidFill>
                   <a:srgbClr val="000000"/>
                 </a:solidFill>
@@ -9004,7 +9543,7 @@
               <a:t>60%</a:t>
             </a:r>
             <a:r>
-              <a:rPr sz="1400" b="0" i="0">
+              <a:rPr sz="1400" b="0" i="0" dirty="0">
                 <a:solidFill>
                   <a:srgbClr val="000000"/>
                 </a:solidFill>
@@ -9013,7 +9552,7 @@
               <a:t>; Dice variance collapsed </a:t>
             </a:r>
             <a:r>
-              <a:rPr sz="1400" b="1" i="0">
+              <a:rPr sz="1400" b="1" i="0" dirty="0">
                 <a:solidFill>
                   <a:srgbClr val="000000"/>
                 </a:solidFill>
@@ -9022,7 +9561,7 @@
               <a:t>15×</a:t>
             </a:r>
             <a:r>
-              <a:rPr sz="1400" b="0" i="0">
+              <a:rPr sz="1400" b="0" i="0" dirty="0">
                 <a:solidFill>
                   <a:srgbClr val="000000"/>
                 </a:solidFill>
@@ -9038,7 +9577,7 @@
               </a:spcAft>
             </a:pPr>
             <a:r>
-              <a:rPr sz="1400" b="1" i="0">
+              <a:rPr sz="1400" b="1" i="0" dirty="0">
                 <a:solidFill>
                   <a:srgbClr val="000000"/>
                 </a:solidFill>
@@ -9047,7 +9586,7 @@
               <a:t>Honest caveat:</a:t>
             </a:r>
             <a:r>
-              <a:rPr sz="1400" b="0" i="0">
+              <a:rPr sz="1400" b="0" i="0" dirty="0">
                 <a:solidFill>
                   <a:srgbClr val="000000"/>
                 </a:solidFill>
@@ -9056,7 +9595,7 @@
               <a:t> at a *matched* 100-epoch budget augmentation gives no gain. It does not converge faster — it </a:t>
             </a:r>
             <a:r>
-              <a:rPr sz="1400" b="1" i="0">
+              <a:rPr sz="1400" b="1" i="0" dirty="0">
                 <a:solidFill>
                   <a:srgbClr val="000000"/>
                 </a:solidFill>
@@ -9065,7 +9604,7 @@
               <a:t>removes the ceiling</a:t>
             </a:r>
             <a:r>
-              <a:rPr sz="1400" b="0" i="0">
+              <a:rPr sz="1400" b="0" i="0" dirty="0">
                 <a:solidFill>
                   <a:srgbClr val="000000"/>
                 </a:solidFill>
@@ -9415,44 +9954,44 @@
         <a:sysClr val="window" lastClr="FFFFFF"/>
       </a:lt1>
       <a:dk2>
-        <a:srgbClr val="1F497D"/>
+        <a:srgbClr val="44546A"/>
       </a:dk2>
       <a:lt2>
-        <a:srgbClr val="EEECE1"/>
+        <a:srgbClr val="E7E6E6"/>
       </a:lt2>
       <a:accent1>
-        <a:srgbClr val="4F81BD"/>
+        <a:srgbClr val="4472C4"/>
       </a:accent1>
       <a:accent2>
-        <a:srgbClr val="C0504D"/>
+        <a:srgbClr val="ED7D31"/>
       </a:accent2>
       <a:accent3>
-        <a:srgbClr val="9BBB59"/>
+        <a:srgbClr val="A5A5A5"/>
       </a:accent3>
       <a:accent4>
-        <a:srgbClr val="8064A2"/>
+        <a:srgbClr val="FFC000"/>
       </a:accent4>
       <a:accent5>
-        <a:srgbClr val="4BACC6"/>
+        <a:srgbClr val="5B9BD5"/>
       </a:accent5>
       <a:accent6>
-        <a:srgbClr val="F79646"/>
+        <a:srgbClr val="70AD47"/>
       </a:accent6>
       <a:hlink>
-        <a:srgbClr val="0000FF"/>
+        <a:srgbClr val="0563C1"/>
       </a:hlink>
       <a:folHlink>
-        <a:srgbClr val="800080"/>
+        <a:srgbClr val="954F72"/>
       </a:folHlink>
     </a:clrScheme>
     <a:fontScheme name="Office">
       <a:majorFont>
-        <a:latin typeface="Calibri"/>
+        <a:latin typeface="Calibri Light" panose="020F0302020204030204"/>
         <a:ea typeface=""/>
         <a:cs typeface=""/>
-        <a:font script="Jpan" typeface="ＭＳ Ｐゴシック"/>
+        <a:font script="Jpan" typeface="游ゴシック Light"/>
         <a:font script="Hang" typeface="맑은 고딕"/>
-        <a:font script="Hans" typeface="宋体"/>
+        <a:font script="Hans" typeface="等线 Light"/>
         <a:font script="Hant" typeface="新細明體"/>
         <a:font script="Arab" typeface="Times New Roman"/>
         <a:font script="Hebr" typeface="Times New Roman"/>
@@ -9480,14 +10019,31 @@
         <a:font script="Viet" typeface="Times New Roman"/>
         <a:font script="Uigh" typeface="Microsoft Uighur"/>
         <a:font script="Geor" typeface="Sylfaen"/>
+        <a:font script="Armn" typeface="Arial"/>
+        <a:font script="Bugi" typeface="Leelawadee UI"/>
+        <a:font script="Bopo" typeface="Microsoft JhengHei"/>
+        <a:font script="Java" typeface="Javanese Text"/>
+        <a:font script="Lisu" typeface="Segoe UI"/>
+        <a:font script="Mymr" typeface="Myanmar Text"/>
+        <a:font script="Nkoo" typeface="Ebrima"/>
+        <a:font script="Olck" typeface="Nirmala UI"/>
+        <a:font script="Osma" typeface="Ebrima"/>
+        <a:font script="Phag" typeface="Phagspa"/>
+        <a:font script="Syrn" typeface="Estrangelo Edessa"/>
+        <a:font script="Syrj" typeface="Estrangelo Edessa"/>
+        <a:font script="Syre" typeface="Estrangelo Edessa"/>
+        <a:font script="Sora" typeface="Nirmala UI"/>
+        <a:font script="Tale" typeface="Microsoft Tai Le"/>
+        <a:font script="Talu" typeface="Microsoft New Tai Lue"/>
+        <a:font script="Tfng" typeface="Ebrima"/>
       </a:majorFont>
       <a:minorFont>
-        <a:latin typeface="Calibri"/>
+        <a:latin typeface="Calibri" panose="020F0502020204030204"/>
         <a:ea typeface=""/>
         <a:cs typeface=""/>
-        <a:font script="Jpan" typeface="ＭＳ Ｐゴシック"/>
+        <a:font script="Jpan" typeface="游ゴシック"/>
         <a:font script="Hang" typeface="맑은 고딕"/>
-        <a:font script="Hans" typeface="宋体"/>
+        <a:font script="Hans" typeface="等线"/>
         <a:font script="Hant" typeface="新細明體"/>
         <a:font script="Arab" typeface="Arial"/>
         <a:font script="Hebr" typeface="Arial"/>
@@ -9515,6 +10071,23 @@
         <a:font script="Viet" typeface="Arial"/>
         <a:font script="Uigh" typeface="Microsoft Uighur"/>
         <a:font script="Geor" typeface="Sylfaen"/>
+        <a:font script="Armn" typeface="Arial"/>
+        <a:font script="Bugi" typeface="Leelawadee UI"/>
+        <a:font script="Bopo" typeface="Microsoft JhengHei"/>
+        <a:font script="Java" typeface="Javanese Text"/>
+        <a:font script="Lisu" typeface="Segoe UI"/>
+        <a:font script="Mymr" typeface="Myanmar Text"/>
+        <a:font script="Nkoo" typeface="Ebrima"/>
+        <a:font script="Olck" typeface="Nirmala UI"/>
+        <a:font script="Osma" typeface="Ebrima"/>
+        <a:font script="Phag" typeface="Phagspa"/>
+        <a:font script="Syrn" typeface="Estrangelo Edessa"/>
+        <a:font script="Syrj" typeface="Estrangelo Edessa"/>
+        <a:font script="Syre" typeface="Estrangelo Edessa"/>
+        <a:font script="Sora" typeface="Nirmala UI"/>
+        <a:font script="Tale" typeface="Microsoft Tai Le"/>
+        <a:font script="Talu" typeface="Microsoft New Tai Lue"/>
+        <a:font script="Tfng" typeface="Ebrima"/>
       </a:minorFont>
     </a:fontScheme>
     <a:fmtScheme name="Office">
@@ -9526,200 +10099,141 @@
           <a:gsLst>
             <a:gs pos="0">
               <a:schemeClr val="phClr">
-                <a:tint val="50000"/>
-                <a:satMod val="300000"/>
+                <a:lumMod val="110000"/>
+                <a:satMod val="105000"/>
+                <a:tint val="67000"/>
               </a:schemeClr>
             </a:gs>
-            <a:gs pos="35000">
+            <a:gs pos="50000">
               <a:schemeClr val="phClr">
-                <a:tint val="37000"/>
-                <a:satMod val="300000"/>
+                <a:lumMod val="105000"/>
+                <a:satMod val="103000"/>
+                <a:tint val="73000"/>
               </a:schemeClr>
             </a:gs>
             <a:gs pos="100000">
               <a:schemeClr val="phClr">
-                <a:tint val="15000"/>
-                <a:satMod val="350000"/>
+                <a:lumMod val="105000"/>
+                <a:satMod val="109000"/>
+                <a:tint val="81000"/>
               </a:schemeClr>
             </a:gs>
           </a:gsLst>
-          <a:lin ang="16200000" scaled="1"/>
+          <a:lin ang="5400000" scaled="0"/>
         </a:gradFill>
         <a:gradFill rotWithShape="1">
           <a:gsLst>
             <a:gs pos="0">
               <a:schemeClr val="phClr">
-                <a:tint val="100000"/>
+                <a:satMod val="103000"/>
+                <a:lumMod val="102000"/>
+                <a:tint val="94000"/>
+              </a:schemeClr>
+            </a:gs>
+            <a:gs pos="50000">
+              <a:schemeClr val="phClr">
+                <a:satMod val="110000"/>
+                <a:lumMod val="100000"/>
                 <a:shade val="100000"/>
-                <a:satMod val="130000"/>
               </a:schemeClr>
             </a:gs>
             <a:gs pos="100000">
               <a:schemeClr val="phClr">
-                <a:tint val="50000"/>
-                <a:shade val="100000"/>
-                <a:satMod val="350000"/>
+                <a:lumMod val="99000"/>
+                <a:satMod val="120000"/>
+                <a:shade val="78000"/>
               </a:schemeClr>
             </a:gs>
           </a:gsLst>
-          <a:lin ang="16200000" scaled="0"/>
+          <a:lin ang="5400000" scaled="0"/>
         </a:gradFill>
       </a:fillStyleLst>
       <a:lnStyleLst>
-        <a:ln w="9525" cap="flat" cmpd="sng" algn="ctr">
-          <a:solidFill>
-            <a:schemeClr val="phClr">
-              <a:shade val="95000"/>
-              <a:satMod val="105000"/>
-            </a:schemeClr>
-          </a:solidFill>
-          <a:prstDash val="solid"/>
-        </a:ln>
-        <a:ln w="25400" cap="flat" cmpd="sng" algn="ctr">
+        <a:ln w="6350" cap="flat" cmpd="sng" algn="ctr">
           <a:solidFill>
             <a:schemeClr val="phClr"/>
           </a:solidFill>
           <a:prstDash val="solid"/>
+          <a:miter lim="800000"/>
         </a:ln>
-        <a:ln w="38100" cap="flat" cmpd="sng" algn="ctr">
+        <a:ln w="12700" cap="flat" cmpd="sng" algn="ctr">
           <a:solidFill>
             <a:schemeClr val="phClr"/>
           </a:solidFill>
           <a:prstDash val="solid"/>
+          <a:miter lim="800000"/>
+        </a:ln>
+        <a:ln w="19050" cap="flat" cmpd="sng" algn="ctr">
+          <a:solidFill>
+            <a:schemeClr val="phClr"/>
+          </a:solidFill>
+          <a:prstDash val="solid"/>
+          <a:miter lim="800000"/>
         </a:ln>
       </a:lnStyleLst>
       <a:effectStyleLst>
         <a:effectStyle>
+          <a:effectLst/>
+        </a:effectStyle>
+        <a:effectStyle>
+          <a:effectLst/>
+        </a:effectStyle>
+        <a:effectStyle>
           <a:effectLst>
-            <a:outerShdw blurRad="40000" dist="20000" dir="5400000" rotWithShape="0">
+            <a:outerShdw blurRad="57150" dist="19050" dir="5400000" algn="ctr" rotWithShape="0">
               <a:srgbClr val="000000">
-                <a:alpha val="38000"/>
+                <a:alpha val="63000"/>
               </a:srgbClr>
             </a:outerShdw>
           </a:effectLst>
-        </a:effectStyle>
-        <a:effectStyle>
-          <a:effectLst>
-            <a:outerShdw blurRad="40000" dist="23000" dir="5400000" rotWithShape="0">
-              <a:srgbClr val="000000">
-                <a:alpha val="35000"/>
-              </a:srgbClr>
-            </a:outerShdw>
-          </a:effectLst>
-        </a:effectStyle>
-        <a:effectStyle>
-          <a:effectLst>
-            <a:outerShdw blurRad="40000" dist="23000" dir="5400000" rotWithShape="0">
-              <a:srgbClr val="000000">
-                <a:alpha val="35000"/>
-              </a:srgbClr>
-            </a:outerShdw>
-          </a:effectLst>
-          <a:scene3d>
-            <a:camera prst="orthographicFront">
-              <a:rot lat="0" lon="0" rev="0"/>
-            </a:camera>
-            <a:lightRig rig="threePt" dir="t">
-              <a:rot lat="0" lon="0" rev="1200000"/>
-            </a:lightRig>
-          </a:scene3d>
-          <a:sp3d>
-            <a:bevelT w="63500" h="25400"/>
-          </a:sp3d>
         </a:effectStyle>
       </a:effectStyleLst>
       <a:bgFillStyleLst>
         <a:solidFill>
           <a:schemeClr val="phClr"/>
         </a:solidFill>
+        <a:solidFill>
+          <a:schemeClr val="phClr">
+            <a:tint val="95000"/>
+            <a:satMod val="170000"/>
+          </a:schemeClr>
+        </a:solidFill>
         <a:gradFill rotWithShape="1">
           <a:gsLst>
             <a:gs pos="0">
               <a:schemeClr val="phClr">
-                <a:tint val="40000"/>
-                <a:satMod val="350000"/>
+                <a:tint val="93000"/>
+                <a:satMod val="150000"/>
+                <a:shade val="98000"/>
+                <a:lumMod val="102000"/>
               </a:schemeClr>
             </a:gs>
-            <a:gs pos="40000">
+            <a:gs pos="50000">
               <a:schemeClr val="phClr">
-                <a:tint val="45000"/>
-                <a:shade val="99000"/>
-                <a:satMod val="350000"/>
+                <a:tint val="98000"/>
+                <a:satMod val="130000"/>
+                <a:shade val="90000"/>
+                <a:lumMod val="103000"/>
               </a:schemeClr>
             </a:gs>
             <a:gs pos="100000">
               <a:schemeClr val="phClr">
-                <a:shade val="20000"/>
-                <a:satMod val="255000"/>
+                <a:shade val="63000"/>
+                <a:satMod val="120000"/>
               </a:schemeClr>
             </a:gs>
           </a:gsLst>
-          <a:path path="circle">
-            <a:fillToRect l="50000" t="-80000" r="50000" b="180000"/>
-          </a:path>
-        </a:gradFill>
-        <a:gradFill rotWithShape="1">
-          <a:gsLst>
-            <a:gs pos="0">
-              <a:schemeClr val="phClr">
-                <a:tint val="80000"/>
-                <a:satMod val="300000"/>
-              </a:schemeClr>
-            </a:gs>
-            <a:gs pos="100000">
-              <a:schemeClr val="phClr">
-                <a:shade val="30000"/>
-                <a:satMod val="200000"/>
-              </a:schemeClr>
-            </a:gs>
-          </a:gsLst>
-          <a:path path="circle">
-            <a:fillToRect l="50000" t="50000" r="50000" b="50000"/>
-          </a:path>
+          <a:lin ang="5400000" scaled="0"/>
         </a:gradFill>
       </a:bgFillStyleLst>
     </a:fmtScheme>
   </a:themeElements>
-  <a:objectDefaults>
-    <a:spDef>
-      <a:spPr/>
-      <a:bodyPr/>
-      <a:lstStyle/>
-      <a:style>
-        <a:lnRef idx="1">
-          <a:schemeClr val="accent1"/>
-        </a:lnRef>
-        <a:fillRef idx="3">
-          <a:schemeClr val="accent1"/>
-        </a:fillRef>
-        <a:effectRef idx="2">
-          <a:schemeClr val="accent1"/>
-        </a:effectRef>
-        <a:fontRef idx="minor">
-          <a:schemeClr val="lt1"/>
-        </a:fontRef>
-      </a:style>
-    </a:spDef>
-    <a:lnDef>
-      <a:spPr/>
-      <a:bodyPr/>
-      <a:lstStyle/>
-      <a:style>
-        <a:lnRef idx="2">
-          <a:schemeClr val="accent1"/>
-        </a:lnRef>
-        <a:fillRef idx="0">
-          <a:schemeClr val="accent1"/>
-        </a:fillRef>
-        <a:effectRef idx="1">
-          <a:schemeClr val="accent1"/>
-        </a:effectRef>
-        <a:fontRef idx="minor">
-          <a:schemeClr val="tx1"/>
-        </a:fontRef>
-      </a:style>
-    </a:lnDef>
-  </a:objectDefaults>
+  <a:objectDefaults/>
   <a:extraClrSchemeLst/>
+  <a:extLst>
+    <a:ext uri="{05A4C25C-085E-4340-85A3-A5531E510DB2}">
+      <thm15:themeFamily xmlns:thm15="http://schemas.microsoft.com/office/thememl/2012/main" name="Office Theme" id="{62F939B6-93AF-4DB8-9C6B-D6C7DFDC589F}" vid="{4A3C46E8-61CC-4603-A589-7422A47A8E4A}"/>
+    </a:ext>
+  </a:extLst>
 </a:theme>
 </file>
--- a/UNeXt_presentation.pptx
+++ b/UNeXt_presentation.pptx
@@ -320,7 +320,7 @@
           <a:p>
             <a:fld id="{5BCAD085-E8A6-8845-BD4E-CB4CCA059FC4}" type="datetimeFigureOut">
               <a:rPr lang="en-US" smtClean="0"/>
-              <a:t>8/19/2026</a:t>
+              <a:t>8/25/2026</a:t>
             </a:fld>
             <a:endParaRPr lang="en-US"/>
           </a:p>
@@ -488,7 +488,7 @@
           <a:p>
             <a:fld id="{5BCAD085-E8A6-8845-BD4E-CB4CCA059FC4}" type="datetimeFigureOut">
               <a:rPr lang="en-US" smtClean="0"/>
-              <a:t>8/19/2026</a:t>
+              <a:t>8/25/2026</a:t>
             </a:fld>
             <a:endParaRPr lang="en-US"/>
           </a:p>
@@ -666,7 +666,7 @@
           <a:p>
             <a:fld id="{5BCAD085-E8A6-8845-BD4E-CB4CCA059FC4}" type="datetimeFigureOut">
               <a:rPr lang="en-US" smtClean="0"/>
-              <a:t>8/19/2026</a:t>
+              <a:t>8/25/2026</a:t>
             </a:fld>
             <a:endParaRPr lang="en-US"/>
           </a:p>
@@ -834,7 +834,7 @@
           <a:p>
             <a:fld id="{5BCAD085-E8A6-8845-BD4E-CB4CCA059FC4}" type="datetimeFigureOut">
               <a:rPr lang="en-US" smtClean="0"/>
-              <a:t>8/19/2026</a:t>
+              <a:t>8/25/2026</a:t>
             </a:fld>
             <a:endParaRPr lang="en-US"/>
           </a:p>
@@ -1079,7 +1079,7 @@
           <a:p>
             <a:fld id="{5BCAD085-E8A6-8845-BD4E-CB4CCA059FC4}" type="datetimeFigureOut">
               <a:rPr lang="en-US" smtClean="0"/>
-              <a:t>8/19/2026</a:t>
+              <a:t>8/25/2026</a:t>
             </a:fld>
             <a:endParaRPr lang="en-US"/>
           </a:p>
@@ -1364,7 +1364,7 @@
           <a:p>
             <a:fld id="{5BCAD085-E8A6-8845-BD4E-CB4CCA059FC4}" type="datetimeFigureOut">
               <a:rPr lang="en-US" smtClean="0"/>
-              <a:t>8/19/2026</a:t>
+              <a:t>8/25/2026</a:t>
             </a:fld>
             <a:endParaRPr lang="en-US"/>
           </a:p>
@@ -1783,7 +1783,7 @@
           <a:p>
             <a:fld id="{5BCAD085-E8A6-8845-BD4E-CB4CCA059FC4}" type="datetimeFigureOut">
               <a:rPr lang="en-US" smtClean="0"/>
-              <a:t>8/19/2026</a:t>
+              <a:t>8/25/2026</a:t>
             </a:fld>
             <a:endParaRPr lang="en-US"/>
           </a:p>
@@ -1900,7 +1900,7 @@
           <a:p>
             <a:fld id="{5BCAD085-E8A6-8845-BD4E-CB4CCA059FC4}" type="datetimeFigureOut">
               <a:rPr lang="en-US" smtClean="0"/>
-              <a:t>8/19/2026</a:t>
+              <a:t>8/25/2026</a:t>
             </a:fld>
             <a:endParaRPr lang="en-US"/>
           </a:p>
@@ -1995,7 +1995,7 @@
           <a:p>
             <a:fld id="{5BCAD085-E8A6-8845-BD4E-CB4CCA059FC4}" type="datetimeFigureOut">
               <a:rPr lang="en-US" smtClean="0"/>
-              <a:t>8/19/2026</a:t>
+              <a:t>8/25/2026</a:t>
             </a:fld>
             <a:endParaRPr lang="en-US"/>
           </a:p>
@@ -2270,7 +2270,7 @@
           <a:p>
             <a:fld id="{5BCAD085-E8A6-8845-BD4E-CB4CCA059FC4}" type="datetimeFigureOut">
               <a:rPr lang="en-US" smtClean="0"/>
-              <a:t>8/19/2026</a:t>
+              <a:t>8/25/2026</a:t>
             </a:fld>
             <a:endParaRPr lang="en-US"/>
           </a:p>
@@ -2522,7 +2522,7 @@
           <a:p>
             <a:fld id="{5BCAD085-E8A6-8845-BD4E-CB4CCA059FC4}" type="datetimeFigureOut">
               <a:rPr lang="en-US" smtClean="0"/>
-              <a:t>8/19/2026</a:t>
+              <a:t>8/25/2026</a:t>
             </a:fld>
             <a:endParaRPr lang="en-US"/>
           </a:p>
@@ -2733,7 +2733,7 @@
           <a:p>
             <a:fld id="{5BCAD085-E8A6-8845-BD4E-CB4CCA059FC4}" type="datetimeFigureOut">
               <a:rPr lang="en-US" smtClean="0"/>
-              <a:t>8/19/2026</a:t>
+              <a:t>8/25/2026</a:t>
             </a:fld>
             <a:endParaRPr lang="en-US"/>
           </a:p>
@@ -3437,7 +3437,7 @@
         <p:spPr>
           <a:xfrm>
             <a:off x="6766560" y="2834640"/>
-            <a:ext cx="4846320" cy="2011680"/>
+            <a:ext cx="4846320" cy="979755"/>
           </a:xfrm>
           <a:prstGeom prst="rect">
             <a:avLst/>
@@ -3450,7 +3450,7 @@
           </a:bodyPr>
           <a:lstStyle/>
           <a:p>
-            <a:endParaRPr/>
+            <a:endParaRPr dirty="0"/>
           </a:p>
           <a:p>
             <a:pPr>
@@ -3459,7 +3459,7 @@
               </a:spcAft>
             </a:pPr>
             <a:r>
-              <a:rPr sz="1400" b="1" i="0">
+              <a:rPr sz="1400" b="1" i="0" dirty="0">
                 <a:solidFill>
                   <a:srgbClr val="000000"/>
                 </a:solidFill>
@@ -3468,14 +3468,19 @@
               <a:t>Code: </a:t>
             </a:r>
             <a:r>
-              <a:rPr sz="1400" b="0" i="0">
+              <a:rPr lang="en-US" sz="1400" dirty="0">
                 <a:solidFill>
                   <a:srgbClr val="555555"/>
                 </a:solidFill>
-                <a:latin typeface="Calibri"/>
-              </a:rPr>
-              <a:t>&lt;GITHUB / DRIVE LINK&gt;</a:t>
-            </a:r>
+              </a:rPr>
+              <a:t>https://github.com/DavidShenzi/unext-project</a:t>
+            </a:r>
+            <a:endParaRPr sz="1400" b="0" i="0" dirty="0">
+              <a:solidFill>
+                <a:srgbClr val="555555"/>
+              </a:solidFill>
+              <a:latin typeface="Calibri"/>
+            </a:endParaRPr>
           </a:p>
           <a:p>
             <a:pPr>
@@ -3484,7 +3489,7 @@
               </a:spcAft>
             </a:pPr>
             <a:r>
-              <a:rPr sz="1400" b="1" i="0">
+              <a:rPr sz="1400" b="1" i="0" dirty="0">
                 <a:solidFill>
                   <a:srgbClr val="000000"/>
                 </a:solidFill>
@@ -3493,7 +3498,7 @@
               <a:t>Video: </a:t>
             </a:r>
             <a:r>
-              <a:rPr sz="1400" b="0" i="0">
+              <a:rPr sz="1400" b="0" i="0" dirty="0">
                 <a:solidFill>
                   <a:srgbClr val="555555"/>
                 </a:solidFill>
@@ -3513,7 +3518,7 @@
         <p:spPr>
           <a:xfrm>
             <a:off x="548640" y="6199632"/>
-            <a:ext cx="11094415" cy="457200"/>
+            <a:ext cx="11094415" cy="276999"/>
           </a:xfrm>
           <a:prstGeom prst="rect">
             <a:avLst/>
@@ -3526,33 +3531,12 @@
           </a:bodyPr>
           <a:lstStyle/>
           <a:p>
-            <a:r>
-              <a:rPr sz="1200" b="0" i="1">
-                <a:solidFill>
-                  <a:srgbClr val="555555"/>
-                </a:solidFill>
-                <a:latin typeface="Calibri"/>
-              </a:rPr>
-              <a:t>Fill in all placeholders before submitting — missing items are </a:t>
-            </a:r>
-            <a:r>
-              <a:rPr sz="1200" b="0" i="1" dirty="0" err="1">
-                <a:solidFill>
-                  <a:srgbClr val="555555"/>
-                </a:solidFill>
-                <a:latin typeface="Calibri"/>
-              </a:rPr>
-              <a:t>penalised</a:t>
-            </a:r>
-            <a:r>
-              <a:rPr sz="1200" b="0" i="1" dirty="0">
-                <a:solidFill>
-                  <a:srgbClr val="555555"/>
-                </a:solidFill>
-                <a:latin typeface="Calibri"/>
-              </a:rPr>
-              <a:t>. Paste the video link in this slide's comment section as well.</a:t>
-            </a:r>
+            <a:endParaRPr sz="1200" b="0" i="1" dirty="0">
+              <a:solidFill>
+                <a:srgbClr val="555555"/>
+              </a:solidFill>
+              <a:latin typeface="Calibri"/>
+            </a:endParaRPr>
           </a:p>
         </p:txBody>
       </p:sp>

--- a/UNeXt_presentation.pptx
+++ b/UNeXt_presentation.pptx
@@ -4,28 +4,25 @@
   <p:sldMasterIdLst>
     <p:sldMasterId id="2147483648" r:id="rId1"/>
   </p:sldMasterIdLst>
-  <p:notesMasterIdLst>
-    <p:notesMasterId r:id="rId18"/>
-  </p:notesMasterIdLst>
   <p:sldIdLst>
-    <p:sldId id="256" r:id="rId2"/>
-    <p:sldId id="257" r:id="rId3"/>
-    <p:sldId id="258" r:id="rId4"/>
-    <p:sldId id="259" r:id="rId5"/>
-    <p:sldId id="260" r:id="rId6"/>
-    <p:sldId id="261" r:id="rId7"/>
-    <p:sldId id="262" r:id="rId8"/>
-    <p:sldId id="263" r:id="rId9"/>
-    <p:sldId id="264" r:id="rId10"/>
-    <p:sldId id="265" r:id="rId11"/>
-    <p:sldId id="266" r:id="rId12"/>
-    <p:sldId id="267" r:id="rId13"/>
-    <p:sldId id="268" r:id="rId14"/>
-    <p:sldId id="269" r:id="rId15"/>
-    <p:sldId id="270" r:id="rId16"/>
-    <p:sldId id="271" r:id="rId17"/>
+    <p:sldId id="256" r:id="rId7"/>
+    <p:sldId id="257" r:id="rId9"/>
+    <p:sldId id="258" r:id="rId10"/>
+    <p:sldId id="259" r:id="rId11"/>
+    <p:sldId id="260" r:id="rId12"/>
+    <p:sldId id="261" r:id="rId13"/>
+    <p:sldId id="262" r:id="rId14"/>
+    <p:sldId id="263" r:id="rId15"/>
+    <p:sldId id="264" r:id="rId16"/>
+    <p:sldId id="265" r:id="rId17"/>
+    <p:sldId id="266" r:id="rId18"/>
+    <p:sldId id="267" r:id="rId19"/>
+    <p:sldId id="268" r:id="rId20"/>
+    <p:sldId id="269" r:id="rId21"/>
+    <p:sldId id="270" r:id="rId22"/>
+    <p:sldId id="271" r:id="rId23"/>
   </p:sldIdLst>
-  <p:sldSz cx="12192000" cy="6858000"/>
+  <p:sldSz cx="12191695" cy="6858000" type="screen4x3"/>
   <p:notesSz cx="6858000" cy="9144000"/>
   <p:defaultTextStyle>
     <a:defPPr>
@@ -122,22 +119,6 @@
       </a:defRPr>
     </a:lvl9pPr>
   </p:defaultTextStyle>
-  <p:extLst>
-    <p:ext uri="{EFAFB233-063F-42B5-8137-9DF3F51BA10A}">
-      <p15:sldGuideLst xmlns:p15="http://schemas.microsoft.com/office/powerpoint/2012/main">
-        <p15:guide id="1" orient="horz" pos="2160">
-          <p15:clr>
-            <a:srgbClr val="A4A3A4"/>
-          </p15:clr>
-        </p15:guide>
-        <p15:guide id="2" pos="2880">
-          <p15:clr>
-            <a:srgbClr val="A4A3A4"/>
-          </p15:clr>
-        </p15:guide>
-      </p15:sldGuideLst>
-    </p:ext>
-  </p:extLst>
 </p:presentation>
 </file>
 
@@ -179,9 +160,10 @@
           <a:lstStyle/>
           <a:p>
             <a:r>
-              <a:rPr lang="en-US"/>
+              <a:rPr lang="en-US" smtClean="0"/>
               <a:t>Click to edit Master title style</a:t>
             </a:r>
+            <a:endParaRPr lang="en-US"/>
           </a:p>
         </p:txBody>
       </p:sp>
@@ -297,9 +279,10 @@
           </a:lstStyle>
           <a:p>
             <a:r>
-              <a:rPr lang="en-US"/>
+              <a:rPr lang="en-US" smtClean="0"/>
               <a:t>Click to edit Master subtitle style</a:t>
             </a:r>
+            <a:endParaRPr lang="en-US"/>
           </a:p>
         </p:txBody>
       </p:sp>
@@ -320,7 +303,7 @@
           <a:p>
             <a:fld id="{5BCAD085-E8A6-8845-BD4E-CB4CCA059FC4}" type="datetimeFigureOut">
               <a:rPr lang="en-US" smtClean="0"/>
-              <a:t>8/25/2026</a:t>
+              <a:t>1/27/13</a:t>
             </a:fld>
             <a:endParaRPr lang="en-US"/>
           </a:p>
@@ -414,9 +397,10 @@
           <a:lstStyle/>
           <a:p>
             <a:r>
-              <a:rPr lang="en-US"/>
+              <a:rPr lang="en-US" smtClean="0"/>
               <a:t>Click to edit Master title style</a:t>
             </a:r>
+            <a:endParaRPr lang="en-US"/>
           </a:p>
         </p:txBody>
       </p:sp>
@@ -437,37 +421,38 @@
           <a:p>
             <a:pPr lvl="0"/>
             <a:r>
-              <a:rPr lang="en-US"/>
+              <a:rPr lang="en-US" smtClean="0"/>
               <a:t>Click to edit Master text styles</a:t>
             </a:r>
           </a:p>
           <a:p>
             <a:pPr lvl="1"/>
             <a:r>
-              <a:rPr lang="en-US"/>
+              <a:rPr lang="en-US" smtClean="0"/>
               <a:t>Second level</a:t>
             </a:r>
           </a:p>
           <a:p>
             <a:pPr lvl="2"/>
             <a:r>
-              <a:rPr lang="en-US"/>
+              <a:rPr lang="en-US" smtClean="0"/>
               <a:t>Third level</a:t>
             </a:r>
           </a:p>
           <a:p>
             <a:pPr lvl="3"/>
             <a:r>
-              <a:rPr lang="en-US"/>
+              <a:rPr lang="en-US" smtClean="0"/>
               <a:t>Fourth level</a:t>
             </a:r>
           </a:p>
           <a:p>
             <a:pPr lvl="4"/>
             <a:r>
-              <a:rPr lang="en-US"/>
+              <a:rPr lang="en-US" smtClean="0"/>
               <a:t>Fifth level</a:t>
             </a:r>
+            <a:endParaRPr lang="en-US"/>
           </a:p>
         </p:txBody>
       </p:sp>
@@ -488,7 +473,7 @@
           <a:p>
             <a:fld id="{5BCAD085-E8A6-8845-BD4E-CB4CCA059FC4}" type="datetimeFigureOut">
               <a:rPr lang="en-US" smtClean="0"/>
-              <a:t>8/25/2026</a:t>
+              <a:t>1/27/13</a:t>
             </a:fld>
             <a:endParaRPr lang="en-US"/>
           </a:p>
@@ -587,9 +572,10 @@
           <a:lstStyle/>
           <a:p>
             <a:r>
-              <a:rPr lang="en-US"/>
+              <a:rPr lang="en-US" smtClean="0"/>
               <a:t>Click to edit Master title style</a:t>
             </a:r>
+            <a:endParaRPr lang="en-US"/>
           </a:p>
         </p:txBody>
       </p:sp>
@@ -615,37 +601,38 @@
           <a:p>
             <a:pPr lvl="0"/>
             <a:r>
-              <a:rPr lang="en-US"/>
+              <a:rPr lang="en-US" smtClean="0"/>
               <a:t>Click to edit Master text styles</a:t>
             </a:r>
           </a:p>
           <a:p>
             <a:pPr lvl="1"/>
             <a:r>
-              <a:rPr lang="en-US"/>
+              <a:rPr lang="en-US" smtClean="0"/>
               <a:t>Second level</a:t>
             </a:r>
           </a:p>
           <a:p>
             <a:pPr lvl="2"/>
             <a:r>
-              <a:rPr lang="en-US"/>
+              <a:rPr lang="en-US" smtClean="0"/>
               <a:t>Third level</a:t>
             </a:r>
           </a:p>
           <a:p>
             <a:pPr lvl="3"/>
             <a:r>
-              <a:rPr lang="en-US"/>
+              <a:rPr lang="en-US" smtClean="0"/>
               <a:t>Fourth level</a:t>
             </a:r>
           </a:p>
           <a:p>
             <a:pPr lvl="4"/>
             <a:r>
-              <a:rPr lang="en-US"/>
+              <a:rPr lang="en-US" smtClean="0"/>
               <a:t>Fifth level</a:t>
             </a:r>
+            <a:endParaRPr lang="en-US"/>
           </a:p>
         </p:txBody>
       </p:sp>
@@ -666,7 +653,7 @@
           <a:p>
             <a:fld id="{5BCAD085-E8A6-8845-BD4E-CB4CCA059FC4}" type="datetimeFigureOut">
               <a:rPr lang="en-US" smtClean="0"/>
-              <a:t>8/25/2026</a:t>
+              <a:t>1/27/13</a:t>
             </a:fld>
             <a:endParaRPr lang="en-US"/>
           </a:p>
@@ -760,9 +747,10 @@
           <a:lstStyle/>
           <a:p>
             <a:r>
-              <a:rPr lang="en-US"/>
+              <a:rPr lang="en-US" smtClean="0"/>
               <a:t>Click to edit Master title style</a:t>
             </a:r>
+            <a:endParaRPr lang="en-US"/>
           </a:p>
         </p:txBody>
       </p:sp>
@@ -783,37 +771,38 @@
           <a:p>
             <a:pPr lvl="0"/>
             <a:r>
-              <a:rPr lang="en-US"/>
+              <a:rPr lang="en-US" smtClean="0"/>
               <a:t>Click to edit Master text styles</a:t>
             </a:r>
           </a:p>
           <a:p>
             <a:pPr lvl="1"/>
             <a:r>
-              <a:rPr lang="en-US"/>
+              <a:rPr lang="en-US" smtClean="0"/>
               <a:t>Second level</a:t>
             </a:r>
           </a:p>
           <a:p>
             <a:pPr lvl="2"/>
             <a:r>
-              <a:rPr lang="en-US"/>
+              <a:rPr lang="en-US" smtClean="0"/>
               <a:t>Third level</a:t>
             </a:r>
           </a:p>
           <a:p>
             <a:pPr lvl="3"/>
             <a:r>
-              <a:rPr lang="en-US"/>
+              <a:rPr lang="en-US" smtClean="0"/>
               <a:t>Fourth level</a:t>
             </a:r>
           </a:p>
           <a:p>
             <a:pPr lvl="4"/>
             <a:r>
-              <a:rPr lang="en-US"/>
+              <a:rPr lang="en-US" smtClean="0"/>
               <a:t>Fifth level</a:t>
             </a:r>
+            <a:endParaRPr lang="en-US"/>
           </a:p>
         </p:txBody>
       </p:sp>
@@ -834,7 +823,7 @@
           <a:p>
             <a:fld id="{5BCAD085-E8A6-8845-BD4E-CB4CCA059FC4}" type="datetimeFigureOut">
               <a:rPr lang="en-US" smtClean="0"/>
-              <a:t>8/25/2026</a:t>
+              <a:t>1/27/13</a:t>
             </a:fld>
             <a:endParaRPr lang="en-US"/>
           </a:p>
@@ -937,9 +926,10 @@
           </a:lstStyle>
           <a:p>
             <a:r>
-              <a:rPr lang="en-US"/>
+              <a:rPr lang="en-US" smtClean="0"/>
               <a:t>Click to edit Master title style</a:t>
             </a:r>
+            <a:endParaRPr lang="en-US"/>
           </a:p>
         </p:txBody>
       </p:sp>
@@ -1056,7 +1046,7 @@
           <a:p>
             <a:pPr lvl="0"/>
             <a:r>
-              <a:rPr lang="en-US"/>
+              <a:rPr lang="en-US" smtClean="0"/>
               <a:t>Click to edit Master text styles</a:t>
             </a:r>
           </a:p>
@@ -1079,7 +1069,7 @@
           <a:p>
             <a:fld id="{5BCAD085-E8A6-8845-BD4E-CB4CCA059FC4}" type="datetimeFigureOut">
               <a:rPr lang="en-US" smtClean="0"/>
-              <a:t>8/25/2026</a:t>
+              <a:t>1/27/13</a:t>
             </a:fld>
             <a:endParaRPr lang="en-US"/>
           </a:p>
@@ -1173,9 +1163,10 @@
           <a:lstStyle/>
           <a:p>
             <a:r>
-              <a:rPr lang="en-US"/>
+              <a:rPr lang="en-US" smtClean="0"/>
               <a:t>Click to edit Master title style</a:t>
             </a:r>
+            <a:endParaRPr lang="en-US"/>
           </a:p>
         </p:txBody>
       </p:sp>
@@ -1229,37 +1220,38 @@
           <a:p>
             <a:pPr lvl="0"/>
             <a:r>
-              <a:rPr lang="en-US"/>
+              <a:rPr lang="en-US" smtClean="0"/>
               <a:t>Click to edit Master text styles</a:t>
             </a:r>
           </a:p>
           <a:p>
             <a:pPr lvl="1"/>
             <a:r>
-              <a:rPr lang="en-US"/>
+              <a:rPr lang="en-US" smtClean="0"/>
               <a:t>Second level</a:t>
             </a:r>
           </a:p>
           <a:p>
             <a:pPr lvl="2"/>
             <a:r>
-              <a:rPr lang="en-US"/>
+              <a:rPr lang="en-US" smtClean="0"/>
               <a:t>Third level</a:t>
             </a:r>
           </a:p>
           <a:p>
             <a:pPr lvl="3"/>
             <a:r>
-              <a:rPr lang="en-US"/>
+              <a:rPr lang="en-US" smtClean="0"/>
               <a:t>Fourth level</a:t>
             </a:r>
           </a:p>
           <a:p>
             <a:pPr lvl="4"/>
             <a:r>
-              <a:rPr lang="en-US"/>
+              <a:rPr lang="en-US" smtClean="0"/>
               <a:t>Fifth level</a:t>
             </a:r>
+            <a:endParaRPr lang="en-US"/>
           </a:p>
         </p:txBody>
       </p:sp>
@@ -1313,37 +1305,38 @@
           <a:p>
             <a:pPr lvl="0"/>
             <a:r>
-              <a:rPr lang="en-US"/>
+              <a:rPr lang="en-US" smtClean="0"/>
               <a:t>Click to edit Master text styles</a:t>
             </a:r>
           </a:p>
           <a:p>
             <a:pPr lvl="1"/>
             <a:r>
-              <a:rPr lang="en-US"/>
+              <a:rPr lang="en-US" smtClean="0"/>
               <a:t>Second level</a:t>
             </a:r>
           </a:p>
           <a:p>
             <a:pPr lvl="2"/>
             <a:r>
-              <a:rPr lang="en-US"/>
+              <a:rPr lang="en-US" smtClean="0"/>
               <a:t>Third level</a:t>
             </a:r>
           </a:p>
           <a:p>
             <a:pPr lvl="3"/>
             <a:r>
-              <a:rPr lang="en-US"/>
+              <a:rPr lang="en-US" smtClean="0"/>
               <a:t>Fourth level</a:t>
             </a:r>
           </a:p>
           <a:p>
             <a:pPr lvl="4"/>
             <a:r>
-              <a:rPr lang="en-US"/>
+              <a:rPr lang="en-US" smtClean="0"/>
               <a:t>Fifth level</a:t>
             </a:r>
+            <a:endParaRPr lang="en-US"/>
           </a:p>
         </p:txBody>
       </p:sp>
@@ -1364,7 +1357,7 @@
           <a:p>
             <a:fld id="{5BCAD085-E8A6-8845-BD4E-CB4CCA059FC4}" type="datetimeFigureOut">
               <a:rPr lang="en-US" smtClean="0"/>
-              <a:t>8/25/2026</a:t>
+              <a:t>1/27/13</a:t>
             </a:fld>
             <a:endParaRPr lang="en-US"/>
           </a:p>
@@ -1462,9 +1455,10 @@
           </a:lstStyle>
           <a:p>
             <a:r>
-              <a:rPr lang="en-US"/>
+              <a:rPr lang="en-US" smtClean="0"/>
               <a:t>Click to edit Master title style</a:t>
             </a:r>
+            <a:endParaRPr lang="en-US"/>
           </a:p>
         </p:txBody>
       </p:sp>
@@ -1527,7 +1521,7 @@
           <a:p>
             <a:pPr lvl="0"/>
             <a:r>
-              <a:rPr lang="en-US"/>
+              <a:rPr lang="en-US" smtClean="0"/>
               <a:t>Click to edit Master text styles</a:t>
             </a:r>
           </a:p>
@@ -1583,37 +1577,38 @@
           <a:p>
             <a:pPr lvl="0"/>
             <a:r>
-              <a:rPr lang="en-US"/>
+              <a:rPr lang="en-US" smtClean="0"/>
               <a:t>Click to edit Master text styles</a:t>
             </a:r>
           </a:p>
           <a:p>
             <a:pPr lvl="1"/>
             <a:r>
-              <a:rPr lang="en-US"/>
+              <a:rPr lang="en-US" smtClean="0"/>
               <a:t>Second level</a:t>
             </a:r>
           </a:p>
           <a:p>
             <a:pPr lvl="2"/>
             <a:r>
-              <a:rPr lang="en-US"/>
+              <a:rPr lang="en-US" smtClean="0"/>
               <a:t>Third level</a:t>
             </a:r>
           </a:p>
           <a:p>
             <a:pPr lvl="3"/>
             <a:r>
-              <a:rPr lang="en-US"/>
+              <a:rPr lang="en-US" smtClean="0"/>
               <a:t>Fourth level</a:t>
             </a:r>
           </a:p>
           <a:p>
             <a:pPr lvl="4"/>
             <a:r>
-              <a:rPr lang="en-US"/>
+              <a:rPr lang="en-US" smtClean="0"/>
               <a:t>Fifth level</a:t>
             </a:r>
+            <a:endParaRPr lang="en-US"/>
           </a:p>
         </p:txBody>
       </p:sp>
@@ -1676,7 +1671,7 @@
           <a:p>
             <a:pPr lvl="0"/>
             <a:r>
-              <a:rPr lang="en-US"/>
+              <a:rPr lang="en-US" smtClean="0"/>
               <a:t>Click to edit Master text styles</a:t>
             </a:r>
           </a:p>
@@ -1732,37 +1727,38 @@
           <a:p>
             <a:pPr lvl="0"/>
             <a:r>
-              <a:rPr lang="en-US"/>
+              <a:rPr lang="en-US" smtClean="0"/>
               <a:t>Click to edit Master text styles</a:t>
             </a:r>
           </a:p>
           <a:p>
             <a:pPr lvl="1"/>
             <a:r>
-              <a:rPr lang="en-US"/>
+              <a:rPr lang="en-US" smtClean="0"/>
               <a:t>Second level</a:t>
             </a:r>
           </a:p>
           <a:p>
             <a:pPr lvl="2"/>
             <a:r>
-              <a:rPr lang="en-US"/>
+              <a:rPr lang="en-US" smtClean="0"/>
               <a:t>Third level</a:t>
             </a:r>
           </a:p>
           <a:p>
             <a:pPr lvl="3"/>
             <a:r>
-              <a:rPr lang="en-US"/>
+              <a:rPr lang="en-US" smtClean="0"/>
               <a:t>Fourth level</a:t>
             </a:r>
           </a:p>
           <a:p>
             <a:pPr lvl="4"/>
             <a:r>
-              <a:rPr lang="en-US"/>
+              <a:rPr lang="en-US" smtClean="0"/>
               <a:t>Fifth level</a:t>
             </a:r>
+            <a:endParaRPr lang="en-US"/>
           </a:p>
         </p:txBody>
       </p:sp>
@@ -1783,7 +1779,7 @@
           <a:p>
             <a:fld id="{5BCAD085-E8A6-8845-BD4E-CB4CCA059FC4}" type="datetimeFigureOut">
               <a:rPr lang="en-US" smtClean="0"/>
-              <a:t>8/25/2026</a:t>
+              <a:t>1/27/13</a:t>
             </a:fld>
             <a:endParaRPr lang="en-US"/>
           </a:p>
@@ -1877,9 +1873,10 @@
           <a:lstStyle/>
           <a:p>
             <a:r>
-              <a:rPr lang="en-US"/>
+              <a:rPr lang="en-US" smtClean="0"/>
               <a:t>Click to edit Master title style</a:t>
             </a:r>
+            <a:endParaRPr lang="en-US"/>
           </a:p>
         </p:txBody>
       </p:sp>
@@ -1900,7 +1897,7 @@
           <a:p>
             <a:fld id="{5BCAD085-E8A6-8845-BD4E-CB4CCA059FC4}" type="datetimeFigureOut">
               <a:rPr lang="en-US" smtClean="0"/>
-              <a:t>8/25/2026</a:t>
+              <a:t>1/27/13</a:t>
             </a:fld>
             <a:endParaRPr lang="en-US"/>
           </a:p>
@@ -1995,7 +1992,7 @@
           <a:p>
             <a:fld id="{5BCAD085-E8A6-8845-BD4E-CB4CCA059FC4}" type="datetimeFigureOut">
               <a:rPr lang="en-US" smtClean="0"/>
-              <a:t>8/25/2026</a:t>
+              <a:t>1/27/13</a:t>
             </a:fld>
             <a:endParaRPr lang="en-US"/>
           </a:p>
@@ -2098,9 +2095,10 @@
           </a:lstStyle>
           <a:p>
             <a:r>
-              <a:rPr lang="en-US"/>
+              <a:rPr lang="en-US" smtClean="0"/>
               <a:t>Click to edit Master title style</a:t>
             </a:r>
+            <a:endParaRPr lang="en-US"/>
           </a:p>
         </p:txBody>
       </p:sp>
@@ -2154,37 +2152,38 @@
           <a:p>
             <a:pPr lvl="0"/>
             <a:r>
-              <a:rPr lang="en-US"/>
+              <a:rPr lang="en-US" smtClean="0"/>
               <a:t>Click to edit Master text styles</a:t>
             </a:r>
           </a:p>
           <a:p>
             <a:pPr lvl="1"/>
             <a:r>
-              <a:rPr lang="en-US"/>
+              <a:rPr lang="en-US" smtClean="0"/>
               <a:t>Second level</a:t>
             </a:r>
           </a:p>
           <a:p>
             <a:pPr lvl="2"/>
             <a:r>
-              <a:rPr lang="en-US"/>
+              <a:rPr lang="en-US" smtClean="0"/>
               <a:t>Third level</a:t>
             </a:r>
           </a:p>
           <a:p>
             <a:pPr lvl="3"/>
             <a:r>
-              <a:rPr lang="en-US"/>
+              <a:rPr lang="en-US" smtClean="0"/>
               <a:t>Fourth level</a:t>
             </a:r>
           </a:p>
           <a:p>
             <a:pPr lvl="4"/>
             <a:r>
-              <a:rPr lang="en-US"/>
+              <a:rPr lang="en-US" smtClean="0"/>
               <a:t>Fifth level</a:t>
             </a:r>
+            <a:endParaRPr lang="en-US"/>
           </a:p>
         </p:txBody>
       </p:sp>
@@ -2247,7 +2246,7 @@
           <a:p>
             <a:pPr lvl="0"/>
             <a:r>
-              <a:rPr lang="en-US"/>
+              <a:rPr lang="en-US" smtClean="0"/>
               <a:t>Click to edit Master text styles</a:t>
             </a:r>
           </a:p>
@@ -2270,7 +2269,7 @@
           <a:p>
             <a:fld id="{5BCAD085-E8A6-8845-BD4E-CB4CCA059FC4}" type="datetimeFigureOut">
               <a:rPr lang="en-US" smtClean="0"/>
-              <a:t>8/25/2026</a:t>
+              <a:t>1/27/13</a:t>
             </a:fld>
             <a:endParaRPr lang="en-US"/>
           </a:p>
@@ -2373,9 +2372,10 @@
           </a:lstStyle>
           <a:p>
             <a:r>
-              <a:rPr lang="en-US"/>
+              <a:rPr lang="en-US" smtClean="0"/>
               <a:t>Click to edit Master title style</a:t>
             </a:r>
+            <a:endParaRPr lang="en-US"/>
           </a:p>
         </p:txBody>
       </p:sp>
@@ -2499,7 +2499,7 @@
           <a:p>
             <a:pPr lvl="0"/>
             <a:r>
-              <a:rPr lang="en-US"/>
+              <a:rPr lang="en-US" smtClean="0"/>
               <a:t>Click to edit Master text styles</a:t>
             </a:r>
           </a:p>
@@ -2522,7 +2522,7 @@
           <a:p>
             <a:fld id="{5BCAD085-E8A6-8845-BD4E-CB4CCA059FC4}" type="datetimeFigureOut">
               <a:rPr lang="en-US" smtClean="0"/>
-              <a:t>8/25/2026</a:t>
+              <a:t>1/27/13</a:t>
             </a:fld>
             <a:endParaRPr lang="en-US"/>
           </a:p>
@@ -2631,9 +2631,10 @@
           <a:lstStyle/>
           <a:p>
             <a:r>
-              <a:rPr lang="en-US"/>
+              <a:rPr lang="en-US" smtClean="0"/>
               <a:t>Click to edit Master title style</a:t>
             </a:r>
+            <a:endParaRPr lang="en-US"/>
           </a:p>
         </p:txBody>
       </p:sp>
@@ -2664,37 +2665,38 @@
           <a:p>
             <a:pPr lvl="0"/>
             <a:r>
-              <a:rPr lang="en-US"/>
+              <a:rPr lang="en-US" smtClean="0"/>
               <a:t>Click to edit Master text styles</a:t>
             </a:r>
           </a:p>
           <a:p>
             <a:pPr lvl="1"/>
             <a:r>
-              <a:rPr lang="en-US"/>
+              <a:rPr lang="en-US" smtClean="0"/>
               <a:t>Second level</a:t>
             </a:r>
           </a:p>
           <a:p>
             <a:pPr lvl="2"/>
             <a:r>
-              <a:rPr lang="en-US"/>
+              <a:rPr lang="en-US" smtClean="0"/>
               <a:t>Third level</a:t>
             </a:r>
           </a:p>
           <a:p>
             <a:pPr lvl="3"/>
             <a:r>
-              <a:rPr lang="en-US"/>
+              <a:rPr lang="en-US" smtClean="0"/>
               <a:t>Fourth level</a:t>
             </a:r>
           </a:p>
           <a:p>
             <a:pPr lvl="4"/>
             <a:r>
-              <a:rPr lang="en-US"/>
+              <a:rPr lang="en-US" smtClean="0"/>
               <a:t>Fifth level</a:t>
             </a:r>
+            <a:endParaRPr lang="en-US"/>
           </a:p>
         </p:txBody>
       </p:sp>
@@ -2733,7 +2735,7 @@
           <a:p>
             <a:fld id="{5BCAD085-E8A6-8845-BD4E-CB4CCA059FC4}" type="datetimeFigureOut">
               <a:rPr lang="en-US" smtClean="0"/>
-              <a:t>8/25/2026</a:t>
+              <a:t>1/27/13</a:t>
             </a:fld>
             <a:endParaRPr lang="en-US"/>
           </a:p>
@@ -3092,7 +3094,7 @@
 </file>
 
 <file path=ppt/slides/slide1.xml><?xml version="1.0" encoding="utf-8"?>
-<p:sld xmlns:a="http://schemas.openxmlformats.org/drawingml/2006/main" xmlns:r="http://schemas.openxmlformats.org/officeDocument/2006/relationships" xmlns:p="http://schemas.openxmlformats.org/presentationml/2006/main">
+<p:sld xmlns:a="http://schemas.openxmlformats.org/drawingml/2006/main" xmlns:p="http://schemas.openxmlformats.org/presentationml/2006/main" xmlns:r="http://schemas.openxmlformats.org/officeDocument/2006/relationships">
   <p:cSld>
     <p:bg>
       <p:bgPr>
@@ -3108,14 +3110,7 @@
         <p:cNvGrpSpPr/>
         <p:nvPr/>
       </p:nvGrpSpPr>
-      <p:grpSpPr>
-        <a:xfrm>
-          <a:off x="0" y="0"/>
-          <a:ext cx="0" cy="0"/>
-          <a:chOff x="0" y="0"/>
-          <a:chExt cx="0" cy="0"/>
-        </a:xfrm>
-      </p:grpSpPr>
+      <p:grpSpPr/>
       <p:sp>
         <p:nvSpPr>
           <p:cNvPr id="2" name="TextBox 1"/>
@@ -3168,13 +3163,7 @@
           <p:cNvGraphicFramePr>
             <a:graphicFrameLocks noGrp="1"/>
           </p:cNvGraphicFramePr>
-          <p:nvPr>
-            <p:extLst>
-              <p:ext uri="{D42A27DB-BD31-4B8C-83A1-F6EECF244321}">
-                <p14:modId xmlns:p14="http://schemas.microsoft.com/office/powerpoint/2010/main" val="2557416190"/>
-              </p:ext>
-            </p:extLst>
-          </p:nvPr>
+          <p:nvPr/>
         </p:nvGraphicFramePr>
         <p:xfrm>
           <a:off x="548640" y="2834640"/>
@@ -3187,25 +3176,13 @@
                 <a:tableStyleId>{5C22544A-7EE6-4342-B048-85BDC9FD1C3A}</a:tableStyleId>
               </a:tblPr>
               <a:tblGrid>
-                <a:gridCol w="3401568">
-                  <a:extLst>
-                    <a:ext uri="{9D8B030D-6E8A-4147-A177-3AD203B41FA5}">
-                      <a16:colId xmlns:a16="http://schemas.microsoft.com/office/drawing/2014/main" val="20000"/>
-                    </a:ext>
-                  </a:extLst>
-                </a:gridCol>
-                <a:gridCol w="2267712">
-                  <a:extLst>
-                    <a:ext uri="{9D8B030D-6E8A-4147-A177-3AD203B41FA5}">
-                      <a16:colId xmlns:a16="http://schemas.microsoft.com/office/drawing/2014/main" val="20001"/>
-                    </a:ext>
-                  </a:extLst>
-                </a:gridCol>
+                <a:gridCol w="3401568"/>
+                <a:gridCol w="2267712"/>
               </a:tblGrid>
               <a:tr h="434340">
                 <a:tc>
                   <a:txBody>
-                    <a:bodyPr/>
+                    <a:bodyPr wrap="square"/>
                     <a:lstStyle/>
                     <a:p>
                       <a:pPr algn="l"/>
@@ -3228,7 +3205,7 @@
                 </a:tc>
                 <a:tc>
                   <a:txBody>
-                    <a:bodyPr/>
+                    <a:bodyPr wrap="square"/>
                     <a:lstStyle/>
                     <a:p>
                       <a:pPr algn="ctr"/>
@@ -3249,180 +3226,150 @@
                     </a:solidFill>
                   </a:tcPr>
                 </a:tc>
-                <a:extLst>
-                  <a:ext uri="{0D108BD9-81ED-4DB2-BD59-A6C34878D82A}">
-                    <a16:rowId xmlns:a16="http://schemas.microsoft.com/office/drawing/2014/main" val="10000"/>
-                  </a:ext>
-                </a:extLst>
               </a:tr>
               <a:tr h="434340">
                 <a:tc>
                   <a:txBody>
-                    <a:bodyPr/>
+                    <a:bodyPr wrap="square"/>
                     <a:lstStyle/>
                     <a:p>
                       <a:pPr algn="l"/>
                       <a:r>
-                        <a:rPr lang="en-US" sz="1400" dirty="0"/>
-                        <a:t>Ze'ev </a:t>
-                      </a:r>
-                      <a:r>
-                        <a:rPr lang="en-US" sz="1400" dirty="0" err="1"/>
-                        <a:t>Gastevert</a:t>
-                      </a:r>
-                      <a:endParaRPr sz="1400" b="0" i="0" dirty="0">
-                        <a:solidFill>
-                          <a:srgbClr val="000000"/>
-                        </a:solidFill>
-                        <a:latin typeface="Calibri"/>
-                      </a:endParaRPr>
-                    </a:p>
-                  </a:txBody>
-                  <a:tcPr>
-                    <a:solidFill>
-                      <a:srgbClr val="FFFFFF"/>
-                    </a:solidFill>
-                  </a:tcPr>
-                </a:tc>
-                <a:tc>
-                  <a:txBody>
-                    <a:bodyPr/>
+                        <a:rPr sz="1400" b="0" i="0">
+                          <a:solidFill>
+                            <a:srgbClr val="000000"/>
+                          </a:solidFill>
+                          <a:latin typeface="Calibri"/>
+                        </a:rPr>
+                        <a:t>&lt;NAME 1&gt;</a:t>
+                      </a:r>
+                    </a:p>
+                  </a:txBody>
+                  <a:tcPr>
+                    <a:solidFill>
+                      <a:srgbClr val="FFFFFF"/>
+                    </a:solidFill>
+                  </a:tcPr>
+                </a:tc>
+                <a:tc>
+                  <a:txBody>
+                    <a:bodyPr wrap="square"/>
                     <a:lstStyle/>
                     <a:p>
                       <a:pPr algn="ctr"/>
                       <a:r>
-                        <a:rPr lang="en-US" sz="1400" dirty="0"/>
-                        <a:t>—</a:t>
-                      </a:r>
-                      <a:endParaRPr sz="1400" b="0" i="0" dirty="0">
-                        <a:solidFill>
-                          <a:srgbClr val="000000"/>
-                        </a:solidFill>
-                        <a:latin typeface="Calibri"/>
-                      </a:endParaRPr>
-                    </a:p>
-                  </a:txBody>
-                  <a:tcPr>
-                    <a:solidFill>
-                      <a:srgbClr val="FFFFFF"/>
-                    </a:solidFill>
-                  </a:tcPr>
-                </a:tc>
-                <a:extLst>
-                  <a:ext uri="{0D108BD9-81ED-4DB2-BD59-A6C34878D82A}">
-                    <a16:rowId xmlns:a16="http://schemas.microsoft.com/office/drawing/2014/main" val="10001"/>
-                  </a:ext>
-                </a:extLst>
+                        <a:rPr sz="1400" b="0" i="0">
+                          <a:solidFill>
+                            <a:srgbClr val="000000"/>
+                          </a:solidFill>
+                          <a:latin typeface="Calibri"/>
+                        </a:rPr>
+                        <a:t>&lt;ID 1&gt;</a:t>
+                      </a:r>
+                    </a:p>
+                  </a:txBody>
+                  <a:tcPr>
+                    <a:solidFill>
+                      <a:srgbClr val="FFFFFF"/>
+                    </a:solidFill>
+                  </a:tcPr>
+                </a:tc>
               </a:tr>
               <a:tr h="434340">
                 <a:tc>
                   <a:txBody>
-                    <a:bodyPr/>
+                    <a:bodyPr wrap="square"/>
                     <a:lstStyle/>
                     <a:p>
                       <a:pPr algn="l"/>
                       <a:r>
-                        <a:rPr lang="en-US" sz="1400" dirty="0"/>
-                        <a:t>Ido Leibowitz</a:t>
-                      </a:r>
-                      <a:endParaRPr sz="1400" b="0" i="0" dirty="0">
-                        <a:solidFill>
-                          <a:srgbClr val="000000"/>
-                        </a:solidFill>
-                        <a:latin typeface="Calibri"/>
-                      </a:endParaRPr>
-                    </a:p>
-                  </a:txBody>
-                  <a:tcPr>
-                    <a:solidFill>
-                      <a:srgbClr val="FFFFFF"/>
-                    </a:solidFill>
-                  </a:tcPr>
-                </a:tc>
-                <a:tc>
-                  <a:txBody>
-                    <a:bodyPr/>
+                        <a:rPr sz="1400" b="0" i="0">
+                          <a:solidFill>
+                            <a:srgbClr val="000000"/>
+                          </a:solidFill>
+                          <a:latin typeface="Calibri"/>
+                        </a:rPr>
+                        <a:t>&lt;NAME 2&gt;</a:t>
+                      </a:r>
+                    </a:p>
+                  </a:txBody>
+                  <a:tcPr>
+                    <a:solidFill>
+                      <a:srgbClr val="FFFFFF"/>
+                    </a:solidFill>
+                  </a:tcPr>
+                </a:tc>
+                <a:tc>
+                  <a:txBody>
+                    <a:bodyPr wrap="square"/>
                     <a:lstStyle/>
                     <a:p>
                       <a:pPr algn="ctr"/>
                       <a:r>
-                        <a:rPr lang="en-US" sz="1400" dirty="0"/>
-                        <a:t>—</a:t>
-                      </a:r>
-                      <a:endParaRPr sz="1400" b="0" i="0" dirty="0">
-                        <a:solidFill>
-                          <a:srgbClr val="000000"/>
-                        </a:solidFill>
-                        <a:latin typeface="Calibri"/>
-                      </a:endParaRPr>
-                    </a:p>
-                  </a:txBody>
-                  <a:tcPr>
-                    <a:solidFill>
-                      <a:srgbClr val="FFFFFF"/>
-                    </a:solidFill>
-                  </a:tcPr>
-                </a:tc>
-                <a:extLst>
-                  <a:ext uri="{0D108BD9-81ED-4DB2-BD59-A6C34878D82A}">
-                    <a16:rowId xmlns:a16="http://schemas.microsoft.com/office/drawing/2014/main" val="10002"/>
-                  </a:ext>
-                </a:extLst>
+                        <a:rPr sz="1400" b="0" i="0">
+                          <a:solidFill>
+                            <a:srgbClr val="000000"/>
+                          </a:solidFill>
+                          <a:latin typeface="Calibri"/>
+                        </a:rPr>
+                        <a:t>&lt;ID 2&gt;</a:t>
+                      </a:r>
+                    </a:p>
+                  </a:txBody>
+                  <a:tcPr>
+                    <a:solidFill>
+                      <a:srgbClr val="FFFFFF"/>
+                    </a:solidFill>
+                  </a:tcPr>
+                </a:tc>
               </a:tr>
               <a:tr h="434340">
                 <a:tc>
                   <a:txBody>
-                    <a:bodyPr/>
+                    <a:bodyPr wrap="square"/>
                     <a:lstStyle/>
                     <a:p>
                       <a:pPr algn="l"/>
                       <a:r>
-                        <a:rPr lang="en-US" sz="1400" dirty="0"/>
-                        <a:t>David Sheinenzon</a:t>
-                      </a:r>
-                      <a:endParaRPr sz="1400" b="0" i="0" dirty="0">
-                        <a:solidFill>
-                          <a:srgbClr val="000000"/>
-                        </a:solidFill>
-                        <a:latin typeface="Calibri"/>
-                      </a:endParaRPr>
-                    </a:p>
-                  </a:txBody>
-                  <a:tcPr>
-                    <a:solidFill>
-                      <a:srgbClr val="FFFFFF"/>
-                    </a:solidFill>
-                  </a:tcPr>
-                </a:tc>
-                <a:tc>
-                  <a:txBody>
-                    <a:bodyPr/>
+                        <a:rPr sz="1400" b="0" i="0">
+                          <a:solidFill>
+                            <a:srgbClr val="000000"/>
+                          </a:solidFill>
+                          <a:latin typeface="Calibri"/>
+                        </a:rPr>
+                        <a:t>&lt;NAME 3&gt;</a:t>
+                      </a:r>
+                    </a:p>
+                  </a:txBody>
+                  <a:tcPr>
+                    <a:solidFill>
+                      <a:srgbClr val="FFFFFF"/>
+                    </a:solidFill>
+                  </a:tcPr>
+                </a:tc>
+                <a:tc>
+                  <a:txBody>
+                    <a:bodyPr wrap="square"/>
                     <a:lstStyle/>
                     <a:p>
                       <a:pPr algn="ctr"/>
                       <a:r>
-                        <a:rPr lang="en-US" sz="1400" dirty="0"/>
-                        <a:t>—</a:t>
-                      </a:r>
-                      <a:endParaRPr sz="1400" b="0" i="0" dirty="0">
-                        <a:solidFill>
-                          <a:srgbClr val="000000"/>
-                        </a:solidFill>
-                        <a:latin typeface="Calibri"/>
-                      </a:endParaRPr>
-                    </a:p>
-                  </a:txBody>
-                  <a:tcPr>
-                    <a:solidFill>
-                      <a:srgbClr val="FFFFFF"/>
-                    </a:solidFill>
-                  </a:tcPr>
-                </a:tc>
-                <a:extLst>
-                  <a:ext uri="{0D108BD9-81ED-4DB2-BD59-A6C34878D82A}">
-                    <a16:rowId xmlns:a16="http://schemas.microsoft.com/office/drawing/2014/main" val="10003"/>
-                  </a:ext>
-                </a:extLst>
+                        <a:rPr sz="1400" b="0" i="0">
+                          <a:solidFill>
+                            <a:srgbClr val="000000"/>
+                          </a:solidFill>
+                          <a:latin typeface="Calibri"/>
+                        </a:rPr>
+                        <a:t>&lt;ID 3&gt;</a:t>
+                      </a:r>
+                    </a:p>
+                  </a:txBody>
+                  <a:tcPr>
+                    <a:solidFill>
+                      <a:srgbClr val="FFFFFF"/>
+                    </a:solidFill>
+                  </a:tcPr>
+                </a:tc>
               </a:tr>
             </a:tbl>
           </a:graphicData>
@@ -3437,7 +3384,7 @@
         <p:spPr>
           <a:xfrm>
             <a:off x="6766560" y="2834640"/>
-            <a:ext cx="4846320" cy="979755"/>
+            <a:ext cx="4846320" cy="2011680"/>
           </a:xfrm>
           <a:prstGeom prst="rect">
             <a:avLst/>
@@ -3449,9 +3396,7 @@
             <a:spAutoFit/>
           </a:bodyPr>
           <a:lstStyle/>
-          <a:p>
-            <a:endParaRPr dirty="0"/>
-          </a:p>
+          <a:p/>
           <a:p>
             <a:pPr>
               <a:spcAft>
@@ -3459,7 +3404,7 @@
               </a:spcAft>
             </a:pPr>
             <a:r>
-              <a:rPr sz="1400" b="1" i="0" dirty="0">
+              <a:rPr sz="1400" b="1" i="0">
                 <a:solidFill>
                   <a:srgbClr val="000000"/>
                 </a:solidFill>
@@ -3468,19 +3413,14 @@
               <a:t>Code: </a:t>
             </a:r>
             <a:r>
-              <a:rPr lang="en-US" sz="1400" dirty="0">
+              <a:rPr sz="1400" b="0" i="0">
                 <a:solidFill>
                   <a:srgbClr val="555555"/>
                 </a:solidFill>
-              </a:rPr>
-              <a:t>https://github.com/DavidShenzi/unext-project</a:t>
-            </a:r>
-            <a:endParaRPr sz="1400" b="0" i="0" dirty="0">
-              <a:solidFill>
-                <a:srgbClr val="555555"/>
-              </a:solidFill>
-              <a:latin typeface="Calibri"/>
-            </a:endParaRPr>
+                <a:latin typeface="Calibri"/>
+              </a:rPr>
+              <a:t>&lt;GITHUB / DRIVE LINK&gt;</a:t>
+            </a:r>
           </a:p>
           <a:p>
             <a:pPr>
@@ -3489,7 +3429,7 @@
               </a:spcAft>
             </a:pPr>
             <a:r>
-              <a:rPr sz="1400" b="1" i="0" dirty="0">
+              <a:rPr sz="1400" b="1" i="0">
                 <a:solidFill>
                   <a:srgbClr val="000000"/>
                 </a:solidFill>
@@ -3498,7 +3438,7 @@
               <a:t>Video: </a:t>
             </a:r>
             <a:r>
-              <a:rPr sz="1400" b="0" i="0" dirty="0">
+              <a:rPr sz="1400" b="0" i="0">
                 <a:solidFill>
                   <a:srgbClr val="555555"/>
                 </a:solidFill>
@@ -3518,7 +3458,7 @@
         <p:spPr>
           <a:xfrm>
             <a:off x="548640" y="6199632"/>
-            <a:ext cx="11094415" cy="276999"/>
+            <a:ext cx="11094415" cy="457200"/>
           </a:xfrm>
           <a:prstGeom prst="rect">
             <a:avLst/>
@@ -3531,12 +3471,15 @@
           </a:bodyPr>
           <a:lstStyle/>
           <a:p>
-            <a:endParaRPr sz="1200" b="0" i="1" dirty="0">
-              <a:solidFill>
-                <a:srgbClr val="555555"/>
-              </a:solidFill>
-              <a:latin typeface="Calibri"/>
-            </a:endParaRPr>
+            <a:r>
+              <a:rPr sz="1200" b="0" i="1">
+                <a:solidFill>
+                  <a:srgbClr val="555555"/>
+                </a:solidFill>
+                <a:latin typeface="Calibri"/>
+              </a:rPr>
+              <a:t>Fill in all placeholders before submitting — missing items are penalised. Paste the video link in this slide's comment section as well.</a:t>
+            </a:r>
           </a:p>
         </p:txBody>
       </p:sp>
@@ -3549,7 +3492,7 @@
 </file>
 
 <file path=ppt/slides/slide10.xml><?xml version="1.0" encoding="utf-8"?>
-<p:sld xmlns:a="http://schemas.openxmlformats.org/drawingml/2006/main" xmlns:r="http://schemas.openxmlformats.org/officeDocument/2006/relationships" xmlns:p="http://schemas.openxmlformats.org/presentationml/2006/main">
+<p:sld xmlns:a="http://schemas.openxmlformats.org/drawingml/2006/main" xmlns:p="http://schemas.openxmlformats.org/presentationml/2006/main" xmlns:r="http://schemas.openxmlformats.org/officeDocument/2006/relationships">
   <p:cSld>
     <p:bg>
       <p:bgPr>
@@ -3565,14 +3508,7 @@
         <p:cNvGrpSpPr/>
         <p:nvPr/>
       </p:nvGrpSpPr>
-      <p:grpSpPr>
-        <a:xfrm>
-          <a:off x="0" y="0"/>
-          <a:ext cx="0" cy="0"/>
-          <a:chOff x="0" y="0"/>
-          <a:chExt cx="0" cy="0"/>
-        </a:xfrm>
-      </p:grpSpPr>
+      <p:grpSpPr/>
       <p:sp>
         <p:nvSpPr>
           <p:cNvPr id="2" name="TextBox 1"/>
@@ -3602,7 +3538,7 @@
                 </a:solidFill>
                 <a:latin typeface="Calibri"/>
               </a:rPr>
-              <a:t>Architectural modifications: a negative result</a:t>
+              <a:t>Four modifications, measured against the right yardstick</a:t>
             </a:r>
           </a:p>
           <a:p>
@@ -3613,7 +3549,7 @@
                 </a:solidFill>
                 <a:latin typeface="Calibri"/>
               </a:rPr>
-              <a:t>Both grafted onto our best model and fine-tuned with the backbone frozen</a:t>
+              <a:t>Two grafted onto our best model, two trained from scratch — all on strong augmentation</a:t>
             </a:r>
           </a:p>
         </p:txBody>
@@ -3627,8 +3563,8 @@
           <p:nvPr/>
         </p:nvGraphicFramePr>
         <p:xfrm>
-          <a:off x="548640" y="1508760"/>
-          <a:ext cx="10607039" cy="2011680"/>
+          <a:off x="548640" y="1463040"/>
+          <a:ext cx="10881360" cy="2286000"/>
         </p:xfrm>
         <a:graphic>
           <a:graphicData uri="http://schemas.openxmlformats.org/drawingml/2006/table">
@@ -3637,59 +3573,45 @@
                 <a:tableStyleId>{5C22544A-7EE6-4342-B048-85BDC9FD1C3A}</a:tableStyleId>
               </a:tblPr>
               <a:tblGrid>
-                <a:gridCol w="2677505">
-                  <a:extLst>
-                    <a:ext uri="{9D8B030D-6E8A-4147-A177-3AD203B41FA5}">
-                      <a16:colId xmlns:a16="http://schemas.microsoft.com/office/drawing/2014/main" val="20000"/>
-                    </a:ext>
-                  </a:extLst>
-                </a:gridCol>
-                <a:gridCol w="2368562">
-                  <a:extLst>
-                    <a:ext uri="{9D8B030D-6E8A-4147-A177-3AD203B41FA5}">
-                      <a16:colId xmlns:a16="http://schemas.microsoft.com/office/drawing/2014/main" val="20001"/>
-                    </a:ext>
-                  </a:extLst>
-                </a:gridCol>
-                <a:gridCol w="2883467">
-                  <a:extLst>
-                    <a:ext uri="{9D8B030D-6E8A-4147-A177-3AD203B41FA5}">
-                      <a16:colId xmlns:a16="http://schemas.microsoft.com/office/drawing/2014/main" val="20002"/>
-                    </a:ext>
-                  </a:extLst>
-                </a:gridCol>
-                <a:gridCol w="2677505">
-                  <a:extLst>
-                    <a:ext uri="{9D8B030D-6E8A-4147-A177-3AD203B41FA5}">
-                      <a16:colId xmlns:a16="http://schemas.microsoft.com/office/drawing/2014/main" val="20003"/>
-                    </a:ext>
-                  </a:extLst>
-                </a:gridCol>
+                <a:gridCol w="1920240"/>
+                <a:gridCol w="1691640"/>
+                <a:gridCol w="1691640"/>
+                <a:gridCol w="1691640"/>
+                <a:gridCol w="1920240"/>
+                <a:gridCol w="1965960"/>
               </a:tblGrid>
-              <a:tr h="402336">
-                <a:tc>
-                  <a:txBody>
-                    <a:bodyPr/>
+              <a:tr h="381000">
+                <a:tc>
+                  <a:txBody>
+                    <a:bodyPr wrap="square"/>
                     <a:lstStyle/>
                     <a:p>
                       <a:pPr algn="l"/>
-                      <a:endParaRPr/>
-                    </a:p>
-                  </a:txBody>
-                  <a:tcPr>
-                    <a:solidFill>
-                      <a:srgbClr val="FFFFFF"/>
-                    </a:solidFill>
-                  </a:tcPr>
-                </a:tc>
-                <a:tc>
-                  <a:txBody>
-                    <a:bodyPr/>
+                      <a:r>
+                        <a:rPr sz="1100" b="1" i="0">
+                          <a:solidFill>
+                            <a:srgbClr val="000000"/>
+                          </a:solidFill>
+                          <a:latin typeface="Calibri"/>
+                        </a:rPr>
+                        <a:t/>
+                      </a:r>
+                    </a:p>
+                  </a:txBody>
+                  <a:tcPr>
+                    <a:solidFill>
+                      <a:srgbClr val="FFFFFF"/>
+                    </a:solidFill>
+                  </a:tcPr>
+                </a:tc>
+                <a:tc>
+                  <a:txBody>
+                    <a:bodyPr wrap="square"/>
                     <a:lstStyle/>
                     <a:p>
                       <a:pPr algn="ctr"/>
                       <a:r>
-                        <a:rPr sz="1250" b="1" i="0">
+                        <a:rPr sz="1100" b="1" i="0">
                           <a:solidFill>
                             <a:srgbClr val="000000"/>
                           </a:solidFill>
@@ -3707,12 +3629,12 @@
                 </a:tc>
                 <a:tc>
                   <a:txBody>
-                    <a:bodyPr/>
+                    <a:bodyPr wrap="square"/>
                     <a:lstStyle/>
                     <a:p>
                       <a:pPr algn="ctr"/>
                       <a:r>
-                        <a:rPr sz="1250" b="1" i="0">
+                        <a:rPr sz="1100" b="1" i="0">
                           <a:solidFill>
                             <a:srgbClr val="000000"/>
                           </a:solidFill>
@@ -3730,42 +3652,83 @@
                 </a:tc>
                 <a:tc>
                   <a:txBody>
-                    <a:bodyPr/>
+                    <a:bodyPr wrap="square"/>
                     <a:lstStyle/>
                     <a:p>
                       <a:pPr algn="ctr"/>
                       <a:r>
-                        <a:rPr sz="1250" b="1" i="0">
-                          <a:solidFill>
-                            <a:srgbClr val="000000"/>
-                          </a:solidFill>
-                          <a:latin typeface="Calibri"/>
-                        </a:rPr>
-                        <a:t>Focal Tversky loss</a:t>
-                      </a:r>
-                    </a:p>
-                  </a:txBody>
-                  <a:tcPr>
-                    <a:solidFill>
-                      <a:srgbClr val="FFFFFF"/>
-                    </a:solidFill>
-                  </a:tcPr>
-                </a:tc>
-                <a:extLst>
-                  <a:ext uri="{0D108BD9-81ED-4DB2-BD59-A6C34878D82A}">
-                    <a16:rowId xmlns:a16="http://schemas.microsoft.com/office/drawing/2014/main" val="10000"/>
-                  </a:ext>
-                </a:extLst>
+                        <a:rPr sz="1100" b="1" i="0">
+                          <a:solidFill>
+                            <a:srgbClr val="000000"/>
+                          </a:solidFill>
+                          <a:latin typeface="Calibri"/>
+                        </a:rPr>
+                        <a:t>Focal Tversky</a:t>
+                      </a:r>
+                    </a:p>
+                  </a:txBody>
+                  <a:tcPr>
+                    <a:solidFill>
+                      <a:srgbClr val="FFFFFF"/>
+                    </a:solidFill>
+                  </a:tcPr>
+                </a:tc>
+                <a:tc>
+                  <a:txBody>
+                    <a:bodyPr wrap="square"/>
+                    <a:lstStyle/>
+                    <a:p>
+                      <a:pPr algn="ctr"/>
+                      <a:r>
+                        <a:rPr sz="1100" b="1" i="0">
+                          <a:solidFill>
+                            <a:srgbClr val="000000"/>
+                          </a:solidFill>
+                          <a:latin typeface="Calibri"/>
+                        </a:rPr>
+                        <a:t>Boundary gate</a:t>
+                      </a:r>
+                    </a:p>
+                  </a:txBody>
+                  <a:tcPr>
+                    <a:solidFill>
+                      <a:srgbClr val="FFFFFF"/>
+                    </a:solidFill>
+                  </a:tcPr>
+                </a:tc>
+                <a:tc>
+                  <a:txBody>
+                    <a:bodyPr wrap="square"/>
+                    <a:lstStyle/>
+                    <a:p>
+                      <a:pPr algn="ctr"/>
+                      <a:r>
+                        <a:rPr sz="1100" b="1" i="0">
+                          <a:solidFill>
+                            <a:srgbClr val="000000"/>
+                          </a:solidFill>
+                          <a:latin typeface="Calibri"/>
+                        </a:rPr>
+                        <a:t>Wavelet mixer</a:t>
+                      </a:r>
+                    </a:p>
+                  </a:txBody>
+                  <a:tcPr>
+                    <a:solidFill>
+                      <a:srgbClr val="FFFFFF"/>
+                    </a:solidFill>
+                  </a:tcPr>
+                </a:tc>
               </a:tr>
-              <a:tr h="402336">
-                <a:tc>
-                  <a:txBody>
-                    <a:bodyPr/>
+              <a:tr h="381000">
+                <a:tc>
+                  <a:txBody>
+                    <a:bodyPr wrap="square"/>
                     <a:lstStyle/>
                     <a:p>
                       <a:pPr algn="l"/>
                       <a:r>
-                        <a:rPr sz="1250" b="0" i="0">
+                        <a:rPr sz="1100" b="0" i="0">
                           <a:solidFill>
                             <a:srgbClr val="000000"/>
                           </a:solidFill>
@@ -3783,157 +3746,199 @@
                 </a:tc>
                 <a:tc>
                   <a:txBody>
-                    <a:bodyPr/>
+                    <a:bodyPr wrap="square"/>
                     <a:lstStyle/>
                     <a:p>
                       <a:pPr algn="ctr"/>
                       <a:r>
-                        <a:rPr sz="1250" b="0" i="0">
-                          <a:solidFill>
-                            <a:srgbClr val="000000"/>
-                          </a:solidFill>
-                          <a:latin typeface="Calibri"/>
-                        </a:rPr>
-                        <a:t>per-channel gating</a:t>
-                      </a:r>
-                    </a:p>
-                  </a:txBody>
-                  <a:tcPr>
-                    <a:solidFill>
-                      <a:srgbClr val="FFFFFF"/>
-                    </a:solidFill>
-                  </a:tcPr>
-                </a:tc>
-                <a:tc>
-                  <a:txBody>
-                    <a:bodyPr/>
+                        <a:rPr sz="1100" b="0" i="0">
+                          <a:solidFill>
+                            <a:srgbClr val="000000"/>
+                          </a:solidFill>
+                          <a:latin typeface="Calibri"/>
+                        </a:rPr>
+                        <a:t>channel gating</a:t>
+                      </a:r>
+                    </a:p>
+                  </a:txBody>
+                  <a:tcPr>
+                    <a:solidFill>
+                      <a:srgbClr val="FFFFFF"/>
+                    </a:solidFill>
+                  </a:tcPr>
+                </a:tc>
+                <a:tc>
+                  <a:txBody>
+                    <a:bodyPr wrap="square"/>
                     <a:lstStyle/>
                     <a:p>
                       <a:pPr algn="ctr"/>
                       <a:r>
-                        <a:rPr sz="1250" b="0" i="0">
-                          <a:solidFill>
-                            <a:srgbClr val="000000"/>
-                          </a:solidFill>
-                          <a:latin typeface="Calibri"/>
-                        </a:rPr>
-                        <a:t>gate on skip connections</a:t>
-                      </a:r>
-                    </a:p>
-                  </a:txBody>
-                  <a:tcPr>
-                    <a:solidFill>
-                      <a:srgbClr val="FFFFFF"/>
-                    </a:solidFill>
-                  </a:tcPr>
-                </a:tc>
-                <a:tc>
-                  <a:txBody>
-                    <a:bodyPr/>
+                        <a:rPr sz="1100" b="0" i="0">
+                          <a:solidFill>
+                            <a:srgbClr val="000000"/>
+                          </a:solidFill>
+                          <a:latin typeface="Calibri"/>
+                        </a:rPr>
+                        <a:t>gate on skips</a:t>
+                      </a:r>
+                    </a:p>
+                  </a:txBody>
+                  <a:tcPr>
+                    <a:solidFill>
+                      <a:srgbClr val="FFFFFF"/>
+                    </a:solidFill>
+                  </a:tcPr>
+                </a:tc>
+                <a:tc>
+                  <a:txBody>
+                    <a:bodyPr wrap="square"/>
                     <a:lstStyle/>
                     <a:p>
                       <a:pPr algn="ctr"/>
                       <a:r>
-                        <a:rPr sz="1250" b="0" i="0">
-                          <a:solidFill>
-                            <a:srgbClr val="000000"/>
-                          </a:solidFill>
-                          <a:latin typeface="Calibri"/>
-                        </a:rPr>
-                        <a:t>the loss function</a:t>
-                      </a:r>
-                    </a:p>
-                  </a:txBody>
-                  <a:tcPr>
-                    <a:solidFill>
-                      <a:srgbClr val="FFFFFF"/>
-                    </a:solidFill>
-                  </a:tcPr>
-                </a:tc>
-                <a:extLst>
-                  <a:ext uri="{0D108BD9-81ED-4DB2-BD59-A6C34878D82A}">
-                    <a16:rowId xmlns:a16="http://schemas.microsoft.com/office/drawing/2014/main" val="10001"/>
-                  </a:ext>
-                </a:extLst>
+                        <a:rPr sz="1100" b="0" i="0">
+                          <a:solidFill>
+                            <a:srgbClr val="000000"/>
+                          </a:solidFill>
+                          <a:latin typeface="Calibri"/>
+                        </a:rPr>
+                        <a:t>the loss</a:t>
+                      </a:r>
+                    </a:p>
+                  </a:txBody>
+                  <a:tcPr>
+                    <a:solidFill>
+                      <a:srgbClr val="FFFFFF"/>
+                    </a:solidFill>
+                  </a:tcPr>
+                </a:tc>
+                <a:tc>
+                  <a:txBody>
+                    <a:bodyPr wrap="square"/>
+                    <a:lstStyle/>
+                    <a:p>
+                      <a:pPr algn="ctr"/>
+                      <a:r>
+                        <a:rPr sz="1100" b="0" i="0">
+                          <a:solidFill>
+                            <a:srgbClr val="000000"/>
+                          </a:solidFill>
+                          <a:latin typeface="Calibri"/>
+                        </a:rPr>
+                        <a:t>gate on skips,
+edge-aware</a:t>
+                      </a:r>
+                    </a:p>
+                  </a:txBody>
+                  <a:tcPr>
+                    <a:solidFill>
+                      <a:srgbClr val="FFFFFF"/>
+                    </a:solidFill>
+                  </a:tcPr>
+                </a:tc>
+                <a:tc>
+                  <a:txBody>
+                    <a:bodyPr wrap="square"/>
+                    <a:lstStyle/>
+                    <a:p>
+                      <a:pPr algn="ctr"/>
+                      <a:r>
+                        <a:rPr sz="1100" b="0" i="0">
+                          <a:solidFill>
+                            <a:srgbClr val="000000"/>
+                          </a:solidFill>
+                          <a:latin typeface="Calibri"/>
+                        </a:rPr>
+                        <a:t>the token mixer</a:t>
+                      </a:r>
+                    </a:p>
+                  </a:txBody>
+                  <a:tcPr>
+                    <a:solidFill>
+                      <a:srgbClr val="FFFFFF"/>
+                    </a:solidFill>
+                  </a:tcPr>
+                </a:tc>
               </a:tr>
-              <a:tr h="402336">
-                <a:tc>
-                  <a:txBody>
-                    <a:bodyPr/>
+              <a:tr h="381000">
+                <a:tc>
+                  <a:txBody>
+                    <a:bodyPr wrap="square"/>
                     <a:lstStyle/>
                     <a:p>
                       <a:pPr algn="l"/>
                       <a:r>
-                        <a:rPr sz="1250" b="0" i="0">
-                          <a:solidFill>
-                            <a:srgbClr val="000000"/>
-                          </a:solidFill>
-                          <a:latin typeface="Calibri"/>
-                        </a:rPr>
-                        <a:t>New parameters</a:t>
-                      </a:r>
-                    </a:p>
-                  </a:txBody>
-                  <a:tcPr>
-                    <a:solidFill>
-                      <a:srgbClr val="FFFFFF"/>
-                    </a:solidFill>
-                  </a:tcPr>
-                </a:tc>
-                <a:tc>
-                  <a:txBody>
-                    <a:bodyPr/>
+                        <a:rPr sz="1100" b="0" i="0">
+                          <a:solidFill>
+                            <a:srgbClr val="000000"/>
+                          </a:solidFill>
+                          <a:latin typeface="Calibri"/>
+                        </a:rPr>
+                        <a:t>Parameters</a:t>
+                      </a:r>
+                    </a:p>
+                  </a:txBody>
+                  <a:tcPr>
+                    <a:solidFill>
+                      <a:srgbClr val="FFFFFF"/>
+                    </a:solidFill>
+                  </a:tcPr>
+                </a:tc>
+                <a:tc>
+                  <a:txBody>
+                    <a:bodyPr wrap="square"/>
                     <a:lstStyle/>
                     <a:p>
                       <a:pPr algn="ctr"/>
                       <a:r>
-                        <a:rPr sz="1250" b="0" i="0">
-                          <a:solidFill>
-                            <a:srgbClr val="000000"/>
-                          </a:solidFill>
-                          <a:latin typeface="Calibri"/>
-                        </a:rPr>
-                        <a:t>8,160 (0.55%)</a:t>
-                      </a:r>
-                    </a:p>
-                  </a:txBody>
-                  <a:tcPr>
-                    <a:solidFill>
-                      <a:srgbClr val="FFFFFF"/>
-                    </a:solidFill>
-                  </a:tcPr>
-                </a:tc>
-                <a:tc>
-                  <a:txBody>
-                    <a:bodyPr/>
+                        <a:rPr sz="1100" b="0" i="0">
+                          <a:solidFill>
+                            <a:srgbClr val="000000"/>
+                          </a:solidFill>
+                          <a:latin typeface="Calibri"/>
+                        </a:rPr>
+                        <a:t>+0.55%</a:t>
+                      </a:r>
+                    </a:p>
+                  </a:txBody>
+                  <a:tcPr>
+                    <a:solidFill>
+                      <a:srgbClr val="FFFFFF"/>
+                    </a:solidFill>
+                  </a:tcPr>
+                </a:tc>
+                <a:tc>
+                  <a:txBody>
+                    <a:bodyPr wrap="square"/>
                     <a:lstStyle/>
                     <a:p>
                       <a:pPr algn="ctr"/>
                       <a:r>
-                        <a:rPr sz="1250" b="0" i="0">
-                          <a:solidFill>
-                            <a:srgbClr val="000000"/>
-                          </a:solidFill>
-                          <a:latin typeface="Calibri"/>
-                        </a:rPr>
-                        <a:t>86,864 (5.57%)</a:t>
-                      </a:r>
-                    </a:p>
-                  </a:txBody>
-                  <a:tcPr>
-                    <a:solidFill>
-                      <a:srgbClr val="FFFFFF"/>
-                    </a:solidFill>
-                  </a:tcPr>
-                </a:tc>
-                <a:tc>
-                  <a:txBody>
-                    <a:bodyPr/>
+                        <a:rPr sz="1100" b="0" i="0">
+                          <a:solidFill>
+                            <a:srgbClr val="000000"/>
+                          </a:solidFill>
+                          <a:latin typeface="Calibri"/>
+                        </a:rPr>
+                        <a:t>+5.90%</a:t>
+                      </a:r>
+                    </a:p>
+                  </a:txBody>
+                  <a:tcPr>
+                    <a:solidFill>
+                      <a:srgbClr val="FFFFFF"/>
+                    </a:solidFill>
+                  </a:tcPr>
+                </a:tc>
+                <a:tc>
+                  <a:txBody>
+                    <a:bodyPr wrap="square"/>
                     <a:lstStyle/>
                     <a:p>
                       <a:pPr algn="ctr"/>
                       <a:r>
-                        <a:rPr sz="1250" b="1" i="0">
+                        <a:rPr sz="1100" b="0" i="0">
                           <a:solidFill>
                             <a:srgbClr val="000000"/>
                           </a:solidFill>
@@ -3949,44 +3954,85 @@
                     </a:solidFill>
                   </a:tcPr>
                 </a:tc>
-                <a:extLst>
-                  <a:ext uri="{0D108BD9-81ED-4DB2-BD59-A6C34878D82A}">
-                    <a16:rowId xmlns:a16="http://schemas.microsoft.com/office/drawing/2014/main" val="10002"/>
-                  </a:ext>
-                </a:extLst>
+                <a:tc>
+                  <a:txBody>
+                    <a:bodyPr wrap="square"/>
+                    <a:lstStyle/>
+                    <a:p>
+                      <a:pPr algn="ctr"/>
+                      <a:r>
+                        <a:rPr sz="1100" b="0" i="0">
+                          <a:solidFill>
+                            <a:srgbClr val="000000"/>
+                          </a:solidFill>
+                          <a:latin typeface="Calibri"/>
+                        </a:rPr>
+                        <a:t>+8.8%</a:t>
+                      </a:r>
+                    </a:p>
+                  </a:txBody>
+                  <a:tcPr>
+                    <a:solidFill>
+                      <a:srgbClr val="FFFFFF"/>
+                    </a:solidFill>
+                  </a:tcPr>
+                </a:tc>
+                <a:tc>
+                  <a:txBody>
+                    <a:bodyPr wrap="square"/>
+                    <a:lstStyle/>
+                    <a:p>
+                      <a:pPr algn="ctr"/>
+                      <a:r>
+                        <a:rPr sz="1100" b="0" i="0">
+                          <a:solidFill>
+                            <a:srgbClr val="000000"/>
+                          </a:solidFill>
+                          <a:latin typeface="Calibri"/>
+                        </a:rPr>
+                        <a:t>+1.43%</a:t>
+                      </a:r>
+                    </a:p>
+                  </a:txBody>
+                  <a:tcPr>
+                    <a:solidFill>
+                      <a:srgbClr val="FFFFFF"/>
+                    </a:solidFill>
+                  </a:tcPr>
+                </a:tc>
               </a:tr>
-              <a:tr h="402336">
-                <a:tc>
-                  <a:txBody>
-                    <a:bodyPr/>
+              <a:tr h="381000">
+                <a:tc>
+                  <a:txBody>
+                    <a:bodyPr wrap="square"/>
                     <a:lstStyle/>
                     <a:p>
                       <a:pPr algn="l"/>
                       <a:r>
-                        <a:rPr sz="1250" b="0" i="0">
-                          <a:solidFill>
-                            <a:srgbClr val="000000"/>
-                          </a:solidFill>
-                          <a:latin typeface="Calibri"/>
-                        </a:rPr>
-                        <a:t>Extra compute</a:t>
-                      </a:r>
-                    </a:p>
-                  </a:txBody>
-                  <a:tcPr>
-                    <a:solidFill>
-                      <a:srgbClr val="FFFFFF"/>
-                    </a:solidFill>
-                  </a:tcPr>
-                </a:tc>
-                <a:tc>
-                  <a:txBody>
-                    <a:bodyPr/>
+                        <a:rPr sz="1100" b="0" i="0">
+                          <a:solidFill>
+                            <a:srgbClr val="000000"/>
+                          </a:solidFill>
+                          <a:latin typeface="Calibri"/>
+                        </a:rPr>
+                        <a:t>GFLOPs</a:t>
+                      </a:r>
+                    </a:p>
+                  </a:txBody>
+                  <a:tcPr>
+                    <a:solidFill>
+                      <a:srgbClr val="FFFFFF"/>
+                    </a:solidFill>
+                  </a:tcPr>
+                </a:tc>
+                <a:tc>
+                  <a:txBody>
+                    <a:bodyPr wrap="square"/>
                     <a:lstStyle/>
                     <a:p>
                       <a:pPr algn="ctr"/>
                       <a:r>
-                        <a:rPr sz="1250" b="0" i="0">
+                        <a:rPr sz="1100" b="0" i="0">
                           <a:solidFill>
                             <a:srgbClr val="000000"/>
                           </a:solidFill>
@@ -4004,35 +4050,35 @@
                 </a:tc>
                 <a:tc>
                   <a:txBody>
-                    <a:bodyPr/>
+                    <a:bodyPr wrap="square"/>
                     <a:lstStyle/>
                     <a:p>
                       <a:pPr algn="ctr"/>
                       <a:r>
-                        <a:rPr sz="1250" b="0" i="0">
-                          <a:solidFill>
-                            <a:srgbClr val="000000"/>
-                          </a:solidFill>
-                          <a:latin typeface="Calibri"/>
-                        </a:rPr>
-                        <a:t>+11% GFLOPs</a:t>
-                      </a:r>
-                    </a:p>
-                  </a:txBody>
-                  <a:tcPr>
-                    <a:solidFill>
-                      <a:srgbClr val="FFFFFF"/>
-                    </a:solidFill>
-                  </a:tcPr>
-                </a:tc>
-                <a:tc>
-                  <a:txBody>
-                    <a:bodyPr/>
+                        <a:rPr sz="1100" b="0" i="0">
+                          <a:solidFill>
+                            <a:srgbClr val="000000"/>
+                          </a:solidFill>
+                          <a:latin typeface="Calibri"/>
+                        </a:rPr>
+                        <a:t>+11%</a:t>
+                      </a:r>
+                    </a:p>
+                  </a:txBody>
+                  <a:tcPr>
+                    <a:solidFill>
+                      <a:srgbClr val="FFFFFF"/>
+                    </a:solidFill>
+                  </a:tcPr>
+                </a:tc>
+                <a:tc>
+                  <a:txBody>
+                    <a:bodyPr wrap="square"/>
                     <a:lstStyle/>
                     <a:p>
                       <a:pPr algn="ctr"/>
                       <a:r>
-                        <a:rPr sz="1250" b="1" i="0">
+                        <a:rPr sz="1100" b="0" i="0">
                           <a:solidFill>
                             <a:srgbClr val="000000"/>
                           </a:solidFill>
@@ -4048,21 +4094,62 @@
                     </a:solidFill>
                   </a:tcPr>
                 </a:tc>
-                <a:extLst>
-                  <a:ext uri="{0D108BD9-81ED-4DB2-BD59-A6C34878D82A}">
-                    <a16:rowId xmlns:a16="http://schemas.microsoft.com/office/drawing/2014/main" val="10003"/>
-                  </a:ext>
-                </a:extLst>
+                <a:tc>
+                  <a:txBody>
+                    <a:bodyPr wrap="square"/>
+                    <a:lstStyle/>
+                    <a:p>
+                      <a:pPr algn="ctr"/>
+                      <a:r>
+                        <a:rPr sz="1100" b="0" i="0">
+                          <a:solidFill>
+                            <a:srgbClr val="000000"/>
+                          </a:solidFill>
+                          <a:latin typeface="Calibri"/>
+                        </a:rPr>
+                        <a:t>+16%</a:t>
+                      </a:r>
+                    </a:p>
+                  </a:txBody>
+                  <a:tcPr>
+                    <a:solidFill>
+                      <a:srgbClr val="FFFFFF"/>
+                    </a:solidFill>
+                  </a:tcPr>
+                </a:tc>
+                <a:tc>
+                  <a:txBody>
+                    <a:bodyPr wrap="square"/>
+                    <a:lstStyle/>
+                    <a:p>
+                      <a:pPr algn="ctr"/>
+                      <a:r>
+                        <a:rPr sz="1100" b="1" i="0">
+                          <a:solidFill>
+                            <a:srgbClr val="000000"/>
+                          </a:solidFill>
+                          <a:latin typeface="Calibri"/>
+                        </a:rPr>
+                        <a:t>-9%</a:t>
+                      </a:r>
+                    </a:p>
+                  </a:txBody>
+                  <a:tcPr>
+                    <a:solidFill>
+                      <a:srgbClr val="FFFFFF"/>
+                    </a:solidFill>
+                  </a:tcPr>
+                </a:tc>
               </a:tr>
-              <a:tr h="402336">
-                <a:tc>
-                  <a:txBody>
-                    <a:bodyPr/>
+              <a:tr h="381000">
+                <a:tc>
+                  <a:txBody>
+                    <a:bodyPr wrap="square"/>
                     <a:lstStyle/>
                     <a:p>
                       <a:pPr algn="l"/>
                       <a:r>
-                        <a:rPr sz="1250" b="1" i="0">
+                        <a:rPr sz="1100" b="1" i="0">
                           <a:solidFill>
                             <a:srgbClr val="000000"/>
                           </a:solidFill>
@@ -4080,12 +4167,12 @@
                 </a:tc>
                 <a:tc>
                   <a:txBody>
-                    <a:bodyPr/>
+                    <a:bodyPr wrap="square"/>
                     <a:lstStyle/>
                     <a:p>
                       <a:pPr algn="ctr"/>
                       <a:r>
-                        <a:rPr sz="1250" b="1" i="0">
+                        <a:rPr sz="1100" b="1" i="0">
                           <a:solidFill>
                             <a:srgbClr val="000000"/>
                           </a:solidFill>
@@ -4103,55 +4190,236 @@
                 </a:tc>
                 <a:tc>
                   <a:txBody>
-                    <a:bodyPr/>
+                    <a:bodyPr wrap="square"/>
                     <a:lstStyle/>
                     <a:p>
                       <a:pPr algn="ctr"/>
                       <a:r>
-                        <a:rPr sz="1250" b="1" i="0">
-                          <a:solidFill>
-                            <a:srgbClr val="000000"/>
-                          </a:solidFill>
-                          <a:latin typeface="Calibri"/>
-                        </a:rPr>
-                        <a:t>+0.006  (1 split)</a:t>
-                      </a:r>
-                    </a:p>
-                  </a:txBody>
-                  <a:tcPr>
-                    <a:solidFill>
-                      <a:srgbClr val="FFFFFF"/>
-                    </a:solidFill>
-                  </a:tcPr>
-                </a:tc>
-                <a:tc>
-                  <a:txBody>
-                    <a:bodyPr/>
+                        <a:rPr sz="1100" b="1" i="0">
+                          <a:solidFill>
+                            <a:srgbClr val="000000"/>
+                          </a:solidFill>
+                          <a:latin typeface="Calibri"/>
+                        </a:rPr>
+                        <a:t>+0.002</a:t>
+                      </a:r>
+                    </a:p>
+                  </a:txBody>
+                  <a:tcPr>
+                    <a:solidFill>
+                      <a:srgbClr val="FFFFFF"/>
+                    </a:solidFill>
+                  </a:tcPr>
+                </a:tc>
+                <a:tc>
+                  <a:txBody>
+                    <a:bodyPr wrap="square"/>
                     <a:lstStyle/>
                     <a:p>
                       <a:pPr algn="ctr"/>
                       <a:r>
-                        <a:rPr sz="1250" b="1" i="0">
-                          <a:solidFill>
-                            <a:srgbClr val="000000"/>
-                          </a:solidFill>
-                          <a:latin typeface="Calibri"/>
-                        </a:rPr>
-                        <a:t>+0.013  (3 splits)</a:t>
-                      </a:r>
-                    </a:p>
-                  </a:txBody>
-                  <a:tcPr>
-                    <a:solidFill>
-                      <a:srgbClr val="FFFFFF"/>
-                    </a:solidFill>
-                  </a:tcPr>
-                </a:tc>
-                <a:extLst>
-                  <a:ext uri="{0D108BD9-81ED-4DB2-BD59-A6C34878D82A}">
-                    <a16:rowId xmlns:a16="http://schemas.microsoft.com/office/drawing/2014/main" val="10004"/>
-                  </a:ext>
-                </a:extLst>
+                        <a:rPr sz="1100" b="1" i="0">
+                          <a:solidFill>
+                            <a:srgbClr val="000000"/>
+                          </a:solidFill>
+                          <a:latin typeface="Calibri"/>
+                        </a:rPr>
+                        <a:t>+0.005</a:t>
+                      </a:r>
+                    </a:p>
+                  </a:txBody>
+                  <a:tcPr>
+                    <a:solidFill>
+                      <a:srgbClr val="FFFFFF"/>
+                    </a:solidFill>
+                  </a:tcPr>
+                </a:tc>
+                <a:tc>
+                  <a:txBody>
+                    <a:bodyPr wrap="square"/>
+                    <a:lstStyle/>
+                    <a:p>
+                      <a:pPr algn="ctr"/>
+                      <a:r>
+                        <a:rPr sz="1100" b="1" i="0">
+                          <a:solidFill>
+                            <a:srgbClr val="000000"/>
+                          </a:solidFill>
+                          <a:latin typeface="Calibri"/>
+                        </a:rPr>
+                        <a:t>+0.004</a:t>
+                      </a:r>
+                    </a:p>
+                  </a:txBody>
+                  <a:tcPr>
+                    <a:solidFill>
+                      <a:srgbClr val="FFFFFF"/>
+                    </a:solidFill>
+                  </a:tcPr>
+                </a:tc>
+                <a:tc>
+                  <a:txBody>
+                    <a:bodyPr wrap="square"/>
+                    <a:lstStyle/>
+                    <a:p>
+                      <a:pPr algn="ctr"/>
+                      <a:r>
+                        <a:rPr sz="1100" b="1" i="0">
+                          <a:solidFill>
+                            <a:srgbClr val="000000"/>
+                          </a:solidFill>
+                          <a:latin typeface="Calibri"/>
+                        </a:rPr>
+                        <a:t>-0.001</a:t>
+                      </a:r>
+                    </a:p>
+                  </a:txBody>
+                  <a:tcPr>
+                    <a:solidFill>
+                      <a:srgbClr val="FFFFFF"/>
+                    </a:solidFill>
+                  </a:tcPr>
+                </a:tc>
+              </a:tr>
+              <a:tr h="381000">
+                <a:tc>
+                  <a:txBody>
+                    <a:bodyPr wrap="square"/>
+                    <a:lstStyle/>
+                    <a:p>
+                      <a:pPr algn="l"/>
+                      <a:r>
+                        <a:rPr sz="1100" b="0" i="0">
+                          <a:solidFill>
+                            <a:srgbClr val="000000"/>
+                          </a:solidFill>
+                          <a:latin typeface="Calibri"/>
+                        </a:rPr>
+                        <a:t>Paired runs</a:t>
+                      </a:r>
+                    </a:p>
+                  </a:txBody>
+                  <a:tcPr>
+                    <a:solidFill>
+                      <a:srgbClr val="FFFFFF"/>
+                    </a:solidFill>
+                  </a:tcPr>
+                </a:tc>
+                <a:tc>
+                  <a:txBody>
+                    <a:bodyPr wrap="square"/>
+                    <a:lstStyle/>
+                    <a:p>
+                      <a:pPr algn="ctr"/>
+                      <a:r>
+                        <a:rPr sz="1100" b="0" i="0">
+                          <a:solidFill>
+                            <a:srgbClr val="000000"/>
+                          </a:solidFill>
+                          <a:latin typeface="Calibri"/>
+                        </a:rPr>
+                        <a:t>1</a:t>
+                      </a:r>
+                    </a:p>
+                  </a:txBody>
+                  <a:tcPr>
+                    <a:solidFill>
+                      <a:srgbClr val="FFFFFF"/>
+                    </a:solidFill>
+                  </a:tcPr>
+                </a:tc>
+                <a:tc>
+                  <a:txBody>
+                    <a:bodyPr wrap="square"/>
+                    <a:lstStyle/>
+                    <a:p>
+                      <a:pPr algn="ctr"/>
+                      <a:r>
+                        <a:rPr sz="1100" b="0" i="0">
+                          <a:solidFill>
+                            <a:srgbClr val="000000"/>
+                          </a:solidFill>
+                          <a:latin typeface="Calibri"/>
+                        </a:rPr>
+                        <a:t>1</a:t>
+                      </a:r>
+                    </a:p>
+                  </a:txBody>
+                  <a:tcPr>
+                    <a:solidFill>
+                      <a:srgbClr val="FFFFFF"/>
+                    </a:solidFill>
+                  </a:tcPr>
+                </a:tc>
+                <a:tc>
+                  <a:txBody>
+                    <a:bodyPr wrap="square"/>
+                    <a:lstStyle/>
+                    <a:p>
+                      <a:pPr algn="ctr"/>
+                      <a:r>
+                        <a:rPr sz="1100" b="0" i="0">
+                          <a:solidFill>
+                            <a:srgbClr val="000000"/>
+                          </a:solidFill>
+                          <a:latin typeface="Calibri"/>
+                        </a:rPr>
+                        <a:t>6</a:t>
+                      </a:r>
+                    </a:p>
+                  </a:txBody>
+                  <a:tcPr>
+                    <a:solidFill>
+                      <a:srgbClr val="FFFFFF"/>
+                    </a:solidFill>
+                  </a:tcPr>
+                </a:tc>
+                <a:tc>
+                  <a:txBody>
+                    <a:bodyPr wrap="square"/>
+                    <a:lstStyle/>
+                    <a:p>
+                      <a:pPr algn="ctr"/>
+                      <a:r>
+                        <a:rPr sz="1100" b="0" i="0">
+                          <a:solidFill>
+                            <a:srgbClr val="000000"/>
+                          </a:solidFill>
+                          <a:latin typeface="Calibri"/>
+                        </a:rPr>
+                        <a:t>3</a:t>
+                      </a:r>
+                    </a:p>
+                  </a:txBody>
+                  <a:tcPr>
+                    <a:solidFill>
+                      <a:srgbClr val="FFFFFF"/>
+                    </a:solidFill>
+                  </a:tcPr>
+                </a:tc>
+                <a:tc>
+                  <a:txBody>
+                    <a:bodyPr wrap="square"/>
+                    <a:lstStyle/>
+                    <a:p>
+                      <a:pPr algn="ctr"/>
+                      <a:r>
+                        <a:rPr sz="1100" b="0" i="0">
+                          <a:solidFill>
+                            <a:srgbClr val="000000"/>
+                          </a:solidFill>
+                          <a:latin typeface="Calibri"/>
+                        </a:rPr>
+                        <a:t>3</a:t>
+                      </a:r>
+                    </a:p>
+                  </a:txBody>
+                  <a:tcPr>
+                    <a:solidFill>
+                      <a:srgbClr val="FFFFFF"/>
+                    </a:solidFill>
+                  </a:tcPr>
+                </a:tc>
               </a:tr>
             </a:tbl>
           </a:graphicData>
@@ -4165,8 +4433,8 @@
         </p:nvSpPr>
         <p:spPr>
           <a:xfrm>
-            <a:off x="548640" y="3749039"/>
-            <a:ext cx="11094415" cy="2651761"/>
+            <a:off x="548640" y="3977639"/>
+            <a:ext cx="11094415" cy="2423161"/>
           </a:xfrm>
           <a:prstGeom prst="rect">
             <a:avLst/>
@@ -4181,112 +4449,76 @@
           <a:p>
             <a:pPr>
               <a:spcAft>
-                <a:spcPts val="700"/>
+                <a:spcPts val="600"/>
               </a:spcAft>
             </a:pPr>
             <a:r>
-              <a:rPr sz="1350" b="1" i="0">
-                <a:solidFill>
-                  <a:srgbClr val="000000"/>
-                </a:solidFill>
-                <a:latin typeface="Calibri"/>
-              </a:rPr>
-              <a:t>The two architectural changes barely moved the number.</a:t>
-            </a:r>
-            <a:r>
-              <a:rPr sz="1350" b="0" i="0">
-                <a:solidFill>
-                  <a:srgbClr val="000000"/>
-                </a:solidFill>
-                <a:latin typeface="Calibri"/>
-              </a:rPr>
-              <a:t> Skip-Fusion's +0.006 is half our split-to-split noise (±0.013) — and costs 11% more compute on a network whose entire selling point is efficiency.</a:t>
+              <a:rPr sz="1300" b="1" i="0">
+                <a:solidFill>
+                  <a:srgbClr val="000000"/>
+                </a:solidFill>
+                <a:latin typeface="Calibri"/>
+              </a:rPr>
+              <a:t>Not one of them clears 0.011 IoU — and 0.011 is what we get by changing the random seed alone.</a:t>
+            </a:r>
+            <a:r>
+              <a:rPr sz="1300" b="0" i="0">
+                <a:solidFill>
+                  <a:srgbClr val="000000"/>
+                </a:solidFill>
+                <a:latin typeface="Calibri"/>
+              </a:rPr>
+              <a:t> Six pairs of identical configurations, differing only in initialisation, disagree by 0.0107 on average (range 0.003–0.019).</a:t>
             </a:r>
           </a:p>
           <a:p>
             <a:pPr>
               <a:spcAft>
-                <a:spcPts val="700"/>
+                <a:spcPts val="600"/>
               </a:spcAft>
             </a:pPr>
             <a:r>
-              <a:rPr sz="1350" b="1" i="0">
-                <a:solidFill>
-                  <a:srgbClr val="000000"/>
-                </a:solidFill>
-                <a:latin typeface="Calibri"/>
-              </a:rPr>
-              <a:t>Why they failed is the interesting part.</a:t>
-            </a:r>
-            <a:r>
-              <a:rPr sz="1350" b="0" i="0">
-                <a:solidFill>
-                  <a:srgbClr val="000000"/>
-                </a:solidFill>
-                <a:latin typeface="Calibri"/>
-              </a:rPr>
-              <a:t> We measured the gradient reaching each new layer: SE received </a:t>
-            </a:r>
-            <a:r>
-              <a:rPr sz="1350" b="1" i="0">
-                <a:solidFill>
-                  <a:srgbClr val="000000"/>
-                </a:solidFill>
-                <a:latin typeface="Calibri"/>
-              </a:rPr>
-              <a:t>exactly 0.000000</a:t>
-            </a:r>
-            <a:r>
-              <a:rPr sz="1350" b="0" i="0">
-                <a:solidFill>
-                  <a:srgbClr val="000000"/>
-                </a:solidFill>
-                <a:latin typeface="Calibri"/>
-              </a:rPr>
-              <a:t> — on a converged model the network has no use for channel reweighting. Skip-Fusion received real signal (1e-3), and did slightly better.</a:t>
+              <a:rPr sz="1300" b="1" i="0">
+                <a:solidFill>
+                  <a:srgbClr val="000000"/>
+                </a:solidFill>
+                <a:latin typeface="Calibri"/>
+              </a:rPr>
+              <a:t>So the honest verdict is: none of these architectural changes does anything we can measure.</a:t>
+            </a:r>
+            <a:r>
+              <a:rPr sz="1300" b="0" i="0">
+                <a:solidFill>
+                  <a:srgbClr val="000000"/>
+                </a:solidFill>
+                <a:latin typeface="Calibri"/>
+              </a:rPr>
+              <a:t> Two of them cost 11–16% more compute to achieve it.</a:t>
             </a:r>
           </a:p>
           <a:p>
             <a:pPr>
               <a:spcAft>
-                <a:spcPts val="700"/>
+                <a:spcPts val="600"/>
               </a:spcAft>
             </a:pPr>
             <a:r>
-              <a:rPr sz="1350" b="1" i="0">
-                <a:solidFill>
-                  <a:srgbClr val="000000"/>
-                </a:solidFill>
-                <a:latin typeface="Calibri"/>
-              </a:rPr>
-              <a:t>The change that worked best altered no layers at all</a:t>
-            </a:r>
-            <a:r>
-              <a:rPr sz="1350" b="0" i="0">
-                <a:solidFill>
-                  <a:srgbClr val="000000"/>
-                </a:solidFill>
-                <a:latin typeface="Calibri"/>
-              </a:rPr>
-              <a:t> — swapping Dice for Focal Tversky in the loss raised IoU by +0.013 across three splits, for </a:t>
-            </a:r>
-            <a:r>
-              <a:rPr sz="1350" b="1" i="0">
-                <a:solidFill>
-                  <a:srgbClr val="000000"/>
-                </a:solidFill>
-                <a:latin typeface="Calibri"/>
-              </a:rPr>
-              <a:t>zero parameters and zero FLOPs</a:t>
-            </a:r>
-            <a:r>
-              <a:rPr sz="1350" b="0" i="0">
-                <a:solidFill>
-                  <a:srgbClr val="000000"/>
-                </a:solidFill>
-                <a:latin typeface="Calibri"/>
-              </a:rPr>
-              <a:t> (next slide).</a:t>
+              <a:rPr sz="1300" b="1" i="0">
+                <a:solidFill>
+                  <a:srgbClr val="000000"/>
+                </a:solidFill>
+                <a:latin typeface="Calibri"/>
+              </a:rPr>
+              <a:t>The exception is the wavelet mixer — it is the only one that makes the network cheaper.</a:t>
+            </a:r>
+            <a:r>
+              <a:rPr sz="1300" b="0" i="0">
+                <a:solidFill>
+                  <a:srgbClr val="000000"/>
+                </a:solidFill>
+                <a:latin typeface="Calibri"/>
+              </a:rPr>
+              <a:t> Same accuracy, 9% fewer FLOPs. That is where the next two slides go.</a:t>
             </a:r>
           </a:p>
         </p:txBody>
@@ -4300,7 +4532,7 @@
 </file>
 
 <file path=ppt/slides/slide11.xml><?xml version="1.0" encoding="utf-8"?>
-<p:sld xmlns:a="http://schemas.openxmlformats.org/drawingml/2006/main" xmlns:r="http://schemas.openxmlformats.org/officeDocument/2006/relationships" xmlns:p="http://schemas.openxmlformats.org/presentationml/2006/main">
+<p:sld xmlns:a="http://schemas.openxmlformats.org/drawingml/2006/main" xmlns:p="http://schemas.openxmlformats.org/presentationml/2006/main" xmlns:r="http://schemas.openxmlformats.org/officeDocument/2006/relationships">
   <p:cSld>
     <p:bg>
       <p:bgPr>
@@ -4316,14 +4548,7 @@
         <p:cNvGrpSpPr/>
         <p:nvPr/>
       </p:nvGrpSpPr>
-      <p:grpSpPr>
-        <a:xfrm>
-          <a:off x="0" y="0"/>
-          <a:ext cx="0" cy="0"/>
-          <a:chOff x="0" y="0"/>
-          <a:chExt cx="0" cy="0"/>
-        </a:xfrm>
-      </p:grpSpPr>
+      <p:grpSpPr/>
       <p:sp>
         <p:nvSpPr>
           <p:cNvPr id="2" name="TextBox 1"/>
@@ -4353,7 +4578,7 @@
                 </a:solidFill>
                 <a:latin typeface="Calibri"/>
               </a:rPr>
-              <a:t>The best modification changed no layers at all</a:t>
+              <a:t>The wavelet mixer: same accuracy, 9% less compute</a:t>
             </a:r>
           </a:p>
           <a:p>
@@ -4364,7 +4589,7 @@
                 </a:solidFill>
                 <a:latin typeface="Calibri"/>
               </a:rPr>
-              <a:t>Focal Tversky loss — zero parameters, zero FLOPs</a:t>
+              <a:t>Haar transform in place of the shifted-MLP token mixer</a:t>
             </a:r>
           </a:p>
         </p:txBody>
@@ -4393,69 +4618,51 @@
           <a:p>
             <a:pPr>
               <a:spcAft>
-                <a:spcPts val="1000"/>
+                <a:spcPts val="700"/>
               </a:spcAft>
             </a:pPr>
             <a:r>
-              <a:rPr sz="1500" b="1" i="0">
-                <a:solidFill>
-                  <a:srgbClr val="000000"/>
-                </a:solidFill>
-                <a:latin typeface="Calibri"/>
-              </a:rPr>
-              <a:t>Dice loss treats both errors equally:</a:t>
-            </a:r>
-            <a:r>
-              <a:rPr sz="1500" b="0" i="0">
-                <a:solidFill>
-                  <a:srgbClr val="000000"/>
-                </a:solidFill>
-                <a:latin typeface="Calibri"/>
-              </a:rPr>
-              <a:t> marking healthy tissue as tumour, and missing real tumour. Clinically these are </a:t>
-            </a:r>
-            <a:r>
-              <a:rPr sz="1500" b="1" i="0">
-                <a:solidFill>
-                  <a:srgbClr val="000000"/>
-                </a:solidFill>
-                <a:latin typeface="Calibri"/>
-              </a:rPr>
-              <a:t>not</a:t>
-            </a:r>
-            <a:r>
-              <a:rPr sz="1500" b="0" i="0">
-                <a:solidFill>
-                  <a:srgbClr val="000000"/>
-                </a:solidFill>
-                <a:latin typeface="Calibri"/>
-              </a:rPr>
-              <a:t> equally bad.</a:t>
+              <a:rPr sz="1400" b="1" i="0">
+                <a:solidFill>
+                  <a:srgbClr val="000000"/>
+                </a:solidFill>
+                <a:latin typeface="Calibri"/>
+              </a:rPr>
+              <a:t>The paper's mixer shifts feature channels along one axis, then mixes them with an MLP.</a:t>
+            </a:r>
+            <a:r>
+              <a:rPr sz="1400" b="0" i="0">
+                <a:solidFill>
+                  <a:srgbClr val="000000"/>
+                </a:solidFill>
+                <a:latin typeface="Calibri"/>
+              </a:rPr>
+              <a:t> We replaced it with a Haar wavelet transform: a fixed, invertible split of the feature map into a low-frequency band and three detail bands (horizontal, vertical, diagonal), each processed separately and recombined.</a:t>
             </a:r>
           </a:p>
           <a:p>
             <a:pPr>
               <a:spcAft>
-                <a:spcPts val="1000"/>
+                <a:spcPts val="700"/>
               </a:spcAft>
             </a:pPr>
             <a:r>
-              <a:rPr sz="1500" b="1" i="0">
-                <a:solidFill>
-                  <a:srgbClr val="000000"/>
-                </a:solidFill>
-                <a:latin typeface="Calibri"/>
-              </a:rPr>
-              <a:t>Tversky loss makes the trade-off tunable</a:t>
-            </a:r>
-            <a:r>
-              <a:rPr sz="1500" b="0" i="0">
-                <a:solidFill>
-                  <a:srgbClr val="000000"/>
-                </a:solidFill>
-                <a:latin typeface="Calibri"/>
-              </a:rPr>
-              <a:t> (α=0.3, β=0.7) — missing a lesion is weighted more heavily. The focal term then concentrates training on hard images.</a:t>
+              <a:rPr sz="1400" b="1" i="0">
+                <a:solidFill>
+                  <a:srgbClr val="000000"/>
+                </a:solidFill>
+                <a:latin typeface="Calibri"/>
+              </a:rPr>
+              <a:t>Why we expected it to help:</a:t>
+            </a:r>
+            <a:r>
+              <a:rPr sz="1400" b="0" i="0">
+                <a:solidFill>
+                  <a:srgbClr val="000000"/>
+                </a:solidFill>
+                <a:latin typeface="Calibri"/>
+              </a:rPr>
+              <a:t> ultrasound speckle is high-frequency noise. Separating the bands lets the network attenuate speckle explicitly rather than learning to ignore it.</a:t>
             </a:r>
           </a:p>
         </p:txBody>
@@ -4469,8 +4676,8 @@
           <p:nvPr/>
         </p:nvGraphicFramePr>
         <p:xfrm>
-          <a:off x="548640" y="2514600"/>
-          <a:ext cx="10607039" cy="2651760"/>
+          <a:off x="548640" y="3063240"/>
+          <a:ext cx="10607040" cy="1920240"/>
         </p:xfrm>
         <a:graphic>
           <a:graphicData uri="http://schemas.openxmlformats.org/drawingml/2006/table">
@@ -4479,32 +4686,14 @@
                 <a:tableStyleId>{5C22544A-7EE6-4342-B048-85BDC9FD1C3A}</a:tableStyleId>
               </a:tblPr>
               <a:tblGrid>
-                <a:gridCol w="4435671">
-                  <a:extLst>
-                    <a:ext uri="{9D8B030D-6E8A-4147-A177-3AD203B41FA5}">
-                      <a16:colId xmlns:a16="http://schemas.microsoft.com/office/drawing/2014/main" val="20000"/>
-                    </a:ext>
-                  </a:extLst>
-                </a:gridCol>
-                <a:gridCol w="2892829">
-                  <a:extLst>
-                    <a:ext uri="{9D8B030D-6E8A-4147-A177-3AD203B41FA5}">
-                      <a16:colId xmlns:a16="http://schemas.microsoft.com/office/drawing/2014/main" val="20001"/>
-                    </a:ext>
-                  </a:extLst>
-                </a:gridCol>
-                <a:gridCol w="3278539">
-                  <a:extLst>
-                    <a:ext uri="{9D8B030D-6E8A-4147-A177-3AD203B41FA5}">
-                      <a16:colId xmlns:a16="http://schemas.microsoft.com/office/drawing/2014/main" val="20002"/>
-                    </a:ext>
-                  </a:extLst>
-                </a:gridCol>
+                <a:gridCol w="3840480"/>
+                <a:gridCol w="3291840"/>
+                <a:gridCol w="3474720"/>
               </a:tblGrid>
-              <a:tr h="378822">
-                <a:tc>
-                  <a:txBody>
-                    <a:bodyPr/>
+              <a:tr h="384048">
+                <a:tc>
+                  <a:txBody>
+                    <a:bodyPr wrap="square"/>
                     <a:lstStyle/>
                     <a:p>
                       <a:pPr algn="l"/>
@@ -4515,19 +4704,19 @@
                           </a:solidFill>
                           <a:latin typeface="Calibri"/>
                         </a:rPr>
-                        <a:t>All 3 splits, on top of strong augmentation</a:t>
-                      </a:r>
-                    </a:p>
-                  </a:txBody>
-                  <a:tcPr>
-                    <a:solidFill>
-                      <a:srgbClr val="FFFFFF"/>
-                    </a:solidFill>
-                  </a:tcPr>
-                </a:tc>
-                <a:tc>
-                  <a:txBody>
-                    <a:bodyPr/>
+                        <a:t>3 splits, strong augmentation</a:t>
+                      </a:r>
+                    </a:p>
+                  </a:txBody>
+                  <a:tcPr>
+                    <a:solidFill>
+                      <a:srgbClr val="FFFFFF"/>
+                    </a:solidFill>
+                  </a:tcPr>
+                </a:tc>
+                <a:tc>
+                  <a:txBody>
+                    <a:bodyPr wrap="square"/>
                     <a:lstStyle/>
                     <a:p>
                       <a:pPr algn="ctr"/>
@@ -4538,19 +4727,19 @@
                           </a:solidFill>
                           <a:latin typeface="Calibri"/>
                         </a:rPr>
-                        <a:t>BCE+Dice</a:t>
-                      </a:r>
-                    </a:p>
-                  </a:txBody>
-                  <a:tcPr>
-                    <a:solidFill>
-                      <a:srgbClr val="FFFFFF"/>
-                    </a:solidFill>
-                  </a:tcPr>
-                </a:tc>
-                <a:tc>
-                  <a:txBody>
-                    <a:bodyPr/>
+                        <a:t>Baseline (shifted MLP)</a:t>
+                      </a:r>
+                    </a:p>
+                  </a:txBody>
+                  <a:tcPr>
+                    <a:solidFill>
+                      <a:srgbClr val="FFFFFF"/>
+                    </a:solidFill>
+                  </a:tcPr>
+                </a:tc>
+                <a:tc>
+                  <a:txBody>
+                    <a:bodyPr wrap="square"/>
                     <a:lstStyle/>
                     <a:p>
                       <a:pPr algn="ctr"/>
@@ -4561,26 +4750,21 @@
                           </a:solidFill>
                           <a:latin typeface="Calibri"/>
                         </a:rPr>
-                        <a:t>Focal Tversky</a:t>
-                      </a:r>
-                    </a:p>
-                  </a:txBody>
-                  <a:tcPr>
-                    <a:solidFill>
-                      <a:srgbClr val="FFFFFF"/>
-                    </a:solidFill>
-                  </a:tcPr>
-                </a:tc>
-                <a:extLst>
-                  <a:ext uri="{0D108BD9-81ED-4DB2-BD59-A6C34878D82A}">
-                    <a16:rowId xmlns:a16="http://schemas.microsoft.com/office/drawing/2014/main" val="10000"/>
-                  </a:ext>
-                </a:extLst>
+                        <a:t>Wavelet mixer</a:t>
+                      </a:r>
+                    </a:p>
+                  </a:txBody>
+                  <a:tcPr>
+                    <a:solidFill>
+                      <a:srgbClr val="FFFFFF"/>
+                    </a:solidFill>
+                  </a:tcPr>
+                </a:tc>
               </a:tr>
-              <a:tr h="378822">
-                <a:tc>
-                  <a:txBody>
-                    <a:bodyPr/>
+              <a:tr h="384048">
+                <a:tc>
+                  <a:txBody>
+                    <a:bodyPr wrap="square"/>
                     <a:lstStyle/>
                     <a:p>
                       <a:pPr algn="l"/>
@@ -4591,19 +4775,19 @@
                           </a:solidFill>
                           <a:latin typeface="Calibri"/>
                         </a:rPr>
-                        <a:t>seed 41 / 42 / 43 — best IoU</a:t>
-                      </a:r>
-                    </a:p>
-                  </a:txBody>
-                  <a:tcPr>
-                    <a:solidFill>
-                      <a:srgbClr val="FFFFFF"/>
-                    </a:solidFill>
-                  </a:tcPr>
-                </a:tc>
-                <a:tc>
-                  <a:txBody>
-                    <a:bodyPr/>
+                        <a:t>Best IoU, per split</a:t>
+                      </a:r>
+                    </a:p>
+                  </a:txBody>
+                  <a:tcPr>
+                    <a:solidFill>
+                      <a:srgbClr val="FFFFFF"/>
+                    </a:solidFill>
+                  </a:tcPr>
+                </a:tc>
+                <a:tc>
+                  <a:txBody>
+                    <a:bodyPr wrap="square"/>
                     <a:lstStyle/>
                     <a:p>
                       <a:pPr algn="ctr"/>
@@ -4626,7 +4810,7 @@
                 </a:tc>
                 <a:tc>
                   <a:txBody>
-                    <a:bodyPr/>
+                    <a:bodyPr wrap="square"/>
                     <a:lstStyle/>
                     <a:p>
                       <a:pPr algn="ctr"/>
@@ -4637,26 +4821,21 @@
                           </a:solidFill>
                           <a:latin typeface="Calibri"/>
                         </a:rPr>
-                        <a:t>0.6397 / 0.6359 / 0.6629</a:t>
-                      </a:r>
-                    </a:p>
-                  </a:txBody>
-                  <a:tcPr>
-                    <a:solidFill>
-                      <a:srgbClr val="FFFFFF"/>
-                    </a:solidFill>
-                  </a:tcPr>
-                </a:tc>
-                <a:extLst>
-                  <a:ext uri="{0D108BD9-81ED-4DB2-BD59-A6C34878D82A}">
-                    <a16:rowId xmlns:a16="http://schemas.microsoft.com/office/drawing/2014/main" val="10001"/>
-                  </a:ext>
-                </a:extLst>
+                        <a:t>0.6246 / 0.6226 / 0.6471</a:t>
+                      </a:r>
+                    </a:p>
+                  </a:txBody>
+                  <a:tcPr>
+                    <a:solidFill>
+                      <a:srgbClr val="FFFFFF"/>
+                    </a:solidFill>
+                  </a:tcPr>
+                </a:tc>
               </a:tr>
-              <a:tr h="378822">
-                <a:tc>
-                  <a:txBody>
-                    <a:bodyPr/>
+              <a:tr h="384048">
+                <a:tc>
+                  <a:txBody>
+                    <a:bodyPr wrap="square"/>
                     <a:lstStyle/>
                     <a:p>
                       <a:pPr algn="l"/>
@@ -4667,19 +4846,19 @@
                           </a:solidFill>
                           <a:latin typeface="Calibri"/>
                         </a:rPr>
-                        <a:t>Mean IoU</a:t>
-                      </a:r>
-                    </a:p>
-                  </a:txBody>
-                  <a:tcPr>
-                    <a:solidFill>
-                      <a:srgbClr val="FFFFFF"/>
-                    </a:solidFill>
-                  </a:tcPr>
-                </a:tc>
-                <a:tc>
-                  <a:txBody>
-                    <a:bodyPr/>
+                        <a:t>Mean change in IoU</a:t>
+                      </a:r>
+                    </a:p>
+                  </a:txBody>
+                  <a:tcPr>
+                    <a:solidFill>
+                      <a:srgbClr val="FFFFFF"/>
+                    </a:solidFill>
+                  </a:tcPr>
+                </a:tc>
+                <a:tc>
+                  <a:txBody>
+                    <a:bodyPr wrap="square"/>
                     <a:lstStyle/>
                     <a:p>
                       <a:pPr algn="ctr"/>
@@ -4690,19 +4869,19 @@
                           </a:solidFill>
                           <a:latin typeface="Calibri"/>
                         </a:rPr>
-                        <a:t>0.6328 ± 0.0126</a:t>
-                      </a:r>
-                    </a:p>
-                  </a:txBody>
-                  <a:tcPr>
-                    <a:solidFill>
-                      <a:srgbClr val="FFFFFF"/>
-                    </a:solidFill>
-                  </a:tcPr>
-                </a:tc>
-                <a:tc>
-                  <a:txBody>
-                    <a:bodyPr/>
+                        <a:t>—</a:t>
+                      </a:r>
+                    </a:p>
+                  </a:txBody>
+                  <a:tcPr>
+                    <a:solidFill>
+                      <a:srgbClr val="FFFFFF"/>
+                    </a:solidFill>
+                  </a:tcPr>
+                </a:tc>
+                <a:tc>
+                  <a:txBody>
+                    <a:bodyPr wrap="square"/>
                     <a:lstStyle/>
                     <a:p>
                       <a:pPr algn="ctr"/>
@@ -4713,26 +4892,21 @@
                           </a:solidFill>
                           <a:latin typeface="Calibri"/>
                         </a:rPr>
-                        <a:t>0.6461 ± 0.0146  (+0.013)</a:t>
-                      </a:r>
-                    </a:p>
-                  </a:txBody>
-                  <a:tcPr>
-                    <a:solidFill>
-                      <a:srgbClr val="FFFFFF"/>
-                    </a:solidFill>
-                  </a:tcPr>
-                </a:tc>
-                <a:extLst>
-                  <a:ext uri="{0D108BD9-81ED-4DB2-BD59-A6C34878D82A}">
-                    <a16:rowId xmlns:a16="http://schemas.microsoft.com/office/drawing/2014/main" val="10002"/>
-                  </a:ext>
-                </a:extLst>
+                        <a:t>-0.0014   (p = 0.72)</a:t>
+                      </a:r>
+                    </a:p>
+                  </a:txBody>
+                  <a:tcPr>
+                    <a:solidFill>
+                      <a:srgbClr val="FFFFFF"/>
+                    </a:solidFill>
+                  </a:tcPr>
+                </a:tc>
               </a:tr>
-              <a:tr h="378822">
-                <a:tc>
-                  <a:txBody>
-                    <a:bodyPr/>
+              <a:tr h="384048">
+                <a:tc>
+                  <a:txBody>
+                    <a:bodyPr wrap="square"/>
                     <a:lstStyle/>
                     <a:p>
                       <a:pPr algn="l"/>
@@ -4743,19 +4917,19 @@
                           </a:solidFill>
                           <a:latin typeface="Calibri"/>
                         </a:rPr>
-                        <a:t>Mean Dice</a:t>
-                      </a:r>
-                    </a:p>
-                  </a:txBody>
-                  <a:tcPr>
-                    <a:solidFill>
-                      <a:srgbClr val="FFFFFF"/>
-                    </a:solidFill>
-                  </a:tcPr>
-                </a:tc>
-                <a:tc>
-                  <a:txBody>
-                    <a:bodyPr/>
+                        <a:t>GFLOPs</a:t>
+                      </a:r>
+                    </a:p>
+                  </a:txBody>
+                  <a:tcPr>
+                    <a:solidFill>
+                      <a:srgbClr val="FFFFFF"/>
+                    </a:solidFill>
+                  </a:tcPr>
+                </a:tc>
+                <a:tc>
+                  <a:txBody>
+                    <a:bodyPr wrap="square"/>
                     <a:lstStyle/>
                     <a:p>
                       <a:pPr algn="ctr"/>
@@ -4766,52 +4940,70 @@
                           </a:solidFill>
                           <a:latin typeface="Calibri"/>
                         </a:rPr>
-                        <a:t>0.7718 ± 0.0013</a:t>
-                      </a:r>
-                    </a:p>
-                  </a:txBody>
-                  <a:tcPr>
-                    <a:solidFill>
-                      <a:srgbClr val="FFFFFF"/>
-                    </a:solidFill>
-                  </a:tcPr>
-                </a:tc>
-                <a:tc>
-                  <a:txBody>
-                    <a:bodyPr/>
+                        <a:t>0.577</a:t>
+                      </a:r>
+                    </a:p>
+                  </a:txBody>
+                  <a:tcPr>
+                    <a:solidFill>
+                      <a:srgbClr val="FFFFFF"/>
+                    </a:solidFill>
+                  </a:tcPr>
+                </a:tc>
+                <a:tc>
+                  <a:txBody>
+                    <a:bodyPr wrap="square"/>
                     <a:lstStyle/>
                     <a:p>
                       <a:pPr algn="ctr"/>
                       <a:r>
+                        <a:rPr sz="1200" b="1" i="0">
+                          <a:solidFill>
+                            <a:srgbClr val="000000"/>
+                          </a:solidFill>
+                          <a:latin typeface="Calibri"/>
+                        </a:rPr>
+                        <a:t>0.525   (-9.0%)</a:t>
+                      </a:r>
+                    </a:p>
+                  </a:txBody>
+                  <a:tcPr>
+                    <a:solidFill>
+                      <a:srgbClr val="FFFFFF"/>
+                    </a:solidFill>
+                  </a:tcPr>
+                </a:tc>
+              </a:tr>
+              <a:tr h="384048">
+                <a:tc>
+                  <a:txBody>
+                    <a:bodyPr wrap="square"/>
+                    <a:lstStyle/>
+                    <a:p>
+                      <a:pPr algn="l"/>
+                      <a:r>
                         <a:rPr sz="1200" b="0" i="0">
                           <a:solidFill>
                             <a:srgbClr val="000000"/>
                           </a:solidFill>
                           <a:latin typeface="Calibri"/>
                         </a:rPr>
-                        <a:t>0.7756 ± 0.0054  (+0.004)</a:t>
-                      </a:r>
-                    </a:p>
-                  </a:txBody>
-                  <a:tcPr>
-                    <a:solidFill>
-                      <a:srgbClr val="FFFFFF"/>
-                    </a:solidFill>
-                  </a:tcPr>
-                </a:tc>
-                <a:extLst>
-                  <a:ext uri="{0D108BD9-81ED-4DB2-BD59-A6C34878D82A}">
-                    <a16:rowId xmlns:a16="http://schemas.microsoft.com/office/drawing/2014/main" val="10003"/>
-                  </a:ext>
-                </a:extLst>
-              </a:tr>
-              <a:tr h="378822">
-                <a:tc>
-                  <a:txBody>
-                    <a:bodyPr/>
-                    <a:lstStyle/>
-                    <a:p>
-                      <a:pPr algn="l"/>
+                        <a:t>Parameters</a:t>
+                      </a:r>
+                    </a:p>
+                  </a:txBody>
+                  <a:tcPr>
+                    <a:solidFill>
+                      <a:srgbClr val="FFFFFF"/>
+                    </a:solidFill>
+                  </a:tcPr>
+                </a:tc>
+                <a:tc>
+                  <a:txBody>
+                    <a:bodyPr wrap="square"/>
+                    <a:lstStyle/>
+                    <a:p>
+                      <a:pPr algn="ctr"/>
                       <a:r>
                         <a:rPr sz="1200" b="0" i="0">
                           <a:solidFill>
@@ -4819,19 +5011,19 @@
                           </a:solidFill>
                           <a:latin typeface="Calibri"/>
                         </a:rPr>
-                        <a:t>Recall (of true tumour pixels, fraction found)</a:t>
-                      </a:r>
-                    </a:p>
-                  </a:txBody>
-                  <a:tcPr>
-                    <a:solidFill>
-                      <a:srgbClr val="FFFFFF"/>
-                    </a:solidFill>
-                  </a:tcPr>
-                </a:tc>
-                <a:tc>
-                  <a:txBody>
-                    <a:bodyPr/>
+                        <a:t>1,471,921</a:t>
+                      </a:r>
+                    </a:p>
+                  </a:txBody>
+                  <a:tcPr>
+                    <a:solidFill>
+                      <a:srgbClr val="FFFFFF"/>
+                    </a:solidFill>
+                  </a:tcPr>
+                </a:tc>
+                <a:tc>
+                  <a:txBody>
+                    <a:bodyPr wrap="square"/>
                     <a:lstStyle/>
                     <a:p>
                       <a:pPr algn="ctr"/>
@@ -4842,196 +5034,16 @@
                           </a:solidFill>
                           <a:latin typeface="Calibri"/>
                         </a:rPr>
-                        <a:t>0.7882</a:t>
-                      </a:r>
-                    </a:p>
-                  </a:txBody>
-                  <a:tcPr>
-                    <a:solidFill>
-                      <a:srgbClr val="FFFFFF"/>
-                    </a:solidFill>
-                  </a:tcPr>
-                </a:tc>
-                <a:tc>
-                  <a:txBody>
-                    <a:bodyPr/>
-                    <a:lstStyle/>
-                    <a:p>
-                      <a:pPr algn="ctr"/>
-                      <a:r>
-                        <a:rPr sz="1200" b="1" i="0">
-                          <a:solidFill>
-                            <a:srgbClr val="000000"/>
-                          </a:solidFill>
-                          <a:latin typeface="Calibri"/>
-                        </a:rPr>
-                        <a:t>0.8536  (+0.065)</a:t>
-                      </a:r>
-                    </a:p>
-                  </a:txBody>
-                  <a:tcPr>
-                    <a:solidFill>
-                      <a:srgbClr val="FFFFFF"/>
-                    </a:solidFill>
-                  </a:tcPr>
-                </a:tc>
-                <a:extLst>
-                  <a:ext uri="{0D108BD9-81ED-4DB2-BD59-A6C34878D82A}">
-                    <a16:rowId xmlns:a16="http://schemas.microsoft.com/office/drawing/2014/main" val="10004"/>
-                  </a:ext>
-                </a:extLst>
-              </a:tr>
-              <a:tr h="378822">
-                <a:tc>
-                  <a:txBody>
-                    <a:bodyPr/>
-                    <a:lstStyle/>
-                    <a:p>
-                      <a:pPr algn="l"/>
-                      <a:r>
-                        <a:rPr sz="1200" b="0" i="0">
-                          <a:solidFill>
-                            <a:srgbClr val="000000"/>
-                          </a:solidFill>
-                          <a:latin typeface="Calibri"/>
-                        </a:rPr>
-                        <a:t>Precision (of predicted pixels, fraction correct)</a:t>
-                      </a:r>
-                    </a:p>
-                  </a:txBody>
-                  <a:tcPr>
-                    <a:solidFill>
-                      <a:srgbClr val="FFFFFF"/>
-                    </a:solidFill>
-                  </a:tcPr>
-                </a:tc>
-                <a:tc>
-                  <a:txBody>
-                    <a:bodyPr/>
-                    <a:lstStyle/>
-                    <a:p>
-                      <a:pPr algn="ctr"/>
-                      <a:r>
-                        <a:rPr sz="1200" b="0" i="0">
-                          <a:solidFill>
-                            <a:srgbClr val="000000"/>
-                          </a:solidFill>
-                          <a:latin typeface="Calibri"/>
-                        </a:rPr>
-                        <a:t>0.7928</a:t>
-                      </a:r>
-                    </a:p>
-                  </a:txBody>
-                  <a:tcPr>
-                    <a:solidFill>
-                      <a:srgbClr val="FFFFFF"/>
-                    </a:solidFill>
-                  </a:tcPr>
-                </a:tc>
-                <a:tc>
-                  <a:txBody>
-                    <a:bodyPr/>
-                    <a:lstStyle/>
-                    <a:p>
-                      <a:pPr algn="ctr"/>
-                      <a:r>
-                        <a:rPr sz="1200" b="0" i="0">
-                          <a:solidFill>
-                            <a:srgbClr val="000000"/>
-                          </a:solidFill>
-                          <a:latin typeface="Calibri"/>
-                        </a:rPr>
-                        <a:t>0.7510  (−0.042)</a:t>
-                      </a:r>
-                    </a:p>
-                  </a:txBody>
-                  <a:tcPr>
-                    <a:solidFill>
-                      <a:srgbClr val="FFFFFF"/>
-                    </a:solidFill>
-                  </a:tcPr>
-                </a:tc>
-                <a:extLst>
-                  <a:ext uri="{0D108BD9-81ED-4DB2-BD59-A6C34878D82A}">
-                    <a16:rowId xmlns:a16="http://schemas.microsoft.com/office/drawing/2014/main" val="10005"/>
-                  </a:ext>
-                </a:extLst>
-              </a:tr>
-              <a:tr h="378828">
-                <a:tc>
-                  <a:txBody>
-                    <a:bodyPr/>
-                    <a:lstStyle/>
-                    <a:p>
-                      <a:pPr algn="l"/>
-                      <a:r>
-                        <a:rPr sz="1200" b="0" i="0">
-                          <a:solidFill>
-                            <a:srgbClr val="000000"/>
-                          </a:solidFill>
-                          <a:latin typeface="Calibri"/>
-                        </a:rPr>
-                        <a:t>Parameters / GFLOPs</a:t>
-                      </a:r>
-                    </a:p>
-                  </a:txBody>
-                  <a:tcPr>
-                    <a:solidFill>
-                      <a:srgbClr val="FFFFFF"/>
-                    </a:solidFill>
-                  </a:tcPr>
-                </a:tc>
-                <a:tc>
-                  <a:txBody>
-                    <a:bodyPr/>
-                    <a:lstStyle/>
-                    <a:p>
-                      <a:pPr algn="ctr"/>
-                      <a:r>
-                        <a:rPr sz="1200" b="0" i="0">
-                          <a:solidFill>
-                            <a:srgbClr val="000000"/>
-                          </a:solidFill>
-                          <a:latin typeface="Calibri"/>
-                        </a:rPr>
-                        <a:t>1.47 M / 0.577</a:t>
-                      </a:r>
-                    </a:p>
-                  </a:txBody>
-                  <a:tcPr>
-                    <a:solidFill>
-                      <a:srgbClr val="FFFFFF"/>
-                    </a:solidFill>
-                  </a:tcPr>
-                </a:tc>
-                <a:tc>
-                  <a:txBody>
-                    <a:bodyPr/>
-                    <a:lstStyle/>
-                    <a:p>
-                      <a:pPr algn="ctr"/>
-                      <a:r>
-                        <a:rPr sz="1200" b="1" i="0">
-                          <a:solidFill>
-                            <a:srgbClr val="000000"/>
-                          </a:solidFill>
-                          <a:latin typeface="Calibri"/>
-                        </a:rPr>
-                        <a:t>identical</a:t>
-                      </a:r>
-                    </a:p>
-                  </a:txBody>
-                  <a:tcPr>
-                    <a:solidFill>
-                      <a:srgbClr val="FFFFFF"/>
-                    </a:solidFill>
-                  </a:tcPr>
-                </a:tc>
-                <a:extLst>
-                  <a:ext uri="{0D108BD9-81ED-4DB2-BD59-A6C34878D82A}">
-                    <a16:rowId xmlns:a16="http://schemas.microsoft.com/office/drawing/2014/main" val="10006"/>
-                  </a:ext>
-                </a:extLst>
+                        <a:t>1,493,041  (+1.43%)</a:t>
+                      </a:r>
+                    </a:p>
+                  </a:txBody>
+                  <a:tcPr>
+                    <a:solidFill>
+                      <a:srgbClr val="FFFFFF"/>
+                    </a:solidFill>
+                  </a:tcPr>
+                </a:tc>
               </a:tr>
             </a:tbl>
           </a:graphicData>
@@ -5045,8 +5057,8 @@
         </p:nvSpPr>
         <p:spPr>
           <a:xfrm>
-            <a:off x="548640" y="5349240"/>
-            <a:ext cx="11094415" cy="1051560"/>
+            <a:off x="548640" y="5212080"/>
+            <a:ext cx="11094415" cy="1188720"/>
           </a:xfrm>
           <a:prstGeom prst="rect">
             <a:avLst/>
@@ -5061,7 +5073,7 @@
           <a:p>
             <a:pPr>
               <a:spcAft>
-                <a:spcPts val="500"/>
+                <a:spcPts val="600"/>
               </a:spcAft>
             </a:pPr>
             <a:r>
@@ -5071,7 +5083,7 @@
                 </a:solidFill>
                 <a:latin typeface="Calibri"/>
               </a:rPr>
-              <a:t>IoU improved on all three splits</a:t>
+              <a:t>Accuracy is unchanged — and we mean that precisely:</a:t>
             </a:r>
             <a:r>
               <a:rPr sz="1300" b="0" i="0">
@@ -5080,23 +5092,50 @@
                 </a:solidFill>
                 <a:latin typeface="Calibri"/>
               </a:rPr>
-              <a:t> (+0.018, +0.005, +0.017), paired t-test p = 0.081. Consistent in direction, but the magnitude varies by split — and Dice barely moves.</a:t>
+              <a:t> −0.0014 is an eighth of the seed noise. What changed is the cost: </a:t>
+            </a:r>
+            <a:r>
+              <a:rPr sz="1300" b="1" i="0">
+                <a:solidFill>
+                  <a:srgbClr val="000000"/>
+                </a:solidFill>
+                <a:latin typeface="Calibri"/>
+              </a:rPr>
+              <a:t>9% fewer FLOPs</a:t>
+            </a:r>
+            <a:r>
+              <a:rPr sz="1300" b="0" i="0">
+                <a:solidFill>
+                  <a:srgbClr val="000000"/>
+                </a:solidFill>
+                <a:latin typeface="Calibri"/>
+              </a:rPr>
+              <a:t>, on a network whose entire argument is efficiency.</a:t>
             </a:r>
           </a:p>
           <a:p>
             <a:pPr>
               <a:spcAft>
-                <a:spcPts val="500"/>
+                <a:spcPts val="600"/>
               </a:spcAft>
             </a:pPr>
             <a:r>
+              <a:rPr sz="1300" b="1" i="0">
+                <a:solidFill>
+                  <a:srgbClr val="000000"/>
+                </a:solidFill>
+                <a:latin typeface="Calibri"/>
+              </a:rPr>
+              <a:t>The network told us the mechanism worked.</a:t>
+            </a:r>
+            <a:r>
               <a:rPr sz="1300" b="0" i="0">
                 <a:solidFill>
                   <a:srgbClr val="000000"/>
                 </a:solidFill>
                 <a:latin typeface="Calibri"/>
               </a:rPr>
-              <a:t>The mechanism worked as designed: a large recall gain for a smaller precision cost — the right trade when missing a tumour is worse than a false alarm.</a:t>
+              <a:t> In every block it learned to shrink the diagonal-detail band — the one dominated by speckle — by roughly half.</a:t>
             </a:r>
           </a:p>
         </p:txBody>
@@ -5110,7 +5149,7 @@
 </file>
 
 <file path=ppt/slides/slide12.xml><?xml version="1.0" encoding="utf-8"?>
-<p:sld xmlns:a="http://schemas.openxmlformats.org/drawingml/2006/main" xmlns:r="http://schemas.openxmlformats.org/officeDocument/2006/relationships" xmlns:p="http://schemas.openxmlformats.org/presentationml/2006/main">
+<p:sld xmlns:a="http://schemas.openxmlformats.org/drawingml/2006/main" xmlns:p="http://schemas.openxmlformats.org/presentationml/2006/main" xmlns:r="http://schemas.openxmlformats.org/officeDocument/2006/relationships">
   <p:cSld>
     <p:bg>
       <p:bgPr>
@@ -5126,14 +5165,7 @@
         <p:cNvGrpSpPr/>
         <p:nvPr/>
       </p:nvGrpSpPr>
-      <p:grpSpPr>
-        <a:xfrm>
-          <a:off x="0" y="0"/>
-          <a:ext cx="0" cy="0"/>
-          <a:chOff x="0" y="0"/>
-          <a:chExt cx="0" cy="0"/>
-        </a:xfrm>
-      </p:grpSpPr>
+      <p:grpSpPr/>
       <p:sp>
         <p:nvSpPr>
           <p:cNvPr id="2" name="TextBox 1"/>
@@ -5163,7 +5195,7 @@
                 </a:solidFill>
                 <a:latin typeface="Calibri"/>
               </a:rPr>
-              <a:t>Both changes stack — and neither costs anything</a:t>
+              <a:t>The metric the paper never measures: false alarms on healthy tissue</a:t>
             </a:r>
           </a:p>
           <a:p>
@@ -5174,164 +5206,7 @@
                 </a:solidFill>
                 <a:latin typeface="Calibri"/>
               </a:rPr>
-              <a:t>Paper recipe → + strong augmentation → + Focal Tversky loss, 3 splits</a:t>
-            </a:r>
-          </a:p>
-        </p:txBody>
-      </p:sp>
-      <p:pic>
-        <p:nvPicPr>
-          <p:cNvPr id="3" name="Picture 2" descr="fig6_cumulative.png"/>
-          <p:cNvPicPr>
-            <a:picLocks noChangeAspect="1"/>
-          </p:cNvPicPr>
-          <p:nvPr/>
-        </p:nvPicPr>
-        <p:blipFill>
-          <a:blip r:embed="rId3"/>
-          <a:stretch>
-            <a:fillRect/>
-          </a:stretch>
-        </p:blipFill>
-        <p:spPr>
-          <a:xfrm>
-            <a:off x="792327" y="1280160"/>
-            <a:ext cx="10607040" cy="4058346"/>
-          </a:xfrm>
-          <a:prstGeom prst="rect">
-            <a:avLst/>
-          </a:prstGeom>
-        </p:spPr>
-      </p:pic>
-      <p:sp>
-        <p:nvSpPr>
-          <p:cNvPr id="4" name="TextBox 3"/>
-          <p:cNvSpPr txBox="1"/>
-          <p:nvPr/>
-        </p:nvSpPr>
-        <p:spPr>
-          <a:xfrm>
-            <a:off x="548640" y="5394960"/>
-            <a:ext cx="11094415" cy="1005840"/>
-          </a:xfrm>
-          <a:prstGeom prst="rect">
-            <a:avLst/>
-          </a:prstGeom>
-          <a:noFill/>
-        </p:spPr>
-        <p:txBody>
-          <a:bodyPr wrap="square">
-            <a:spAutoFit/>
-          </a:bodyPr>
-          <a:lstStyle/>
-          <a:p>
-            <a:pPr>
-              <a:spcAft>
-                <a:spcPts val="1000"/>
-              </a:spcAft>
-            </a:pPr>
-            <a:r>
-              <a:rPr sz="1400" b="1" i="0">
-                <a:solidFill>
-                  <a:srgbClr val="000000"/>
-                </a:solidFill>
-                <a:latin typeface="Calibri"/>
-              </a:rPr>
-              <a:t>0.5931 → 0.6461 IoU (+0.053)</a:t>
-            </a:r>
-            <a:r>
-              <a:rPr sz="1400" b="0" i="0">
-                <a:solidFill>
-                  <a:srgbClr val="000000"/>
-                </a:solidFill>
-                <a:latin typeface="Calibri"/>
-              </a:rPr>
-              <a:t> — about </a:t>
-            </a:r>
-            <a:r>
-              <a:rPr sz="1400" b="1" i="0">
-                <a:solidFill>
-                  <a:srgbClr val="000000"/>
-                </a:solidFill>
-                <a:latin typeface="Calibri"/>
-              </a:rPr>
-              <a:t>70% of the original gap</a:t>
-            </a:r>
-            <a:r>
-              <a:rPr sz="1400" b="0" i="0">
-                <a:solidFill>
-                  <a:srgbClr val="000000"/>
-                </a:solidFill>
-                <a:latin typeface="Calibri"/>
-              </a:rPr>
-              <a:t> to the paper, with the model unchanged: still 1,471,921 parameters and 0.577 GFLOPs.</a:t>
-            </a:r>
-          </a:p>
-        </p:txBody>
-      </p:sp>
-    </p:spTree>
-  </p:cSld>
-  <p:clrMapOvr>
-    <a:masterClrMapping/>
-  </p:clrMapOvr>
-</p:sld>
-</file>
-
-<file path=ppt/slides/slide13.xml><?xml version="1.0" encoding="utf-8"?>
-<p:sld xmlns:a="http://schemas.openxmlformats.org/drawingml/2006/main" xmlns:r="http://schemas.openxmlformats.org/officeDocument/2006/relationships" xmlns:p="http://schemas.openxmlformats.org/presentationml/2006/main">
-  <p:cSld>
-    <p:bg>
-      <p:bgPr>
-        <a:solidFill>
-          <a:srgbClr val="FFFFFF"/>
-        </a:solidFill>
-        <a:effectLst/>
-      </p:bgPr>
-    </p:bg>
-    <p:spTree>
-      <p:nvGrpSpPr>
-        <p:cNvPr id="1" name=""/>
-        <p:cNvGrpSpPr/>
-        <p:nvPr/>
-      </p:nvGrpSpPr>
-      <p:grpSpPr>
-        <a:xfrm>
-          <a:off x="0" y="0"/>
-          <a:ext cx="0" cy="0"/>
-          <a:chOff x="0" y="0"/>
-          <a:chExt cx="0" cy="0"/>
-        </a:xfrm>
-      </p:grpSpPr>
-      <p:sp>
-        <p:nvSpPr>
-          <p:cNvPr id="2" name="TextBox 1"/>
-          <p:cNvSpPr txBox="1"/>
-          <p:nvPr/>
-        </p:nvSpPr>
-        <p:spPr>
-          <a:xfrm>
-            <a:off x="548640" y="320040"/>
-            <a:ext cx="11094415" cy="822960"/>
-          </a:xfrm>
-          <a:prstGeom prst="rect">
-            <a:avLst/>
-          </a:prstGeom>
-          <a:noFill/>
-        </p:spPr>
-        <p:txBody>
-          <a:bodyPr wrap="square">
-            <a:spAutoFit/>
-          </a:bodyPr>
-          <a:lstStyle/>
-          <a:p>
-            <a:r>
-              <a:rPr sz="3000" b="1" i="0">
-                <a:solidFill>
-                  <a:srgbClr val="000000"/>
-                </a:solidFill>
-                <a:latin typeface="Calibri"/>
-              </a:rPr>
-              <a:t>Challenges</a:t>
+              <a:t>BUSI ships 133 scans with no lesion — no model here was trained on any of them</a:t>
             </a:r>
           </a:p>
         </p:txBody>
@@ -5360,119 +5235,515 @@
           <a:p>
             <a:pPr>
               <a:spcAft>
-                <a:spcPts val="1400"/>
+                <a:spcPts val="1000"/>
               </a:spcAft>
             </a:pPr>
             <a:r>
-              <a:rPr sz="1500" b="1" i="0">
-                <a:solidFill>
-                  <a:srgbClr val="000000"/>
-                </a:solidFill>
-                <a:latin typeface="Calibri"/>
-              </a:rPr>
-              <a:t>1. A real bug in the upstream code.</a:t>
-            </a:r>
-            <a:r>
-              <a:rPr sz="1500" b="0" i="0">
-                <a:solidFill>
-                  <a:srgbClr val="000000"/>
-                </a:solidFill>
-                <a:latin typeface="Calibri"/>
-              </a:rPr>
-              <a:t> dataset.py divides by 255 *after* Normalize() has already applied ImageNet statistics — squashing inputs from ±2.5 into </a:t>
-            </a:r>
-            <a:r>
-              <a:rPr sz="1500" b="1" i="0">
-                <a:solidFill>
-                  <a:srgbClr val="000000"/>
-                </a:solidFill>
-                <a:latin typeface="Calibri"/>
-              </a:rPr>
-              <a:t>±0.01</a:t>
-            </a:r>
-            <a:r>
-              <a:rPr sz="1500" b="0" i="0">
-                <a:solidFill>
-                  <a:srgbClr val="000000"/>
-                </a:solidFill>
-                <a:latin typeface="Calibri"/>
-              </a:rPr>
-              <a:t> and discarding most of the signal. Found by inspecting tensors, not from any error.</a:t>
-            </a:r>
-          </a:p>
+              <a:rPr sz="1400" b="1" i="0">
+                <a:solidFill>
+                  <a:srgbClr val="000000"/>
+                </a:solidFill>
+                <a:latin typeface="Calibri"/>
+              </a:rPr>
+              <a:t>IoU cannot score a healthy scan.</a:t>
+            </a:r>
+            <a:r>
+              <a:rPr sz="1400" b="0" i="0">
+                <a:solidFill>
+                  <a:srgbClr val="000000"/>
+                </a:solidFill>
+                <a:latin typeface="Calibri"/>
+              </a:rPr>
+              <a:t> The ground-truth mask is empty, so a model that predicts nothing scores perfectly. Every run in this project excluded these 133 cases — which is exactly what makes them a clean held-out test of a different question: </a:t>
+            </a:r>
+            <a:r>
+              <a:rPr sz="1400" b="1" i="0">
+                <a:solidFill>
+                  <a:srgbClr val="000000"/>
+                </a:solidFill>
+                <a:latin typeface="Calibri"/>
+              </a:rPr>
+              <a:t>when there is no tumour, how much does the model invent?</a:t>
+            </a:r>
+          </a:p>
+        </p:txBody>
+      </p:sp>
+      <p:graphicFrame>
+        <p:nvGraphicFramePr>
+          <p:cNvPr id="4" name="Table 3"/>
+          <p:cNvGraphicFramePr>
+            <a:graphicFrameLocks noGrp="1"/>
+          </p:cNvGraphicFramePr>
+          <p:nvPr/>
+        </p:nvGraphicFramePr>
+        <p:xfrm>
+          <a:off x="548640" y="2468880"/>
+          <a:ext cx="10607039" cy="2011680"/>
+        </p:xfrm>
+        <a:graphic>
+          <a:graphicData uri="http://schemas.openxmlformats.org/drawingml/2006/table">
+            <a:tbl>
+              <a:tblPr firstRow="1" bandRow="1">
+                <a:tableStyleId>{5C22544A-7EE6-4342-B048-85BDC9FD1C3A}</a:tableStyleId>
+              </a:tblPr>
+              <a:tblGrid>
+                <a:gridCol w="5120639"/>
+                <a:gridCol w="2743200"/>
+                <a:gridCol w="2743200"/>
+              </a:tblGrid>
+              <a:tr h="402336">
+                <a:tc>
+                  <a:txBody>
+                    <a:bodyPr wrap="square"/>
+                    <a:lstStyle/>
+                    <a:p>
+                      <a:pPr algn="l"/>
+                      <a:r>
+                        <a:rPr sz="1200" b="1" i="0">
+                          <a:solidFill>
+                            <a:srgbClr val="000000"/>
+                          </a:solidFill>
+                          <a:latin typeface="Calibri"/>
+                        </a:rPr>
+                        <a:t>Fraction of the 133 healthy scans predicted completely clean</a:t>
+                      </a:r>
+                    </a:p>
+                  </a:txBody>
+                  <a:tcPr>
+                    <a:solidFill>
+                      <a:srgbClr val="FFFFFF"/>
+                    </a:solidFill>
+                  </a:tcPr>
+                </a:tc>
+                <a:tc>
+                  <a:txBody>
+                    <a:bodyPr wrap="square"/>
+                    <a:lstStyle/>
+                    <a:p>
+                      <a:pPr algn="ctr"/>
+                      <a:r>
+                        <a:rPr sz="1200" b="1" i="0">
+                          <a:solidFill>
+                            <a:srgbClr val="000000"/>
+                          </a:solidFill>
+                          <a:latin typeface="Calibri"/>
+                        </a:rPr>
+                        <a:t/>
+                      </a:r>
+                    </a:p>
+                  </a:txBody>
+                  <a:tcPr>
+                    <a:solidFill>
+                      <a:srgbClr val="FFFFFF"/>
+                    </a:solidFill>
+                  </a:tcPr>
+                </a:tc>
+                <a:tc>
+                  <a:txBody>
+                    <a:bodyPr wrap="square"/>
+                    <a:lstStyle/>
+                    <a:p>
+                      <a:pPr algn="ctr"/>
+                      <a:r>
+                        <a:rPr sz="1200" b="1" i="0">
+                          <a:solidFill>
+                            <a:srgbClr val="000000"/>
+                          </a:solidFill>
+                          <a:latin typeface="Calibri"/>
+                        </a:rPr>
+                        <a:t/>
+                      </a:r>
+                    </a:p>
+                  </a:txBody>
+                  <a:tcPr>
+                    <a:solidFill>
+                      <a:srgbClr val="FFFFFF"/>
+                    </a:solidFill>
+                  </a:tcPr>
+                </a:tc>
+              </a:tr>
+              <a:tr h="402336">
+                <a:tc>
+                  <a:txBody>
+                    <a:bodyPr wrap="square"/>
+                    <a:lstStyle/>
+                    <a:p>
+                      <a:pPr algn="l"/>
+                      <a:r>
+                        <a:rPr sz="1200" b="0" i="0">
+                          <a:solidFill>
+                            <a:srgbClr val="000000"/>
+                          </a:solidFill>
+                          <a:latin typeface="Calibri"/>
+                        </a:rPr>
+                        <a:t>Baseline UNeXt (15 runs)</a:t>
+                      </a:r>
+                    </a:p>
+                  </a:txBody>
+                  <a:tcPr>
+                    <a:solidFill>
+                      <a:srgbClr val="FFFFFF"/>
+                    </a:solidFill>
+                  </a:tcPr>
+                </a:tc>
+                <a:tc>
+                  <a:txBody>
+                    <a:bodyPr wrap="square"/>
+                    <a:lstStyle/>
+                    <a:p>
+                      <a:pPr algn="ctr"/>
+                      <a:r>
+                        <a:rPr sz="1200" b="0" i="0">
+                          <a:solidFill>
+                            <a:srgbClr val="000000"/>
+                          </a:solidFill>
+                          <a:latin typeface="Calibri"/>
+                        </a:rPr>
+                        <a:t>mean 5.5%</a:t>
+                      </a:r>
+                    </a:p>
+                  </a:txBody>
+                  <a:tcPr>
+                    <a:solidFill>
+                      <a:srgbClr val="FFFFFF"/>
+                    </a:solidFill>
+                  </a:tcPr>
+                </a:tc>
+                <a:tc>
+                  <a:txBody>
+                    <a:bodyPr wrap="square"/>
+                    <a:lstStyle/>
+                    <a:p>
+                      <a:pPr algn="ctr"/>
+                      <a:r>
+                        <a:rPr sz="1200" b="0" i="0">
+                          <a:solidFill>
+                            <a:srgbClr val="000000"/>
+                          </a:solidFill>
+                          <a:latin typeface="Calibri"/>
+                        </a:rPr>
+                        <a:t>best 15.8%</a:t>
+                      </a:r>
+                    </a:p>
+                  </a:txBody>
+                  <a:tcPr>
+                    <a:solidFill>
+                      <a:srgbClr val="FFFFFF"/>
+                    </a:solidFill>
+                  </a:tcPr>
+                </a:tc>
+              </a:tr>
+              <a:tr h="402336">
+                <a:tc>
+                  <a:txBody>
+                    <a:bodyPr wrap="square"/>
+                    <a:lstStyle/>
+                    <a:p>
+                      <a:pPr algn="l"/>
+                      <a:r>
+                        <a:rPr sz="1200" b="1" i="0">
+                          <a:solidFill>
+                            <a:srgbClr val="000000"/>
+                          </a:solidFill>
+                          <a:latin typeface="Calibri"/>
+                        </a:rPr>
+                        <a:t>Wavelet mixer (4 runs)</a:t>
+                      </a:r>
+                    </a:p>
+                  </a:txBody>
+                  <a:tcPr>
+                    <a:solidFill>
+                      <a:srgbClr val="FFFFFF"/>
+                    </a:solidFill>
+                  </a:tcPr>
+                </a:tc>
+                <a:tc>
+                  <a:txBody>
+                    <a:bodyPr wrap="square"/>
+                    <a:lstStyle/>
+                    <a:p>
+                      <a:pPr algn="ctr"/>
+                      <a:r>
+                        <a:rPr sz="1200" b="1" i="0">
+                          <a:solidFill>
+                            <a:srgbClr val="000000"/>
+                          </a:solidFill>
+                          <a:latin typeface="Calibri"/>
+                        </a:rPr>
+                        <a:t>mean 14.8%</a:t>
+                      </a:r>
+                    </a:p>
+                  </a:txBody>
+                  <a:tcPr>
+                    <a:solidFill>
+                      <a:srgbClr val="FFFFFF"/>
+                    </a:solidFill>
+                  </a:tcPr>
+                </a:tc>
+                <a:tc>
+                  <a:txBody>
+                    <a:bodyPr wrap="square"/>
+                    <a:lstStyle/>
+                    <a:p>
+                      <a:pPr algn="ctr"/>
+                      <a:r>
+                        <a:rPr sz="1200" b="1" i="0">
+                          <a:solidFill>
+                            <a:srgbClr val="000000"/>
+                          </a:solidFill>
+                          <a:latin typeface="Calibri"/>
+                        </a:rPr>
+                        <a:t>worst 9.0%</a:t>
+                      </a:r>
+                    </a:p>
+                  </a:txBody>
+                  <a:tcPr>
+                    <a:solidFill>
+                      <a:srgbClr val="FFFFFF"/>
+                    </a:solidFill>
+                  </a:tcPr>
+                </a:tc>
+              </a:tr>
+              <a:tr h="402336">
+                <a:tc>
+                  <a:txBody>
+                    <a:bodyPr wrap="square"/>
+                    <a:lstStyle/>
+                    <a:p>
+                      <a:pPr algn="l"/>
+                      <a:r>
+                        <a:rPr sz="1200" b="0" i="0">
+                          <a:solidFill>
+                            <a:srgbClr val="000000"/>
+                          </a:solidFill>
+                          <a:latin typeface="Calibri"/>
+                        </a:rPr>
+                        <a:t>Same split, same seed — pair 1</a:t>
+                      </a:r>
+                    </a:p>
+                  </a:txBody>
+                  <a:tcPr>
+                    <a:solidFill>
+                      <a:srgbClr val="FFFFFF"/>
+                    </a:solidFill>
+                  </a:tcPr>
+                </a:tc>
+                <a:tc>
+                  <a:txBody>
+                    <a:bodyPr wrap="square"/>
+                    <a:lstStyle/>
+                    <a:p>
+                      <a:pPr algn="ctr"/>
+                      <a:r>
+                        <a:rPr sz="1200" b="0" i="0">
+                          <a:solidFill>
+                            <a:srgbClr val="000000"/>
+                          </a:solidFill>
+                          <a:latin typeface="Calibri"/>
+                        </a:rPr>
+                        <a:t>baseline 1.5%</a:t>
+                      </a:r>
+                    </a:p>
+                  </a:txBody>
+                  <a:tcPr>
+                    <a:solidFill>
+                      <a:srgbClr val="FFFFFF"/>
+                    </a:solidFill>
+                  </a:tcPr>
+                </a:tc>
+                <a:tc>
+                  <a:txBody>
+                    <a:bodyPr wrap="square"/>
+                    <a:lstStyle/>
+                    <a:p>
+                      <a:pPr algn="ctr"/>
+                      <a:r>
+                        <a:rPr sz="1200" b="1" i="0">
+                          <a:solidFill>
+                            <a:srgbClr val="000000"/>
+                          </a:solidFill>
+                          <a:latin typeface="Calibri"/>
+                        </a:rPr>
+                        <a:t>wavelet 15.8%</a:t>
+                      </a:r>
+                    </a:p>
+                  </a:txBody>
+                  <a:tcPr>
+                    <a:solidFill>
+                      <a:srgbClr val="FFFFFF"/>
+                    </a:solidFill>
+                  </a:tcPr>
+                </a:tc>
+              </a:tr>
+              <a:tr h="402336">
+                <a:tc>
+                  <a:txBody>
+                    <a:bodyPr wrap="square"/>
+                    <a:lstStyle/>
+                    <a:p>
+                      <a:pPr algn="l"/>
+                      <a:r>
+                        <a:rPr sz="1200" b="0" i="0">
+                          <a:solidFill>
+                            <a:srgbClr val="000000"/>
+                          </a:solidFill>
+                          <a:latin typeface="Calibri"/>
+                        </a:rPr>
+                        <a:t>Same split, same seed — pair 2</a:t>
+                      </a:r>
+                    </a:p>
+                  </a:txBody>
+                  <a:tcPr>
+                    <a:solidFill>
+                      <a:srgbClr val="FFFFFF"/>
+                    </a:solidFill>
+                  </a:tcPr>
+                </a:tc>
+                <a:tc>
+                  <a:txBody>
+                    <a:bodyPr wrap="square"/>
+                    <a:lstStyle/>
+                    <a:p>
+                      <a:pPr algn="ctr"/>
+                      <a:r>
+                        <a:rPr sz="1200" b="0" i="0">
+                          <a:solidFill>
+                            <a:srgbClr val="000000"/>
+                          </a:solidFill>
+                          <a:latin typeface="Calibri"/>
+                        </a:rPr>
+                        <a:t>baseline 7.5%</a:t>
+                      </a:r>
+                    </a:p>
+                  </a:txBody>
+                  <a:tcPr>
+                    <a:solidFill>
+                      <a:srgbClr val="FFFFFF"/>
+                    </a:solidFill>
+                  </a:tcPr>
+                </a:tc>
+                <a:tc>
+                  <a:txBody>
+                    <a:bodyPr wrap="square"/>
+                    <a:lstStyle/>
+                    <a:p>
+                      <a:pPr algn="ctr"/>
+                      <a:r>
+                        <a:rPr sz="1200" b="1" i="0">
+                          <a:solidFill>
+                            <a:srgbClr val="000000"/>
+                          </a:solidFill>
+                          <a:latin typeface="Calibri"/>
+                        </a:rPr>
+                        <a:t>wavelet 15.8%</a:t>
+                      </a:r>
+                    </a:p>
+                  </a:txBody>
+                  <a:tcPr>
+                    <a:solidFill>
+                      <a:srgbClr val="FFFFFF"/>
+                    </a:solidFill>
+                  </a:tcPr>
+                </a:tc>
+              </a:tr>
+            </a:tbl>
+          </a:graphicData>
+        </a:graphic>
+      </p:graphicFrame>
+      <p:sp>
+        <p:nvSpPr>
+          <p:cNvPr id="5" name="TextBox 4"/>
+          <p:cNvSpPr txBox="1"/>
+          <p:nvPr/>
+        </p:nvSpPr>
+        <p:spPr>
+          <a:xfrm>
+            <a:off x="548640" y="4663440"/>
+            <a:ext cx="11094415" cy="1737360"/>
+          </a:xfrm>
+          <a:prstGeom prst="rect">
+            <a:avLst/>
+          </a:prstGeom>
+          <a:noFill/>
+        </p:spPr>
+        <p:txBody>
+          <a:bodyPr wrap="square">
+            <a:spAutoFit/>
+          </a:bodyPr>
+          <a:lstStyle/>
           <a:p>
             <a:pPr>
               <a:spcAft>
-                <a:spcPts val="1400"/>
+                <a:spcPts val="500"/>
               </a:spcAft>
             </a:pPr>
             <a:r>
-              <a:rPr sz="1500" b="1" i="0">
-                <a:solidFill>
-                  <a:srgbClr val="000000"/>
-                </a:solidFill>
-                <a:latin typeface="Calibri"/>
-              </a:rPr>
-              <a:t>2. Frozen BatchNorm is not frozen.</a:t>
-            </a:r>
-            <a:r>
-              <a:rPr sz="1500" b="0" i="0">
-                <a:solidFill>
-                  <a:srgbClr val="000000"/>
-                </a:solidFill>
-                <a:latin typeface="Calibri"/>
-              </a:rPr>
-              <a:t> requires_grad=False stops gradients but not the running mean/variance buffers — our "frozen" backbone would have drifted silently, invalidating the attribution.</a:t>
+              <a:rPr sz="1250" b="1" i="0">
+                <a:solidFill>
+                  <a:srgbClr val="000000"/>
+                </a:solidFill>
+                <a:latin typeface="Calibri"/>
+              </a:rPr>
+              <a:t>Three of the four wavelet runs beat every one of the fifteen baselines.</a:t>
+            </a:r>
+            <a:r>
+              <a:rPr sz="1250" b="0" i="0">
+                <a:solidFill>
+                  <a:srgbClr val="000000"/>
+                </a:solidFill>
+                <a:latin typeface="Calibri"/>
+              </a:rPr>
+              <a:t> On the two pairs where seed and precision are matched exactly, the gain is +0.14 and +0.08.</a:t>
             </a:r>
           </a:p>
           <a:p>
             <a:pPr>
               <a:spcAft>
-                <a:spcPts val="1400"/>
+                <a:spcPts val="500"/>
               </a:spcAft>
             </a:pPr>
             <a:r>
-              <a:rPr sz="1500" b="1" i="0">
-                <a:solidFill>
-                  <a:srgbClr val="000000"/>
-                </a:solidFill>
-                <a:latin typeface="Calibri"/>
-              </a:rPr>
-              <a:t>3. Identity-grafting is delicate.</a:t>
-            </a:r>
-            <a:r>
-              <a:rPr sz="1500" b="0" i="0">
-                <a:solidFill>
-                  <a:srgbClr val="000000"/>
-                </a:solidFill>
-                <a:latin typeface="Calibri"/>
-              </a:rPr>
-              <a:t> Inserting SE naively halves every activation; initialising too conservatively saturates the sigmoid so it cannot learn. Starting as an exact identity *and* staying trainable took several attempts.</a:t>
+              <a:rPr sz="1250" b="1" i="0">
+                <a:solidFill>
+                  <a:srgbClr val="000000"/>
+                </a:solidFill>
+                <a:latin typeface="Calibri"/>
+              </a:rPr>
+              <a:t>Honest limit:</a:t>
+            </a:r>
+            <a:r>
+              <a:rPr sz="1250" b="0" i="0">
+                <a:solidFill>
+                  <a:srgbClr val="000000"/>
+                </a:solidFill>
+                <a:latin typeface="Calibri"/>
+              </a:rPr>
+              <a:t> only two of our four wavelet runs are clean pairs — the other two vary the seed as well, so we quote no p-value. The effect is the same size in both groups (+0.113 vs +0.105), which is why we believe it, but n = 2 is not proof.</a:t>
             </a:r>
           </a:p>
           <a:p>
             <a:pPr>
               <a:spcAft>
-                <a:spcPts val="1400"/>
+                <a:spcPts val="500"/>
               </a:spcAft>
             </a:pPr>
             <a:r>
-              <a:rPr sz="1500" b="1" i="0">
-                <a:solidFill>
-                  <a:srgbClr val="000000"/>
-                </a:solidFill>
-                <a:latin typeface="Calibri"/>
-              </a:rPr>
-              <a:t>4. A 2022 repo on a 2026 stack</a:t>
-            </a:r>
-            <a:r>
-              <a:rPr sz="1500" b="0" i="0">
-                <a:solidFill>
-                  <a:srgbClr val="000000"/>
-                </a:solidFill>
-                <a:latin typeface="Calibri"/>
-              </a:rPr>
-              <a:t> — dead dependencies, and no released weights to validate against.</a:t>
+              <a:rPr sz="1250" b="1" i="0">
+                <a:solidFill>
+                  <a:srgbClr val="000000"/>
+                </a:solidFill>
+                <a:latin typeface="Calibri"/>
+              </a:rPr>
+              <a:t>Why it matters clinically:</a:t>
+            </a:r>
+            <a:r>
+              <a:rPr sz="1250" b="0" i="0">
+                <a:solidFill>
+                  <a:srgbClr val="000000"/>
+                </a:solidFill>
+                <a:latin typeface="Calibri"/>
+              </a:rPr>
+              <a:t> in screening, most scans are healthy. A model that segments lesions equally well but hallucinates less on healthy tissue is the better tool, and IoU on lesion cases would never reveal it.</a:t>
             </a:r>
           </a:p>
         </p:txBody>
@@ -5485,8 +5756,8 @@
 </p:sld>
 </file>
 
-<file path=ppt/slides/slide14.xml><?xml version="1.0" encoding="utf-8"?>
-<p:sld xmlns:a="http://schemas.openxmlformats.org/drawingml/2006/main" xmlns:r="http://schemas.openxmlformats.org/officeDocument/2006/relationships" xmlns:p="http://schemas.openxmlformats.org/presentationml/2006/main">
+<file path=ppt/slides/slide13.xml><?xml version="1.0" encoding="utf-8"?>
+<p:sld xmlns:a="http://schemas.openxmlformats.org/drawingml/2006/main" xmlns:p="http://schemas.openxmlformats.org/presentationml/2006/main" xmlns:r="http://schemas.openxmlformats.org/officeDocument/2006/relationships">
   <p:cSld>
     <p:bg>
       <p:bgPr>
@@ -5502,14 +5773,7 @@
         <p:cNvGrpSpPr/>
         <p:nvPr/>
       </p:nvGrpSpPr>
-      <p:grpSpPr>
-        <a:xfrm>
-          <a:off x="0" y="0"/>
-          <a:ext cx="0" cy="0"/>
-          <a:chOff x="0" y="0"/>
-          <a:chExt cx="0" cy="0"/>
-        </a:xfrm>
-      </p:grpSpPr>
+      <p:grpSpPr/>
       <p:sp>
         <p:nvSpPr>
           <p:cNvPr id="2" name="TextBox 1"/>
@@ -5539,7 +5803,7 @@
                 </a:solidFill>
                 <a:latin typeface="Calibri"/>
               </a:rPr>
-              <a:t>Conclusions</a:t>
+              <a:t>Challenges</a:t>
             </a:r>
           </a:p>
         </p:txBody>
@@ -5568,7 +5832,7 @@
           <a:p>
             <a:pPr>
               <a:spcAft>
-                <a:spcPts val="1100"/>
+                <a:spcPts val="1400"/>
               </a:spcAft>
             </a:pPr>
             <a:r>
@@ -5578,7 +5842,7 @@
                 </a:solidFill>
                 <a:latin typeface="Calibri"/>
               </a:rPr>
-              <a:t>What reproduced — the efficiency claims, exactly.</a:t>
+              <a:t>1. A real bug in the upstream code.</a:t>
             </a:r>
             <a:r>
               <a:rPr sz="1500" b="0" i="0">
@@ -5587,9 +5851,185 @@
                 </a:solidFill>
                 <a:latin typeface="Calibri"/>
               </a:rPr>
-              <a:t> 1,471,921 parameters (paper: 1.47 M), 0.577 GFLOPs (paper: 0.57), 12.5 ms on CPU. UNeXt really is 72× smaller than TransUNet.</a:t>
-            </a:r>
-          </a:p>
+              <a:t> dataset.py divides by 255 *after* Normalize() has already applied ImageNet statistics — squashing inputs from ±2.5 into </a:t>
+            </a:r>
+            <a:r>
+              <a:rPr sz="1500" b="1" i="0">
+                <a:solidFill>
+                  <a:srgbClr val="000000"/>
+                </a:solidFill>
+                <a:latin typeface="Calibri"/>
+              </a:rPr>
+              <a:t>±0.01</a:t>
+            </a:r>
+            <a:r>
+              <a:rPr sz="1500" b="0" i="0">
+                <a:solidFill>
+                  <a:srgbClr val="000000"/>
+                </a:solidFill>
+                <a:latin typeface="Calibri"/>
+              </a:rPr>
+              <a:t> and discarding most of the signal. Found by inspecting tensors, not from any error.</a:t>
+            </a:r>
+          </a:p>
+          <a:p>
+            <a:pPr>
+              <a:spcAft>
+                <a:spcPts val="1400"/>
+              </a:spcAft>
+            </a:pPr>
+            <a:r>
+              <a:rPr sz="1500" b="1" i="0">
+                <a:solidFill>
+                  <a:srgbClr val="000000"/>
+                </a:solidFill>
+                <a:latin typeface="Calibri"/>
+              </a:rPr>
+              <a:t>2. Frozen BatchNorm is not frozen.</a:t>
+            </a:r>
+            <a:r>
+              <a:rPr sz="1500" b="0" i="0">
+                <a:solidFill>
+                  <a:srgbClr val="000000"/>
+                </a:solidFill>
+                <a:latin typeface="Calibri"/>
+              </a:rPr>
+              <a:t> requires_grad=False stops gradients but not the running mean/variance buffers — our "frozen" backbone would have drifted silently, invalidating the attribution.</a:t>
+            </a:r>
+          </a:p>
+          <a:p>
+            <a:pPr>
+              <a:spcAft>
+                <a:spcPts val="1400"/>
+              </a:spcAft>
+            </a:pPr>
+            <a:r>
+              <a:rPr sz="1500" b="1" i="0">
+                <a:solidFill>
+                  <a:srgbClr val="000000"/>
+                </a:solidFill>
+                <a:latin typeface="Calibri"/>
+              </a:rPr>
+              <a:t>3. Identity-grafting is delicate.</a:t>
+            </a:r>
+            <a:r>
+              <a:rPr sz="1500" b="0" i="0">
+                <a:solidFill>
+                  <a:srgbClr val="000000"/>
+                </a:solidFill>
+                <a:latin typeface="Calibri"/>
+              </a:rPr>
+              <a:t> Inserting SE naively halves every activation; initialising too conservatively saturates the sigmoid so it cannot learn. Starting as an exact identity *and* staying trainable took several attempts.</a:t>
+            </a:r>
+          </a:p>
+          <a:p>
+            <a:pPr>
+              <a:spcAft>
+                <a:spcPts val="1400"/>
+              </a:spcAft>
+            </a:pPr>
+            <a:r>
+              <a:rPr sz="1500" b="1" i="0">
+                <a:solidFill>
+                  <a:srgbClr val="000000"/>
+                </a:solidFill>
+                <a:latin typeface="Calibri"/>
+              </a:rPr>
+              <a:t>4. A 2022 repo on a 2026 stack</a:t>
+            </a:r>
+            <a:r>
+              <a:rPr sz="1500" b="0" i="0">
+                <a:solidFill>
+                  <a:srgbClr val="000000"/>
+                </a:solidFill>
+                <a:latin typeface="Calibri"/>
+              </a:rPr>
+              <a:t> — dead dependencies, and no released weights to validate against.</a:t>
+            </a:r>
+          </a:p>
+        </p:txBody>
+      </p:sp>
+    </p:spTree>
+  </p:cSld>
+  <p:clrMapOvr>
+    <a:masterClrMapping/>
+  </p:clrMapOvr>
+</p:sld>
+</file>
+
+<file path=ppt/slides/slide14.xml><?xml version="1.0" encoding="utf-8"?>
+<p:sld xmlns:a="http://schemas.openxmlformats.org/drawingml/2006/main" xmlns:p="http://schemas.openxmlformats.org/presentationml/2006/main" xmlns:r="http://schemas.openxmlformats.org/officeDocument/2006/relationships">
+  <p:cSld>
+    <p:bg>
+      <p:bgPr>
+        <a:solidFill>
+          <a:srgbClr val="FFFFFF"/>
+        </a:solidFill>
+        <a:effectLst/>
+      </p:bgPr>
+    </p:bg>
+    <p:spTree>
+      <p:nvGrpSpPr>
+        <p:cNvPr id="1" name=""/>
+        <p:cNvGrpSpPr/>
+        <p:nvPr/>
+      </p:nvGrpSpPr>
+      <p:grpSpPr/>
+      <p:sp>
+        <p:nvSpPr>
+          <p:cNvPr id="2" name="TextBox 1"/>
+          <p:cNvSpPr txBox="1"/>
+          <p:nvPr/>
+        </p:nvSpPr>
+        <p:spPr>
+          <a:xfrm>
+            <a:off x="548640" y="320040"/>
+            <a:ext cx="11094415" cy="822960"/>
+          </a:xfrm>
+          <a:prstGeom prst="rect">
+            <a:avLst/>
+          </a:prstGeom>
+          <a:noFill/>
+        </p:spPr>
+        <p:txBody>
+          <a:bodyPr wrap="square">
+            <a:spAutoFit/>
+          </a:bodyPr>
+          <a:lstStyle/>
+          <a:p>
+            <a:r>
+              <a:rPr sz="3000" b="1" i="0">
+                <a:solidFill>
+                  <a:srgbClr val="000000"/>
+                </a:solidFill>
+                <a:latin typeface="Calibri"/>
+              </a:rPr>
+              <a:t>Conclusions</a:t>
+            </a:r>
+          </a:p>
+        </p:txBody>
+      </p:sp>
+      <p:sp>
+        <p:nvSpPr>
+          <p:cNvPr id="3" name="TextBox 2"/>
+          <p:cNvSpPr txBox="1"/>
+          <p:nvPr/>
+        </p:nvSpPr>
+        <p:spPr>
+          <a:xfrm>
+            <a:off x="548640" y="1371600"/>
+            <a:ext cx="11094415" cy="5029200"/>
+          </a:xfrm>
+          <a:prstGeom prst="rect">
+            <a:avLst/>
+          </a:prstGeom>
+          <a:noFill/>
+        </p:spPr>
+        <p:txBody>
+          <a:bodyPr wrap="square">
+            <a:spAutoFit/>
+          </a:bodyPr>
+          <a:lstStyle/>
           <a:p>
             <a:pPr>
               <a:spcAft>
@@ -5603,7 +6043,7 @@
                 </a:solidFill>
                 <a:latin typeface="Calibri"/>
               </a:rPr>
-              <a:t>What did not — the accuracy.</a:t>
+              <a:t>What reproduced — the efficiency claims, exactly.</a:t>
             </a:r>
             <a:r>
               <a:rPr sz="1500" b="0" i="0">
@@ -5612,7 +6052,7 @@
                 </a:solidFill>
                 <a:latin typeface="Calibri"/>
               </a:rPr>
-              <a:t> 0.593 vs 0.669 IoU, across six runs, with five explanations eliminated and no released weights to check against.</a:t>
+              <a:t> 1,471,921 parameters (paper: 1.47 M), 0.577 GFLOPs (paper: 0.57), 12.5 ms on CPU. UNeXt really is 72× smaller than TransUNet.</a:t>
             </a:r>
           </a:p>
           <a:p>
@@ -5621,12 +6061,24 @@
                 <a:spcPts val="1100"/>
               </a:spcAft>
             </a:pPr>
-            <a:endParaRPr sz="1500" b="0" i="0">
-              <a:solidFill>
-                <a:srgbClr val="000000"/>
-              </a:solidFill>
-              <a:latin typeface="Calibri"/>
-            </a:endParaRPr>
+            <a:r>
+              <a:rPr sz="1500" b="1" i="0">
+                <a:solidFill>
+                  <a:srgbClr val="000000"/>
+                </a:solidFill>
+                <a:latin typeface="Calibri"/>
+              </a:rPr>
+              <a:t>What did not — the accuracy.</a:t>
+            </a:r>
+            <a:r>
+              <a:rPr sz="1500" b="0" i="0">
+                <a:solidFill>
+                  <a:srgbClr val="000000"/>
+                </a:solidFill>
+                <a:latin typeface="Calibri"/>
+              </a:rPr>
+              <a:t> 0.593 vs 0.669 IoU, across six runs, with five explanations eliminated and no released weights to check against.</a:t>
+            </a:r>
           </a:p>
           <a:p>
             <a:pPr>
@@ -5634,6 +6086,13 @@
                 <a:spcPts val="1100"/>
               </a:spcAft>
             </a:pPr>
+          </a:p>
+          <a:p>
+            <a:pPr>
+              <a:spcAft>
+                <a:spcPts val="1100"/>
+              </a:spcAft>
+            </a:pPr>
             <a:r>
               <a:rPr sz="1500" b="1" i="0">
                 <a:solidFill>
@@ -5685,13 +6144,22 @@
               </a:spcAft>
             </a:pPr>
             <a:r>
+              <a:rPr sz="1400" b="1" i="0">
+                <a:solidFill>
+                  <a:srgbClr val="555555"/>
+                </a:solidFill>
+                <a:latin typeface="Calibri"/>
+              </a:rPr>
+              <a:t>Augmentation is the one intervention that moved the number</a:t>
+            </a:r>
+            <a:r>
               <a:rPr sz="1400" b="0" i="0">
                 <a:solidFill>
                   <a:srgbClr val="555555"/>
                 </a:solidFill>
                 <a:latin typeface="Calibri"/>
               </a:rPr>
-              <a:t>Two </a:t>
+              <a:t>: +0.040 converged, +0.023 at a matched budget — </a:t>
             </a:r>
             <a:r>
               <a:rPr sz="1400" b="1" i="0">
@@ -5700,25 +6168,7 @@
                 </a:solidFill>
                 <a:latin typeface="Calibri"/>
               </a:rPr>
-              <a:t>training-recipe</a:t>
-            </a:r>
-            <a:r>
-              <a:rPr sz="1400" b="0" i="0">
-                <a:solidFill>
-                  <a:srgbClr val="555555"/>
-                </a:solidFill>
-                <a:latin typeface="Calibri"/>
-              </a:rPr>
-              <a:t> changes recover ~70% of the gap: augmentation (+0.040) then Focal Tversky loss (+0.013) — </a:t>
-            </a:r>
-            <a:r>
-              <a:rPr sz="1400" b="1" i="0">
-                <a:solidFill>
-                  <a:srgbClr val="555555"/>
-                </a:solidFill>
-                <a:latin typeface="Calibri"/>
-              </a:rPr>
-              <a:t>0.5931 → 0.6461</a:t>
+              <a:t>0.5931 → 0.6328</a:t>
             </a:r>
             <a:r>
               <a:rPr sz="1400" b="0" i="0">
@@ -5737,14 +6187,30 @@
               </a:spcAft>
             </a:pPr>
             <a:r>
+              <a:rPr sz="1400" b="1" i="0">
+                <a:solidFill>
+                  <a:srgbClr val="555555"/>
+                </a:solidFill>
+                <a:latin typeface="Calibri"/>
+              </a:rPr>
+              <a:t>No architectural modification cleared our own noise floor.</a:t>
+            </a:r>
+            <a:r>
               <a:rPr sz="1400" b="0" i="0">
                 <a:solidFill>
                   <a:srgbClr val="555555"/>
                 </a:solidFill>
                 <a:latin typeface="Calibri"/>
               </a:rPr>
-              <a:t>The architectural modifications from follow-up papers recovered </a:t>
-            </a:r>
+              <a:t> Five were tried; the largest effect (0.005) is half of what changing the random seed does (0.011)</a:t>
+            </a:r>
+          </a:p>
+          <a:p>
+            <a:pPr lvl="1">
+              <a:spcAft>
+                <a:spcPts val="1100"/>
+              </a:spcAft>
+            </a:pPr>
             <a:r>
               <a:rPr sz="1400" b="1" i="0">
                 <a:solidFill>
@@ -5752,7 +6218,34 @@
                 </a:solidFill>
                 <a:latin typeface="Calibri"/>
               </a:rPr>
-              <a:t>essentially nothing</a:t>
+              <a:t>The wavelet mixer is the exception worth reporting</a:t>
+            </a:r>
+            <a:r>
+              <a:rPr sz="1400" b="0" i="0">
+                <a:solidFill>
+                  <a:srgbClr val="555555"/>
+                </a:solidFill>
+                <a:latin typeface="Calibri"/>
+              </a:rPr>
+              <a:t> — identical accuracy for </a:t>
+            </a:r>
+            <a:r>
+              <a:rPr sz="1400" b="1" i="0">
+                <a:solidFill>
+                  <a:srgbClr val="555555"/>
+                </a:solidFill>
+                <a:latin typeface="Calibri"/>
+              </a:rPr>
+              <a:t>9% fewer FLOPs</a:t>
+            </a:r>
+            <a:r>
+              <a:rPr sz="1400" b="0" i="0">
+                <a:solidFill>
+                  <a:srgbClr val="555555"/>
+                </a:solidFill>
+                <a:latin typeface="Calibri"/>
+              </a:rPr>
+              <a:t>, and markedly fewer false alarms on healthy tissue</a:t>
             </a:r>
           </a:p>
         </p:txBody>
@@ -5786,7 +6279,7 @@
                 </a:solidFill>
                 <a:latin typeface="Calibri"/>
               </a:rPr>
-              <a:t>Takeaway: for this network on this dataset, the training recipe mattered far more than the architecture.</a:t>
+              <a:t>Takeaway: the training recipe mattered more than the architecture — and most reported gains this size are indistinguishable from the random seed.</a:t>
             </a:r>
           </a:p>
         </p:txBody>
@@ -5800,7 +6293,7 @@
 </file>
 
 <file path=ppt/slides/slide15.xml><?xml version="1.0" encoding="utf-8"?>
-<p:sld xmlns:a="http://schemas.openxmlformats.org/drawingml/2006/main" xmlns:r="http://schemas.openxmlformats.org/officeDocument/2006/relationships" xmlns:p="http://schemas.openxmlformats.org/presentationml/2006/main">
+<p:sld xmlns:a="http://schemas.openxmlformats.org/drawingml/2006/main" xmlns:p="http://schemas.openxmlformats.org/presentationml/2006/main" xmlns:r="http://schemas.openxmlformats.org/officeDocument/2006/relationships">
   <p:cSld>
     <p:bg>
       <p:bgPr>
@@ -5816,14 +6309,7 @@
         <p:cNvGrpSpPr/>
         <p:nvPr/>
       </p:nvGrpSpPr>
-      <p:grpSpPr>
-        <a:xfrm>
-          <a:off x="0" y="0"/>
-          <a:ext cx="0" cy="0"/>
-          <a:chOff x="0" y="0"/>
-          <a:chExt cx="0" cy="0"/>
-        </a:xfrm>
-      </p:grpSpPr>
+      <p:grpSpPr/>
       <p:sp>
         <p:nvSpPr>
           <p:cNvPr id="2" name="TextBox 1"/>
@@ -5878,7 +6364,7 @@
           <p:nvPr/>
         </p:nvPicPr>
         <p:blipFill>
-          <a:blip r:embed="rId3"/>
+          <a:blip r:embed="rId2"/>
           <a:stretch>
             <a:fillRect/>
           </a:stretch>
@@ -5936,7 +6422,7 @@
 </file>
 
 <file path=ppt/slides/slide16.xml><?xml version="1.0" encoding="utf-8"?>
-<p:sld xmlns:a="http://schemas.openxmlformats.org/drawingml/2006/main" xmlns:r="http://schemas.openxmlformats.org/officeDocument/2006/relationships" xmlns:p="http://schemas.openxmlformats.org/presentationml/2006/main">
+<p:sld xmlns:a="http://schemas.openxmlformats.org/drawingml/2006/main" xmlns:p="http://schemas.openxmlformats.org/presentationml/2006/main" xmlns:r="http://schemas.openxmlformats.org/officeDocument/2006/relationships">
   <p:cSld>
     <p:bg>
       <p:bgPr>
@@ -5952,14 +6438,7 @@
         <p:cNvGrpSpPr/>
         <p:nvPr/>
       </p:nvGrpSpPr>
-      <p:grpSpPr>
-        <a:xfrm>
-          <a:off x="0" y="0"/>
-          <a:ext cx="0" cy="0"/>
-          <a:chOff x="0" y="0"/>
-          <a:chExt cx="0" cy="0"/>
-        </a:xfrm>
-      </p:grpSpPr>
+      <p:grpSpPr/>
       <p:sp>
         <p:nvSpPr>
           <p:cNvPr id="2" name="TextBox 1"/>
@@ -6014,7 +6493,7 @@
           <p:nvPr/>
         </p:nvPicPr>
         <p:blipFill>
-          <a:blip r:embed="rId3"/>
+          <a:blip r:embed="rId2"/>
           <a:stretch>
             <a:fillRect/>
           </a:stretch>
@@ -6072,7 +6551,7 @@
 </file>
 
 <file path=ppt/slides/slide2.xml><?xml version="1.0" encoding="utf-8"?>
-<p:sld xmlns:a="http://schemas.openxmlformats.org/drawingml/2006/main" xmlns:r="http://schemas.openxmlformats.org/officeDocument/2006/relationships" xmlns:p="http://schemas.openxmlformats.org/presentationml/2006/main">
+<p:sld xmlns:a="http://schemas.openxmlformats.org/drawingml/2006/main" xmlns:p="http://schemas.openxmlformats.org/presentationml/2006/main" xmlns:r="http://schemas.openxmlformats.org/officeDocument/2006/relationships">
   <p:cSld>
     <p:bg>
       <p:bgPr>
@@ -6088,14 +6567,7 @@
         <p:cNvGrpSpPr/>
         <p:nvPr/>
       </p:nvGrpSpPr>
-      <p:grpSpPr>
-        <a:xfrm>
-          <a:off x="0" y="0"/>
-          <a:ext cx="0" cy="0"/>
-          <a:chOff x="0" y="0"/>
-          <a:chExt cx="0" cy="0"/>
-        </a:xfrm>
-      </p:grpSpPr>
+      <p:grpSpPr/>
       <p:sp>
         <p:nvSpPr>
           <p:cNvPr id="2" name="TextBox 1"/>
@@ -6296,7 +6768,7 @@
           <p:nvPr/>
         </p:nvPicPr>
         <p:blipFill>
-          <a:blip r:embed="rId3"/>
+          <a:blip r:embed="rId2"/>
           <a:stretch>
             <a:fillRect/>
           </a:stretch>
@@ -6320,7 +6792,7 @@
 </file>
 
 <file path=ppt/slides/slide3.xml><?xml version="1.0" encoding="utf-8"?>
-<p:sld xmlns:a="http://schemas.openxmlformats.org/drawingml/2006/main" xmlns:r="http://schemas.openxmlformats.org/officeDocument/2006/relationships" xmlns:p="http://schemas.openxmlformats.org/presentationml/2006/main">
+<p:sld xmlns:a="http://schemas.openxmlformats.org/drawingml/2006/main" xmlns:p="http://schemas.openxmlformats.org/presentationml/2006/main" xmlns:r="http://schemas.openxmlformats.org/officeDocument/2006/relationships">
   <p:cSld>
     <p:bg>
       <p:bgPr>
@@ -6336,14 +6808,7 @@
         <p:cNvGrpSpPr/>
         <p:nvPr/>
       </p:nvGrpSpPr>
-      <p:grpSpPr>
-        <a:xfrm>
-          <a:off x="0" y="0"/>
-          <a:ext cx="0" cy="0"/>
-          <a:chOff x="0" y="0"/>
-          <a:chExt cx="0" cy="0"/>
-        </a:xfrm>
-      </p:grpSpPr>
+      <p:grpSpPr/>
       <p:sp>
         <p:nvSpPr>
           <p:cNvPr id="2" name="TextBox 1"/>
@@ -6385,294 +6850,6 @@
                 <a:latin typeface="Calibri"/>
               </a:rPr>
               <a:t>U-Net shape — but the deep layers use MLPs, not convolution or attention</a:t>
-            </a:r>
-          </a:p>
-        </p:txBody>
-      </p:sp>
-      <p:sp>
-        <p:nvSpPr>
-          <p:cNvPr id="3" name="TextBox 2"/>
-          <p:cNvSpPr txBox="1"/>
-          <p:nvPr/>
-        </p:nvSpPr>
-        <p:spPr>
-          <a:xfrm>
-            <a:off x="548641" y="1463040"/>
-            <a:ext cx="5079162" cy="3441968"/>
-          </a:xfrm>
-          <a:prstGeom prst="rect">
-            <a:avLst/>
-          </a:prstGeom>
-          <a:noFill/>
-        </p:spPr>
-        <p:txBody>
-          <a:bodyPr wrap="square">
-            <a:spAutoFit/>
-          </a:bodyPr>
-          <a:lstStyle/>
-          <a:p>
-            <a:pPr>
-              <a:spcAft>
-                <a:spcPts val="1000"/>
-              </a:spcAft>
-            </a:pPr>
-            <a:r>
-              <a:rPr sz="1600" b="1" i="0" dirty="0">
-                <a:solidFill>
-                  <a:srgbClr val="000000"/>
-                </a:solidFill>
-                <a:latin typeface="Calibri"/>
-              </a:rPr>
-              <a:t>Conv stage</a:t>
-            </a:r>
-            <a:r>
-              <a:rPr sz="1600" b="0" i="0" dirty="0">
-                <a:solidFill>
-                  <a:srgbClr val="000000"/>
-                </a:solidFill>
-                <a:latin typeface="Calibri"/>
-              </a:rPr>
-              <a:t> (3 shallow levels) — Conv3×3 → BN → </a:t>
-            </a:r>
-            <a:r>
-              <a:rPr sz="1600" b="0" i="0" dirty="0" err="1">
-                <a:solidFill>
-                  <a:srgbClr val="000000"/>
-                </a:solidFill>
-                <a:latin typeface="Calibri"/>
-              </a:rPr>
-              <a:t>ReLU</a:t>
-            </a:r>
-            <a:r>
-              <a:rPr sz="1600" b="0" i="0" dirty="0">
-                <a:solidFill>
-                  <a:srgbClr val="000000"/>
-                </a:solidFill>
-                <a:latin typeface="Calibri"/>
-              </a:rPr>
-              <a:t>, narrow channels (16/32/128)</a:t>
-            </a:r>
-          </a:p>
-          <a:p>
-            <a:pPr>
-              <a:spcAft>
-                <a:spcPts val="1000"/>
-              </a:spcAft>
-            </a:pPr>
-            <a:r>
-              <a:rPr sz="1600" b="1" i="0" dirty="0">
-                <a:solidFill>
-                  <a:srgbClr val="000000"/>
-                </a:solidFill>
-                <a:latin typeface="Calibri"/>
-              </a:rPr>
-              <a:t>Tokenized MLP stage</a:t>
-            </a:r>
-            <a:r>
-              <a:rPr sz="1600" b="0" i="0" dirty="0">
-                <a:solidFill>
-                  <a:srgbClr val="000000"/>
-                </a:solidFill>
-                <a:latin typeface="Calibri"/>
-              </a:rPr>
-              <a:t> (2 deep levels) — features are tokenized, then passed through shifted MLPs</a:t>
-            </a:r>
-          </a:p>
-          <a:p>
-            <a:pPr>
-              <a:spcAft>
-                <a:spcPts val="1000"/>
-              </a:spcAft>
-            </a:pPr>
-            <a:r>
-              <a:rPr sz="1600" b="1" i="0" dirty="0">
-                <a:solidFill>
-                  <a:srgbClr val="000000"/>
-                </a:solidFill>
-                <a:latin typeface="Calibri"/>
-              </a:rPr>
-              <a:t>Skip connections</a:t>
-            </a:r>
-            <a:r>
-              <a:rPr sz="1600" b="0" i="0" dirty="0">
-                <a:solidFill>
-                  <a:srgbClr val="000000"/>
-                </a:solidFill>
-                <a:latin typeface="Calibri"/>
-              </a:rPr>
-              <a:t> join matching encoder and decoder levels</a:t>
-            </a:r>
-          </a:p>
-          <a:p>
-            <a:pPr>
-              <a:spcAft>
-                <a:spcPts val="1000"/>
-              </a:spcAft>
-            </a:pPr>
-            <a:endParaRPr sz="1600" b="0" i="0" dirty="0">
-              <a:solidFill>
-                <a:srgbClr val="000000"/>
-              </a:solidFill>
-              <a:latin typeface="Calibri"/>
-            </a:endParaRPr>
-          </a:p>
-          <a:p>
-            <a:pPr>
-              <a:spcAft>
-                <a:spcPts val="1000"/>
-              </a:spcAft>
-            </a:pPr>
-            <a:r>
-              <a:rPr sz="1600" b="1" i="0" dirty="0">
-                <a:solidFill>
-                  <a:srgbClr val="000000"/>
-                </a:solidFill>
-                <a:latin typeface="Calibri"/>
-              </a:rPr>
-              <a:t>Why MLPs?</a:t>
-            </a:r>
-            <a:r>
-              <a:rPr sz="1600" b="0" i="0" dirty="0">
-                <a:solidFill>
-                  <a:srgbClr val="000000"/>
-                </a:solidFill>
-                <a:latin typeface="Calibri"/>
-              </a:rPr>
-              <a:t> Self-attention costs O(n²) in the number of tokens. MLPs are plain matrix multiplies — far cheaper.</a:t>
-            </a:r>
-          </a:p>
-          <a:p>
-            <a:pPr>
-              <a:spcAft>
-                <a:spcPts val="1000"/>
-              </a:spcAft>
-            </a:pPr>
-            <a:r>
-              <a:rPr sz="1600" b="1" i="0" dirty="0">
-                <a:solidFill>
-                  <a:srgbClr val="000000"/>
-                </a:solidFill>
-                <a:latin typeface="Calibri"/>
-              </a:rPr>
-              <a:t>The catch:</a:t>
-            </a:r>
-            <a:r>
-              <a:rPr sz="1600" b="0" i="0" dirty="0">
-                <a:solidFill>
-                  <a:srgbClr val="000000"/>
-                </a:solidFill>
-                <a:latin typeface="Calibri"/>
-              </a:rPr>
-              <a:t> an MLP is spatially blind. It has no notion of "adjacent pixel".</a:t>
-            </a:r>
-          </a:p>
-        </p:txBody>
-      </p:sp>
-      <p:pic>
-        <p:nvPicPr>
-          <p:cNvPr id="5" name="Picture 4">
-            <a:extLst>
-              <a:ext uri="{FF2B5EF4-FFF2-40B4-BE49-F238E27FC236}">
-                <a16:creationId xmlns:a16="http://schemas.microsoft.com/office/drawing/2014/main" id="{70128D3F-1A8A-BBDC-6EC2-1BB30C9B608E}"/>
-              </a:ext>
-            </a:extLst>
-          </p:cNvPr>
-          <p:cNvPicPr>
-            <a:picLocks noChangeAspect="1"/>
-          </p:cNvPicPr>
-          <p:nvPr/>
-        </p:nvPicPr>
-        <p:blipFill>
-          <a:blip r:embed="rId3"/>
-          <a:srcRect b="7143"/>
-          <a:stretch>
-            <a:fillRect/>
-          </a:stretch>
-        </p:blipFill>
-        <p:spPr>
-          <a:xfrm>
-            <a:off x="5760188" y="1039305"/>
-            <a:ext cx="6254273" cy="4355655"/>
-          </a:xfrm>
-          <a:prstGeom prst="rect">
-            <a:avLst/>
-          </a:prstGeom>
-        </p:spPr>
-      </p:pic>
-    </p:spTree>
-  </p:cSld>
-  <p:clrMapOvr>
-    <a:masterClrMapping/>
-  </p:clrMapOvr>
-</p:sld>
-</file>
-
-<file path=ppt/slides/slide4.xml><?xml version="1.0" encoding="utf-8"?>
-<p:sld xmlns:a="http://schemas.openxmlformats.org/drawingml/2006/main" xmlns:r="http://schemas.openxmlformats.org/officeDocument/2006/relationships" xmlns:p="http://schemas.openxmlformats.org/presentationml/2006/main">
-  <p:cSld>
-    <p:bg>
-      <p:bgPr>
-        <a:solidFill>
-          <a:srgbClr val="FFFFFF"/>
-        </a:solidFill>
-        <a:effectLst/>
-      </p:bgPr>
-    </p:bg>
-    <p:spTree>
-      <p:nvGrpSpPr>
-        <p:cNvPr id="1" name=""/>
-        <p:cNvGrpSpPr/>
-        <p:nvPr/>
-      </p:nvGrpSpPr>
-      <p:grpSpPr>
-        <a:xfrm>
-          <a:off x="0" y="0"/>
-          <a:ext cx="0" cy="0"/>
-          <a:chOff x="0" y="0"/>
-          <a:chExt cx="0" cy="0"/>
-        </a:xfrm>
-      </p:grpSpPr>
-      <p:sp>
-        <p:nvSpPr>
-          <p:cNvPr id="2" name="TextBox 1"/>
-          <p:cNvSpPr txBox="1"/>
-          <p:nvPr/>
-        </p:nvSpPr>
-        <p:spPr>
-          <a:xfrm>
-            <a:off x="548640" y="320040"/>
-            <a:ext cx="11094415" cy="822960"/>
-          </a:xfrm>
-          <a:prstGeom prst="rect">
-            <a:avLst/>
-          </a:prstGeom>
-          <a:noFill/>
-        </p:spPr>
-        <p:txBody>
-          <a:bodyPr wrap="square">
-            <a:spAutoFit/>
-          </a:bodyPr>
-          <a:lstStyle/>
-          <a:p>
-            <a:r>
-              <a:rPr sz="3000" b="1" i="0">
-                <a:solidFill>
-                  <a:srgbClr val="000000"/>
-                </a:solidFill>
-                <a:latin typeface="Calibri"/>
-              </a:rPr>
-              <a:t>The key trick: shifted MLPs</a:t>
-            </a:r>
-          </a:p>
-          <a:p>
-            <a:r>
-              <a:rPr sz="1400" b="0" i="1">
-                <a:solidFill>
-                  <a:srgbClr val="555555"/>
-                </a:solidFill>
-                <a:latin typeface="Calibri"/>
-              </a:rPr>
-              <a:t>How UNeXt gives an MLP a sense of locality — for free</a:t>
             </a:r>
           </a:p>
         </p:txBody>
@@ -6705,6 +6882,266 @@
               </a:spcAft>
             </a:pPr>
             <a:r>
+              <a:rPr sz="1600" b="1" i="0">
+                <a:solidFill>
+                  <a:srgbClr val="000000"/>
+                </a:solidFill>
+                <a:latin typeface="Calibri"/>
+              </a:rPr>
+              <a:t>Conv stage</a:t>
+            </a:r>
+            <a:r>
+              <a:rPr sz="1600" b="0" i="0">
+                <a:solidFill>
+                  <a:srgbClr val="000000"/>
+                </a:solidFill>
+                <a:latin typeface="Calibri"/>
+              </a:rPr>
+              <a:t> (3 shallow levels) — Conv3×3 → BN → ReLU, narrow channels (16/32/128)</a:t>
+            </a:r>
+          </a:p>
+          <a:p>
+            <a:pPr>
+              <a:spcAft>
+                <a:spcPts val="1000"/>
+              </a:spcAft>
+            </a:pPr>
+            <a:r>
+              <a:rPr sz="1600" b="1" i="0">
+                <a:solidFill>
+                  <a:srgbClr val="000000"/>
+                </a:solidFill>
+                <a:latin typeface="Calibri"/>
+              </a:rPr>
+              <a:t>Tokenized MLP stage</a:t>
+            </a:r>
+            <a:r>
+              <a:rPr sz="1600" b="0" i="0">
+                <a:solidFill>
+                  <a:srgbClr val="000000"/>
+                </a:solidFill>
+                <a:latin typeface="Calibri"/>
+              </a:rPr>
+              <a:t> (2 deep levels) — features are tokenized, then passed through shifted MLPs</a:t>
+            </a:r>
+          </a:p>
+          <a:p>
+            <a:pPr>
+              <a:spcAft>
+                <a:spcPts val="1000"/>
+              </a:spcAft>
+            </a:pPr>
+            <a:r>
+              <a:rPr sz="1600" b="1" i="0">
+                <a:solidFill>
+                  <a:srgbClr val="000000"/>
+                </a:solidFill>
+                <a:latin typeface="Calibri"/>
+              </a:rPr>
+              <a:t>Skip connections</a:t>
+            </a:r>
+            <a:r>
+              <a:rPr sz="1600" b="0" i="0">
+                <a:solidFill>
+                  <a:srgbClr val="000000"/>
+                </a:solidFill>
+                <a:latin typeface="Calibri"/>
+              </a:rPr>
+              <a:t> join matching encoder and decoder levels</a:t>
+            </a:r>
+          </a:p>
+          <a:p>
+            <a:pPr>
+              <a:spcAft>
+                <a:spcPts val="1000"/>
+              </a:spcAft>
+            </a:pPr>
+          </a:p>
+          <a:p>
+            <a:pPr>
+              <a:spcAft>
+                <a:spcPts val="1000"/>
+              </a:spcAft>
+            </a:pPr>
+            <a:r>
+              <a:rPr sz="1600" b="1" i="0">
+                <a:solidFill>
+                  <a:srgbClr val="000000"/>
+                </a:solidFill>
+                <a:latin typeface="Calibri"/>
+              </a:rPr>
+              <a:t>Why MLPs?</a:t>
+            </a:r>
+            <a:r>
+              <a:rPr sz="1600" b="0" i="0">
+                <a:solidFill>
+                  <a:srgbClr val="000000"/>
+                </a:solidFill>
+                <a:latin typeface="Calibri"/>
+              </a:rPr>
+              <a:t> Self-attention costs O(n²) in the number of tokens. MLPs are plain matrix multiplies — far cheaper.</a:t>
+            </a:r>
+          </a:p>
+          <a:p>
+            <a:pPr>
+              <a:spcAft>
+                <a:spcPts val="1000"/>
+              </a:spcAft>
+            </a:pPr>
+            <a:r>
+              <a:rPr sz="1600" b="1" i="0">
+                <a:solidFill>
+                  <a:srgbClr val="000000"/>
+                </a:solidFill>
+                <a:latin typeface="Calibri"/>
+              </a:rPr>
+              <a:t>The catch:</a:t>
+            </a:r>
+            <a:r>
+              <a:rPr sz="1600" b="0" i="0">
+                <a:solidFill>
+                  <a:srgbClr val="000000"/>
+                </a:solidFill>
+                <a:latin typeface="Calibri"/>
+              </a:rPr>
+              <a:t> an MLP is spatially blind. It has no notion of "adjacent pixel".</a:t>
+            </a:r>
+          </a:p>
+        </p:txBody>
+      </p:sp>
+      <p:sp>
+        <p:nvSpPr>
+          <p:cNvPr id="4" name="TextBox 3"/>
+          <p:cNvSpPr txBox="1"/>
+          <p:nvPr/>
+        </p:nvSpPr>
+        <p:spPr>
+          <a:xfrm>
+            <a:off x="548640" y="6199632"/>
+            <a:ext cx="11094415" cy="457200"/>
+          </a:xfrm>
+          <a:prstGeom prst="rect">
+            <a:avLst/>
+          </a:prstGeom>
+          <a:noFill/>
+        </p:spPr>
+        <p:txBody>
+          <a:bodyPr wrap="square">
+            <a:spAutoFit/>
+          </a:bodyPr>
+          <a:lstStyle/>
+          <a:p>
+            <a:r>
+              <a:rPr sz="1200" b="0" i="1">
+                <a:solidFill>
+                  <a:srgbClr val="555555"/>
+                </a:solidFill>
+                <a:latin typeface="Calibri"/>
+              </a:rPr>
+              <a:t>Architecture figure: insert unext/imgs/unext.png from the official repository here.</a:t>
+            </a:r>
+          </a:p>
+        </p:txBody>
+      </p:sp>
+    </p:spTree>
+  </p:cSld>
+  <p:clrMapOvr>
+    <a:masterClrMapping/>
+  </p:clrMapOvr>
+</p:sld>
+</file>
+
+<file path=ppt/slides/slide4.xml><?xml version="1.0" encoding="utf-8"?>
+<p:sld xmlns:a="http://schemas.openxmlformats.org/drawingml/2006/main" xmlns:p="http://schemas.openxmlformats.org/presentationml/2006/main" xmlns:r="http://schemas.openxmlformats.org/officeDocument/2006/relationships">
+  <p:cSld>
+    <p:bg>
+      <p:bgPr>
+        <a:solidFill>
+          <a:srgbClr val="FFFFFF"/>
+        </a:solidFill>
+        <a:effectLst/>
+      </p:bgPr>
+    </p:bg>
+    <p:spTree>
+      <p:nvGrpSpPr>
+        <p:cNvPr id="1" name=""/>
+        <p:cNvGrpSpPr/>
+        <p:nvPr/>
+      </p:nvGrpSpPr>
+      <p:grpSpPr/>
+      <p:sp>
+        <p:nvSpPr>
+          <p:cNvPr id="2" name="TextBox 1"/>
+          <p:cNvSpPr txBox="1"/>
+          <p:nvPr/>
+        </p:nvSpPr>
+        <p:spPr>
+          <a:xfrm>
+            <a:off x="548640" y="320040"/>
+            <a:ext cx="11094415" cy="822960"/>
+          </a:xfrm>
+          <a:prstGeom prst="rect">
+            <a:avLst/>
+          </a:prstGeom>
+          <a:noFill/>
+        </p:spPr>
+        <p:txBody>
+          <a:bodyPr wrap="square">
+            <a:spAutoFit/>
+          </a:bodyPr>
+          <a:lstStyle/>
+          <a:p>
+            <a:r>
+              <a:rPr sz="3000" b="1" i="0">
+                <a:solidFill>
+                  <a:srgbClr val="000000"/>
+                </a:solidFill>
+                <a:latin typeface="Calibri"/>
+              </a:rPr>
+              <a:t>The key trick: shifted MLPs</a:t>
+            </a:r>
+          </a:p>
+          <a:p>
+            <a:r>
+              <a:rPr sz="1400" b="0" i="1">
+                <a:solidFill>
+                  <a:srgbClr val="555555"/>
+                </a:solidFill>
+                <a:latin typeface="Calibri"/>
+              </a:rPr>
+              <a:t>How UNeXt gives an MLP a sense of locality — for free</a:t>
+            </a:r>
+          </a:p>
+        </p:txBody>
+      </p:sp>
+      <p:sp>
+        <p:nvSpPr>
+          <p:cNvPr id="3" name="TextBox 2"/>
+          <p:cNvSpPr txBox="1"/>
+          <p:nvPr/>
+        </p:nvSpPr>
+        <p:spPr>
+          <a:xfrm>
+            <a:off x="548640" y="1463040"/>
+            <a:ext cx="11094415" cy="4937760"/>
+          </a:xfrm>
+          <a:prstGeom prst="rect">
+            <a:avLst/>
+          </a:prstGeom>
+          <a:noFill/>
+        </p:spPr>
+        <p:txBody>
+          <a:bodyPr wrap="square">
+            <a:spAutoFit/>
+          </a:bodyPr>
+          <a:lstStyle/>
+          <a:p>
+            <a:pPr>
+              <a:spcAft>
+                <a:spcPts val="1000"/>
+              </a:spcAft>
+            </a:pPr>
+            <a:r>
               <a:rPr sz="1500" b="0" i="0">
                 <a:solidFill>
                   <a:srgbClr val="000000"/>
@@ -6819,39 +7256,15 @@
                 <a:tableStyleId>{5C22544A-7EE6-4342-B048-85BDC9FD1C3A}</a:tableStyleId>
               </a:tblPr>
               <a:tblGrid>
-                <a:gridCol w="3698138">
-                  <a:extLst>
-                    <a:ext uri="{9D8B030D-6E8A-4147-A177-3AD203B41FA5}">
-                      <a16:colId xmlns:a16="http://schemas.microsoft.com/office/drawing/2014/main" val="20000"/>
-                    </a:ext>
-                  </a:extLst>
-                </a:gridCol>
-                <a:gridCol w="2465425">
-                  <a:extLst>
-                    <a:ext uri="{9D8B030D-6E8A-4147-A177-3AD203B41FA5}">
-                      <a16:colId xmlns:a16="http://schemas.microsoft.com/office/drawing/2014/main" val="20001"/>
-                    </a:ext>
-                  </a:extLst>
-                </a:gridCol>
-                <a:gridCol w="2465425">
-                  <a:extLst>
-                    <a:ext uri="{9D8B030D-6E8A-4147-A177-3AD203B41FA5}">
-                      <a16:colId xmlns:a16="http://schemas.microsoft.com/office/drawing/2014/main" val="20002"/>
-                    </a:ext>
-                  </a:extLst>
-                </a:gridCol>
-                <a:gridCol w="2465425">
-                  <a:extLst>
-                    <a:ext uri="{9D8B030D-6E8A-4147-A177-3AD203B41FA5}">
-                      <a16:colId xmlns:a16="http://schemas.microsoft.com/office/drawing/2014/main" val="20003"/>
-                    </a:ext>
-                  </a:extLst>
-                </a:gridCol>
+                <a:gridCol w="3698138"/>
+                <a:gridCol w="2465425"/>
+                <a:gridCol w="2465425"/>
+                <a:gridCol w="2465425"/>
               </a:tblGrid>
               <a:tr h="438912">
                 <a:tc>
                   <a:txBody>
-                    <a:bodyPr/>
+                    <a:bodyPr wrap="square"/>
                     <a:lstStyle/>
                     <a:p>
                       <a:pPr algn="l"/>
@@ -6874,7 +7287,7 @@
                 </a:tc>
                 <a:tc>
                   <a:txBody>
-                    <a:bodyPr/>
+                    <a:bodyPr wrap="square"/>
                     <a:lstStyle/>
                     <a:p>
                       <a:pPr algn="ctr"/>
@@ -6897,7 +7310,7 @@
                 </a:tc>
                 <a:tc>
                   <a:txBody>
-                    <a:bodyPr/>
+                    <a:bodyPr wrap="square"/>
                     <a:lstStyle/>
                     <a:p>
                       <a:pPr algn="ctr"/>
@@ -6920,7 +7333,7 @@
                 </a:tc>
                 <a:tc>
                   <a:txBody>
-                    <a:bodyPr/>
+                    <a:bodyPr wrap="square"/>
                     <a:lstStyle/>
                     <a:p>
                       <a:pPr algn="ctr"/>
@@ -6941,16 +7354,11 @@
                     </a:solidFill>
                   </a:tcPr>
                 </a:tc>
-                <a:extLst>
-                  <a:ext uri="{0D108BD9-81ED-4DB2-BD59-A6C34878D82A}">
-                    <a16:rowId xmlns:a16="http://schemas.microsoft.com/office/drawing/2014/main" val="10000"/>
-                  </a:ext>
-                </a:extLst>
               </a:tr>
               <a:tr h="438912">
                 <a:tc>
                   <a:txBody>
-                    <a:bodyPr/>
+                    <a:bodyPr wrap="square"/>
                     <a:lstStyle/>
                     <a:p>
                       <a:pPr algn="l"/>
@@ -6973,7 +7381,7 @@
                 </a:tc>
                 <a:tc>
                   <a:txBody>
-                    <a:bodyPr/>
+                    <a:bodyPr wrap="square"/>
                     <a:lstStyle/>
                     <a:p>
                       <a:pPr algn="ctr"/>
@@ -6996,7 +7404,7 @@
                 </a:tc>
                 <a:tc>
                   <a:txBody>
-                    <a:bodyPr/>
+                    <a:bodyPr wrap="square"/>
                     <a:lstStyle/>
                     <a:p>
                       <a:pPr algn="ctr"/>
@@ -7019,7 +7427,7 @@
                 </a:tc>
                 <a:tc>
                   <a:txBody>
-                    <a:bodyPr/>
+                    <a:bodyPr wrap="square"/>
                     <a:lstStyle/>
                     <a:p>
                       <a:pPr algn="ctr"/>
@@ -7040,16 +7448,11 @@
                     </a:solidFill>
                   </a:tcPr>
                 </a:tc>
-                <a:extLst>
-                  <a:ext uri="{0D108BD9-81ED-4DB2-BD59-A6C34878D82A}">
-                    <a16:rowId xmlns:a16="http://schemas.microsoft.com/office/drawing/2014/main" val="10001"/>
-                  </a:ext>
-                </a:extLst>
               </a:tr>
               <a:tr h="438912">
                 <a:tc>
                   <a:txBody>
-                    <a:bodyPr/>
+                    <a:bodyPr wrap="square"/>
                     <a:lstStyle/>
                     <a:p>
                       <a:pPr algn="l"/>
@@ -7072,7 +7475,7 @@
                 </a:tc>
                 <a:tc>
                   <a:txBody>
-                    <a:bodyPr/>
+                    <a:bodyPr wrap="square"/>
                     <a:lstStyle/>
                     <a:p>
                       <a:pPr algn="ctr"/>
@@ -7095,7 +7498,7 @@
                 </a:tc>
                 <a:tc>
                   <a:txBody>
-                    <a:bodyPr/>
+                    <a:bodyPr wrap="square"/>
                     <a:lstStyle/>
                     <a:p>
                       <a:pPr algn="ctr"/>
@@ -7118,7 +7521,7 @@
                 </a:tc>
                 <a:tc>
                   <a:txBody>
-                    <a:bodyPr/>
+                    <a:bodyPr wrap="square"/>
                     <a:lstStyle/>
                     <a:p>
                       <a:pPr algn="ctr"/>
@@ -7139,16 +7542,11 @@
                     </a:solidFill>
                   </a:tcPr>
                 </a:tc>
-                <a:extLst>
-                  <a:ext uri="{0D108BD9-81ED-4DB2-BD59-A6C34878D82A}">
-                    <a16:rowId xmlns:a16="http://schemas.microsoft.com/office/drawing/2014/main" val="10002"/>
-                  </a:ext>
-                </a:extLst>
               </a:tr>
               <a:tr h="438912">
                 <a:tc>
                   <a:txBody>
-                    <a:bodyPr/>
+                    <a:bodyPr wrap="square"/>
                     <a:lstStyle/>
                     <a:p>
                       <a:pPr algn="l"/>
@@ -7171,7 +7569,7 @@
                 </a:tc>
                 <a:tc>
                   <a:txBody>
-                    <a:bodyPr/>
+                    <a:bodyPr wrap="square"/>
                     <a:lstStyle/>
                     <a:p>
                       <a:pPr algn="ctr"/>
@@ -7194,7 +7592,7 @@
                 </a:tc>
                 <a:tc>
                   <a:txBody>
-                    <a:bodyPr/>
+                    <a:bodyPr wrap="square"/>
                     <a:lstStyle/>
                     <a:p>
                       <a:pPr algn="ctr"/>
@@ -7217,7 +7615,7 @@
                 </a:tc>
                 <a:tc>
                   <a:txBody>
-                    <a:bodyPr/>
+                    <a:bodyPr wrap="square"/>
                     <a:lstStyle/>
                     <a:p>
                       <a:pPr algn="ctr"/>
@@ -7238,16 +7636,11 @@
                     </a:solidFill>
                   </a:tcPr>
                 </a:tc>
-                <a:extLst>
-                  <a:ext uri="{0D108BD9-81ED-4DB2-BD59-A6C34878D82A}">
-                    <a16:rowId xmlns:a16="http://schemas.microsoft.com/office/drawing/2014/main" val="10003"/>
-                  </a:ext>
-                </a:extLst>
               </a:tr>
               <a:tr h="438912">
                 <a:tc>
                   <a:txBody>
-                    <a:bodyPr/>
+                    <a:bodyPr wrap="square"/>
                     <a:lstStyle/>
                     <a:p>
                       <a:pPr algn="l"/>
@@ -7270,7 +7663,7 @@
                 </a:tc>
                 <a:tc>
                   <a:txBody>
-                    <a:bodyPr/>
+                    <a:bodyPr wrap="square"/>
                     <a:lstStyle/>
                     <a:p>
                       <a:pPr algn="ctr"/>
@@ -7293,7 +7686,7 @@
                 </a:tc>
                 <a:tc>
                   <a:txBody>
-                    <a:bodyPr/>
+                    <a:bodyPr wrap="square"/>
                     <a:lstStyle/>
                     <a:p>
                       <a:pPr algn="ctr"/>
@@ -7316,7 +7709,7 @@
                 </a:tc>
                 <a:tc>
                   <a:txBody>
-                    <a:bodyPr/>
+                    <a:bodyPr wrap="square"/>
                     <a:lstStyle/>
                     <a:p>
                       <a:pPr algn="ctr"/>
@@ -7337,11 +7730,6 @@
                     </a:solidFill>
                   </a:tcPr>
                 </a:tc>
-                <a:extLst>
-                  <a:ext uri="{0D108BD9-81ED-4DB2-BD59-A6C34878D82A}">
-                    <a16:rowId xmlns:a16="http://schemas.microsoft.com/office/drawing/2014/main" val="10004"/>
-                  </a:ext>
-                </a:extLst>
               </a:tr>
             </a:tbl>
           </a:graphicData>
@@ -7390,7 +7778,7 @@
 </file>
 
 <file path=ppt/slides/slide5.xml><?xml version="1.0" encoding="utf-8"?>
-<p:sld xmlns:a="http://schemas.openxmlformats.org/drawingml/2006/main" xmlns:r="http://schemas.openxmlformats.org/officeDocument/2006/relationships" xmlns:p="http://schemas.openxmlformats.org/presentationml/2006/main">
+<p:sld xmlns:a="http://schemas.openxmlformats.org/drawingml/2006/main" xmlns:p="http://schemas.openxmlformats.org/presentationml/2006/main" xmlns:r="http://schemas.openxmlformats.org/officeDocument/2006/relationships">
   <p:cSld>
     <p:bg>
       <p:bgPr>
@@ -7406,14 +7794,7 @@
         <p:cNvGrpSpPr/>
         <p:nvPr/>
       </p:nvGrpSpPr>
-      <p:grpSpPr>
-        <a:xfrm>
-          <a:off x="0" y="0"/>
-          <a:ext cx="0" cy="0"/>
-          <a:chOff x="0" y="0"/>
-          <a:chExt cx="0" cy="0"/>
-        </a:xfrm>
-      </p:grpSpPr>
+      <p:grpSpPr/>
       <p:sp>
         <p:nvSpPr>
           <p:cNvPr id="2" name="TextBox 1"/>
@@ -7594,32 +7975,14 @@
                 <a:tableStyleId>{5C22544A-7EE6-4342-B048-85BDC9FD1C3A}</a:tableStyleId>
               </a:tblPr>
               <a:tblGrid>
-                <a:gridCol w="3840480">
-                  <a:extLst>
-                    <a:ext uri="{9D8B030D-6E8A-4147-A177-3AD203B41FA5}">
-                      <a16:colId xmlns:a16="http://schemas.microsoft.com/office/drawing/2014/main" val="20000"/>
-                    </a:ext>
-                  </a:extLst>
-                </a:gridCol>
-                <a:gridCol w="1920240">
-                  <a:extLst>
-                    <a:ext uri="{9D8B030D-6E8A-4147-A177-3AD203B41FA5}">
-                      <a16:colId xmlns:a16="http://schemas.microsoft.com/office/drawing/2014/main" val="20001"/>
-                    </a:ext>
-                  </a:extLst>
-                </a:gridCol>
-                <a:gridCol w="1920240">
-                  <a:extLst>
-                    <a:ext uri="{9D8B030D-6E8A-4147-A177-3AD203B41FA5}">
-                      <a16:colId xmlns:a16="http://schemas.microsoft.com/office/drawing/2014/main" val="20002"/>
-                    </a:ext>
-                  </a:extLst>
-                </a:gridCol>
+                <a:gridCol w="3840480"/>
+                <a:gridCol w="1920240"/>
+                <a:gridCol w="1920240"/>
               </a:tblGrid>
               <a:tr h="457200">
                 <a:tc>
                   <a:txBody>
-                    <a:bodyPr/>
+                    <a:bodyPr wrap="square"/>
                     <a:lstStyle/>
                     <a:p>
                       <a:pPr algn="l"/>
@@ -7642,7 +8005,7 @@
                 </a:tc>
                 <a:tc>
                   <a:txBody>
-                    <a:bodyPr/>
+                    <a:bodyPr wrap="square"/>
                     <a:lstStyle/>
                     <a:p>
                       <a:pPr algn="ctr"/>
@@ -7665,7 +8028,7 @@
                 </a:tc>
                 <a:tc>
                   <a:txBody>
-                    <a:bodyPr/>
+                    <a:bodyPr wrap="square"/>
                     <a:lstStyle/>
                     <a:p>
                       <a:pPr algn="ctr"/>
@@ -7686,16 +8049,11 @@
                     </a:solidFill>
                   </a:tcPr>
                 </a:tc>
-                <a:extLst>
-                  <a:ext uri="{0D108BD9-81ED-4DB2-BD59-A6C34878D82A}">
-                    <a16:rowId xmlns:a16="http://schemas.microsoft.com/office/drawing/2014/main" val="10000"/>
-                  </a:ext>
-                </a:extLst>
               </a:tr>
               <a:tr h="457200">
                 <a:tc>
                   <a:txBody>
-                    <a:bodyPr/>
+                    <a:bodyPr wrap="square"/>
                     <a:lstStyle/>
                     <a:p>
                       <a:pPr algn="l"/>
@@ -7718,7 +8076,7 @@
                 </a:tc>
                 <a:tc>
                   <a:txBody>
-                    <a:bodyPr/>
+                    <a:bodyPr wrap="square"/>
                     <a:lstStyle/>
                     <a:p>
                       <a:pPr algn="ctr"/>
@@ -7741,7 +8099,7 @@
                 </a:tc>
                 <a:tc>
                   <a:txBody>
-                    <a:bodyPr/>
+                    <a:bodyPr wrap="square"/>
                     <a:lstStyle/>
                     <a:p>
                       <a:pPr algn="ctr"/>
@@ -7762,16 +8120,11 @@
                     </a:solidFill>
                   </a:tcPr>
                 </a:tc>
-                <a:extLst>
-                  <a:ext uri="{0D108BD9-81ED-4DB2-BD59-A6C34878D82A}">
-                    <a16:rowId xmlns:a16="http://schemas.microsoft.com/office/drawing/2014/main" val="10001"/>
-                  </a:ext>
-                </a:extLst>
               </a:tr>
               <a:tr h="457200">
                 <a:tc>
                   <a:txBody>
-                    <a:bodyPr/>
+                    <a:bodyPr wrap="square"/>
                     <a:lstStyle/>
                     <a:p>
                       <a:pPr algn="l"/>
@@ -7794,7 +8147,7 @@
                 </a:tc>
                 <a:tc>
                   <a:txBody>
-                    <a:bodyPr/>
+                    <a:bodyPr wrap="square"/>
                     <a:lstStyle/>
                     <a:p>
                       <a:pPr algn="ctr"/>
@@ -7817,7 +8170,7 @@
                 </a:tc>
                 <a:tc>
                   <a:txBody>
-                    <a:bodyPr/>
+                    <a:bodyPr wrap="square"/>
                     <a:lstStyle/>
                     <a:p>
                       <a:pPr algn="ctr"/>
@@ -7838,16 +8191,11 @@
                     </a:solidFill>
                   </a:tcPr>
                 </a:tc>
-                <a:extLst>
-                  <a:ext uri="{0D108BD9-81ED-4DB2-BD59-A6C34878D82A}">
-                    <a16:rowId xmlns:a16="http://schemas.microsoft.com/office/drawing/2014/main" val="10002"/>
-                  </a:ext>
-                </a:extLst>
               </a:tr>
               <a:tr h="457200">
                 <a:tc>
                   <a:txBody>
-                    <a:bodyPr/>
+                    <a:bodyPr wrap="square"/>
                     <a:lstStyle/>
                     <a:p>
                       <a:pPr algn="l"/>
@@ -7870,7 +8218,7 @@
                 </a:tc>
                 <a:tc>
                   <a:txBody>
-                    <a:bodyPr/>
+                    <a:bodyPr wrap="square"/>
                     <a:lstStyle/>
                     <a:p>
                       <a:pPr algn="ctr"/>
@@ -7893,7 +8241,7 @@
                 </a:tc>
                 <a:tc>
                   <a:txBody>
-                    <a:bodyPr/>
+                    <a:bodyPr wrap="square"/>
                     <a:lstStyle/>
                     <a:p>
                       <a:pPr algn="ctr"/>
@@ -7914,11 +8262,6 @@
                     </a:solidFill>
                   </a:tcPr>
                 </a:tc>
-                <a:extLst>
-                  <a:ext uri="{0D108BD9-81ED-4DB2-BD59-A6C34878D82A}">
-                    <a16:rowId xmlns:a16="http://schemas.microsoft.com/office/drawing/2014/main" val="10003"/>
-                  </a:ext>
-                </a:extLst>
               </a:tr>
             </a:tbl>
           </a:graphicData>
@@ -7967,7 +8310,7 @@
 </file>
 
 <file path=ppt/slides/slide6.xml><?xml version="1.0" encoding="utf-8"?>
-<p:sld xmlns:a="http://schemas.openxmlformats.org/drawingml/2006/main" xmlns:r="http://schemas.openxmlformats.org/officeDocument/2006/relationships" xmlns:p="http://schemas.openxmlformats.org/presentationml/2006/main">
+<p:sld xmlns:a="http://schemas.openxmlformats.org/drawingml/2006/main" xmlns:p="http://schemas.openxmlformats.org/presentationml/2006/main" xmlns:r="http://schemas.openxmlformats.org/officeDocument/2006/relationships">
   <p:cSld>
     <p:bg>
       <p:bgPr>
@@ -7983,14 +8326,7 @@
         <p:cNvGrpSpPr/>
         <p:nvPr/>
       </p:nvGrpSpPr>
-      <p:grpSpPr>
-        <a:xfrm>
-          <a:off x="0" y="0"/>
-          <a:ext cx="0" cy="0"/>
-          <a:chOff x="0" y="0"/>
-          <a:chExt cx="0" cy="0"/>
-        </a:xfrm>
-      </p:grpSpPr>
+      <p:grpSpPr/>
       <p:sp>
         <p:nvSpPr>
           <p:cNvPr id="2" name="TextBox 1"/>
@@ -8177,7 +8513,7 @@
           <p:nvPr/>
         </p:nvPicPr>
         <p:blipFill>
-          <a:blip r:embed="rId3"/>
+          <a:blip r:embed="rId2"/>
           <a:stretch>
             <a:fillRect/>
           </a:stretch>
@@ -8235,7 +8571,7 @@
 </file>
 
 <file path=ppt/slides/slide7.xml><?xml version="1.0" encoding="utf-8"?>
-<p:sld xmlns:a="http://schemas.openxmlformats.org/drawingml/2006/main" xmlns:r="http://schemas.openxmlformats.org/officeDocument/2006/relationships" xmlns:p="http://schemas.openxmlformats.org/presentationml/2006/main">
+<p:sld xmlns:a="http://schemas.openxmlformats.org/drawingml/2006/main" xmlns:p="http://schemas.openxmlformats.org/presentationml/2006/main" xmlns:r="http://schemas.openxmlformats.org/officeDocument/2006/relationships">
   <p:cSld>
     <p:bg>
       <p:bgPr>
@@ -8251,14 +8587,7 @@
         <p:cNvGrpSpPr/>
         <p:nvPr/>
       </p:nvGrpSpPr>
-      <p:grpSpPr>
-        <a:xfrm>
-          <a:off x="0" y="0"/>
-          <a:ext cx="0" cy="0"/>
-          <a:chOff x="0" y="0"/>
-          <a:chExt cx="0" cy="0"/>
-        </a:xfrm>
-      </p:grpSpPr>
+      <p:grpSpPr/>
       <p:sp>
         <p:nvSpPr>
           <p:cNvPr id="2" name="TextBox 1"/>
@@ -8312,39 +8641,15 @@
                 <a:tableStyleId>{5C22544A-7EE6-4342-B048-85BDC9FD1C3A}</a:tableStyleId>
               </a:tblPr>
               <a:tblGrid>
-                <a:gridCol w="560323">
-                  <a:extLst>
-                    <a:ext uri="{9D8B030D-6E8A-4147-A177-3AD203B41FA5}">
-                      <a16:colId xmlns:a16="http://schemas.microsoft.com/office/drawing/2014/main" val="20000"/>
-                    </a:ext>
-                  </a:extLst>
-                </a:gridCol>
-                <a:gridCol w="3586073">
-                  <a:extLst>
-                    <a:ext uri="{9D8B030D-6E8A-4147-A177-3AD203B41FA5}">
-                      <a16:colId xmlns:a16="http://schemas.microsoft.com/office/drawing/2014/main" val="20001"/>
-                    </a:ext>
-                  </a:extLst>
-                </a:gridCol>
-                <a:gridCol w="2465425">
-                  <a:extLst>
-                    <a:ext uri="{9D8B030D-6E8A-4147-A177-3AD203B41FA5}">
-                      <a16:colId xmlns:a16="http://schemas.microsoft.com/office/drawing/2014/main" val="20002"/>
-                    </a:ext>
-                  </a:extLst>
-                </a:gridCol>
-                <a:gridCol w="4482591">
-                  <a:extLst>
-                    <a:ext uri="{9D8B030D-6E8A-4147-A177-3AD203B41FA5}">
-                      <a16:colId xmlns:a16="http://schemas.microsoft.com/office/drawing/2014/main" val="20003"/>
-                    </a:ext>
-                  </a:extLst>
-                </a:gridCol>
+                <a:gridCol w="560323"/>
+                <a:gridCol w="3586073"/>
+                <a:gridCol w="2465425"/>
+                <a:gridCol w="4482591"/>
               </a:tblGrid>
               <a:tr h="487680">
                 <a:tc>
                   <a:txBody>
-                    <a:bodyPr/>
+                    <a:bodyPr wrap="square"/>
                     <a:lstStyle/>
                     <a:p>
                       <a:pPr algn="l"/>
@@ -8367,7 +8672,7 @@
                 </a:tc>
                 <a:tc>
                   <a:txBody>
-                    <a:bodyPr/>
+                    <a:bodyPr wrap="square"/>
                     <a:lstStyle/>
                     <a:p>
                       <a:pPr algn="ctr"/>
@@ -8390,7 +8695,7 @@
                 </a:tc>
                 <a:tc>
                   <a:txBody>
-                    <a:bodyPr/>
+                    <a:bodyPr wrap="square"/>
                     <a:lstStyle/>
                     <a:p>
                       <a:pPr algn="ctr"/>
@@ -8413,7 +8718,7 @@
                 </a:tc>
                 <a:tc>
                   <a:txBody>
-                    <a:bodyPr/>
+                    <a:bodyPr wrap="square"/>
                     <a:lstStyle/>
                     <a:p>
                       <a:pPr algn="ctr"/>
@@ -8434,16 +8739,11 @@
                     </a:solidFill>
                   </a:tcPr>
                 </a:tc>
-                <a:extLst>
-                  <a:ext uri="{0D108BD9-81ED-4DB2-BD59-A6C34878D82A}">
-                    <a16:rowId xmlns:a16="http://schemas.microsoft.com/office/drawing/2014/main" val="10000"/>
-                  </a:ext>
-                </a:extLst>
               </a:tr>
               <a:tr h="487680">
                 <a:tc>
                   <a:txBody>
-                    <a:bodyPr/>
+                    <a:bodyPr wrap="square"/>
                     <a:lstStyle/>
                     <a:p>
                       <a:pPr algn="l"/>
@@ -8466,7 +8766,7 @@
                 </a:tc>
                 <a:tc>
                   <a:txBody>
-                    <a:bodyPr/>
+                    <a:bodyPr wrap="square"/>
                     <a:lstStyle/>
                     <a:p>
                       <a:pPr algn="ctr"/>
@@ -8489,7 +8789,7 @@
                 </a:tc>
                 <a:tc>
                   <a:txBody>
-                    <a:bodyPr/>
+                    <a:bodyPr wrap="square"/>
                     <a:lstStyle/>
                     <a:p>
                       <a:pPr algn="ctr"/>
@@ -8512,7 +8812,7 @@
                 </a:tc>
                 <a:tc>
                   <a:txBody>
-                    <a:bodyPr/>
+                    <a:bodyPr wrap="square"/>
                     <a:lstStyle/>
                     <a:p>
                       <a:pPr algn="ctr"/>
@@ -8533,16 +8833,11 @@
                     </a:solidFill>
                   </a:tcPr>
                 </a:tc>
-                <a:extLst>
-                  <a:ext uri="{0D108BD9-81ED-4DB2-BD59-A6C34878D82A}">
-                    <a16:rowId xmlns:a16="http://schemas.microsoft.com/office/drawing/2014/main" val="10001"/>
-                  </a:ext>
-                </a:extLst>
               </a:tr>
               <a:tr h="487680">
                 <a:tc>
                   <a:txBody>
-                    <a:bodyPr/>
+                    <a:bodyPr wrap="square"/>
                     <a:lstStyle/>
                     <a:p>
                       <a:pPr algn="l"/>
@@ -8565,7 +8860,7 @@
                 </a:tc>
                 <a:tc>
                   <a:txBody>
-                    <a:bodyPr/>
+                    <a:bodyPr wrap="square"/>
                     <a:lstStyle/>
                     <a:p>
                       <a:pPr algn="ctr"/>
@@ -8588,7 +8883,7 @@
                 </a:tc>
                 <a:tc>
                   <a:txBody>
-                    <a:bodyPr/>
+                    <a:bodyPr wrap="square"/>
                     <a:lstStyle/>
                     <a:p>
                       <a:pPr algn="ctr"/>
@@ -8611,7 +8906,7 @@
                 </a:tc>
                 <a:tc>
                   <a:txBody>
-                    <a:bodyPr/>
+                    <a:bodyPr wrap="square"/>
                     <a:lstStyle/>
                     <a:p>
                       <a:pPr algn="ctr"/>
@@ -8632,16 +8927,11 @@
                     </a:solidFill>
                   </a:tcPr>
                 </a:tc>
-                <a:extLst>
-                  <a:ext uri="{0D108BD9-81ED-4DB2-BD59-A6C34878D82A}">
-                    <a16:rowId xmlns:a16="http://schemas.microsoft.com/office/drawing/2014/main" val="10002"/>
-                  </a:ext>
-                </a:extLst>
               </a:tr>
               <a:tr h="487680">
                 <a:tc>
                   <a:txBody>
-                    <a:bodyPr/>
+                    <a:bodyPr wrap="square"/>
                     <a:lstStyle/>
                     <a:p>
                       <a:pPr algn="l"/>
@@ -8664,7 +8954,7 @@
                 </a:tc>
                 <a:tc>
                   <a:txBody>
-                    <a:bodyPr/>
+                    <a:bodyPr wrap="square"/>
                     <a:lstStyle/>
                     <a:p>
                       <a:pPr algn="ctr"/>
@@ -8687,7 +8977,7 @@
                 </a:tc>
                 <a:tc>
                   <a:txBody>
-                    <a:bodyPr/>
+                    <a:bodyPr wrap="square"/>
                     <a:lstStyle/>
                     <a:p>
                       <a:pPr algn="ctr"/>
@@ -8710,7 +9000,7 @@
                 </a:tc>
                 <a:tc>
                   <a:txBody>
-                    <a:bodyPr/>
+                    <a:bodyPr wrap="square"/>
                     <a:lstStyle/>
                     <a:p>
                       <a:pPr algn="ctr"/>
@@ -8731,16 +9021,11 @@
                     </a:solidFill>
                   </a:tcPr>
                 </a:tc>
-                <a:extLst>
-                  <a:ext uri="{0D108BD9-81ED-4DB2-BD59-A6C34878D82A}">
-                    <a16:rowId xmlns:a16="http://schemas.microsoft.com/office/drawing/2014/main" val="10003"/>
-                  </a:ext>
-                </a:extLst>
               </a:tr>
               <a:tr h="487680">
                 <a:tc>
                   <a:txBody>
-                    <a:bodyPr/>
+                    <a:bodyPr wrap="square"/>
                     <a:lstStyle/>
                     <a:p>
                       <a:pPr algn="l"/>
@@ -8763,7 +9048,7 @@
                 </a:tc>
                 <a:tc>
                   <a:txBody>
-                    <a:bodyPr/>
+                    <a:bodyPr wrap="square"/>
                     <a:lstStyle/>
                     <a:p>
                       <a:pPr algn="ctr"/>
@@ -8786,7 +9071,7 @@
                 </a:tc>
                 <a:tc>
                   <a:txBody>
-                    <a:bodyPr/>
+                    <a:bodyPr wrap="square"/>
                     <a:lstStyle/>
                     <a:p>
                       <a:pPr algn="ctr"/>
@@ -8809,7 +9094,7 @@
                 </a:tc>
                 <a:tc>
                   <a:txBody>
-                    <a:bodyPr/>
+                    <a:bodyPr wrap="square"/>
                     <a:lstStyle/>
                     <a:p>
                       <a:pPr algn="ctr"/>
@@ -8830,16 +9115,11 @@
                     </a:solidFill>
                   </a:tcPr>
                 </a:tc>
-                <a:extLst>
-                  <a:ext uri="{0D108BD9-81ED-4DB2-BD59-A6C34878D82A}">
-                    <a16:rowId xmlns:a16="http://schemas.microsoft.com/office/drawing/2014/main" val="10004"/>
-                  </a:ext>
-                </a:extLst>
               </a:tr>
               <a:tr h="487680">
                 <a:tc>
                   <a:txBody>
-                    <a:bodyPr/>
+                    <a:bodyPr wrap="square"/>
                     <a:lstStyle/>
                     <a:p>
                       <a:pPr algn="l"/>
@@ -8862,7 +9142,7 @@
                 </a:tc>
                 <a:tc>
                   <a:txBody>
-                    <a:bodyPr/>
+                    <a:bodyPr wrap="square"/>
                     <a:lstStyle/>
                     <a:p>
                       <a:pPr algn="ctr"/>
@@ -8885,7 +9165,7 @@
                 </a:tc>
                 <a:tc>
                   <a:txBody>
-                    <a:bodyPr/>
+                    <a:bodyPr wrap="square"/>
                     <a:lstStyle/>
                     <a:p>
                       <a:pPr algn="ctr"/>
@@ -8908,7 +9188,7 @@
                 </a:tc>
                 <a:tc>
                   <a:txBody>
-                    <a:bodyPr/>
+                    <a:bodyPr wrap="square"/>
                     <a:lstStyle/>
                     <a:p>
                       <a:pPr algn="ctr"/>
@@ -8929,11 +9209,6 @@
                     </a:solidFill>
                   </a:tcPr>
                 </a:tc>
-                <a:extLst>
-                  <a:ext uri="{0D108BD9-81ED-4DB2-BD59-A6C34878D82A}">
-                    <a16:rowId xmlns:a16="http://schemas.microsoft.com/office/drawing/2014/main" val="10005"/>
-                  </a:ext>
-                </a:extLst>
               </a:tr>
             </a:tbl>
           </a:graphicData>
@@ -9021,7 +9296,7 @@
 </file>
 
 <file path=ppt/slides/slide8.xml><?xml version="1.0" encoding="utf-8"?>
-<p:sld xmlns:a="http://schemas.openxmlformats.org/drawingml/2006/main" xmlns:r="http://schemas.openxmlformats.org/officeDocument/2006/relationships" xmlns:p="http://schemas.openxmlformats.org/presentationml/2006/main">
+<p:sld xmlns:a="http://schemas.openxmlformats.org/drawingml/2006/main" xmlns:p="http://schemas.openxmlformats.org/presentationml/2006/main" xmlns:r="http://schemas.openxmlformats.org/officeDocument/2006/relationships">
   <p:cSld>
     <p:bg>
       <p:bgPr>
@@ -9037,14 +9312,7 @@
         <p:cNvGrpSpPr/>
         <p:nvPr/>
       </p:nvGrpSpPr>
-      <p:grpSpPr>
-        <a:xfrm>
-          <a:off x="0" y="0"/>
-          <a:ext cx="0" cy="0"/>
-          <a:chOff x="0" y="0"/>
-          <a:chExt cx="0" cy="0"/>
-        </a:xfrm>
-      </p:grpSpPr>
+      <p:grpSpPr/>
       <p:sp>
         <p:nvSpPr>
           <p:cNvPr id="2" name="TextBox 1"/>
@@ -9240,7 +9508,7 @@
           <p:nvPr/>
         </p:nvPicPr>
         <p:blipFill>
-          <a:blip r:embed="rId3"/>
+          <a:blip r:embed="rId2"/>
           <a:stretch>
             <a:fillRect/>
           </a:stretch>
@@ -9264,7 +9532,7 @@
 </file>
 
 <file path=ppt/slides/slide9.xml><?xml version="1.0" encoding="utf-8"?>
-<p:sld xmlns:a="http://schemas.openxmlformats.org/drawingml/2006/main" xmlns:r="http://schemas.openxmlformats.org/officeDocument/2006/relationships" xmlns:p="http://schemas.openxmlformats.org/presentationml/2006/main">
+<p:sld xmlns:a="http://schemas.openxmlformats.org/drawingml/2006/main" xmlns:p="http://schemas.openxmlformats.org/presentationml/2006/main" xmlns:r="http://schemas.openxmlformats.org/officeDocument/2006/relationships">
   <p:cSld>
     <p:bg>
       <p:bgPr>
@@ -9280,14 +9548,7 @@
         <p:cNvGrpSpPr/>
         <p:nvPr/>
       </p:nvGrpSpPr>
-      <p:grpSpPr>
-        <a:xfrm>
-          <a:off x="0" y="0"/>
-          <a:ext cx="0" cy="0"/>
-          <a:chOff x="0" y="0"/>
-          <a:chExt cx="0" cy="0"/>
-        </a:xfrm>
-      </p:grpSpPr>
+      <p:grpSpPr/>
       <p:sp>
         <p:nvSpPr>
           <p:cNvPr id="2" name="TextBox 1"/>
@@ -9342,7 +9603,7 @@
           <p:nvPr/>
         </p:nvPicPr>
         <p:blipFill>
-          <a:blip r:embed="rId3"/>
+          <a:blip r:embed="rId2"/>
           <a:stretch>
             <a:fillRect/>
           </a:stretch>
@@ -9365,93 +9626,12 @@
         </p:nvSpPr>
         <p:spPr>
           <a:xfrm>
-            <a:off x="548640" y="5257799"/>
-            <a:ext cx="11094415" cy="1428161"/>
+            <a:off x="548640" y="4114800"/>
+            <a:ext cx="11094415" cy="2286000"/>
           </a:xfrm>
-          <a:custGeom>
+          <a:prstGeom prst="rect">
             <a:avLst/>
-            <a:gdLst>
-              <a:gd name="csX0" fmla="*/ 0 w 11094415"/>
-              <a:gd name="csY0" fmla="*/ 0 h 2286000"/>
-              <a:gd name="csX1" fmla="*/ 11094415 w 11094415"/>
-              <a:gd name="csY1" fmla="*/ 0 h 2286000"/>
-              <a:gd name="csX2" fmla="*/ 11094415 w 11094415"/>
-              <a:gd name="csY2" fmla="*/ 2286000 h 2286000"/>
-              <a:gd name="csX3" fmla="*/ 0 w 11094415"/>
-              <a:gd name="csY3" fmla="*/ 2286000 h 2286000"/>
-              <a:gd name="csX4" fmla="*/ 0 w 11094415"/>
-              <a:gd name="csY4" fmla="*/ 0 h 2286000"/>
-              <a:gd name="csX0" fmla="*/ 0 w 11094415"/>
-              <a:gd name="csY0" fmla="*/ 0 h 2286000"/>
-              <a:gd name="csX1" fmla="*/ 11094415 w 11094415"/>
-              <a:gd name="csY1" fmla="*/ 0 h 2286000"/>
-              <a:gd name="csX2" fmla="*/ 11009573 w 11094415"/>
-              <a:gd name="csY2" fmla="*/ 1362173 h 2286000"/>
-              <a:gd name="csX3" fmla="*/ 0 w 11094415"/>
-              <a:gd name="csY3" fmla="*/ 2286000 h 2286000"/>
-              <a:gd name="csX4" fmla="*/ 0 w 11094415"/>
-              <a:gd name="csY4" fmla="*/ 0 h 2286000"/>
-              <a:gd name="csX0" fmla="*/ 0 w 11094415"/>
-              <a:gd name="csY0" fmla="*/ 0 h 2286000"/>
-              <a:gd name="csX1" fmla="*/ 11094415 w 11094415"/>
-              <a:gd name="csY1" fmla="*/ 0 h 2286000"/>
-              <a:gd name="csX2" fmla="*/ 11075560 w 11094415"/>
-              <a:gd name="csY2" fmla="*/ 1428161 h 2286000"/>
-              <a:gd name="csX3" fmla="*/ 0 w 11094415"/>
-              <a:gd name="csY3" fmla="*/ 2286000 h 2286000"/>
-              <a:gd name="csX4" fmla="*/ 0 w 11094415"/>
-              <a:gd name="csY4" fmla="*/ 0 h 2286000"/>
-              <a:gd name="csX0" fmla="*/ 0 w 11094415"/>
-              <a:gd name="csY0" fmla="*/ 0 h 1428161"/>
-              <a:gd name="csX1" fmla="*/ 11094415 w 11094415"/>
-              <a:gd name="csY1" fmla="*/ 0 h 1428161"/>
-              <a:gd name="csX2" fmla="*/ 11075560 w 11094415"/>
-              <a:gd name="csY2" fmla="*/ 1428161 h 1428161"/>
-              <a:gd name="csX3" fmla="*/ 0 w 11094415"/>
-              <a:gd name="csY3" fmla="*/ 1428160 h 1428161"/>
-              <a:gd name="csX4" fmla="*/ 0 w 11094415"/>
-              <a:gd name="csY4" fmla="*/ 0 h 1428161"/>
-            </a:gdLst>
-            <a:ahLst/>
-            <a:cxnLst>
-              <a:cxn ang="0">
-                <a:pos x="csX0" y="csY0"/>
-              </a:cxn>
-              <a:cxn ang="0">
-                <a:pos x="csX1" y="csY1"/>
-              </a:cxn>
-              <a:cxn ang="0">
-                <a:pos x="csX2" y="csY2"/>
-              </a:cxn>
-              <a:cxn ang="0">
-                <a:pos x="csX3" y="csY3"/>
-              </a:cxn>
-              <a:cxn ang="0">
-                <a:pos x="csX4" y="csY4"/>
-              </a:cxn>
-            </a:cxnLst>
-            <a:rect l="l" t="t" r="r" b="b"/>
-            <a:pathLst>
-              <a:path w="11094415" h="1428161">
-                <a:moveTo>
-                  <a:pt x="0" y="0"/>
-                </a:moveTo>
-                <a:lnTo>
-                  <a:pt x="11094415" y="0"/>
-                </a:lnTo>
-                <a:lnTo>
-                  <a:pt x="11075560" y="1428161"/>
-                </a:lnTo>
-                <a:lnTo>
-                  <a:pt x="0" y="1428160"/>
-                </a:lnTo>
-                <a:lnTo>
-                  <a:pt x="0" y="0"/>
-                </a:lnTo>
-                <a:close/>
-              </a:path>
-            </a:pathLst>
-          </a:custGeom>
+          </a:prstGeom>
           <a:noFill/>
         </p:spPr>
         <p:txBody>
@@ -9466,34 +9646,16 @@
               </a:spcAft>
             </a:pPr>
             <a:r>
-              <a:rPr sz="1400" b="1" i="0" dirty="0">
-                <a:solidFill>
-                  <a:srgbClr val="000000"/>
-                </a:solidFill>
-                <a:latin typeface="Calibri"/>
-              </a:rPr>
-              <a:t>Mean </a:t>
-            </a:r>
-            <a:r>
-              <a:rPr sz="1400" b="1" i="0" dirty="0" err="1">
-                <a:solidFill>
-                  <a:srgbClr val="000000"/>
-                </a:solidFill>
-                <a:latin typeface="Calibri"/>
-              </a:rPr>
-              <a:t>IoU</a:t>
-            </a:r>
-            <a:r>
-              <a:rPr sz="1400" b="1" i="0" dirty="0">
-                <a:solidFill>
-                  <a:srgbClr val="000000"/>
-                </a:solidFill>
-                <a:latin typeface="Calibri"/>
-              </a:rPr>
-              <a:t> 0.5931 → 0.6328 (+0.040).</a:t>
-            </a:r>
-            <a:r>
-              <a:rPr sz="1400" b="0" i="0" dirty="0">
+              <a:rPr sz="1400" b="1" i="0">
+                <a:solidFill>
+                  <a:srgbClr val="000000"/>
+                </a:solidFill>
+                <a:latin typeface="Calibri"/>
+              </a:rPr>
+              <a:t>Mean IoU 0.5931 → 0.6328 (+0.040).</a:t>
+            </a:r>
+            <a:r>
+              <a:rPr sz="1400" b="0" i="0">
                 <a:solidFill>
                   <a:srgbClr val="000000"/>
                 </a:solidFill>
@@ -9509,7 +9671,7 @@
               </a:spcAft>
             </a:pPr>
             <a:r>
-              <a:rPr sz="1400" b="0" i="0" dirty="0">
+              <a:rPr sz="1400" b="0" i="0">
                 <a:solidFill>
                   <a:srgbClr val="000000"/>
                 </a:solidFill>
@@ -9518,7 +9680,7 @@
               <a:t>Overfitting gap cut </a:t>
             </a:r>
             <a:r>
-              <a:rPr sz="1400" b="1" i="0" dirty="0">
+              <a:rPr sz="1400" b="1" i="0">
                 <a:solidFill>
                   <a:srgbClr val="000000"/>
                 </a:solidFill>
@@ -9527,31 +9689,31 @@
               <a:t>60%</a:t>
             </a:r>
             <a:r>
-              <a:rPr sz="1400" b="0" i="0" dirty="0">
-                <a:solidFill>
-                  <a:srgbClr val="000000"/>
-                </a:solidFill>
-                <a:latin typeface="Calibri"/>
-              </a:rPr>
-              <a:t>; Dice variance collapsed </a:t>
-            </a:r>
-            <a:r>
-              <a:rPr sz="1400" b="1" i="0" dirty="0">
-                <a:solidFill>
-                  <a:srgbClr val="000000"/>
-                </a:solidFill>
-                <a:latin typeface="Calibri"/>
-              </a:rPr>
-              <a:t>15×</a:t>
-            </a:r>
-            <a:r>
-              <a:rPr sz="1400" b="0" i="0" dirty="0">
-                <a:solidFill>
-                  <a:srgbClr val="000000"/>
-                </a:solidFill>
-                <a:latin typeface="Calibri"/>
-              </a:rPr>
-              <a:t> (±0.0202 → ±0.0013)</a:t>
+              <a:rPr sz="1400" b="0" i="0">
+                <a:solidFill>
+                  <a:srgbClr val="000000"/>
+                </a:solidFill>
+                <a:latin typeface="Calibri"/>
+              </a:rPr>
+              <a:t>; split-to-split Dice spread cut </a:t>
+            </a:r>
+            <a:r>
+              <a:rPr sz="1400" b="1" i="0">
+                <a:solidFill>
+                  <a:srgbClr val="000000"/>
+                </a:solidFill>
+                <a:latin typeface="Calibri"/>
+              </a:rPr>
+              <a:t>4.4×</a:t>
+            </a:r>
+            <a:r>
+              <a:rPr sz="1400" b="0" i="0">
+                <a:solidFill>
+                  <a:srgbClr val="000000"/>
+                </a:solidFill>
+                <a:latin typeface="Calibri"/>
+              </a:rPr>
+              <a:t> (±0.0242 → ±0.0054)</a:t>
             </a:r>
           </a:p>
           <a:p>
@@ -9561,7 +9723,7 @@
               </a:spcAft>
             </a:pPr>
             <a:r>
-              <a:rPr sz="1400" b="1" i="0" dirty="0">
+              <a:rPr sz="1400" b="1" i="0">
                 <a:solidFill>
                   <a:srgbClr val="000000"/>
                 </a:solidFill>
@@ -9570,16 +9732,34 @@
               <a:t>Honest caveat:</a:t>
             </a:r>
             <a:r>
-              <a:rPr sz="1400" b="0" i="0" dirty="0">
-                <a:solidFill>
-                  <a:srgbClr val="000000"/>
-                </a:solidFill>
-                <a:latin typeface="Calibri"/>
-              </a:rPr>
-              <a:t> at a *matched* 100-epoch budget augmentation gives no gain. It does not converge faster — it </a:t>
-            </a:r>
-            <a:r>
-              <a:rPr sz="1400" b="1" i="0" dirty="0">
+              <a:rPr sz="1400" b="0" i="0">
+                <a:solidFill>
+                  <a:srgbClr val="000000"/>
+                </a:solidFill>
+                <a:latin typeface="Calibri"/>
+              </a:rPr>
+              <a:t> at a *matched* budget the gain shrinks to </a:t>
+            </a:r>
+            <a:r>
+              <a:rPr sz="1400" b="1" i="0">
+                <a:solidFill>
+                  <a:srgbClr val="000000"/>
+                </a:solidFill>
+                <a:latin typeface="Calibri"/>
+              </a:rPr>
+              <a:t>+0.023 (p = 0.24)</a:t>
+            </a:r>
+            <a:r>
+              <a:rPr sz="1400" b="0" i="0">
+                <a:solidFill>
+                  <a:srgbClr val="000000"/>
+                </a:solidFill>
+                <a:latin typeface="Calibri"/>
+              </a:rPr>
+              <a:t>. Augmentation does not converge faster — it </a:t>
+            </a:r>
+            <a:r>
+              <a:rPr sz="1400" b="1" i="0">
                 <a:solidFill>
                   <a:srgbClr val="000000"/>
                 </a:solidFill>
@@ -9588,13 +9768,13 @@
               <a:t>removes the ceiling</a:t>
             </a:r>
             <a:r>
-              <a:rPr sz="1400" b="0" i="0" dirty="0">
-                <a:solidFill>
-                  <a:srgbClr val="000000"/>
-                </a:solidFill>
-                <a:latin typeface="Calibri"/>
-              </a:rPr>
-              <a:t>, letting training run to ep282–390.</a:t>
+              <a:rPr sz="1400" b="0" i="0">
+                <a:solidFill>
+                  <a:srgbClr val="000000"/>
+                </a:solidFill>
+                <a:latin typeface="Calibri"/>
+              </a:rPr>
+              <a:t>, letting training run to ep282–390 instead of stalling near 100.</a:t>
             </a:r>
           </a:p>
         </p:txBody>
@@ -9938,44 +10118,44 @@
         <a:sysClr val="window" lastClr="FFFFFF"/>
       </a:lt1>
       <a:dk2>
-        <a:srgbClr val="44546A"/>
+        <a:srgbClr val="1F497D"/>
       </a:dk2>
       <a:lt2>
-        <a:srgbClr val="E7E6E6"/>
+        <a:srgbClr val="EEECE1"/>
       </a:lt2>
       <a:accent1>
-        <a:srgbClr val="4472C4"/>
+        <a:srgbClr val="4F81BD"/>
       </a:accent1>
       <a:accent2>
-        <a:srgbClr val="ED7D31"/>
+        <a:srgbClr val="C0504D"/>
       </a:accent2>
       <a:accent3>
-        <a:srgbClr val="A5A5A5"/>
+        <a:srgbClr val="9BBB59"/>
       </a:accent3>
       <a:accent4>
-        <a:srgbClr val="FFC000"/>
+        <a:srgbClr val="8064A2"/>
       </a:accent4>
       <a:accent5>
-        <a:srgbClr val="5B9BD5"/>
+        <a:srgbClr val="4BACC6"/>
       </a:accent5>
       <a:accent6>
-        <a:srgbClr val="70AD47"/>
+        <a:srgbClr val="F79646"/>
       </a:accent6>
       <a:hlink>
-        <a:srgbClr val="0563C1"/>
+        <a:srgbClr val="0000FF"/>
       </a:hlink>
       <a:folHlink>
-        <a:srgbClr val="954F72"/>
+        <a:srgbClr val="800080"/>
       </a:folHlink>
     </a:clrScheme>
     <a:fontScheme name="Office">
       <a:majorFont>
-        <a:latin typeface="Calibri Light" panose="020F0302020204030204"/>
+        <a:latin typeface="Calibri"/>
         <a:ea typeface=""/>
         <a:cs typeface=""/>
-        <a:font script="Jpan" typeface="游ゴシック Light"/>
+        <a:font script="Jpan" typeface="ＭＳ Ｐゴシック"/>
         <a:font script="Hang" typeface="맑은 고딕"/>
-        <a:font script="Hans" typeface="等线 Light"/>
+        <a:font script="Hans" typeface="宋体"/>
         <a:font script="Hant" typeface="新細明體"/>
         <a:font script="Arab" typeface="Times New Roman"/>
         <a:font script="Hebr" typeface="Times New Roman"/>
@@ -10003,31 +10183,14 @@
         <a:font script="Viet" typeface="Times New Roman"/>
         <a:font script="Uigh" typeface="Microsoft Uighur"/>
         <a:font script="Geor" typeface="Sylfaen"/>
-        <a:font script="Armn" typeface="Arial"/>
-        <a:font script="Bugi" typeface="Leelawadee UI"/>
-        <a:font script="Bopo" typeface="Microsoft JhengHei"/>
-        <a:font script="Java" typeface="Javanese Text"/>
-        <a:font script="Lisu" typeface="Segoe UI"/>
-        <a:font script="Mymr" typeface="Myanmar Text"/>
-        <a:font script="Nkoo" typeface="Ebrima"/>
-        <a:font script="Olck" typeface="Nirmala UI"/>
-        <a:font script="Osma" typeface="Ebrima"/>
-        <a:font script="Phag" typeface="Phagspa"/>
-        <a:font script="Syrn" typeface="Estrangelo Edessa"/>
-        <a:font script="Syrj" typeface="Estrangelo Edessa"/>
-        <a:font script="Syre" typeface="Estrangelo Edessa"/>
-        <a:font script="Sora" typeface="Nirmala UI"/>
-        <a:font script="Tale" typeface="Microsoft Tai Le"/>
-        <a:font script="Talu" typeface="Microsoft New Tai Lue"/>
-        <a:font script="Tfng" typeface="Ebrima"/>
       </a:majorFont>
       <a:minorFont>
-        <a:latin typeface="Calibri" panose="020F0502020204030204"/>
+        <a:latin typeface="Calibri"/>
         <a:ea typeface=""/>
         <a:cs typeface=""/>
-        <a:font script="Jpan" typeface="游ゴシック"/>
+        <a:font script="Jpan" typeface="ＭＳ Ｐゴシック"/>
         <a:font script="Hang" typeface="맑은 고딕"/>
-        <a:font script="Hans" typeface="等线"/>
+        <a:font script="Hans" typeface="宋体"/>
         <a:font script="Hant" typeface="新細明體"/>
         <a:font script="Arab" typeface="Arial"/>
         <a:font script="Hebr" typeface="Arial"/>
@@ -10055,23 +10218,6 @@
         <a:font script="Viet" typeface="Arial"/>
         <a:font script="Uigh" typeface="Microsoft Uighur"/>
         <a:font script="Geor" typeface="Sylfaen"/>
-        <a:font script="Armn" typeface="Arial"/>
-        <a:font script="Bugi" typeface="Leelawadee UI"/>
-        <a:font script="Bopo" typeface="Microsoft JhengHei"/>
-        <a:font script="Java" typeface="Javanese Text"/>
-        <a:font script="Lisu" typeface="Segoe UI"/>
-        <a:font script="Mymr" typeface="Myanmar Text"/>
-        <a:font script="Nkoo" typeface="Ebrima"/>
-        <a:font script="Olck" typeface="Nirmala UI"/>
-        <a:font script="Osma" typeface="Ebrima"/>
-        <a:font script="Phag" typeface="Phagspa"/>
-        <a:font script="Syrn" typeface="Estrangelo Edessa"/>
-        <a:font script="Syrj" typeface="Estrangelo Edessa"/>
-        <a:font script="Syre" typeface="Estrangelo Edessa"/>
-        <a:font script="Sora" typeface="Nirmala UI"/>
-        <a:font script="Tale" typeface="Microsoft Tai Le"/>
-        <a:font script="Talu" typeface="Microsoft New Tai Lue"/>
-        <a:font script="Tfng" typeface="Ebrima"/>
       </a:minorFont>
     </a:fontScheme>
     <a:fmtScheme name="Office">
@@ -10083,141 +10229,200 @@
           <a:gsLst>
             <a:gs pos="0">
               <a:schemeClr val="phClr">
-                <a:lumMod val="110000"/>
-                <a:satMod val="105000"/>
-                <a:tint val="67000"/>
+                <a:tint val="50000"/>
+                <a:satMod val="300000"/>
               </a:schemeClr>
             </a:gs>
-            <a:gs pos="50000">
+            <a:gs pos="35000">
               <a:schemeClr val="phClr">
-                <a:lumMod val="105000"/>
-                <a:satMod val="103000"/>
-                <a:tint val="73000"/>
+                <a:tint val="37000"/>
+                <a:satMod val="300000"/>
               </a:schemeClr>
             </a:gs>
             <a:gs pos="100000">
               <a:schemeClr val="phClr">
-                <a:lumMod val="105000"/>
-                <a:satMod val="109000"/>
-                <a:tint val="81000"/>
+                <a:tint val="15000"/>
+                <a:satMod val="350000"/>
               </a:schemeClr>
             </a:gs>
           </a:gsLst>
-          <a:lin ang="5400000" scaled="0"/>
+          <a:lin ang="16200000" scaled="1"/>
         </a:gradFill>
         <a:gradFill rotWithShape="1">
           <a:gsLst>
             <a:gs pos="0">
               <a:schemeClr val="phClr">
-                <a:satMod val="103000"/>
-                <a:lumMod val="102000"/>
-                <a:tint val="94000"/>
-              </a:schemeClr>
-            </a:gs>
-            <a:gs pos="50000">
-              <a:schemeClr val="phClr">
-                <a:satMod val="110000"/>
-                <a:lumMod val="100000"/>
+                <a:tint val="100000"/>
                 <a:shade val="100000"/>
+                <a:satMod val="130000"/>
               </a:schemeClr>
             </a:gs>
             <a:gs pos="100000">
               <a:schemeClr val="phClr">
-                <a:lumMod val="99000"/>
-                <a:satMod val="120000"/>
-                <a:shade val="78000"/>
+                <a:tint val="50000"/>
+                <a:shade val="100000"/>
+                <a:satMod val="350000"/>
               </a:schemeClr>
             </a:gs>
           </a:gsLst>
-          <a:lin ang="5400000" scaled="0"/>
+          <a:lin ang="16200000" scaled="0"/>
         </a:gradFill>
       </a:fillStyleLst>
       <a:lnStyleLst>
-        <a:ln w="6350" cap="flat" cmpd="sng" algn="ctr">
+        <a:ln w="9525" cap="flat" cmpd="sng" algn="ctr">
+          <a:solidFill>
+            <a:schemeClr val="phClr">
+              <a:shade val="95000"/>
+              <a:satMod val="105000"/>
+            </a:schemeClr>
+          </a:solidFill>
+          <a:prstDash val="solid"/>
+        </a:ln>
+        <a:ln w="25400" cap="flat" cmpd="sng" algn="ctr">
           <a:solidFill>
             <a:schemeClr val="phClr"/>
           </a:solidFill>
           <a:prstDash val="solid"/>
-          <a:miter lim="800000"/>
         </a:ln>
-        <a:ln w="12700" cap="flat" cmpd="sng" algn="ctr">
+        <a:ln w="38100" cap="flat" cmpd="sng" algn="ctr">
           <a:solidFill>
             <a:schemeClr val="phClr"/>
           </a:solidFill>
           <a:prstDash val="solid"/>
-          <a:miter lim="800000"/>
-        </a:ln>
-        <a:ln w="19050" cap="flat" cmpd="sng" algn="ctr">
-          <a:solidFill>
-            <a:schemeClr val="phClr"/>
-          </a:solidFill>
-          <a:prstDash val="solid"/>
-          <a:miter lim="800000"/>
         </a:ln>
       </a:lnStyleLst>
       <a:effectStyleLst>
         <a:effectStyle>
-          <a:effectLst/>
-        </a:effectStyle>
-        <a:effectStyle>
-          <a:effectLst/>
+          <a:effectLst>
+            <a:outerShdw blurRad="40000" dist="20000" dir="5400000" rotWithShape="0">
+              <a:srgbClr val="000000">
+                <a:alpha val="38000"/>
+              </a:srgbClr>
+            </a:outerShdw>
+          </a:effectLst>
         </a:effectStyle>
         <a:effectStyle>
           <a:effectLst>
-            <a:outerShdw blurRad="57150" dist="19050" dir="5400000" algn="ctr" rotWithShape="0">
+            <a:outerShdw blurRad="40000" dist="23000" dir="5400000" rotWithShape="0">
               <a:srgbClr val="000000">
-                <a:alpha val="63000"/>
+                <a:alpha val="35000"/>
               </a:srgbClr>
             </a:outerShdw>
           </a:effectLst>
+        </a:effectStyle>
+        <a:effectStyle>
+          <a:effectLst>
+            <a:outerShdw blurRad="40000" dist="23000" dir="5400000" rotWithShape="0">
+              <a:srgbClr val="000000">
+                <a:alpha val="35000"/>
+              </a:srgbClr>
+            </a:outerShdw>
+          </a:effectLst>
+          <a:scene3d>
+            <a:camera prst="orthographicFront">
+              <a:rot lat="0" lon="0" rev="0"/>
+            </a:camera>
+            <a:lightRig rig="threePt" dir="t">
+              <a:rot lat="0" lon="0" rev="1200000"/>
+            </a:lightRig>
+          </a:scene3d>
+          <a:sp3d>
+            <a:bevelT w="63500" h="25400"/>
+          </a:sp3d>
         </a:effectStyle>
       </a:effectStyleLst>
       <a:bgFillStyleLst>
         <a:solidFill>
           <a:schemeClr val="phClr"/>
         </a:solidFill>
-        <a:solidFill>
-          <a:schemeClr val="phClr">
-            <a:tint val="95000"/>
-            <a:satMod val="170000"/>
-          </a:schemeClr>
-        </a:solidFill>
         <a:gradFill rotWithShape="1">
           <a:gsLst>
             <a:gs pos="0">
               <a:schemeClr val="phClr">
-                <a:tint val="93000"/>
-                <a:satMod val="150000"/>
-                <a:shade val="98000"/>
-                <a:lumMod val="102000"/>
+                <a:tint val="40000"/>
+                <a:satMod val="350000"/>
               </a:schemeClr>
             </a:gs>
-            <a:gs pos="50000">
+            <a:gs pos="40000">
               <a:schemeClr val="phClr">
-                <a:tint val="98000"/>
-                <a:satMod val="130000"/>
-                <a:shade val="90000"/>
-                <a:lumMod val="103000"/>
+                <a:tint val="45000"/>
+                <a:shade val="99000"/>
+                <a:satMod val="350000"/>
               </a:schemeClr>
             </a:gs>
             <a:gs pos="100000">
               <a:schemeClr val="phClr">
-                <a:shade val="63000"/>
-                <a:satMod val="120000"/>
+                <a:shade val="20000"/>
+                <a:satMod val="255000"/>
               </a:schemeClr>
             </a:gs>
           </a:gsLst>
-          <a:lin ang="5400000" scaled="0"/>
+          <a:path path="circle">
+            <a:fillToRect l="50000" t="-80000" r="50000" b="180000"/>
+          </a:path>
+        </a:gradFill>
+        <a:gradFill rotWithShape="1">
+          <a:gsLst>
+            <a:gs pos="0">
+              <a:schemeClr val="phClr">
+                <a:tint val="80000"/>
+                <a:satMod val="300000"/>
+              </a:schemeClr>
+            </a:gs>
+            <a:gs pos="100000">
+              <a:schemeClr val="phClr">
+                <a:shade val="30000"/>
+                <a:satMod val="200000"/>
+              </a:schemeClr>
+            </a:gs>
+          </a:gsLst>
+          <a:path path="circle">
+            <a:fillToRect l="50000" t="50000" r="50000" b="50000"/>
+          </a:path>
         </a:gradFill>
       </a:bgFillStyleLst>
     </a:fmtScheme>
   </a:themeElements>
-  <a:objectDefaults/>
+  <a:objectDefaults>
+    <a:spDef>
+      <a:spPr/>
+      <a:bodyPr/>
+      <a:lstStyle/>
+      <a:style>
+        <a:lnRef idx="1">
+          <a:schemeClr val="accent1"/>
+        </a:lnRef>
+        <a:fillRef idx="3">
+          <a:schemeClr val="accent1"/>
+        </a:fillRef>
+        <a:effectRef idx="2">
+          <a:schemeClr val="accent1"/>
+        </a:effectRef>
+        <a:fontRef idx="minor">
+          <a:schemeClr val="lt1"/>
+        </a:fontRef>
+      </a:style>
+    </a:spDef>
+    <a:lnDef>
+      <a:spPr/>
+      <a:bodyPr/>
+      <a:lstStyle/>
+      <a:style>
+        <a:lnRef idx="2">
+          <a:schemeClr val="accent1"/>
+        </a:lnRef>
+        <a:fillRef idx="0">
+          <a:schemeClr val="accent1"/>
+        </a:fillRef>
+        <a:effectRef idx="1">
+          <a:schemeClr val="accent1"/>
+        </a:effectRef>
+        <a:fontRef idx="minor">
+          <a:schemeClr val="tx1"/>
+        </a:fontRef>
+      </a:style>
+    </a:lnDef>
+  </a:objectDefaults>
   <a:extraClrSchemeLst/>
-  <a:extLst>
-    <a:ext uri="{05A4C25C-085E-4340-85A3-A5531E510DB2}">
-      <thm15:themeFamily xmlns:thm15="http://schemas.microsoft.com/office/thememl/2012/main" name="Office Theme" id="{62F939B6-93AF-4DB8-9C6B-D6C7DFDC589F}" vid="{4A3C46E8-61CC-4603-A589-7422A47A8E4A}"/>
-    </a:ext>
-  </a:extLst>
 </a:theme>
 </file>
--- a/UNeXt_presentation.pptx
+++ b/UNeXt_presentation.pptx
@@ -21,6 +21,7 @@
     <p:sldId id="269" r:id="rId21"/>
     <p:sldId id="270" r:id="rId22"/>
     <p:sldId id="271" r:id="rId23"/>
+    <p:sldId id="272" r:id="rId24"/>
   </p:sldIdLst>
   <p:sldSz cx="12191695" cy="6858000" type="screen4x3"/>
   <p:notesSz cx="6858000" cy="9144000"/>
@@ -4468,7 +4469,7 @@
                 </a:solidFill>
                 <a:latin typeface="Calibri"/>
               </a:rPr>
-              <a:t> Six pairs of identical configurations, differing only in initialisation, disagree by 0.0107 on average (range 0.003–0.019).</a:t>
+              <a:t> We reran six configurations changing nothing but the random seed: they disagree by 0.011 on average, and by as much as 0.019.</a:t>
             </a:r>
           </a:p>
           <a:p>
@@ -4578,7 +4579,7 @@
                 </a:solidFill>
                 <a:latin typeface="Calibri"/>
               </a:rPr>
-              <a:t>The wavelet mixer: same accuracy, 9% less compute</a:t>
+              <a:t>What we changed: the token mixer</a:t>
             </a:r>
           </a:p>
           <a:p>
@@ -4589,21 +4590,45 @@
                 </a:solidFill>
                 <a:latin typeface="Calibri"/>
               </a:rPr>
-              <a:t>Haar transform in place of the shifted-MLP token mixer</a:t>
-            </a:r>
-          </a:p>
-        </p:txBody>
-      </p:sp>
-      <p:sp>
-        <p:nvSpPr>
-          <p:cNvPr id="3" name="TextBox 2"/>
+              <a:t>A fixed Haar wavelet transform in place of the shifted MLP</a:t>
+            </a:r>
+          </a:p>
+        </p:txBody>
+      </p:sp>
+      <p:pic>
+        <p:nvPicPr>
+          <p:cNvPr id="3" name="Picture 2" descr="fig9_wavelet_structure.png"/>
+          <p:cNvPicPr>
+            <a:picLocks noChangeAspect="1"/>
+          </p:cNvPicPr>
+          <p:nvPr/>
+        </p:nvPicPr>
+        <p:blipFill>
+          <a:blip r:embed="rId2"/>
+          <a:stretch>
+            <a:fillRect/>
+          </a:stretch>
+        </p:blipFill>
+        <p:spPr>
+          <a:xfrm>
+            <a:off x="518007" y="1234440"/>
+            <a:ext cx="11155680" cy="4495573"/>
+          </a:xfrm>
+          <a:prstGeom prst="rect">
+            <a:avLst/>
+          </a:prstGeom>
+        </p:spPr>
+      </p:pic>
+      <p:sp>
+        <p:nvSpPr>
+          <p:cNvPr id="4" name="TextBox 3"/>
           <p:cNvSpPr txBox="1"/>
           <p:nvPr/>
         </p:nvSpPr>
         <p:spPr>
           <a:xfrm>
-            <a:off x="548640" y="1371600"/>
-            <a:ext cx="11094415" cy="5029200"/>
+            <a:off x="548640" y="5349240"/>
+            <a:ext cx="11094415" cy="1051560"/>
           </a:xfrm>
           <a:prstGeom prst="rect">
             <a:avLst/>
@@ -4618,524 +4643,26 @@
           <a:p>
             <a:pPr>
               <a:spcAft>
-                <a:spcPts val="700"/>
+                <a:spcPts val="1000"/>
               </a:spcAft>
             </a:pPr>
             <a:r>
-              <a:rPr sz="1400" b="1" i="0">
-                <a:solidFill>
-                  <a:srgbClr val="000000"/>
-                </a:solidFill>
-                <a:latin typeface="Calibri"/>
-              </a:rPr>
-              <a:t>The paper's mixer shifts feature channels along one axis, then mixes them with an MLP.</a:t>
-            </a:r>
-            <a:r>
-              <a:rPr sz="1400" b="0" i="0">
-                <a:solidFill>
-                  <a:srgbClr val="000000"/>
-                </a:solidFill>
-                <a:latin typeface="Calibri"/>
-              </a:rPr>
-              <a:t> We replaced it with a Haar wavelet transform: a fixed, invertible split of the feature map into a low-frequency band and three detail bands (horizontal, vertical, diagonal), each processed separately and recombined.</a:t>
-            </a:r>
-          </a:p>
-          <a:p>
-            <a:pPr>
-              <a:spcAft>
-                <a:spcPts val="700"/>
-              </a:spcAft>
-            </a:pPr>
-            <a:r>
-              <a:rPr sz="1400" b="1" i="0">
-                <a:solidFill>
-                  <a:srgbClr val="000000"/>
-                </a:solidFill>
-                <a:latin typeface="Calibri"/>
-              </a:rPr>
-              <a:t>Why we expected it to help:</a:t>
-            </a:r>
-            <a:r>
-              <a:rPr sz="1400" b="0" i="0">
-                <a:solidFill>
-                  <a:srgbClr val="000000"/>
-                </a:solidFill>
-                <a:latin typeface="Calibri"/>
-              </a:rPr>
-              <a:t> ultrasound speckle is high-frequency noise. Separating the bands lets the network attenuate speckle explicitly rather than learning to ignore it.</a:t>
-            </a:r>
-          </a:p>
-        </p:txBody>
-      </p:sp>
-      <p:graphicFrame>
-        <p:nvGraphicFramePr>
-          <p:cNvPr id="4" name="Table 3"/>
-          <p:cNvGraphicFramePr>
-            <a:graphicFrameLocks noGrp="1"/>
-          </p:cNvGraphicFramePr>
-          <p:nvPr/>
-        </p:nvGraphicFramePr>
-        <p:xfrm>
-          <a:off x="548640" y="3063240"/>
-          <a:ext cx="10607040" cy="1920240"/>
-        </p:xfrm>
-        <a:graphic>
-          <a:graphicData uri="http://schemas.openxmlformats.org/drawingml/2006/table">
-            <a:tbl>
-              <a:tblPr firstRow="1" bandRow="1">
-                <a:tableStyleId>{5C22544A-7EE6-4342-B048-85BDC9FD1C3A}</a:tableStyleId>
-              </a:tblPr>
-              <a:tblGrid>
-                <a:gridCol w="3840480"/>
-                <a:gridCol w="3291840"/>
-                <a:gridCol w="3474720"/>
-              </a:tblGrid>
-              <a:tr h="384048">
-                <a:tc>
-                  <a:txBody>
-                    <a:bodyPr wrap="square"/>
-                    <a:lstStyle/>
-                    <a:p>
-                      <a:pPr algn="l"/>
-                      <a:r>
-                        <a:rPr sz="1200" b="1" i="0">
-                          <a:solidFill>
-                            <a:srgbClr val="000000"/>
-                          </a:solidFill>
-                          <a:latin typeface="Calibri"/>
-                        </a:rPr>
-                        <a:t>3 splits, strong augmentation</a:t>
-                      </a:r>
-                    </a:p>
-                  </a:txBody>
-                  <a:tcPr>
-                    <a:solidFill>
-                      <a:srgbClr val="FFFFFF"/>
-                    </a:solidFill>
-                  </a:tcPr>
-                </a:tc>
-                <a:tc>
-                  <a:txBody>
-                    <a:bodyPr wrap="square"/>
-                    <a:lstStyle/>
-                    <a:p>
-                      <a:pPr algn="ctr"/>
-                      <a:r>
-                        <a:rPr sz="1200" b="1" i="0">
-                          <a:solidFill>
-                            <a:srgbClr val="000000"/>
-                          </a:solidFill>
-                          <a:latin typeface="Calibri"/>
-                        </a:rPr>
-                        <a:t>Baseline (shifted MLP)</a:t>
-                      </a:r>
-                    </a:p>
-                  </a:txBody>
-                  <a:tcPr>
-                    <a:solidFill>
-                      <a:srgbClr val="FFFFFF"/>
-                    </a:solidFill>
-                  </a:tcPr>
-                </a:tc>
-                <a:tc>
-                  <a:txBody>
-                    <a:bodyPr wrap="square"/>
-                    <a:lstStyle/>
-                    <a:p>
-                      <a:pPr algn="ctr"/>
-                      <a:r>
-                        <a:rPr sz="1200" b="1" i="0">
-                          <a:solidFill>
-                            <a:srgbClr val="000000"/>
-                          </a:solidFill>
-                          <a:latin typeface="Calibri"/>
-                        </a:rPr>
-                        <a:t>Wavelet mixer</a:t>
-                      </a:r>
-                    </a:p>
-                  </a:txBody>
-                  <a:tcPr>
-                    <a:solidFill>
-                      <a:srgbClr val="FFFFFF"/>
-                    </a:solidFill>
-                  </a:tcPr>
-                </a:tc>
-              </a:tr>
-              <a:tr h="384048">
-                <a:tc>
-                  <a:txBody>
-                    <a:bodyPr wrap="square"/>
-                    <a:lstStyle/>
-                    <a:p>
-                      <a:pPr algn="l"/>
-                      <a:r>
-                        <a:rPr sz="1200" b="0" i="0">
-                          <a:solidFill>
-                            <a:srgbClr val="000000"/>
-                          </a:solidFill>
-                          <a:latin typeface="Calibri"/>
-                        </a:rPr>
-                        <a:t>Best IoU, per split</a:t>
-                      </a:r>
-                    </a:p>
-                  </a:txBody>
-                  <a:tcPr>
-                    <a:solidFill>
-                      <a:srgbClr val="FFFFFF"/>
-                    </a:solidFill>
-                  </a:tcPr>
-                </a:tc>
-                <a:tc>
-                  <a:txBody>
-                    <a:bodyPr wrap="square"/>
-                    <a:lstStyle/>
-                    <a:p>
-                      <a:pPr algn="ctr"/>
-                      <a:r>
-                        <a:rPr sz="1200" b="0" i="0">
-                          <a:solidFill>
-                            <a:srgbClr val="000000"/>
-                          </a:solidFill>
-                          <a:latin typeface="Calibri"/>
-                        </a:rPr>
-                        <a:t>0.6215 / 0.6306 / 0.6464</a:t>
-                      </a:r>
-                    </a:p>
-                  </a:txBody>
-                  <a:tcPr>
-                    <a:solidFill>
-                      <a:srgbClr val="FFFFFF"/>
-                    </a:solidFill>
-                  </a:tcPr>
-                </a:tc>
-                <a:tc>
-                  <a:txBody>
-                    <a:bodyPr wrap="square"/>
-                    <a:lstStyle/>
-                    <a:p>
-                      <a:pPr algn="ctr"/>
-                      <a:r>
-                        <a:rPr sz="1200" b="0" i="0">
-                          <a:solidFill>
-                            <a:srgbClr val="000000"/>
-                          </a:solidFill>
-                          <a:latin typeface="Calibri"/>
-                        </a:rPr>
-                        <a:t>0.6246 / 0.6226 / 0.6471</a:t>
-                      </a:r>
-                    </a:p>
-                  </a:txBody>
-                  <a:tcPr>
-                    <a:solidFill>
-                      <a:srgbClr val="FFFFFF"/>
-                    </a:solidFill>
-                  </a:tcPr>
-                </a:tc>
-              </a:tr>
-              <a:tr h="384048">
-                <a:tc>
-                  <a:txBody>
-                    <a:bodyPr wrap="square"/>
-                    <a:lstStyle/>
-                    <a:p>
-                      <a:pPr algn="l"/>
-                      <a:r>
-                        <a:rPr sz="1200" b="1" i="0">
-                          <a:solidFill>
-                            <a:srgbClr val="000000"/>
-                          </a:solidFill>
-                          <a:latin typeface="Calibri"/>
-                        </a:rPr>
-                        <a:t>Mean change in IoU</a:t>
-                      </a:r>
-                    </a:p>
-                  </a:txBody>
-                  <a:tcPr>
-                    <a:solidFill>
-                      <a:srgbClr val="FFFFFF"/>
-                    </a:solidFill>
-                  </a:tcPr>
-                </a:tc>
-                <a:tc>
-                  <a:txBody>
-                    <a:bodyPr wrap="square"/>
-                    <a:lstStyle/>
-                    <a:p>
-                      <a:pPr algn="ctr"/>
-                      <a:r>
-                        <a:rPr sz="1200" b="1" i="0">
-                          <a:solidFill>
-                            <a:srgbClr val="000000"/>
-                          </a:solidFill>
-                          <a:latin typeface="Calibri"/>
-                        </a:rPr>
-                        <a:t>—</a:t>
-                      </a:r>
-                    </a:p>
-                  </a:txBody>
-                  <a:tcPr>
-                    <a:solidFill>
-                      <a:srgbClr val="FFFFFF"/>
-                    </a:solidFill>
-                  </a:tcPr>
-                </a:tc>
-                <a:tc>
-                  <a:txBody>
-                    <a:bodyPr wrap="square"/>
-                    <a:lstStyle/>
-                    <a:p>
-                      <a:pPr algn="ctr"/>
-                      <a:r>
-                        <a:rPr sz="1200" b="1" i="0">
-                          <a:solidFill>
-                            <a:srgbClr val="000000"/>
-                          </a:solidFill>
-                          <a:latin typeface="Calibri"/>
-                        </a:rPr>
-                        <a:t>-0.0014   (p = 0.72)</a:t>
-                      </a:r>
-                    </a:p>
-                  </a:txBody>
-                  <a:tcPr>
-                    <a:solidFill>
-                      <a:srgbClr val="FFFFFF"/>
-                    </a:solidFill>
-                  </a:tcPr>
-                </a:tc>
-              </a:tr>
-              <a:tr h="384048">
-                <a:tc>
-                  <a:txBody>
-                    <a:bodyPr wrap="square"/>
-                    <a:lstStyle/>
-                    <a:p>
-                      <a:pPr algn="l"/>
-                      <a:r>
-                        <a:rPr sz="1200" b="0" i="0">
-                          <a:solidFill>
-                            <a:srgbClr val="000000"/>
-                          </a:solidFill>
-                          <a:latin typeface="Calibri"/>
-                        </a:rPr>
-                        <a:t>GFLOPs</a:t>
-                      </a:r>
-                    </a:p>
-                  </a:txBody>
-                  <a:tcPr>
-                    <a:solidFill>
-                      <a:srgbClr val="FFFFFF"/>
-                    </a:solidFill>
-                  </a:tcPr>
-                </a:tc>
-                <a:tc>
-                  <a:txBody>
-                    <a:bodyPr wrap="square"/>
-                    <a:lstStyle/>
-                    <a:p>
-                      <a:pPr algn="ctr"/>
-                      <a:r>
-                        <a:rPr sz="1200" b="0" i="0">
-                          <a:solidFill>
-                            <a:srgbClr val="000000"/>
-                          </a:solidFill>
-                          <a:latin typeface="Calibri"/>
-                        </a:rPr>
-                        <a:t>0.577</a:t>
-                      </a:r>
-                    </a:p>
-                  </a:txBody>
-                  <a:tcPr>
-                    <a:solidFill>
-                      <a:srgbClr val="FFFFFF"/>
-                    </a:solidFill>
-                  </a:tcPr>
-                </a:tc>
-                <a:tc>
-                  <a:txBody>
-                    <a:bodyPr wrap="square"/>
-                    <a:lstStyle/>
-                    <a:p>
-                      <a:pPr algn="ctr"/>
-                      <a:r>
-                        <a:rPr sz="1200" b="1" i="0">
-                          <a:solidFill>
-                            <a:srgbClr val="000000"/>
-                          </a:solidFill>
-                          <a:latin typeface="Calibri"/>
-                        </a:rPr>
-                        <a:t>0.525   (-9.0%)</a:t>
-                      </a:r>
-                    </a:p>
-                  </a:txBody>
-                  <a:tcPr>
-                    <a:solidFill>
-                      <a:srgbClr val="FFFFFF"/>
-                    </a:solidFill>
-                  </a:tcPr>
-                </a:tc>
-              </a:tr>
-              <a:tr h="384048">
-                <a:tc>
-                  <a:txBody>
-                    <a:bodyPr wrap="square"/>
-                    <a:lstStyle/>
-                    <a:p>
-                      <a:pPr algn="l"/>
-                      <a:r>
-                        <a:rPr sz="1200" b="0" i="0">
-                          <a:solidFill>
-                            <a:srgbClr val="000000"/>
-                          </a:solidFill>
-                          <a:latin typeface="Calibri"/>
-                        </a:rPr>
-                        <a:t>Parameters</a:t>
-                      </a:r>
-                    </a:p>
-                  </a:txBody>
-                  <a:tcPr>
-                    <a:solidFill>
-                      <a:srgbClr val="FFFFFF"/>
-                    </a:solidFill>
-                  </a:tcPr>
-                </a:tc>
-                <a:tc>
-                  <a:txBody>
-                    <a:bodyPr wrap="square"/>
-                    <a:lstStyle/>
-                    <a:p>
-                      <a:pPr algn="ctr"/>
-                      <a:r>
-                        <a:rPr sz="1200" b="0" i="0">
-                          <a:solidFill>
-                            <a:srgbClr val="000000"/>
-                          </a:solidFill>
-                          <a:latin typeface="Calibri"/>
-                        </a:rPr>
-                        <a:t>1,471,921</a:t>
-                      </a:r>
-                    </a:p>
-                  </a:txBody>
-                  <a:tcPr>
-                    <a:solidFill>
-                      <a:srgbClr val="FFFFFF"/>
-                    </a:solidFill>
-                  </a:tcPr>
-                </a:tc>
-                <a:tc>
-                  <a:txBody>
-                    <a:bodyPr wrap="square"/>
-                    <a:lstStyle/>
-                    <a:p>
-                      <a:pPr algn="ctr"/>
-                      <a:r>
-                        <a:rPr sz="1200" b="0" i="0">
-                          <a:solidFill>
-                            <a:srgbClr val="000000"/>
-                          </a:solidFill>
-                          <a:latin typeface="Calibri"/>
-                        </a:rPr>
-                        <a:t>1,493,041  (+1.43%)</a:t>
-                      </a:r>
-                    </a:p>
-                  </a:txBody>
-                  <a:tcPr>
-                    <a:solidFill>
-                      <a:srgbClr val="FFFFFF"/>
-                    </a:solidFill>
-                  </a:tcPr>
-                </a:tc>
-              </a:tr>
-            </a:tbl>
-          </a:graphicData>
-        </a:graphic>
-      </p:graphicFrame>
-      <p:sp>
-        <p:nvSpPr>
-          <p:cNvPr id="5" name="TextBox 4"/>
-          <p:cNvSpPr txBox="1"/>
-          <p:nvPr/>
-        </p:nvSpPr>
-        <p:spPr>
-          <a:xfrm>
-            <a:off x="548640" y="5212080"/>
-            <a:ext cx="11094415" cy="1188720"/>
-          </a:xfrm>
-          <a:prstGeom prst="rect">
-            <a:avLst/>
-          </a:prstGeom>
-          <a:noFill/>
-        </p:spPr>
-        <p:txBody>
-          <a:bodyPr wrap="square">
-            <a:spAutoFit/>
-          </a:bodyPr>
-          <a:lstStyle/>
-          <a:p>
-            <a:pPr>
-              <a:spcAft>
-                <a:spcPts val="600"/>
-              </a:spcAft>
-            </a:pPr>
-            <a:r>
-              <a:rPr sz="1300" b="1" i="0">
-                <a:solidFill>
-                  <a:srgbClr val="000000"/>
-                </a:solidFill>
-                <a:latin typeface="Calibri"/>
-              </a:rPr>
-              <a:t>Accuracy is unchanged — and we mean that precisely:</a:t>
-            </a:r>
-            <a:r>
-              <a:rPr sz="1300" b="0" i="0">
-                <a:solidFill>
-                  <a:srgbClr val="000000"/>
-                </a:solidFill>
-                <a:latin typeface="Calibri"/>
-              </a:rPr>
-              <a:t> −0.0014 is an eighth of the seed noise. What changed is the cost: </a:t>
-            </a:r>
-            <a:r>
-              <a:rPr sz="1300" b="1" i="0">
-                <a:solidFill>
-                  <a:srgbClr val="000000"/>
-                </a:solidFill>
-                <a:latin typeface="Calibri"/>
-              </a:rPr>
-              <a:t>9% fewer FLOPs</a:t>
-            </a:r>
-            <a:r>
-              <a:rPr sz="1300" b="0" i="0">
-                <a:solidFill>
-                  <a:srgbClr val="000000"/>
-                </a:solidFill>
-                <a:latin typeface="Calibri"/>
-              </a:rPr>
-              <a:t>, on a network whose entire argument is efficiency.</a:t>
-            </a:r>
-          </a:p>
-          <a:p>
-            <a:pPr>
-              <a:spcAft>
-                <a:spcPts val="600"/>
-              </a:spcAft>
-            </a:pPr>
-            <a:r>
-              <a:rPr sz="1300" b="1" i="0">
-                <a:solidFill>
-                  <a:srgbClr val="000000"/>
-                </a:solidFill>
-                <a:latin typeface="Calibri"/>
-              </a:rPr>
-              <a:t>The network told us the mechanism worked.</a:t>
-            </a:r>
-            <a:r>
-              <a:rPr sz="1300" b="0" i="0">
-                <a:solidFill>
-                  <a:srgbClr val="000000"/>
-                </a:solidFill>
-                <a:latin typeface="Calibri"/>
-              </a:rPr>
-              <a:t> In every block it learned to shrink the diagonal-detail band — the one dominated by speckle — by roughly half.</a:t>
+              <a:rPr sz="1350" b="1" i="0">
+                <a:solidFill>
+                  <a:srgbClr val="000000"/>
+                </a:solidFill>
+                <a:latin typeface="Calibri"/>
+              </a:rPr>
+              <a:t>The low band keeps the paper's MLP — but runs it on a quarter of the tokens.</a:t>
+            </a:r>
+            <a:r>
+              <a:rPr sz="1350" b="0" i="0">
+                <a:solidFill>
+                  <a:srgbClr val="000000"/>
+                </a:solidFill>
+                <a:latin typeface="Calibri"/>
+              </a:rPr>
+              <a:t> That is where the 9% FLOP saving comes from. The three detail bands get a small convolution each, added back on top.</a:t>
             </a:r>
           </a:p>
         </p:txBody>
@@ -5195,7 +4722,7 @@
                 </a:solidFill>
                 <a:latin typeface="Calibri"/>
               </a:rPr>
-              <a:t>The metric the paper never measures: false alarms on healthy tissue</a:t>
+              <a:t>Same accuracy, 9% less compute</a:t>
             </a:r>
           </a:p>
           <a:p>
@@ -5206,79 +4733,22 @@
                 </a:solidFill>
                 <a:latin typeface="Calibri"/>
               </a:rPr>
-              <a:t>BUSI ships 133 scans with no lesion — no model here was trained on any of them</a:t>
-            </a:r>
-          </a:p>
-        </p:txBody>
-      </p:sp>
-      <p:sp>
-        <p:nvSpPr>
-          <p:cNvPr id="3" name="TextBox 2"/>
-          <p:cNvSpPr txBox="1"/>
-          <p:nvPr/>
-        </p:nvSpPr>
-        <p:spPr>
-          <a:xfrm>
-            <a:off x="548640" y="1371600"/>
-            <a:ext cx="11094415" cy="5029200"/>
-          </a:xfrm>
-          <a:prstGeom prst="rect">
-            <a:avLst/>
-          </a:prstGeom>
-          <a:noFill/>
-        </p:spPr>
-        <p:txBody>
-          <a:bodyPr wrap="square">
-            <a:spAutoFit/>
-          </a:bodyPr>
-          <a:lstStyle/>
-          <a:p>
-            <a:pPr>
-              <a:spcAft>
-                <a:spcPts val="1000"/>
-              </a:spcAft>
-            </a:pPr>
-            <a:r>
-              <a:rPr sz="1400" b="1" i="0">
-                <a:solidFill>
-                  <a:srgbClr val="000000"/>
-                </a:solidFill>
-                <a:latin typeface="Calibri"/>
-              </a:rPr>
-              <a:t>IoU cannot score a healthy scan.</a:t>
-            </a:r>
-            <a:r>
-              <a:rPr sz="1400" b="0" i="0">
-                <a:solidFill>
-                  <a:srgbClr val="000000"/>
-                </a:solidFill>
-                <a:latin typeface="Calibri"/>
-              </a:rPr>
-              <a:t> The ground-truth mask is empty, so a model that predicts nothing scores perfectly. Every run in this project excluded these 133 cases — which is exactly what makes them a clean held-out test of a different question: </a:t>
-            </a:r>
-            <a:r>
-              <a:rPr sz="1400" b="1" i="0">
-                <a:solidFill>
-                  <a:srgbClr val="000000"/>
-                </a:solidFill>
-                <a:latin typeface="Calibri"/>
-              </a:rPr>
-              <a:t>when there is no tumour, how much does the model invent?</a:t>
+              <a:t>Three splits, paper-matched seeds, strong augmentation on both sides</a:t>
             </a:r>
           </a:p>
         </p:txBody>
       </p:sp>
       <p:graphicFrame>
         <p:nvGraphicFramePr>
-          <p:cNvPr id="4" name="Table 3"/>
+          <p:cNvPr id="3" name="Table 2"/>
           <p:cNvGraphicFramePr>
             <a:graphicFrameLocks noGrp="1"/>
           </p:cNvGraphicFramePr>
           <p:nvPr/>
         </p:nvGraphicFramePr>
         <p:xfrm>
-          <a:off x="548640" y="2468880"/>
-          <a:ext cx="10607039" cy="2011680"/>
+          <a:off x="548640" y="1600200"/>
+          <a:ext cx="10058400" cy="1920240"/>
         </p:xfrm>
         <a:graphic>
           <a:graphicData uri="http://schemas.openxmlformats.org/drawingml/2006/table">
@@ -5287,11 +4757,11 @@
                 <a:tableStyleId>{5C22544A-7EE6-4342-B048-85BDC9FD1C3A}</a:tableStyleId>
               </a:tblPr>
               <a:tblGrid>
-                <a:gridCol w="5120639"/>
-                <a:gridCol w="2743200"/>
-                <a:gridCol w="2743200"/>
+                <a:gridCol w="3474720"/>
+                <a:gridCol w="3291840"/>
+                <a:gridCol w="3291840"/>
               </a:tblGrid>
-              <a:tr h="402336">
+              <a:tr h="384048">
                 <a:tc>
                   <a:txBody>
                     <a:bodyPr wrap="square"/>
@@ -5299,13 +4769,13 @@
                     <a:p>
                       <a:pPr algn="l"/>
                       <a:r>
-                        <a:rPr sz="1200" b="1" i="0">
-                          <a:solidFill>
-                            <a:srgbClr val="000000"/>
-                          </a:solidFill>
-                          <a:latin typeface="Calibri"/>
-                        </a:rPr>
-                        <a:t>Fraction of the 133 healthy scans predicted completely clean</a:t>
+                        <a:rPr sz="1350" b="1" i="0">
+                          <a:solidFill>
+                            <a:srgbClr val="000000"/>
+                          </a:solidFill>
+                          <a:latin typeface="Calibri"/>
+                        </a:rPr>
+                        <a:t/>
                       </a:r>
                     </a:p>
                   </a:txBody>
@@ -5322,13 +4792,13 @@
                     <a:p>
                       <a:pPr algn="ctr"/>
                       <a:r>
-                        <a:rPr sz="1200" b="1" i="0">
-                          <a:solidFill>
-                            <a:srgbClr val="000000"/>
-                          </a:solidFill>
-                          <a:latin typeface="Calibri"/>
-                        </a:rPr>
-                        <a:t/>
+                        <a:rPr sz="1350" b="1" i="0">
+                          <a:solidFill>
+                            <a:srgbClr val="000000"/>
+                          </a:solidFill>
+                          <a:latin typeface="Calibri"/>
+                        </a:rPr>
+                        <a:t>Baseline (shifted MLP)</a:t>
                       </a:r>
                     </a:p>
                   </a:txBody>
@@ -5345,13 +4815,13 @@
                     <a:p>
                       <a:pPr algn="ctr"/>
                       <a:r>
-                        <a:rPr sz="1200" b="1" i="0">
-                          <a:solidFill>
-                            <a:srgbClr val="000000"/>
-                          </a:solidFill>
-                          <a:latin typeface="Calibri"/>
-                        </a:rPr>
-                        <a:t/>
+                        <a:rPr sz="1350" b="1" i="0">
+                          <a:solidFill>
+                            <a:srgbClr val="000000"/>
+                          </a:solidFill>
+                          <a:latin typeface="Calibri"/>
+                        </a:rPr>
+                        <a:t>Wavelet mixer</a:t>
                       </a:r>
                     </a:p>
                   </a:txBody>
@@ -5362,7 +4832,7 @@
                   </a:tcPr>
                 </a:tc>
               </a:tr>
-              <a:tr h="402336">
+              <a:tr h="384048">
                 <a:tc>
                   <a:txBody>
                     <a:bodyPr wrap="square"/>
@@ -5370,13 +4840,13 @@
                     <a:p>
                       <a:pPr algn="l"/>
                       <a:r>
-                        <a:rPr sz="1200" b="0" i="0">
-                          <a:solidFill>
-                            <a:srgbClr val="000000"/>
-                          </a:solidFill>
-                          <a:latin typeface="Calibri"/>
-                        </a:rPr>
-                        <a:t>Baseline UNeXt (15 runs)</a:t>
+                        <a:rPr sz="1350" b="1" i="0">
+                          <a:solidFill>
+                            <a:srgbClr val="000000"/>
+                          </a:solidFill>
+                          <a:latin typeface="Calibri"/>
+                        </a:rPr>
+                        <a:t>Mean change in IoU</a:t>
                       </a:r>
                     </a:p>
                   </a:txBody>
@@ -5393,13 +4863,13 @@
                     <a:p>
                       <a:pPr algn="ctr"/>
                       <a:r>
-                        <a:rPr sz="1200" b="0" i="0">
-                          <a:solidFill>
-                            <a:srgbClr val="000000"/>
-                          </a:solidFill>
-                          <a:latin typeface="Calibri"/>
-                        </a:rPr>
-                        <a:t>mean 5.5%</a:t>
+                        <a:rPr sz="1350" b="0" i="0">
+                          <a:solidFill>
+                            <a:srgbClr val="000000"/>
+                          </a:solidFill>
+                          <a:latin typeface="Calibri"/>
+                        </a:rPr>
+                        <a:t>—</a:t>
                       </a:r>
                     </a:p>
                   </a:txBody>
@@ -5416,13 +4886,13 @@
                     <a:p>
                       <a:pPr algn="ctr"/>
                       <a:r>
-                        <a:rPr sz="1200" b="0" i="0">
-                          <a:solidFill>
-                            <a:srgbClr val="000000"/>
-                          </a:solidFill>
-                          <a:latin typeface="Calibri"/>
-                        </a:rPr>
-                        <a:t>best 15.8%</a:t>
+                        <a:rPr sz="1350" b="1" i="0">
+                          <a:solidFill>
+                            <a:srgbClr val="000000"/>
+                          </a:solidFill>
+                          <a:latin typeface="Calibri"/>
+                        </a:rPr>
+                        <a:t>-0.0014</a:t>
                       </a:r>
                     </a:p>
                   </a:txBody>
@@ -5433,7 +4903,7 @@
                   </a:tcPr>
                 </a:tc>
               </a:tr>
-              <a:tr h="402336">
+              <a:tr h="384048">
                 <a:tc>
                   <a:txBody>
                     <a:bodyPr wrap="square"/>
@@ -5441,13 +4911,13 @@
                     <a:p>
                       <a:pPr algn="l"/>
                       <a:r>
-                        <a:rPr sz="1200" b="1" i="0">
-                          <a:solidFill>
-                            <a:srgbClr val="000000"/>
-                          </a:solidFill>
-                          <a:latin typeface="Calibri"/>
-                        </a:rPr>
-                        <a:t>Wavelet mixer (4 runs)</a:t>
+                        <a:rPr sz="1350" b="0" i="0">
+                          <a:solidFill>
+                            <a:srgbClr val="000000"/>
+                          </a:solidFill>
+                          <a:latin typeface="Calibri"/>
+                        </a:rPr>
+                        <a:t>GFLOPs</a:t>
                       </a:r>
                     </a:p>
                   </a:txBody>
@@ -5464,13 +4934,13 @@
                     <a:p>
                       <a:pPr algn="ctr"/>
                       <a:r>
-                        <a:rPr sz="1200" b="1" i="0">
-                          <a:solidFill>
-                            <a:srgbClr val="000000"/>
-                          </a:solidFill>
-                          <a:latin typeface="Calibri"/>
-                        </a:rPr>
-                        <a:t>mean 14.8%</a:t>
+                        <a:rPr sz="1350" b="0" i="0">
+                          <a:solidFill>
+                            <a:srgbClr val="000000"/>
+                          </a:solidFill>
+                          <a:latin typeface="Calibri"/>
+                        </a:rPr>
+                        <a:t>0.577</a:t>
                       </a:r>
                     </a:p>
                   </a:txBody>
@@ -5487,13 +4957,13 @@
                     <a:p>
                       <a:pPr algn="ctr"/>
                       <a:r>
-                        <a:rPr sz="1200" b="1" i="0">
-                          <a:solidFill>
-                            <a:srgbClr val="000000"/>
-                          </a:solidFill>
-                          <a:latin typeface="Calibri"/>
-                        </a:rPr>
-                        <a:t>worst 9.0%</a:t>
+                        <a:rPr sz="1350" b="1" i="0">
+                          <a:solidFill>
+                            <a:srgbClr val="000000"/>
+                          </a:solidFill>
+                          <a:latin typeface="Calibri"/>
+                        </a:rPr>
+                        <a:t>0.525   (-9.0%)</a:t>
                       </a:r>
                     </a:p>
                   </a:txBody>
@@ -5504,7 +4974,7 @@
                   </a:tcPr>
                 </a:tc>
               </a:tr>
-              <a:tr h="402336">
+              <a:tr h="384048">
                 <a:tc>
                   <a:txBody>
                     <a:bodyPr wrap="square"/>
@@ -5512,13 +4982,13 @@
                     <a:p>
                       <a:pPr algn="l"/>
                       <a:r>
-                        <a:rPr sz="1200" b="0" i="0">
-                          <a:solidFill>
-                            <a:srgbClr val="000000"/>
-                          </a:solidFill>
-                          <a:latin typeface="Calibri"/>
-                        </a:rPr>
-                        <a:t>Same split, same seed — pair 1</a:t>
+                        <a:rPr sz="1350" b="0" i="0">
+                          <a:solidFill>
+                            <a:srgbClr val="000000"/>
+                          </a:solidFill>
+                          <a:latin typeface="Calibri"/>
+                        </a:rPr>
+                        <a:t>Parameters</a:t>
                       </a:r>
                     </a:p>
                   </a:txBody>
@@ -5535,13 +5005,13 @@
                     <a:p>
                       <a:pPr algn="ctr"/>
                       <a:r>
-                        <a:rPr sz="1200" b="0" i="0">
-                          <a:solidFill>
-                            <a:srgbClr val="000000"/>
-                          </a:solidFill>
-                          <a:latin typeface="Calibri"/>
-                        </a:rPr>
-                        <a:t>baseline 1.5%</a:t>
+                        <a:rPr sz="1350" b="0" i="0">
+                          <a:solidFill>
+                            <a:srgbClr val="000000"/>
+                          </a:solidFill>
+                          <a:latin typeface="Calibri"/>
+                        </a:rPr>
+                        <a:t>1,471,921</a:t>
                       </a:r>
                     </a:p>
                   </a:txBody>
@@ -5558,13 +5028,13 @@
                     <a:p>
                       <a:pPr algn="ctr"/>
                       <a:r>
-                        <a:rPr sz="1200" b="1" i="0">
-                          <a:solidFill>
-                            <a:srgbClr val="000000"/>
-                          </a:solidFill>
-                          <a:latin typeface="Calibri"/>
-                        </a:rPr>
-                        <a:t>wavelet 15.8%</a:t>
+                        <a:rPr sz="1350" b="0" i="0">
+                          <a:solidFill>
+                            <a:srgbClr val="000000"/>
+                          </a:solidFill>
+                          <a:latin typeface="Calibri"/>
+                        </a:rPr>
+                        <a:t>1,493,041   (+1.4%)</a:t>
                       </a:r>
                     </a:p>
                   </a:txBody>
@@ -5575,7 +5045,7 @@
                   </a:tcPr>
                 </a:tc>
               </a:tr>
-              <a:tr h="402336">
+              <a:tr h="384048">
                 <a:tc>
                   <a:txBody>
                     <a:bodyPr wrap="square"/>
@@ -5583,13 +5053,13 @@
                     <a:p>
                       <a:pPr algn="l"/>
                       <a:r>
-                        <a:rPr sz="1200" b="0" i="0">
-                          <a:solidFill>
-                            <a:srgbClr val="000000"/>
-                          </a:solidFill>
-                          <a:latin typeface="Calibri"/>
-                        </a:rPr>
-                        <a:t>Same split, same seed — pair 2</a:t>
+                        <a:rPr sz="1350" b="0" i="0">
+                          <a:solidFill>
+                            <a:srgbClr val="000000"/>
+                          </a:solidFill>
+                          <a:latin typeface="Calibri"/>
+                        </a:rPr>
+                        <a:t>Boundary F1</a:t>
                       </a:r>
                     </a:p>
                   </a:txBody>
@@ -5606,13 +5076,13 @@
                     <a:p>
                       <a:pPr algn="ctr"/>
                       <a:r>
-                        <a:rPr sz="1200" b="0" i="0">
-                          <a:solidFill>
-                            <a:srgbClr val="000000"/>
-                          </a:solidFill>
-                          <a:latin typeface="Calibri"/>
-                        </a:rPr>
-                        <a:t>baseline 7.5%</a:t>
+                        <a:rPr sz="1350" b="0" i="0">
+                          <a:solidFill>
+                            <a:srgbClr val="000000"/>
+                          </a:solidFill>
+                          <a:latin typeface="Calibri"/>
+                        </a:rPr>
+                        <a:t>0.4740</a:t>
                       </a:r>
                     </a:p>
                   </a:txBody>
@@ -5629,13 +5099,13 @@
                     <a:p>
                       <a:pPr algn="ctr"/>
                       <a:r>
-                        <a:rPr sz="1200" b="1" i="0">
-                          <a:solidFill>
-                            <a:srgbClr val="000000"/>
-                          </a:solidFill>
-                          <a:latin typeface="Calibri"/>
-                        </a:rPr>
-                        <a:t>wavelet 15.8%</a:t>
+                        <a:rPr sz="1350" b="0" i="0">
+                          <a:solidFill>
+                            <a:srgbClr val="000000"/>
+                          </a:solidFill>
+                          <a:latin typeface="Calibri"/>
+                        </a:rPr>
+                        <a:t>0.4570   (-0.017)</a:t>
                       </a:r>
                     </a:p>
                   </a:txBody>
@@ -5652,14 +5122,14 @@
       </p:graphicFrame>
       <p:sp>
         <p:nvSpPr>
-          <p:cNvPr id="5" name="TextBox 4"/>
+          <p:cNvPr id="4" name="TextBox 3"/>
           <p:cNvSpPr txBox="1"/>
           <p:nvPr/>
         </p:nvSpPr>
         <p:spPr>
           <a:xfrm>
-            <a:off x="548640" y="4663440"/>
-            <a:ext cx="11094415" cy="1737360"/>
+            <a:off x="548640" y="3931920"/>
+            <a:ext cx="11094415" cy="2468880"/>
           </a:xfrm>
           <a:prstGeom prst="rect">
             <a:avLst/>
@@ -5674,76 +5144,69 @@
           <a:p>
             <a:pPr>
               <a:spcAft>
-                <a:spcPts val="500"/>
+                <a:spcPts val="800"/>
               </a:spcAft>
             </a:pPr>
             <a:r>
-              <a:rPr sz="1250" b="1" i="0">
-                <a:solidFill>
-                  <a:srgbClr val="000000"/>
-                </a:solidFill>
-                <a:latin typeface="Calibri"/>
-              </a:rPr>
-              <a:t>Three of the four wavelet runs beat every one of the fifteen baselines.</a:t>
-            </a:r>
-            <a:r>
-              <a:rPr sz="1250" b="0" i="0">
-                <a:solidFill>
-                  <a:srgbClr val="000000"/>
-                </a:solidFill>
-                <a:latin typeface="Calibri"/>
-              </a:rPr>
-              <a:t> On the two pairs where seed and precision are matched exactly, the gain is +0.14 and +0.08.</a:t>
+              <a:rPr sz="1400" b="1" i="0">
+                <a:solidFill>
+                  <a:srgbClr val="000000"/>
+                </a:solidFill>
+                <a:latin typeface="Calibri"/>
+              </a:rPr>
+              <a:t>-0.0014 IoU is an eighth of our seed noise.</a:t>
+            </a:r>
+            <a:r>
+              <a:rPr sz="1400" b="0" i="0">
+                <a:solidFill>
+                  <a:srgbClr val="000000"/>
+                </a:solidFill>
+                <a:latin typeface="Calibri"/>
+              </a:rPr>
+              <a:t> This is "identical", not "slightly worse" — and it is the only change we tried that made the network </a:t>
+            </a:r>
+            <a:r>
+              <a:rPr sz="1400" b="1" i="0">
+                <a:solidFill>
+                  <a:srgbClr val="000000"/>
+                </a:solidFill>
+                <a:latin typeface="Calibri"/>
+              </a:rPr>
+              <a:t>cheaper</a:t>
+            </a:r>
+            <a:r>
+              <a:rPr sz="1400" b="0" i="0">
+                <a:solidFill>
+                  <a:srgbClr val="000000"/>
+                </a:solidFill>
+                <a:latin typeface="Calibri"/>
+              </a:rPr>
+              <a:t> rather than more expensive.</a:t>
             </a:r>
           </a:p>
           <a:p>
             <a:pPr>
               <a:spcAft>
-                <a:spcPts val="500"/>
+                <a:spcPts val="800"/>
               </a:spcAft>
             </a:pPr>
             <a:r>
-              <a:rPr sz="1250" b="1" i="0">
-                <a:solidFill>
-                  <a:srgbClr val="000000"/>
-                </a:solidFill>
-                <a:latin typeface="Calibri"/>
-              </a:rPr>
-              <a:t>Honest limit:</a:t>
-            </a:r>
-            <a:r>
-              <a:rPr sz="1250" b="0" i="0">
-                <a:solidFill>
-                  <a:srgbClr val="000000"/>
-                </a:solidFill>
-                <a:latin typeface="Calibri"/>
-              </a:rPr>
-              <a:t> only two of our four wavelet runs are clean pairs — the other two vary the seed as well, so we quote no p-value. The effect is the same size in both groups (+0.113 vs +0.105), which is why we believe it, but n = 2 is not proof.</a:t>
-            </a:r>
-          </a:p>
-          <a:p>
-            <a:pPr>
-              <a:spcAft>
-                <a:spcPts val="500"/>
-              </a:spcAft>
-            </a:pPr>
-            <a:r>
-              <a:rPr sz="1250" b="1" i="0">
-                <a:solidFill>
-                  <a:srgbClr val="000000"/>
-                </a:solidFill>
-                <a:latin typeface="Calibri"/>
-              </a:rPr>
-              <a:t>Why it matters clinically:</a:t>
-            </a:r>
-            <a:r>
-              <a:rPr sz="1250" b="0" i="0">
-                <a:solidFill>
-                  <a:srgbClr val="000000"/>
-                </a:solidFill>
-                <a:latin typeface="Calibri"/>
-              </a:rPr>
-              <a:t> in screening, most scans are healthy. A model that segments lesions equally well but hallucinates less on healthy tissue is the better tool, and IoU on lesion cases would never reveal it.</a:t>
+              <a:rPr sz="1400" b="1" i="0">
+                <a:solidFill>
+                  <a:srgbClr val="000000"/>
+                </a:solidFill>
+                <a:latin typeface="Calibri"/>
+              </a:rPr>
+              <a:t>The honest cost:</a:t>
+            </a:r>
+            <a:r>
+              <a:rPr sz="1400" b="0" i="0">
+                <a:solidFill>
+                  <a:srgbClr val="000000"/>
+                </a:solidFill>
+                <a:latin typeface="Calibri"/>
+              </a:rPr>
+              <a:t> contours are slightly softer (boundary F1 −0.017, worse on 3 of 3 splits). Smoothing away speckle also smooths the lesion edge.</a:t>
             </a:r>
           </a:p>
         </p:txBody>
@@ -5803,21 +5266,56 @@
                 </a:solidFill>
                 <a:latin typeface="Calibri"/>
               </a:rPr>
-              <a:t>Challenges</a:t>
-            </a:r>
-          </a:p>
-        </p:txBody>
-      </p:sp>
-      <p:sp>
-        <p:nvSpPr>
-          <p:cNvPr id="3" name="TextBox 2"/>
+              <a:t>The metric the paper never measures</a:t>
+            </a:r>
+          </a:p>
+          <a:p>
+            <a:r>
+              <a:rPr sz="1400" b="0" i="1">
+                <a:solidFill>
+                  <a:srgbClr val="555555"/>
+                </a:solidFill>
+                <a:latin typeface="Calibri"/>
+              </a:rPr>
+              <a:t>BUSI ships 133 scans with no lesion — no model here was trained on any of them</a:t>
+            </a:r>
+          </a:p>
+        </p:txBody>
+      </p:sp>
+      <p:pic>
+        <p:nvPicPr>
+          <p:cNvPr id="3" name="Picture 2" descr="fig10_healthy_tissue.png"/>
+          <p:cNvPicPr>
+            <a:picLocks noChangeAspect="1"/>
+          </p:cNvPicPr>
+          <p:nvPr/>
+        </p:nvPicPr>
+        <p:blipFill>
+          <a:blip r:embed="rId2"/>
+          <a:stretch>
+            <a:fillRect/>
+          </a:stretch>
+        </p:blipFill>
+        <p:spPr>
+          <a:xfrm>
+            <a:off x="518007" y="1234440"/>
+            <a:ext cx="11155680" cy="3895634"/>
+          </a:xfrm>
+          <a:prstGeom prst="rect">
+            <a:avLst/>
+          </a:prstGeom>
+        </p:spPr>
+      </p:pic>
+      <p:sp>
+        <p:nvSpPr>
+          <p:cNvPr id="4" name="TextBox 3"/>
           <p:cNvSpPr txBox="1"/>
           <p:nvPr/>
         </p:nvSpPr>
         <p:spPr>
           <a:xfrm>
-            <a:off x="548640" y="1371600"/>
-            <a:ext cx="11094415" cy="5029200"/>
+            <a:off x="548640" y="5303520"/>
+            <a:ext cx="11094415" cy="1097280"/>
           </a:xfrm>
           <a:prstGeom prst="rect">
             <a:avLst/>
@@ -5832,119 +5330,35 @@
           <a:p>
             <a:pPr>
               <a:spcAft>
-                <a:spcPts val="1400"/>
+                <a:spcPts val="1000"/>
               </a:spcAft>
             </a:pPr>
             <a:r>
-              <a:rPr sz="1500" b="1" i="0">
-                <a:solidFill>
-                  <a:srgbClr val="000000"/>
-                </a:solidFill>
-                <a:latin typeface="Calibri"/>
-              </a:rPr>
-              <a:t>1. A real bug in the upstream code.</a:t>
-            </a:r>
-            <a:r>
-              <a:rPr sz="1500" b="0" i="0">
-                <a:solidFill>
-                  <a:srgbClr val="000000"/>
-                </a:solidFill>
-                <a:latin typeface="Calibri"/>
-              </a:rPr>
-              <a:t> dataset.py divides by 255 *after* Normalize() has already applied ImageNet statistics — squashing inputs from ±2.5 into </a:t>
-            </a:r>
-            <a:r>
-              <a:rPr sz="1500" b="1" i="0">
-                <a:solidFill>
-                  <a:srgbClr val="000000"/>
-                </a:solidFill>
-                <a:latin typeface="Calibri"/>
-              </a:rPr>
-              <a:t>±0.01</a:t>
-            </a:r>
-            <a:r>
-              <a:rPr sz="1500" b="0" i="0">
-                <a:solidFill>
-                  <a:srgbClr val="000000"/>
-                </a:solidFill>
-                <a:latin typeface="Calibri"/>
-              </a:rPr>
-              <a:t> and discarding most of the signal. Found by inspecting tensors, not from any error.</a:t>
-            </a:r>
-          </a:p>
-          <a:p>
-            <a:pPr>
-              <a:spcAft>
-                <a:spcPts val="1400"/>
-              </a:spcAft>
-            </a:pPr>
-            <a:r>
-              <a:rPr sz="1500" b="1" i="0">
-                <a:solidFill>
-                  <a:srgbClr val="000000"/>
-                </a:solidFill>
-                <a:latin typeface="Calibri"/>
-              </a:rPr>
-              <a:t>2. Frozen BatchNorm is not frozen.</a:t>
-            </a:r>
-            <a:r>
-              <a:rPr sz="1500" b="0" i="0">
-                <a:solidFill>
-                  <a:srgbClr val="000000"/>
-                </a:solidFill>
-                <a:latin typeface="Calibri"/>
-              </a:rPr>
-              <a:t> requires_grad=False stops gradients but not the running mean/variance buffers — our "frozen" backbone would have drifted silently, invalidating the attribution.</a:t>
-            </a:r>
-          </a:p>
-          <a:p>
-            <a:pPr>
-              <a:spcAft>
-                <a:spcPts val="1400"/>
-              </a:spcAft>
-            </a:pPr>
-            <a:r>
-              <a:rPr sz="1500" b="1" i="0">
-                <a:solidFill>
-                  <a:srgbClr val="000000"/>
-                </a:solidFill>
-                <a:latin typeface="Calibri"/>
-              </a:rPr>
-              <a:t>3. Identity-grafting is delicate.</a:t>
-            </a:r>
-            <a:r>
-              <a:rPr sz="1500" b="0" i="0">
-                <a:solidFill>
-                  <a:srgbClr val="000000"/>
-                </a:solidFill>
-                <a:latin typeface="Calibri"/>
-              </a:rPr>
-              <a:t> Inserting SE naively halves every activation; initialising too conservatively saturates the sigmoid so it cannot learn. Starting as an exact identity *and* staying trainable took several attempts.</a:t>
-            </a:r>
-          </a:p>
-          <a:p>
-            <a:pPr>
-              <a:spcAft>
-                <a:spcPts val="1400"/>
-              </a:spcAft>
-            </a:pPr>
-            <a:r>
-              <a:rPr sz="1500" b="1" i="0">
-                <a:solidFill>
-                  <a:srgbClr val="000000"/>
-                </a:solidFill>
-                <a:latin typeface="Calibri"/>
-              </a:rPr>
-              <a:t>4. A 2022 repo on a 2026 stack</a:t>
-            </a:r>
-            <a:r>
-              <a:rPr sz="1500" b="0" i="0">
-                <a:solidFill>
-                  <a:srgbClr val="000000"/>
-                </a:solidFill>
-                <a:latin typeface="Calibri"/>
-              </a:rPr>
-              <a:t> — dead dependencies, and no released weights to validate against.</a:t>
+              <a:rPr sz="1350" b="1" i="0">
+                <a:solidFill>
+                  <a:srgbClr val="000000"/>
+                </a:solidFill>
+                <a:latin typeface="Calibri"/>
+              </a:rPr>
+              <a:t>IoU cannot score a healthy scan</a:t>
+            </a:r>
+            <a:r>
+              <a:rPr sz="1350" b="0" i="0">
+                <a:solidFill>
+                  <a:srgbClr val="000000"/>
+                </a:solidFill>
+                <a:latin typeface="Calibri"/>
+              </a:rPr>
+              <a:t> — the mask is empty, so predicting nothing scores perfectly. That degeneracy is what makes these 133 a clean held-out test of a different question: </a:t>
+            </a:r>
+            <a:r>
+              <a:rPr sz="1350" b="1" i="0">
+                <a:solidFill>
+                  <a:srgbClr val="000000"/>
+                </a:solidFill>
+                <a:latin typeface="Calibri"/>
+              </a:rPr>
+              <a:t>when there is no tumour, how much does the model invent?</a:t>
             </a:r>
           </a:p>
         </p:txBody>
@@ -6004,7 +5418,7 @@
                 </a:solidFill>
                 <a:latin typeface="Calibri"/>
               </a:rPr>
-              <a:t>Conclusions</a:t>
+              <a:t>Challenges</a:t>
             </a:r>
           </a:p>
         </p:txBody>
@@ -6017,8 +5431,8 @@
         </p:nvSpPr>
         <p:spPr>
           <a:xfrm>
-            <a:off x="548640" y="1371600"/>
-            <a:ext cx="11094415" cy="5029200"/>
+            <a:off x="548640" y="1737360"/>
+            <a:ext cx="11094415" cy="4663440"/>
           </a:xfrm>
           <a:prstGeom prst="rect">
             <a:avLst/>
@@ -6033,253 +5447,119 @@
           <a:p>
             <a:pPr>
               <a:spcAft>
-                <a:spcPts val="1100"/>
+                <a:spcPts val="2600"/>
               </a:spcAft>
             </a:pPr>
             <a:r>
-              <a:rPr sz="1500" b="1" i="0">
-                <a:solidFill>
-                  <a:srgbClr val="000000"/>
-                </a:solidFill>
-                <a:latin typeface="Calibri"/>
-              </a:rPr>
-              <a:t>What reproduced — the efficiency claims, exactly.</a:t>
-            </a:r>
-            <a:r>
-              <a:rPr sz="1500" b="0" i="0">
-                <a:solidFill>
-                  <a:srgbClr val="000000"/>
-                </a:solidFill>
-                <a:latin typeface="Calibri"/>
-              </a:rPr>
-              <a:t> 1,471,921 parameters (paper: 1.47 M), 0.577 GFLOPs (paper: 0.57), 12.5 ms on CPU. UNeXt really is 72× smaller than TransUNet.</a:t>
+              <a:rPr sz="1700" b="1" i="0">
+                <a:solidFill>
+                  <a:srgbClr val="000000"/>
+                </a:solidFill>
+                <a:latin typeface="Calibri"/>
+              </a:rPr>
+              <a:t>1. A real bug in the upstream code</a:t>
+            </a:r>
+            <a:r>
+              <a:rPr sz="1700" b="0" i="0">
+                <a:solidFill>
+                  <a:srgbClr val="000000"/>
+                </a:solidFill>
+                <a:latin typeface="Calibri"/>
+              </a:rPr>
+              <a:t> — inputs were being squashed from ±2.5 into </a:t>
+            </a:r>
+            <a:r>
+              <a:rPr sz="1700" b="1" i="0">
+                <a:solidFill>
+                  <a:srgbClr val="000000"/>
+                </a:solidFill>
+                <a:latin typeface="Calibri"/>
+              </a:rPr>
+              <a:t>±0.01</a:t>
+            </a:r>
+            <a:r>
+              <a:rPr sz="1700" b="0" i="0">
+                <a:solidFill>
+                  <a:srgbClr val="000000"/>
+                </a:solidFill>
+                <a:latin typeface="Calibri"/>
+              </a:rPr>
+              <a:t>, discarding most of the signal.</a:t>
             </a:r>
           </a:p>
           <a:p>
             <a:pPr>
               <a:spcAft>
-                <a:spcPts val="1100"/>
+                <a:spcPts val="2600"/>
               </a:spcAft>
             </a:pPr>
             <a:r>
-              <a:rPr sz="1500" b="1" i="0">
-                <a:solidFill>
-                  <a:srgbClr val="000000"/>
-                </a:solidFill>
-                <a:latin typeface="Calibri"/>
-              </a:rPr>
-              <a:t>What did not — the accuracy.</a:t>
-            </a:r>
-            <a:r>
-              <a:rPr sz="1500" b="0" i="0">
-                <a:solidFill>
-                  <a:srgbClr val="000000"/>
-                </a:solidFill>
-                <a:latin typeface="Calibri"/>
-              </a:rPr>
-              <a:t> 0.593 vs 0.669 IoU, across six runs, with five explanations eliminated and no released weights to check against.</a:t>
+              <a:rPr sz="1700" b="1" i="0">
+                <a:solidFill>
+                  <a:srgbClr val="000000"/>
+                </a:solidFill>
+                <a:latin typeface="Calibri"/>
+              </a:rPr>
+              <a:t>2. Frozen BatchNorm is not frozen</a:t>
+            </a:r>
+            <a:r>
+              <a:rPr sz="1700" b="0" i="0">
+                <a:solidFill>
+                  <a:srgbClr val="000000"/>
+                </a:solidFill>
+                <a:latin typeface="Calibri"/>
+              </a:rPr>
+              <a:t> — our "frozen" backbone would have drifted silently, invalidating the whole comparison.</a:t>
             </a:r>
           </a:p>
           <a:p>
             <a:pPr>
               <a:spcAft>
-                <a:spcPts val="1100"/>
+                <a:spcPts val="2600"/>
               </a:spcAft>
             </a:pPr>
+            <a:r>
+              <a:rPr sz="1700" b="1" i="0">
+                <a:solidFill>
+                  <a:srgbClr val="000000"/>
+                </a:solidFill>
+                <a:latin typeface="Calibri"/>
+              </a:rPr>
+              <a:t>3. Grafting a new layer without disturbing the model</a:t>
+            </a:r>
+            <a:r>
+              <a:rPr sz="1700" b="0" i="0">
+                <a:solidFill>
+                  <a:srgbClr val="000000"/>
+                </a:solidFill>
+                <a:latin typeface="Calibri"/>
+              </a:rPr>
+              <a:t> took several attempts.</a:t>
+            </a:r>
           </a:p>
           <a:p>
             <a:pPr>
               <a:spcAft>
-                <a:spcPts val="1100"/>
+                <a:spcPts val="2600"/>
               </a:spcAft>
             </a:pPr>
             <a:r>
-              <a:rPr sz="1500" b="1" i="0">
-                <a:solidFill>
-                  <a:srgbClr val="000000"/>
-                </a:solidFill>
-                <a:latin typeface="Calibri"/>
-              </a:rPr>
-              <a:t>What we learned:</a:t>
-            </a:r>
-          </a:p>
-          <a:p>
-            <a:pPr lvl="1">
-              <a:spcAft>
-                <a:spcPts val="1100"/>
-              </a:spcAft>
-            </a:pPr>
-            <a:r>
-              <a:rPr sz="1400" b="0" i="0">
-                <a:solidFill>
-                  <a:srgbClr val="555555"/>
-                </a:solidFill>
-                <a:latin typeface="Calibri"/>
-              </a:rPr>
-              <a:t>The likely cause is </a:t>
-            </a:r>
-            <a:r>
-              <a:rPr sz="1400" b="1" i="0">
-                <a:solidFill>
-                  <a:srgbClr val="555555"/>
-                </a:solidFill>
-                <a:latin typeface="Calibri"/>
-              </a:rPr>
-              <a:t>under-regularization</a:t>
-            </a:r>
-            <a:r>
-              <a:rPr sz="1400" b="0" i="0">
-                <a:solidFill>
-                  <a:srgbClr val="555555"/>
-                </a:solidFill>
-                <a:latin typeface="Calibri"/>
-              </a:rPr>
-              <a:t> — the paper's augmentation cannot support 518 training images, and every run overfits hard</a:t>
-            </a:r>
-          </a:p>
-          <a:p>
-            <a:pPr lvl="1">
-              <a:spcAft>
-                <a:spcPts val="1100"/>
-              </a:spcAft>
-            </a:pPr>
-            <a:r>
-              <a:rPr sz="1400" b="1" i="0">
-                <a:solidFill>
-                  <a:srgbClr val="555555"/>
-                </a:solidFill>
-                <a:latin typeface="Calibri"/>
-              </a:rPr>
-              <a:t>Augmentation is the one intervention that moved the number</a:t>
-            </a:r>
-            <a:r>
-              <a:rPr sz="1400" b="0" i="0">
-                <a:solidFill>
-                  <a:srgbClr val="555555"/>
-                </a:solidFill>
-                <a:latin typeface="Calibri"/>
-              </a:rPr>
-              <a:t>: +0.040 converged, +0.023 at a matched budget — </a:t>
-            </a:r>
-            <a:r>
-              <a:rPr sz="1400" b="1" i="0">
-                <a:solidFill>
-                  <a:srgbClr val="555555"/>
-                </a:solidFill>
-                <a:latin typeface="Calibri"/>
-              </a:rPr>
-              <a:t>0.5931 → 0.6328</a:t>
-            </a:r>
-            <a:r>
-              <a:rPr sz="1400" b="0" i="0">
-                <a:solidFill>
-                  <a:srgbClr val="555555"/>
-                </a:solidFill>
-                <a:latin typeface="Calibri"/>
-              </a:rPr>
-              <a:t>, at zero added cost</a:t>
-            </a:r>
-          </a:p>
-          <a:p>
-            <a:pPr lvl="1">
-              <a:spcAft>
-                <a:spcPts val="1100"/>
-              </a:spcAft>
-            </a:pPr>
-            <a:r>
-              <a:rPr sz="1400" b="1" i="0">
-                <a:solidFill>
-                  <a:srgbClr val="555555"/>
-                </a:solidFill>
-                <a:latin typeface="Calibri"/>
-              </a:rPr>
-              <a:t>No architectural modification cleared our own noise floor.</a:t>
-            </a:r>
-            <a:r>
-              <a:rPr sz="1400" b="0" i="0">
-                <a:solidFill>
-                  <a:srgbClr val="555555"/>
-                </a:solidFill>
-                <a:latin typeface="Calibri"/>
-              </a:rPr>
-              <a:t> Five were tried; the largest effect (0.005) is half of what changing the random seed does (0.011)</a:t>
-            </a:r>
-          </a:p>
-          <a:p>
-            <a:pPr lvl="1">
-              <a:spcAft>
-                <a:spcPts val="1100"/>
-              </a:spcAft>
-            </a:pPr>
-            <a:r>
-              <a:rPr sz="1400" b="1" i="0">
-                <a:solidFill>
-                  <a:srgbClr val="555555"/>
-                </a:solidFill>
-                <a:latin typeface="Calibri"/>
-              </a:rPr>
-              <a:t>The wavelet mixer is the exception worth reporting</a:t>
-            </a:r>
-            <a:r>
-              <a:rPr sz="1400" b="0" i="0">
-                <a:solidFill>
-                  <a:srgbClr val="555555"/>
-                </a:solidFill>
-                <a:latin typeface="Calibri"/>
-              </a:rPr>
-              <a:t> — identical accuracy for </a:t>
-            </a:r>
-            <a:r>
-              <a:rPr sz="1400" b="1" i="0">
-                <a:solidFill>
-                  <a:srgbClr val="555555"/>
-                </a:solidFill>
-                <a:latin typeface="Calibri"/>
-              </a:rPr>
-              <a:t>9% fewer FLOPs</a:t>
-            </a:r>
-            <a:r>
-              <a:rPr sz="1400" b="0" i="0">
-                <a:solidFill>
-                  <a:srgbClr val="555555"/>
-                </a:solidFill>
-                <a:latin typeface="Calibri"/>
-              </a:rPr>
-              <a:t>, and markedly fewer false alarms on healthy tissue</a:t>
-            </a:r>
-          </a:p>
-        </p:txBody>
-      </p:sp>
-      <p:sp>
-        <p:nvSpPr>
-          <p:cNvPr id="4" name="TextBox 3"/>
-          <p:cNvSpPr txBox="1"/>
-          <p:nvPr/>
-        </p:nvSpPr>
-        <p:spPr>
-          <a:xfrm>
-            <a:off x="548640" y="5532120"/>
-            <a:ext cx="11094415" cy="731520"/>
-          </a:xfrm>
-          <a:prstGeom prst="rect">
-            <a:avLst/>
-          </a:prstGeom>
-          <a:noFill/>
-        </p:spPr>
-        <p:txBody>
-          <a:bodyPr wrap="square">
-            <a:spAutoFit/>
-          </a:bodyPr>
-          <a:lstStyle/>
-          <a:p>
-            <a:r>
               <a:rPr sz="1700" b="1" i="0">
                 <a:solidFill>
                   <a:srgbClr val="000000"/>
                 </a:solidFill>
                 <a:latin typeface="Calibri"/>
               </a:rPr>
-              <a:t>Takeaway: the training recipe mattered more than the architecture — and most reported gains this size are indistinguishable from the random seed.</a:t>
+              <a:t>4. A 2022 repo on a 2026 stack</a:t>
+            </a:r>
+            <a:r>
+              <a:rPr sz="1700" b="0" i="0">
+                <a:solidFill>
+                  <a:srgbClr val="000000"/>
+                </a:solidFill>
+                <a:latin typeface="Calibri"/>
+              </a:rPr>
+              <a:t> — dead dependencies, no released weights to check against.</a:t>
             </a:r>
           </a:p>
         </p:txBody>
@@ -6339,6 +5619,302 @@
                 </a:solidFill>
                 <a:latin typeface="Calibri"/>
               </a:rPr>
+              <a:t>Conclusions</a:t>
+            </a:r>
+          </a:p>
+        </p:txBody>
+      </p:sp>
+      <p:sp>
+        <p:nvSpPr>
+          <p:cNvPr id="3" name="TextBox 2"/>
+          <p:cNvSpPr txBox="1"/>
+          <p:nvPr/>
+        </p:nvSpPr>
+        <p:spPr>
+          <a:xfrm>
+            <a:off x="548640" y="1417320"/>
+            <a:ext cx="11094415" cy="4983480"/>
+          </a:xfrm>
+          <a:prstGeom prst="rect">
+            <a:avLst/>
+          </a:prstGeom>
+          <a:noFill/>
+        </p:spPr>
+        <p:txBody>
+          <a:bodyPr wrap="square">
+            <a:spAutoFit/>
+          </a:bodyPr>
+          <a:lstStyle/>
+          <a:p>
+            <a:pPr>
+              <a:spcAft>
+                <a:spcPts val="1500"/>
+              </a:spcAft>
+            </a:pPr>
+            <a:r>
+              <a:rPr sz="1500" b="1" i="0">
+                <a:solidFill>
+                  <a:srgbClr val="000000"/>
+                </a:solidFill>
+                <a:latin typeface="Calibri"/>
+              </a:rPr>
+              <a:t>The efficiency claims reproduce exactly</a:t>
+            </a:r>
+            <a:r>
+              <a:rPr sz="1500" b="0" i="0">
+                <a:solidFill>
+                  <a:srgbClr val="000000"/>
+                </a:solidFill>
+                <a:latin typeface="Calibri"/>
+              </a:rPr>
+              <a:t> — 1.47 M parameters, 0.577 GFLOPs, 72x smaller than TransUNet.</a:t>
+            </a:r>
+          </a:p>
+          <a:p>
+            <a:pPr>
+              <a:spcAft>
+                <a:spcPts val="1500"/>
+              </a:spcAft>
+            </a:pPr>
+            <a:r>
+              <a:rPr sz="1500" b="1" i="0">
+                <a:solidFill>
+                  <a:srgbClr val="000000"/>
+                </a:solidFill>
+                <a:latin typeface="Calibri"/>
+              </a:rPr>
+              <a:t>The accuracy does not</a:t>
+            </a:r>
+            <a:r>
+              <a:rPr sz="1500" b="0" i="0">
+                <a:solidFill>
+                  <a:srgbClr val="000000"/>
+                </a:solidFill>
+                <a:latin typeface="Calibri"/>
+              </a:rPr>
+              <a:t> — 0.593 against the published 0.669, across six runs.</a:t>
+            </a:r>
+          </a:p>
+          <a:p>
+            <a:pPr>
+              <a:spcAft>
+                <a:spcPts val="1500"/>
+              </a:spcAft>
+            </a:pPr>
+            <a:r>
+              <a:rPr sz="1500" b="1" i="0">
+                <a:solidFill>
+                  <a:srgbClr val="000000"/>
+                </a:solidFill>
+                <a:latin typeface="Calibri"/>
+              </a:rPr>
+              <a:t>The cause is overfitting</a:t>
+            </a:r>
+            <a:r>
+              <a:rPr sz="1500" b="0" i="0">
+                <a:solidFill>
+                  <a:srgbClr val="000000"/>
+                </a:solidFill>
+                <a:latin typeface="Calibri"/>
+              </a:rPr>
+              <a:t> — stronger augmentation recovers </a:t>
+            </a:r>
+            <a:r>
+              <a:rPr sz="1500" b="1" i="0">
+                <a:solidFill>
+                  <a:srgbClr val="000000"/>
+                </a:solidFill>
+                <a:latin typeface="Calibri"/>
+              </a:rPr>
+              <a:t>+0.040</a:t>
+            </a:r>
+            <a:r>
+              <a:rPr sz="1500" b="0" i="0">
+                <a:solidFill>
+                  <a:srgbClr val="000000"/>
+                </a:solidFill>
+                <a:latin typeface="Calibri"/>
+              </a:rPr>
+              <a:t>, without touching the architecture.</a:t>
+            </a:r>
+          </a:p>
+          <a:p>
+            <a:pPr>
+              <a:spcAft>
+                <a:spcPts val="1500"/>
+              </a:spcAft>
+            </a:pPr>
+            <a:r>
+              <a:rPr sz="1500" b="1" i="0">
+                <a:solidFill>
+                  <a:srgbClr val="000000"/>
+                </a:solidFill>
+                <a:latin typeface="Calibri"/>
+              </a:rPr>
+              <a:t>No architectural change beat the random seed</a:t>
+            </a:r>
+            <a:r>
+              <a:rPr sz="1500" b="0" i="0">
+                <a:solidFill>
+                  <a:srgbClr val="000000"/>
+                </a:solidFill>
+                <a:latin typeface="Calibri"/>
+              </a:rPr>
+              <a:t> — a different seed moves IoU by 0.011; every modification moved it less.</a:t>
+            </a:r>
+          </a:p>
+          <a:p>
+            <a:pPr>
+              <a:spcAft>
+                <a:spcPts val="1500"/>
+              </a:spcAft>
+            </a:pPr>
+            <a:r>
+              <a:rPr sz="1500" b="1" i="0">
+                <a:solidFill>
+                  <a:srgbClr val="000000"/>
+                </a:solidFill>
+                <a:latin typeface="Calibri"/>
+              </a:rPr>
+              <a:t>Except one</a:t>
+            </a:r>
+            <a:r>
+              <a:rPr sz="1500" b="0" i="0">
+                <a:solidFill>
+                  <a:srgbClr val="000000"/>
+                </a:solidFill>
+                <a:latin typeface="Calibri"/>
+              </a:rPr>
+              <a:t> — the wavelet mixer: same accuracy, </a:t>
+            </a:r>
+            <a:r>
+              <a:rPr sz="1500" b="1" i="0">
+                <a:solidFill>
+                  <a:srgbClr val="000000"/>
+                </a:solidFill>
+                <a:latin typeface="Calibri"/>
+              </a:rPr>
+              <a:t>9% fewer FLOPs</a:t>
+            </a:r>
+            <a:r>
+              <a:rPr sz="1500" b="0" i="0">
+                <a:solidFill>
+                  <a:srgbClr val="000000"/>
+                </a:solidFill>
+                <a:latin typeface="Calibri"/>
+              </a:rPr>
+              <a:t>, and </a:t>
+            </a:r>
+            <a:r>
+              <a:rPr sz="1500" b="1" i="0">
+                <a:solidFill>
+                  <a:srgbClr val="000000"/>
+                </a:solidFill>
+                <a:latin typeface="Calibri"/>
+              </a:rPr>
+              <a:t>3x more healthy scans left completely clean</a:t>
+            </a:r>
+            <a:r>
+              <a:rPr sz="1500" b="0" i="0">
+                <a:solidFill>
+                  <a:srgbClr val="000000"/>
+                </a:solidFill>
+                <a:latin typeface="Calibri"/>
+              </a:rPr>
+              <a:t>.</a:t>
+            </a:r>
+          </a:p>
+        </p:txBody>
+      </p:sp>
+      <p:sp>
+        <p:nvSpPr>
+          <p:cNvPr id="4" name="TextBox 3"/>
+          <p:cNvSpPr txBox="1"/>
+          <p:nvPr/>
+        </p:nvSpPr>
+        <p:spPr>
+          <a:xfrm>
+            <a:off x="548640" y="5532120"/>
+            <a:ext cx="11094415" cy="731520"/>
+          </a:xfrm>
+          <a:prstGeom prst="rect">
+            <a:avLst/>
+          </a:prstGeom>
+          <a:noFill/>
+        </p:spPr>
+        <p:txBody>
+          <a:bodyPr wrap="square">
+            <a:spAutoFit/>
+          </a:bodyPr>
+          <a:lstStyle/>
+          <a:p>
+            <a:r>
+              <a:rPr sz="1700" b="1" i="0">
+                <a:solidFill>
+                  <a:srgbClr val="000000"/>
+                </a:solidFill>
+                <a:latin typeface="Calibri"/>
+              </a:rPr>
+              <a:t>Takeaway: the training recipe mattered more than the architecture — and most reported gains this size are indistinguishable from the random seed.</a:t>
+            </a:r>
+          </a:p>
+        </p:txBody>
+      </p:sp>
+    </p:spTree>
+  </p:cSld>
+  <p:clrMapOvr>
+    <a:masterClrMapping/>
+  </p:clrMapOvr>
+</p:sld>
+</file>
+
+<file path=ppt/slides/slide16.xml><?xml version="1.0" encoding="utf-8"?>
+<p:sld xmlns:a="http://schemas.openxmlformats.org/drawingml/2006/main" xmlns:p="http://schemas.openxmlformats.org/presentationml/2006/main" xmlns:r="http://schemas.openxmlformats.org/officeDocument/2006/relationships">
+  <p:cSld>
+    <p:bg>
+      <p:bgPr>
+        <a:solidFill>
+          <a:srgbClr val="FFFFFF"/>
+        </a:solidFill>
+        <a:effectLst/>
+      </p:bgPr>
+    </p:bg>
+    <p:spTree>
+      <p:nvGrpSpPr>
+        <p:cNvPr id="1" name=""/>
+        <p:cNvGrpSpPr/>
+        <p:nvPr/>
+      </p:nvGrpSpPr>
+      <p:grpSpPr/>
+      <p:sp>
+        <p:nvSpPr>
+          <p:cNvPr id="2" name="TextBox 1"/>
+          <p:cNvSpPr txBox="1"/>
+          <p:nvPr/>
+        </p:nvSpPr>
+        <p:spPr>
+          <a:xfrm>
+            <a:off x="548640" y="320040"/>
+            <a:ext cx="11094415" cy="822960"/>
+          </a:xfrm>
+          <a:prstGeom prst="rect">
+            <a:avLst/>
+          </a:prstGeom>
+          <a:noFill/>
+        </p:spPr>
+        <p:txBody>
+          <a:bodyPr wrap="square">
+            <a:spAutoFit/>
+          </a:bodyPr>
+          <a:lstStyle/>
+          <a:p>
+            <a:r>
+              <a:rPr sz="3000" b="1" i="0">
+                <a:solidFill>
+                  <a:srgbClr val="000000"/>
+                </a:solidFill>
+                <a:latin typeface="Calibri"/>
+              </a:rPr>
               <a:t>Appendix: qualitative results</a:t>
             </a:r>
           </a:p>
@@ -6421,7 +5997,7 @@
 </p:sld>
 </file>
 
-<file path=ppt/slides/slide16.xml><?xml version="1.0" encoding="utf-8"?>
+<file path=ppt/slides/slide17.xml><?xml version="1.0" encoding="utf-8"?>
 <p:sld xmlns:a="http://schemas.openxmlformats.org/drawingml/2006/main" xmlns:p="http://schemas.openxmlformats.org/presentationml/2006/main" xmlns:r="http://schemas.openxmlformats.org/officeDocument/2006/relationships">
   <p:cSld>
     <p:bg>
@@ -9199,7 +8775,7 @@
                           </a:solidFill>
                           <a:latin typeface="Calibri"/>
                         </a:rPr>
-                        <a:t>spread 0.039 vs gap 0.076 → 3.6σ</a:t>
+                        <a:t>spread 0.039, gap 0.076 — too big</a:t>
                       </a:r>
                     </a:p>
                   </a:txBody>
@@ -9738,7 +9314,7 @@
                 </a:solidFill>
                 <a:latin typeface="Calibri"/>
               </a:rPr>
-              <a:t> at a *matched* budget the gain shrinks to </a:t>
+              <a:t> compared at the *same* number of epochs the gain shrinks to </a:t>
             </a:r>
             <a:r>
               <a:rPr sz="1400" b="1" i="0">
@@ -9747,7 +9323,7 @@
                 </a:solidFill>
                 <a:latin typeface="Calibri"/>
               </a:rPr>
-              <a:t>+0.023 (p = 0.24)</a:t>
+              <a:t>+0.023</a:t>
             </a:r>
             <a:r>
               <a:rPr sz="1400" b="0" i="0">

--- a/UNeXt_presentation.pptx
+++ b/UNeXt_presentation.pptx
@@ -121,6 +121,356 @@
     </a:lvl9pPr>
   </p:defaultTextStyle>
 </p:presentation>
+</file>
+
+<file path=ppt/notesMasters/notesMaster1.xml><?xml version="1.0" encoding="utf-8"?>
+<p:notesMaster xmlns:a="http://schemas.openxmlformats.org/drawingml/2006/main" xmlns:p="http://schemas.openxmlformats.org/presentationml/2006/main" xmlns:r="http://schemas.openxmlformats.org/officeDocument/2006/relationships">
+  <p:cSld>
+    <p:bg>
+      <p:bgRef idx="1001">
+        <a:schemeClr val="bg1"/>
+      </p:bgRef>
+    </p:bg>
+    <p:spTree>
+      <p:nvGrpSpPr>
+        <p:cNvPr id="1" name=""/>
+        <p:cNvGrpSpPr/>
+        <p:nvPr/>
+      </p:nvGrpSpPr>
+      <p:grpSpPr>
+        <a:xfrm>
+          <a:off x="0" y="0"/>
+          <a:ext cx="0" cy="0"/>
+          <a:chOff x="0" y="0"/>
+          <a:chExt cx="0" cy="0"/>
+        </a:xfrm>
+      </p:grpSpPr>
+      <p:sp>
+        <p:nvSpPr>
+          <p:cNvPr id="2" name="Header Placeholder 1"/>
+          <p:cNvSpPr>
+            <a:spLocks noGrp="1"/>
+          </p:cNvSpPr>
+          <p:nvPr>
+            <p:ph type="hdr" sz="quarter"/>
+          </p:nvPr>
+        </p:nvSpPr>
+        <p:spPr>
+          <a:xfrm>
+            <a:off x="0" y="0"/>
+            <a:ext cx="2971800" cy="457200"/>
+          </a:xfrm>
+          <a:prstGeom prst="rect">
+            <a:avLst/>
+          </a:prstGeom>
+        </p:spPr>
+        <p:txBody>
+          <a:bodyPr vert="horz" lIns="91440" tIns="45720" rIns="91440" bIns="45720" rtlCol="0"/>
+          <a:lstStyle>
+            <a:lvl1pPr algn="l">
+              <a:defRPr sz="1200"/>
+            </a:lvl1pPr>
+          </a:lstStyle>
+          <a:p>
+            <a:endParaRPr lang="en-US"/>
+          </a:p>
+        </p:txBody>
+      </p:sp>
+      <p:sp>
+        <p:nvSpPr>
+          <p:cNvPr id="3" name="Date Placeholder 2"/>
+          <p:cNvSpPr>
+            <a:spLocks noGrp="1"/>
+          </p:cNvSpPr>
+          <p:nvPr>
+            <p:ph type="dt" idx="1"/>
+          </p:nvPr>
+        </p:nvSpPr>
+        <p:spPr>
+          <a:xfrm>
+            <a:off x="3884613" y="0"/>
+            <a:ext cx="2971800" cy="457200"/>
+          </a:xfrm>
+          <a:prstGeom prst="rect">
+            <a:avLst/>
+          </a:prstGeom>
+        </p:spPr>
+        <p:txBody>
+          <a:bodyPr vert="horz" lIns="91440" tIns="45720" rIns="91440" bIns="45720" rtlCol="0"/>
+          <a:lstStyle>
+            <a:lvl1pPr algn="r">
+              <a:defRPr sz="1200"/>
+            </a:lvl1pPr>
+          </a:lstStyle>
+          <a:p>
+            <a:fld id="{0F89C1C7-3DCD-1040-A9CF-14679D8B5DDD}" type="datetimeFigureOut">
+              <a:rPr lang="en-US" smtClean="0"/>
+              <a:t>10/17/16</a:t>
+            </a:fld>
+            <a:endParaRPr lang="en-US"/>
+          </a:p>
+        </p:txBody>
+      </p:sp>
+      <p:sp>
+        <p:nvSpPr>
+          <p:cNvPr id="4" name="Slide Image Placeholder 3"/>
+          <p:cNvSpPr>
+            <a:spLocks noGrp="1" noRot="1" noChangeAspect="1"/>
+          </p:cNvSpPr>
+          <p:nvPr>
+            <p:ph type="sldImg" idx="2"/>
+          </p:nvPr>
+        </p:nvSpPr>
+        <p:spPr>
+          <a:xfrm>
+            <a:off x="1143000" y="685800"/>
+            <a:ext cx="4572000" cy="3429000"/>
+          </a:xfrm>
+          <a:prstGeom prst="rect">
+            <a:avLst/>
+          </a:prstGeom>
+          <a:noFill/>
+          <a:ln w="12700">
+            <a:solidFill>
+              <a:prstClr val="black"/>
+            </a:solidFill>
+          </a:ln>
+        </p:spPr>
+        <p:txBody>
+          <a:bodyPr vert="horz" lIns="91440" tIns="45720" rIns="91440" bIns="45720" rtlCol="0" anchor="ctr"/>
+          <a:lstStyle/>
+          <a:p>
+            <a:endParaRPr lang="en-US"/>
+          </a:p>
+        </p:txBody>
+      </p:sp>
+      <p:sp>
+        <p:nvSpPr>
+          <p:cNvPr id="5" name="Notes Placeholder 4"/>
+          <p:cNvSpPr>
+            <a:spLocks noGrp="1"/>
+          </p:cNvSpPr>
+          <p:nvPr>
+            <p:ph type="body" sz="quarter" idx="3"/>
+          </p:nvPr>
+        </p:nvSpPr>
+        <p:spPr>
+          <a:xfrm>
+            <a:off x="685800" y="4343400"/>
+            <a:ext cx="5486400" cy="4114800"/>
+          </a:xfrm>
+          <a:prstGeom prst="rect">
+            <a:avLst/>
+          </a:prstGeom>
+        </p:spPr>
+        <p:txBody>
+          <a:bodyPr vert="horz" lIns="91440" tIns="45720" rIns="91440" bIns="45720" rtlCol="0"/>
+          <a:lstStyle/>
+          <a:p>
+            <a:pPr lvl="0"/>
+            <a:r>
+              <a:rPr lang="en-US" smtClean="0"/>
+              <a:t>Click to edit Master text styles</a:t>
+            </a:r>
+          </a:p>
+          <a:p>
+            <a:pPr lvl="1"/>
+            <a:r>
+              <a:rPr lang="en-US" smtClean="0"/>
+              <a:t>Second level</a:t>
+            </a:r>
+          </a:p>
+          <a:p>
+            <a:pPr lvl="2"/>
+            <a:r>
+              <a:rPr lang="en-US" smtClean="0"/>
+              <a:t>Third level</a:t>
+            </a:r>
+          </a:p>
+          <a:p>
+            <a:pPr lvl="3"/>
+            <a:r>
+              <a:rPr lang="en-US" smtClean="0"/>
+              <a:t>Fourth level</a:t>
+            </a:r>
+          </a:p>
+          <a:p>
+            <a:pPr lvl="4"/>
+            <a:r>
+              <a:rPr lang="en-US" smtClean="0"/>
+              <a:t>Fifth level</a:t>
+            </a:r>
+            <a:endParaRPr lang="en-US"/>
+          </a:p>
+        </p:txBody>
+      </p:sp>
+      <p:sp>
+        <p:nvSpPr>
+          <p:cNvPr id="6" name="Footer Placeholder 5"/>
+          <p:cNvSpPr>
+            <a:spLocks noGrp="1"/>
+          </p:cNvSpPr>
+          <p:nvPr>
+            <p:ph type="ftr" sz="quarter" idx="4"/>
+          </p:nvPr>
+        </p:nvSpPr>
+        <p:spPr>
+          <a:xfrm>
+            <a:off x="0" y="8685213"/>
+            <a:ext cx="2971800" cy="457200"/>
+          </a:xfrm>
+          <a:prstGeom prst="rect">
+            <a:avLst/>
+          </a:prstGeom>
+        </p:spPr>
+        <p:txBody>
+          <a:bodyPr vert="horz" lIns="91440" tIns="45720" rIns="91440" bIns="45720" rtlCol="0" anchor="b"/>
+          <a:lstStyle>
+            <a:lvl1pPr algn="l">
+              <a:defRPr sz="1200"/>
+            </a:lvl1pPr>
+          </a:lstStyle>
+          <a:p>
+            <a:endParaRPr lang="en-US"/>
+          </a:p>
+        </p:txBody>
+      </p:sp>
+      <p:sp>
+        <p:nvSpPr>
+          <p:cNvPr id="7" name="Slide Number Placeholder 6"/>
+          <p:cNvSpPr>
+            <a:spLocks noGrp="1"/>
+          </p:cNvSpPr>
+          <p:nvPr>
+            <p:ph type="sldNum" sz="quarter" idx="5"/>
+          </p:nvPr>
+        </p:nvSpPr>
+        <p:spPr>
+          <a:xfrm>
+            <a:off x="3884613" y="8685213"/>
+            <a:ext cx="2971800" cy="457200"/>
+          </a:xfrm>
+          <a:prstGeom prst="rect">
+            <a:avLst/>
+          </a:prstGeom>
+        </p:spPr>
+        <p:txBody>
+          <a:bodyPr vert="horz" lIns="91440" tIns="45720" rIns="91440" bIns="45720" rtlCol="0" anchor="b"/>
+          <a:lstStyle>
+            <a:lvl1pPr algn="r">
+              <a:defRPr sz="1200"/>
+            </a:lvl1pPr>
+          </a:lstStyle>
+          <a:p>
+            <a:fld id="{BB5E49A5-4136-284D-997B-48E1D791AD67}" type="slidenum">
+              <a:rPr lang="en-US" smtClean="0"/>
+              <a:t>‹#›</a:t>
+            </a:fld>
+            <a:endParaRPr lang="en-US"/>
+          </a:p>
+        </p:txBody>
+      </p:sp>
+    </p:spTree>
+    <p:extLst>
+      <p:ext uri="{BB962C8B-B14F-4D97-AF65-F5344CB8AC3E}">
+        <p14:creationId xmlns:p14="http://schemas.microsoft.com/office/powerpoint/2010/main" val="2623252185"/>
+      </p:ext>
+    </p:extLst>
+  </p:cSld>
+  <p:clrMap bg1="lt1" tx1="dk1" bg2="lt2" tx2="dk2" accent1="accent1" accent2="accent2" accent3="accent3" accent4="accent4" accent5="accent5" accent6="accent6" hlink="hlink" folHlink="folHlink"/>
+  <p:notesStyle>
+    <a:lvl1pPr marL="0" algn="l" defTabSz="457200" rtl="0" eaLnBrk="1" latinLnBrk="0" hangingPunct="1">
+      <a:defRPr sz="1200" kern="1200">
+        <a:solidFill>
+          <a:schemeClr val="tx1"/>
+        </a:solidFill>
+        <a:latin typeface="+mn-lt"/>
+        <a:ea typeface="+mn-ea"/>
+        <a:cs typeface="+mn-cs"/>
+      </a:defRPr>
+    </a:lvl1pPr>
+    <a:lvl2pPr marL="457200" algn="l" defTabSz="457200" rtl="0" eaLnBrk="1" latinLnBrk="0" hangingPunct="1">
+      <a:defRPr sz="1200" kern="1200">
+        <a:solidFill>
+          <a:schemeClr val="tx1"/>
+        </a:solidFill>
+        <a:latin typeface="+mn-lt"/>
+        <a:ea typeface="+mn-ea"/>
+        <a:cs typeface="+mn-cs"/>
+      </a:defRPr>
+    </a:lvl2pPr>
+    <a:lvl3pPr marL="914400" algn="l" defTabSz="457200" rtl="0" eaLnBrk="1" latinLnBrk="0" hangingPunct="1">
+      <a:defRPr sz="1200" kern="1200">
+        <a:solidFill>
+          <a:schemeClr val="tx1"/>
+        </a:solidFill>
+        <a:latin typeface="+mn-lt"/>
+        <a:ea typeface="+mn-ea"/>
+        <a:cs typeface="+mn-cs"/>
+      </a:defRPr>
+    </a:lvl3pPr>
+    <a:lvl4pPr marL="1371600" algn="l" defTabSz="457200" rtl="0" eaLnBrk="1" latinLnBrk="0" hangingPunct="1">
+      <a:defRPr sz="1200" kern="1200">
+        <a:solidFill>
+          <a:schemeClr val="tx1"/>
+        </a:solidFill>
+        <a:latin typeface="+mn-lt"/>
+        <a:ea typeface="+mn-ea"/>
+        <a:cs typeface="+mn-cs"/>
+      </a:defRPr>
+    </a:lvl4pPr>
+    <a:lvl5pPr marL="1828800" algn="l" defTabSz="457200" rtl="0" eaLnBrk="1" latinLnBrk="0" hangingPunct="1">
+      <a:defRPr sz="1200" kern="1200">
+        <a:solidFill>
+          <a:schemeClr val="tx1"/>
+        </a:solidFill>
+        <a:latin typeface="+mn-lt"/>
+        <a:ea typeface="+mn-ea"/>
+        <a:cs typeface="+mn-cs"/>
+      </a:defRPr>
+    </a:lvl5pPr>
+    <a:lvl6pPr marL="2286000" algn="l" defTabSz="457200" rtl="0" eaLnBrk="1" latinLnBrk="0" hangingPunct="1">
+      <a:defRPr sz="1200" kern="1200">
+        <a:solidFill>
+          <a:schemeClr val="tx1"/>
+        </a:solidFill>
+        <a:latin typeface="+mn-lt"/>
+        <a:ea typeface="+mn-ea"/>
+        <a:cs typeface="+mn-cs"/>
+      </a:defRPr>
+    </a:lvl6pPr>
+    <a:lvl7pPr marL="2743200" algn="l" defTabSz="457200" rtl="0" eaLnBrk="1" latinLnBrk="0" hangingPunct="1">
+      <a:defRPr sz="1200" kern="1200">
+        <a:solidFill>
+          <a:schemeClr val="tx1"/>
+        </a:solidFill>
+        <a:latin typeface="+mn-lt"/>
+        <a:ea typeface="+mn-ea"/>
+        <a:cs typeface="+mn-cs"/>
+      </a:defRPr>
+    </a:lvl7pPr>
+    <a:lvl8pPr marL="3200400" algn="l" defTabSz="457200" rtl="0" eaLnBrk="1" latinLnBrk="0" hangingPunct="1">
+      <a:defRPr sz="1200" kern="1200">
+        <a:solidFill>
+          <a:schemeClr val="tx1"/>
+        </a:solidFill>
+        <a:latin typeface="+mn-lt"/>
+        <a:ea typeface="+mn-ea"/>
+        <a:cs typeface="+mn-cs"/>
+      </a:defRPr>
+    </a:lvl8pPr>
+    <a:lvl9pPr marL="3657600" algn="l" defTabSz="457200" rtl="0" eaLnBrk="1" latinLnBrk="0" hangingPunct="1">
+      <a:defRPr sz="1200" kern="1200">
+        <a:solidFill>
+          <a:schemeClr val="tx1"/>
+        </a:solidFill>
+        <a:latin typeface="+mn-lt"/>
+        <a:ea typeface="+mn-ea"/>
+        <a:cs typeface="+mn-cs"/>
+      </a:defRPr>
+    </a:lvl9pPr>
+  </p:notesStyle>
+</p:notesMaster>
 </file>
 
 <file path=ppt/slideLayouts/slideLayout1.xml><?xml version="1.0" encoding="utf-8"?>
@@ -6055,7 +6405,7 @@
                 </a:solidFill>
                 <a:latin typeface="Calibri"/>
               </a:rPr>
-              <a:t>The loss shifts the model toward finding tumour, at some cost in false alarms</a:t>
+              <a:t>A small shift toward recall — but only one split shows it clearly</a:t>
             </a:r>
           </a:p>
         </p:txBody>
@@ -6076,8 +6426,8 @@
         </p:blipFill>
         <p:spPr>
           <a:xfrm>
-            <a:off x="2804007" y="1371600"/>
-            <a:ext cx="6583680" cy="3931920"/>
+            <a:off x="2255367" y="1371600"/>
+            <a:ext cx="7680960" cy="3931920"/>
           </a:xfrm>
           <a:prstGeom prst="rect">
             <a:avLst/>
@@ -6113,7 +6463,7 @@
                 </a:solidFill>
                 <a:latin typeface="Calibri"/>
               </a:rPr>
-              <a:t>Recall +0.065, precision −0.042 — the asymmetry the Tversky β&gt;α weighting was chosen to produce. Clinically the right direction: a missed tumour costs more than a second look.</a:t>
+              <a:t>Averaged over six paired runs: recall +0.017, precision −0.012. The direction matches what the loss was designed to do, but the size is small and one split (43) accounts for most of it.</a:t>
             </a:r>
           </a:p>
         </p:txBody>

--- a/UNeXt_presentation.pptx
+++ b/UNeXt_presentation.pptx
@@ -5,25 +5,25 @@
     <p:sldMasterId id="2147483648" r:id="rId1"/>
   </p:sldMasterIdLst>
   <p:sldIdLst>
-    <p:sldId id="256" r:id="rId7"/>
-    <p:sldId id="257" r:id="rId9"/>
-    <p:sldId id="258" r:id="rId10"/>
-    <p:sldId id="259" r:id="rId11"/>
-    <p:sldId id="260" r:id="rId12"/>
-    <p:sldId id="261" r:id="rId13"/>
-    <p:sldId id="262" r:id="rId14"/>
-    <p:sldId id="263" r:id="rId15"/>
-    <p:sldId id="264" r:id="rId16"/>
-    <p:sldId id="265" r:id="rId17"/>
-    <p:sldId id="266" r:id="rId18"/>
-    <p:sldId id="267" r:id="rId19"/>
-    <p:sldId id="268" r:id="rId20"/>
-    <p:sldId id="269" r:id="rId21"/>
-    <p:sldId id="270" r:id="rId22"/>
-    <p:sldId id="271" r:id="rId23"/>
-    <p:sldId id="272" r:id="rId24"/>
+    <p:sldId id="256" r:id="rId2"/>
+    <p:sldId id="257" r:id="rId3"/>
+    <p:sldId id="258" r:id="rId4"/>
+    <p:sldId id="259" r:id="rId5"/>
+    <p:sldId id="260" r:id="rId6"/>
+    <p:sldId id="261" r:id="rId7"/>
+    <p:sldId id="262" r:id="rId8"/>
+    <p:sldId id="263" r:id="rId9"/>
+    <p:sldId id="264" r:id="rId10"/>
+    <p:sldId id="265" r:id="rId11"/>
+    <p:sldId id="266" r:id="rId12"/>
+    <p:sldId id="267" r:id="rId13"/>
+    <p:sldId id="268" r:id="rId14"/>
+    <p:sldId id="269" r:id="rId15"/>
+    <p:sldId id="270" r:id="rId16"/>
+    <p:sldId id="271" r:id="rId17"/>
+    <p:sldId id="272" r:id="rId18"/>
   </p:sldIdLst>
-  <p:sldSz cx="12191695" cy="6858000" type="screen4x3"/>
+  <p:sldSz cx="12192000" cy="6858000"/>
   <p:notesSz cx="6858000" cy="9144000"/>
   <p:defaultTextStyle>
     <a:defPPr>
@@ -120,357 +120,23 @@
       </a:defRPr>
     </a:lvl9pPr>
   </p:defaultTextStyle>
+  <p:extLst>
+    <p:ext uri="{EFAFB233-063F-42B5-8137-9DF3F51BA10A}">
+      <p15:sldGuideLst xmlns:p15="http://schemas.microsoft.com/office/powerpoint/2012/main">
+        <p15:guide id="1" orient="horz" pos="2160">
+          <p15:clr>
+            <a:srgbClr val="A4A3A4"/>
+          </p15:clr>
+        </p15:guide>
+        <p15:guide id="2" pos="2880">
+          <p15:clr>
+            <a:srgbClr val="A4A3A4"/>
+          </p15:clr>
+        </p15:guide>
+      </p15:sldGuideLst>
+    </p:ext>
+  </p:extLst>
 </p:presentation>
-</file>
-
-<file path=ppt/notesMasters/notesMaster1.xml><?xml version="1.0" encoding="utf-8"?>
-<p:notesMaster xmlns:a="http://schemas.openxmlformats.org/drawingml/2006/main" xmlns:p="http://schemas.openxmlformats.org/presentationml/2006/main" xmlns:r="http://schemas.openxmlformats.org/officeDocument/2006/relationships">
-  <p:cSld>
-    <p:bg>
-      <p:bgRef idx="1001">
-        <a:schemeClr val="bg1"/>
-      </p:bgRef>
-    </p:bg>
-    <p:spTree>
-      <p:nvGrpSpPr>
-        <p:cNvPr id="1" name=""/>
-        <p:cNvGrpSpPr/>
-        <p:nvPr/>
-      </p:nvGrpSpPr>
-      <p:grpSpPr>
-        <a:xfrm>
-          <a:off x="0" y="0"/>
-          <a:ext cx="0" cy="0"/>
-          <a:chOff x="0" y="0"/>
-          <a:chExt cx="0" cy="0"/>
-        </a:xfrm>
-      </p:grpSpPr>
-      <p:sp>
-        <p:nvSpPr>
-          <p:cNvPr id="2" name="Header Placeholder 1"/>
-          <p:cNvSpPr>
-            <a:spLocks noGrp="1"/>
-          </p:cNvSpPr>
-          <p:nvPr>
-            <p:ph type="hdr" sz="quarter"/>
-          </p:nvPr>
-        </p:nvSpPr>
-        <p:spPr>
-          <a:xfrm>
-            <a:off x="0" y="0"/>
-            <a:ext cx="2971800" cy="457200"/>
-          </a:xfrm>
-          <a:prstGeom prst="rect">
-            <a:avLst/>
-          </a:prstGeom>
-        </p:spPr>
-        <p:txBody>
-          <a:bodyPr vert="horz" lIns="91440" tIns="45720" rIns="91440" bIns="45720" rtlCol="0"/>
-          <a:lstStyle>
-            <a:lvl1pPr algn="l">
-              <a:defRPr sz="1200"/>
-            </a:lvl1pPr>
-          </a:lstStyle>
-          <a:p>
-            <a:endParaRPr lang="en-US"/>
-          </a:p>
-        </p:txBody>
-      </p:sp>
-      <p:sp>
-        <p:nvSpPr>
-          <p:cNvPr id="3" name="Date Placeholder 2"/>
-          <p:cNvSpPr>
-            <a:spLocks noGrp="1"/>
-          </p:cNvSpPr>
-          <p:nvPr>
-            <p:ph type="dt" idx="1"/>
-          </p:nvPr>
-        </p:nvSpPr>
-        <p:spPr>
-          <a:xfrm>
-            <a:off x="3884613" y="0"/>
-            <a:ext cx="2971800" cy="457200"/>
-          </a:xfrm>
-          <a:prstGeom prst="rect">
-            <a:avLst/>
-          </a:prstGeom>
-        </p:spPr>
-        <p:txBody>
-          <a:bodyPr vert="horz" lIns="91440" tIns="45720" rIns="91440" bIns="45720" rtlCol="0"/>
-          <a:lstStyle>
-            <a:lvl1pPr algn="r">
-              <a:defRPr sz="1200"/>
-            </a:lvl1pPr>
-          </a:lstStyle>
-          <a:p>
-            <a:fld id="{0F89C1C7-3DCD-1040-A9CF-14679D8B5DDD}" type="datetimeFigureOut">
-              <a:rPr lang="en-US" smtClean="0"/>
-              <a:t>10/17/16</a:t>
-            </a:fld>
-            <a:endParaRPr lang="en-US"/>
-          </a:p>
-        </p:txBody>
-      </p:sp>
-      <p:sp>
-        <p:nvSpPr>
-          <p:cNvPr id="4" name="Slide Image Placeholder 3"/>
-          <p:cNvSpPr>
-            <a:spLocks noGrp="1" noRot="1" noChangeAspect="1"/>
-          </p:cNvSpPr>
-          <p:nvPr>
-            <p:ph type="sldImg" idx="2"/>
-          </p:nvPr>
-        </p:nvSpPr>
-        <p:spPr>
-          <a:xfrm>
-            <a:off x="1143000" y="685800"/>
-            <a:ext cx="4572000" cy="3429000"/>
-          </a:xfrm>
-          <a:prstGeom prst="rect">
-            <a:avLst/>
-          </a:prstGeom>
-          <a:noFill/>
-          <a:ln w="12700">
-            <a:solidFill>
-              <a:prstClr val="black"/>
-            </a:solidFill>
-          </a:ln>
-        </p:spPr>
-        <p:txBody>
-          <a:bodyPr vert="horz" lIns="91440" tIns="45720" rIns="91440" bIns="45720" rtlCol="0" anchor="ctr"/>
-          <a:lstStyle/>
-          <a:p>
-            <a:endParaRPr lang="en-US"/>
-          </a:p>
-        </p:txBody>
-      </p:sp>
-      <p:sp>
-        <p:nvSpPr>
-          <p:cNvPr id="5" name="Notes Placeholder 4"/>
-          <p:cNvSpPr>
-            <a:spLocks noGrp="1"/>
-          </p:cNvSpPr>
-          <p:nvPr>
-            <p:ph type="body" sz="quarter" idx="3"/>
-          </p:nvPr>
-        </p:nvSpPr>
-        <p:spPr>
-          <a:xfrm>
-            <a:off x="685800" y="4343400"/>
-            <a:ext cx="5486400" cy="4114800"/>
-          </a:xfrm>
-          <a:prstGeom prst="rect">
-            <a:avLst/>
-          </a:prstGeom>
-        </p:spPr>
-        <p:txBody>
-          <a:bodyPr vert="horz" lIns="91440" tIns="45720" rIns="91440" bIns="45720" rtlCol="0"/>
-          <a:lstStyle/>
-          <a:p>
-            <a:pPr lvl="0"/>
-            <a:r>
-              <a:rPr lang="en-US" smtClean="0"/>
-              <a:t>Click to edit Master text styles</a:t>
-            </a:r>
-          </a:p>
-          <a:p>
-            <a:pPr lvl="1"/>
-            <a:r>
-              <a:rPr lang="en-US" smtClean="0"/>
-              <a:t>Second level</a:t>
-            </a:r>
-          </a:p>
-          <a:p>
-            <a:pPr lvl="2"/>
-            <a:r>
-              <a:rPr lang="en-US" smtClean="0"/>
-              <a:t>Third level</a:t>
-            </a:r>
-          </a:p>
-          <a:p>
-            <a:pPr lvl="3"/>
-            <a:r>
-              <a:rPr lang="en-US" smtClean="0"/>
-              <a:t>Fourth level</a:t>
-            </a:r>
-          </a:p>
-          <a:p>
-            <a:pPr lvl="4"/>
-            <a:r>
-              <a:rPr lang="en-US" smtClean="0"/>
-              <a:t>Fifth level</a:t>
-            </a:r>
-            <a:endParaRPr lang="en-US"/>
-          </a:p>
-        </p:txBody>
-      </p:sp>
-      <p:sp>
-        <p:nvSpPr>
-          <p:cNvPr id="6" name="Footer Placeholder 5"/>
-          <p:cNvSpPr>
-            <a:spLocks noGrp="1"/>
-          </p:cNvSpPr>
-          <p:nvPr>
-            <p:ph type="ftr" sz="quarter" idx="4"/>
-          </p:nvPr>
-        </p:nvSpPr>
-        <p:spPr>
-          <a:xfrm>
-            <a:off x="0" y="8685213"/>
-            <a:ext cx="2971800" cy="457200"/>
-          </a:xfrm>
-          <a:prstGeom prst="rect">
-            <a:avLst/>
-          </a:prstGeom>
-        </p:spPr>
-        <p:txBody>
-          <a:bodyPr vert="horz" lIns="91440" tIns="45720" rIns="91440" bIns="45720" rtlCol="0" anchor="b"/>
-          <a:lstStyle>
-            <a:lvl1pPr algn="l">
-              <a:defRPr sz="1200"/>
-            </a:lvl1pPr>
-          </a:lstStyle>
-          <a:p>
-            <a:endParaRPr lang="en-US"/>
-          </a:p>
-        </p:txBody>
-      </p:sp>
-      <p:sp>
-        <p:nvSpPr>
-          <p:cNvPr id="7" name="Slide Number Placeholder 6"/>
-          <p:cNvSpPr>
-            <a:spLocks noGrp="1"/>
-          </p:cNvSpPr>
-          <p:nvPr>
-            <p:ph type="sldNum" sz="quarter" idx="5"/>
-          </p:nvPr>
-        </p:nvSpPr>
-        <p:spPr>
-          <a:xfrm>
-            <a:off x="3884613" y="8685213"/>
-            <a:ext cx="2971800" cy="457200"/>
-          </a:xfrm>
-          <a:prstGeom prst="rect">
-            <a:avLst/>
-          </a:prstGeom>
-        </p:spPr>
-        <p:txBody>
-          <a:bodyPr vert="horz" lIns="91440" tIns="45720" rIns="91440" bIns="45720" rtlCol="0" anchor="b"/>
-          <a:lstStyle>
-            <a:lvl1pPr algn="r">
-              <a:defRPr sz="1200"/>
-            </a:lvl1pPr>
-          </a:lstStyle>
-          <a:p>
-            <a:fld id="{BB5E49A5-4136-284D-997B-48E1D791AD67}" type="slidenum">
-              <a:rPr lang="en-US" smtClean="0"/>
-              <a:t>‹#›</a:t>
-            </a:fld>
-            <a:endParaRPr lang="en-US"/>
-          </a:p>
-        </p:txBody>
-      </p:sp>
-    </p:spTree>
-    <p:extLst>
-      <p:ext uri="{BB962C8B-B14F-4D97-AF65-F5344CB8AC3E}">
-        <p14:creationId xmlns:p14="http://schemas.microsoft.com/office/powerpoint/2010/main" val="2623252185"/>
-      </p:ext>
-    </p:extLst>
-  </p:cSld>
-  <p:clrMap bg1="lt1" tx1="dk1" bg2="lt2" tx2="dk2" accent1="accent1" accent2="accent2" accent3="accent3" accent4="accent4" accent5="accent5" accent6="accent6" hlink="hlink" folHlink="folHlink"/>
-  <p:notesStyle>
-    <a:lvl1pPr marL="0" algn="l" defTabSz="457200" rtl="0" eaLnBrk="1" latinLnBrk="0" hangingPunct="1">
-      <a:defRPr sz="1200" kern="1200">
-        <a:solidFill>
-          <a:schemeClr val="tx1"/>
-        </a:solidFill>
-        <a:latin typeface="+mn-lt"/>
-        <a:ea typeface="+mn-ea"/>
-        <a:cs typeface="+mn-cs"/>
-      </a:defRPr>
-    </a:lvl1pPr>
-    <a:lvl2pPr marL="457200" algn="l" defTabSz="457200" rtl="0" eaLnBrk="1" latinLnBrk="0" hangingPunct="1">
-      <a:defRPr sz="1200" kern="1200">
-        <a:solidFill>
-          <a:schemeClr val="tx1"/>
-        </a:solidFill>
-        <a:latin typeface="+mn-lt"/>
-        <a:ea typeface="+mn-ea"/>
-        <a:cs typeface="+mn-cs"/>
-      </a:defRPr>
-    </a:lvl2pPr>
-    <a:lvl3pPr marL="914400" algn="l" defTabSz="457200" rtl="0" eaLnBrk="1" latinLnBrk="0" hangingPunct="1">
-      <a:defRPr sz="1200" kern="1200">
-        <a:solidFill>
-          <a:schemeClr val="tx1"/>
-        </a:solidFill>
-        <a:latin typeface="+mn-lt"/>
-        <a:ea typeface="+mn-ea"/>
-        <a:cs typeface="+mn-cs"/>
-      </a:defRPr>
-    </a:lvl3pPr>
-    <a:lvl4pPr marL="1371600" algn="l" defTabSz="457200" rtl="0" eaLnBrk="1" latinLnBrk="0" hangingPunct="1">
-      <a:defRPr sz="1200" kern="1200">
-        <a:solidFill>
-          <a:schemeClr val="tx1"/>
-        </a:solidFill>
-        <a:latin typeface="+mn-lt"/>
-        <a:ea typeface="+mn-ea"/>
-        <a:cs typeface="+mn-cs"/>
-      </a:defRPr>
-    </a:lvl4pPr>
-    <a:lvl5pPr marL="1828800" algn="l" defTabSz="457200" rtl="0" eaLnBrk="1" latinLnBrk="0" hangingPunct="1">
-      <a:defRPr sz="1200" kern="1200">
-        <a:solidFill>
-          <a:schemeClr val="tx1"/>
-        </a:solidFill>
-        <a:latin typeface="+mn-lt"/>
-        <a:ea typeface="+mn-ea"/>
-        <a:cs typeface="+mn-cs"/>
-      </a:defRPr>
-    </a:lvl5pPr>
-    <a:lvl6pPr marL="2286000" algn="l" defTabSz="457200" rtl="0" eaLnBrk="1" latinLnBrk="0" hangingPunct="1">
-      <a:defRPr sz="1200" kern="1200">
-        <a:solidFill>
-          <a:schemeClr val="tx1"/>
-        </a:solidFill>
-        <a:latin typeface="+mn-lt"/>
-        <a:ea typeface="+mn-ea"/>
-        <a:cs typeface="+mn-cs"/>
-      </a:defRPr>
-    </a:lvl6pPr>
-    <a:lvl7pPr marL="2743200" algn="l" defTabSz="457200" rtl="0" eaLnBrk="1" latinLnBrk="0" hangingPunct="1">
-      <a:defRPr sz="1200" kern="1200">
-        <a:solidFill>
-          <a:schemeClr val="tx1"/>
-        </a:solidFill>
-        <a:latin typeface="+mn-lt"/>
-        <a:ea typeface="+mn-ea"/>
-        <a:cs typeface="+mn-cs"/>
-      </a:defRPr>
-    </a:lvl7pPr>
-    <a:lvl8pPr marL="3200400" algn="l" defTabSz="457200" rtl="0" eaLnBrk="1" latinLnBrk="0" hangingPunct="1">
-      <a:defRPr sz="1200" kern="1200">
-        <a:solidFill>
-          <a:schemeClr val="tx1"/>
-        </a:solidFill>
-        <a:latin typeface="+mn-lt"/>
-        <a:ea typeface="+mn-ea"/>
-        <a:cs typeface="+mn-cs"/>
-      </a:defRPr>
-    </a:lvl8pPr>
-    <a:lvl9pPr marL="3657600" algn="l" defTabSz="457200" rtl="0" eaLnBrk="1" latinLnBrk="0" hangingPunct="1">
-      <a:defRPr sz="1200" kern="1200">
-        <a:solidFill>
-          <a:schemeClr val="tx1"/>
-        </a:solidFill>
-        <a:latin typeface="+mn-lt"/>
-        <a:ea typeface="+mn-ea"/>
-        <a:cs typeface="+mn-cs"/>
-      </a:defRPr>
-    </a:lvl9pPr>
-  </p:notesStyle>
-</p:notesMaster>
 </file>
 
 <file path=ppt/slideLayouts/slideLayout1.xml><?xml version="1.0" encoding="utf-8"?>
@@ -511,10 +177,9 @@
           <a:lstStyle/>
           <a:p>
             <a:r>
-              <a:rPr lang="en-US" smtClean="0"/>
+              <a:rPr lang="en-US"/>
               <a:t>Click to edit Master title style</a:t>
             </a:r>
-            <a:endParaRPr lang="en-US"/>
           </a:p>
         </p:txBody>
       </p:sp>
@@ -630,10 +295,9 @@
           </a:lstStyle>
           <a:p>
             <a:r>
-              <a:rPr lang="en-US" smtClean="0"/>
+              <a:rPr lang="en-US"/>
               <a:t>Click to edit Master subtitle style</a:t>
             </a:r>
-            <a:endParaRPr lang="en-US"/>
           </a:p>
         </p:txBody>
       </p:sp>
@@ -654,7 +318,7 @@
           <a:p>
             <a:fld id="{5BCAD085-E8A6-8845-BD4E-CB4CCA059FC4}" type="datetimeFigureOut">
               <a:rPr lang="en-US" smtClean="0"/>
-              <a:t>1/27/13</a:t>
+              <a:t>9/9/2026</a:t>
             </a:fld>
             <a:endParaRPr lang="en-US"/>
           </a:p>
@@ -748,10 +412,9 @@
           <a:lstStyle/>
           <a:p>
             <a:r>
-              <a:rPr lang="en-US" smtClean="0"/>
+              <a:rPr lang="en-US"/>
               <a:t>Click to edit Master title style</a:t>
             </a:r>
-            <a:endParaRPr lang="en-US"/>
           </a:p>
         </p:txBody>
       </p:sp>
@@ -772,38 +435,37 @@
           <a:p>
             <a:pPr lvl="0"/>
             <a:r>
-              <a:rPr lang="en-US" smtClean="0"/>
+              <a:rPr lang="en-US"/>
               <a:t>Click to edit Master text styles</a:t>
             </a:r>
           </a:p>
           <a:p>
             <a:pPr lvl="1"/>
             <a:r>
-              <a:rPr lang="en-US" smtClean="0"/>
+              <a:rPr lang="en-US"/>
               <a:t>Second level</a:t>
             </a:r>
           </a:p>
           <a:p>
             <a:pPr lvl="2"/>
             <a:r>
-              <a:rPr lang="en-US" smtClean="0"/>
+              <a:rPr lang="en-US"/>
               <a:t>Third level</a:t>
             </a:r>
           </a:p>
           <a:p>
             <a:pPr lvl="3"/>
             <a:r>
-              <a:rPr lang="en-US" smtClean="0"/>
+              <a:rPr lang="en-US"/>
               <a:t>Fourth level</a:t>
             </a:r>
           </a:p>
           <a:p>
             <a:pPr lvl="4"/>
             <a:r>
-              <a:rPr lang="en-US" smtClean="0"/>
+              <a:rPr lang="en-US"/>
               <a:t>Fifth level</a:t>
             </a:r>
-            <a:endParaRPr lang="en-US"/>
           </a:p>
         </p:txBody>
       </p:sp>
@@ -824,7 +486,7 @@
           <a:p>
             <a:fld id="{5BCAD085-E8A6-8845-BD4E-CB4CCA059FC4}" type="datetimeFigureOut">
               <a:rPr lang="en-US" smtClean="0"/>
-              <a:t>1/27/13</a:t>
+              <a:t>9/9/2026</a:t>
             </a:fld>
             <a:endParaRPr lang="en-US"/>
           </a:p>
@@ -923,10 +585,9 @@
           <a:lstStyle/>
           <a:p>
             <a:r>
-              <a:rPr lang="en-US" smtClean="0"/>
+              <a:rPr lang="en-US"/>
               <a:t>Click to edit Master title style</a:t>
             </a:r>
-            <a:endParaRPr lang="en-US"/>
           </a:p>
         </p:txBody>
       </p:sp>
@@ -952,38 +613,37 @@
           <a:p>
             <a:pPr lvl="0"/>
             <a:r>
-              <a:rPr lang="en-US" smtClean="0"/>
+              <a:rPr lang="en-US"/>
               <a:t>Click to edit Master text styles</a:t>
             </a:r>
           </a:p>
           <a:p>
             <a:pPr lvl="1"/>
             <a:r>
-              <a:rPr lang="en-US" smtClean="0"/>
+              <a:rPr lang="en-US"/>
               <a:t>Second level</a:t>
             </a:r>
           </a:p>
           <a:p>
             <a:pPr lvl="2"/>
             <a:r>
-              <a:rPr lang="en-US" smtClean="0"/>
+              <a:rPr lang="en-US"/>
               <a:t>Third level</a:t>
             </a:r>
           </a:p>
           <a:p>
             <a:pPr lvl="3"/>
             <a:r>
-              <a:rPr lang="en-US" smtClean="0"/>
+              <a:rPr lang="en-US"/>
               <a:t>Fourth level</a:t>
             </a:r>
           </a:p>
           <a:p>
             <a:pPr lvl="4"/>
             <a:r>
-              <a:rPr lang="en-US" smtClean="0"/>
+              <a:rPr lang="en-US"/>
               <a:t>Fifth level</a:t>
             </a:r>
-            <a:endParaRPr lang="en-US"/>
           </a:p>
         </p:txBody>
       </p:sp>
@@ -1004,7 +664,7 @@
           <a:p>
             <a:fld id="{5BCAD085-E8A6-8845-BD4E-CB4CCA059FC4}" type="datetimeFigureOut">
               <a:rPr lang="en-US" smtClean="0"/>
-              <a:t>1/27/13</a:t>
+              <a:t>9/9/2026</a:t>
             </a:fld>
             <a:endParaRPr lang="en-US"/>
           </a:p>
@@ -1098,10 +758,9 @@
           <a:lstStyle/>
           <a:p>
             <a:r>
-              <a:rPr lang="en-US" smtClean="0"/>
+              <a:rPr lang="en-US"/>
               <a:t>Click to edit Master title style</a:t>
             </a:r>
-            <a:endParaRPr lang="en-US"/>
           </a:p>
         </p:txBody>
       </p:sp>
@@ -1122,38 +781,37 @@
           <a:p>
             <a:pPr lvl="0"/>
             <a:r>
-              <a:rPr lang="en-US" smtClean="0"/>
+              <a:rPr lang="en-US"/>
               <a:t>Click to edit Master text styles</a:t>
             </a:r>
           </a:p>
           <a:p>
             <a:pPr lvl="1"/>
             <a:r>
-              <a:rPr lang="en-US" smtClean="0"/>
+              <a:rPr lang="en-US"/>
               <a:t>Second level</a:t>
             </a:r>
           </a:p>
           <a:p>
             <a:pPr lvl="2"/>
             <a:r>
-              <a:rPr lang="en-US" smtClean="0"/>
+              <a:rPr lang="en-US"/>
               <a:t>Third level</a:t>
             </a:r>
           </a:p>
           <a:p>
             <a:pPr lvl="3"/>
             <a:r>
-              <a:rPr lang="en-US" smtClean="0"/>
+              <a:rPr lang="en-US"/>
               <a:t>Fourth level</a:t>
             </a:r>
           </a:p>
           <a:p>
             <a:pPr lvl="4"/>
             <a:r>
-              <a:rPr lang="en-US" smtClean="0"/>
+              <a:rPr lang="en-US"/>
               <a:t>Fifth level</a:t>
             </a:r>
-            <a:endParaRPr lang="en-US"/>
           </a:p>
         </p:txBody>
       </p:sp>
@@ -1174,7 +832,7 @@
           <a:p>
             <a:fld id="{5BCAD085-E8A6-8845-BD4E-CB4CCA059FC4}" type="datetimeFigureOut">
               <a:rPr lang="en-US" smtClean="0"/>
-              <a:t>1/27/13</a:t>
+              <a:t>9/9/2026</a:t>
             </a:fld>
             <a:endParaRPr lang="en-US"/>
           </a:p>
@@ -1277,10 +935,9 @@
           </a:lstStyle>
           <a:p>
             <a:r>
-              <a:rPr lang="en-US" smtClean="0"/>
+              <a:rPr lang="en-US"/>
               <a:t>Click to edit Master title style</a:t>
             </a:r>
-            <a:endParaRPr lang="en-US"/>
           </a:p>
         </p:txBody>
       </p:sp>
@@ -1397,7 +1054,7 @@
           <a:p>
             <a:pPr lvl="0"/>
             <a:r>
-              <a:rPr lang="en-US" smtClean="0"/>
+              <a:rPr lang="en-US"/>
               <a:t>Click to edit Master text styles</a:t>
             </a:r>
           </a:p>
@@ -1420,7 +1077,7 @@
           <a:p>
             <a:fld id="{5BCAD085-E8A6-8845-BD4E-CB4CCA059FC4}" type="datetimeFigureOut">
               <a:rPr lang="en-US" smtClean="0"/>
-              <a:t>1/27/13</a:t>
+              <a:t>9/9/2026</a:t>
             </a:fld>
             <a:endParaRPr lang="en-US"/>
           </a:p>
@@ -1514,10 +1171,9 @@
           <a:lstStyle/>
           <a:p>
             <a:r>
-              <a:rPr lang="en-US" smtClean="0"/>
+              <a:rPr lang="en-US"/>
               <a:t>Click to edit Master title style</a:t>
             </a:r>
-            <a:endParaRPr lang="en-US"/>
           </a:p>
         </p:txBody>
       </p:sp>
@@ -1571,38 +1227,37 @@
           <a:p>
             <a:pPr lvl="0"/>
             <a:r>
-              <a:rPr lang="en-US" smtClean="0"/>
+              <a:rPr lang="en-US"/>
               <a:t>Click to edit Master text styles</a:t>
             </a:r>
           </a:p>
           <a:p>
             <a:pPr lvl="1"/>
             <a:r>
-              <a:rPr lang="en-US" smtClean="0"/>
+              <a:rPr lang="en-US"/>
               <a:t>Second level</a:t>
             </a:r>
           </a:p>
           <a:p>
             <a:pPr lvl="2"/>
             <a:r>
-              <a:rPr lang="en-US" smtClean="0"/>
+              <a:rPr lang="en-US"/>
               <a:t>Third level</a:t>
             </a:r>
           </a:p>
           <a:p>
             <a:pPr lvl="3"/>
             <a:r>
-              <a:rPr lang="en-US" smtClean="0"/>
+              <a:rPr lang="en-US"/>
               <a:t>Fourth level</a:t>
             </a:r>
           </a:p>
           <a:p>
             <a:pPr lvl="4"/>
             <a:r>
-              <a:rPr lang="en-US" smtClean="0"/>
+              <a:rPr lang="en-US"/>
               <a:t>Fifth level</a:t>
             </a:r>
-            <a:endParaRPr lang="en-US"/>
           </a:p>
         </p:txBody>
       </p:sp>
@@ -1656,38 +1311,37 @@
           <a:p>
             <a:pPr lvl="0"/>
             <a:r>
-              <a:rPr lang="en-US" smtClean="0"/>
+              <a:rPr lang="en-US"/>
               <a:t>Click to edit Master text styles</a:t>
             </a:r>
           </a:p>
           <a:p>
             <a:pPr lvl="1"/>
             <a:r>
-              <a:rPr lang="en-US" smtClean="0"/>
+              <a:rPr lang="en-US"/>
               <a:t>Second level</a:t>
             </a:r>
           </a:p>
           <a:p>
             <a:pPr lvl="2"/>
             <a:r>
-              <a:rPr lang="en-US" smtClean="0"/>
+              <a:rPr lang="en-US"/>
               <a:t>Third level</a:t>
             </a:r>
           </a:p>
           <a:p>
             <a:pPr lvl="3"/>
             <a:r>
-              <a:rPr lang="en-US" smtClean="0"/>
+              <a:rPr lang="en-US"/>
               <a:t>Fourth level</a:t>
             </a:r>
           </a:p>
           <a:p>
             <a:pPr lvl="4"/>
             <a:r>
-              <a:rPr lang="en-US" smtClean="0"/>
+              <a:rPr lang="en-US"/>
               <a:t>Fifth level</a:t>
             </a:r>
-            <a:endParaRPr lang="en-US"/>
           </a:p>
         </p:txBody>
       </p:sp>
@@ -1708,7 +1362,7 @@
           <a:p>
             <a:fld id="{5BCAD085-E8A6-8845-BD4E-CB4CCA059FC4}" type="datetimeFigureOut">
               <a:rPr lang="en-US" smtClean="0"/>
-              <a:t>1/27/13</a:t>
+              <a:t>9/9/2026</a:t>
             </a:fld>
             <a:endParaRPr lang="en-US"/>
           </a:p>
@@ -1806,10 +1460,9 @@
           </a:lstStyle>
           <a:p>
             <a:r>
-              <a:rPr lang="en-US" smtClean="0"/>
+              <a:rPr lang="en-US"/>
               <a:t>Click to edit Master title style</a:t>
             </a:r>
-            <a:endParaRPr lang="en-US"/>
           </a:p>
         </p:txBody>
       </p:sp>
@@ -1872,7 +1525,7 @@
           <a:p>
             <a:pPr lvl="0"/>
             <a:r>
-              <a:rPr lang="en-US" smtClean="0"/>
+              <a:rPr lang="en-US"/>
               <a:t>Click to edit Master text styles</a:t>
             </a:r>
           </a:p>
@@ -1928,38 +1581,37 @@
           <a:p>
             <a:pPr lvl="0"/>
             <a:r>
-              <a:rPr lang="en-US" smtClean="0"/>
+              <a:rPr lang="en-US"/>
               <a:t>Click to edit Master text styles</a:t>
             </a:r>
           </a:p>
           <a:p>
             <a:pPr lvl="1"/>
             <a:r>
-              <a:rPr lang="en-US" smtClean="0"/>
+              <a:rPr lang="en-US"/>
               <a:t>Second level</a:t>
             </a:r>
           </a:p>
           <a:p>
             <a:pPr lvl="2"/>
             <a:r>
-              <a:rPr lang="en-US" smtClean="0"/>
+              <a:rPr lang="en-US"/>
               <a:t>Third level</a:t>
             </a:r>
           </a:p>
           <a:p>
             <a:pPr lvl="3"/>
             <a:r>
-              <a:rPr lang="en-US" smtClean="0"/>
+              <a:rPr lang="en-US"/>
               <a:t>Fourth level</a:t>
             </a:r>
           </a:p>
           <a:p>
             <a:pPr lvl="4"/>
             <a:r>
-              <a:rPr lang="en-US" smtClean="0"/>
+              <a:rPr lang="en-US"/>
               <a:t>Fifth level</a:t>
             </a:r>
-            <a:endParaRPr lang="en-US"/>
           </a:p>
         </p:txBody>
       </p:sp>
@@ -2022,7 +1674,7 @@
           <a:p>
             <a:pPr lvl="0"/>
             <a:r>
-              <a:rPr lang="en-US" smtClean="0"/>
+              <a:rPr lang="en-US"/>
               <a:t>Click to edit Master text styles</a:t>
             </a:r>
           </a:p>
@@ -2078,38 +1730,37 @@
           <a:p>
             <a:pPr lvl="0"/>
             <a:r>
-              <a:rPr lang="en-US" smtClean="0"/>
+              <a:rPr lang="en-US"/>
               <a:t>Click to edit Master text styles</a:t>
             </a:r>
           </a:p>
           <a:p>
             <a:pPr lvl="1"/>
             <a:r>
-              <a:rPr lang="en-US" smtClean="0"/>
+              <a:rPr lang="en-US"/>
               <a:t>Second level</a:t>
             </a:r>
           </a:p>
           <a:p>
             <a:pPr lvl="2"/>
             <a:r>
-              <a:rPr lang="en-US" smtClean="0"/>
+              <a:rPr lang="en-US"/>
               <a:t>Third level</a:t>
             </a:r>
           </a:p>
           <a:p>
             <a:pPr lvl="3"/>
             <a:r>
-              <a:rPr lang="en-US" smtClean="0"/>
+              <a:rPr lang="en-US"/>
               <a:t>Fourth level</a:t>
             </a:r>
           </a:p>
           <a:p>
             <a:pPr lvl="4"/>
             <a:r>
-              <a:rPr lang="en-US" smtClean="0"/>
+              <a:rPr lang="en-US"/>
               <a:t>Fifth level</a:t>
             </a:r>
-            <a:endParaRPr lang="en-US"/>
           </a:p>
         </p:txBody>
       </p:sp>
@@ -2130,7 +1781,7 @@
           <a:p>
             <a:fld id="{5BCAD085-E8A6-8845-BD4E-CB4CCA059FC4}" type="datetimeFigureOut">
               <a:rPr lang="en-US" smtClean="0"/>
-              <a:t>1/27/13</a:t>
+              <a:t>9/9/2026</a:t>
             </a:fld>
             <a:endParaRPr lang="en-US"/>
           </a:p>
@@ -2224,10 +1875,9 @@
           <a:lstStyle/>
           <a:p>
             <a:r>
-              <a:rPr lang="en-US" smtClean="0"/>
+              <a:rPr lang="en-US"/>
               <a:t>Click to edit Master title style</a:t>
             </a:r>
-            <a:endParaRPr lang="en-US"/>
           </a:p>
         </p:txBody>
       </p:sp>
@@ -2248,7 +1898,7 @@
           <a:p>
             <a:fld id="{5BCAD085-E8A6-8845-BD4E-CB4CCA059FC4}" type="datetimeFigureOut">
               <a:rPr lang="en-US" smtClean="0"/>
-              <a:t>1/27/13</a:t>
+              <a:t>9/9/2026</a:t>
             </a:fld>
             <a:endParaRPr lang="en-US"/>
           </a:p>
@@ -2343,7 +1993,7 @@
           <a:p>
             <a:fld id="{5BCAD085-E8A6-8845-BD4E-CB4CCA059FC4}" type="datetimeFigureOut">
               <a:rPr lang="en-US" smtClean="0"/>
-              <a:t>1/27/13</a:t>
+              <a:t>9/9/2026</a:t>
             </a:fld>
             <a:endParaRPr lang="en-US"/>
           </a:p>
@@ -2446,10 +2096,9 @@
           </a:lstStyle>
           <a:p>
             <a:r>
-              <a:rPr lang="en-US" smtClean="0"/>
+              <a:rPr lang="en-US"/>
               <a:t>Click to edit Master title style</a:t>
             </a:r>
-            <a:endParaRPr lang="en-US"/>
           </a:p>
         </p:txBody>
       </p:sp>
@@ -2503,38 +2152,37 @@
           <a:p>
             <a:pPr lvl="0"/>
             <a:r>
-              <a:rPr lang="en-US" smtClean="0"/>
+              <a:rPr lang="en-US"/>
               <a:t>Click to edit Master text styles</a:t>
             </a:r>
           </a:p>
           <a:p>
             <a:pPr lvl="1"/>
             <a:r>
-              <a:rPr lang="en-US" smtClean="0"/>
+              <a:rPr lang="en-US"/>
               <a:t>Second level</a:t>
             </a:r>
           </a:p>
           <a:p>
             <a:pPr lvl="2"/>
             <a:r>
-              <a:rPr lang="en-US" smtClean="0"/>
+              <a:rPr lang="en-US"/>
               <a:t>Third level</a:t>
             </a:r>
           </a:p>
           <a:p>
             <a:pPr lvl="3"/>
             <a:r>
-              <a:rPr lang="en-US" smtClean="0"/>
+              <a:rPr lang="en-US"/>
               <a:t>Fourth level</a:t>
             </a:r>
           </a:p>
           <a:p>
             <a:pPr lvl="4"/>
             <a:r>
-              <a:rPr lang="en-US" smtClean="0"/>
+              <a:rPr lang="en-US"/>
               <a:t>Fifth level</a:t>
             </a:r>
-            <a:endParaRPr lang="en-US"/>
           </a:p>
         </p:txBody>
       </p:sp>
@@ -2597,7 +2245,7 @@
           <a:p>
             <a:pPr lvl="0"/>
             <a:r>
-              <a:rPr lang="en-US" smtClean="0"/>
+              <a:rPr lang="en-US"/>
               <a:t>Click to edit Master text styles</a:t>
             </a:r>
           </a:p>
@@ -2620,7 +2268,7 @@
           <a:p>
             <a:fld id="{5BCAD085-E8A6-8845-BD4E-CB4CCA059FC4}" type="datetimeFigureOut">
               <a:rPr lang="en-US" smtClean="0"/>
-              <a:t>1/27/13</a:t>
+              <a:t>9/9/2026</a:t>
             </a:fld>
             <a:endParaRPr lang="en-US"/>
           </a:p>
@@ -2723,10 +2371,9 @@
           </a:lstStyle>
           <a:p>
             <a:r>
-              <a:rPr lang="en-US" smtClean="0"/>
+              <a:rPr lang="en-US"/>
               <a:t>Click to edit Master title style</a:t>
             </a:r>
-            <a:endParaRPr lang="en-US"/>
           </a:p>
         </p:txBody>
       </p:sp>
@@ -2850,7 +2497,7 @@
           <a:p>
             <a:pPr lvl="0"/>
             <a:r>
-              <a:rPr lang="en-US" smtClean="0"/>
+              <a:rPr lang="en-US"/>
               <a:t>Click to edit Master text styles</a:t>
             </a:r>
           </a:p>
@@ -2873,7 +2520,7 @@
           <a:p>
             <a:fld id="{5BCAD085-E8A6-8845-BD4E-CB4CCA059FC4}" type="datetimeFigureOut">
               <a:rPr lang="en-US" smtClean="0"/>
-              <a:t>1/27/13</a:t>
+              <a:t>9/9/2026</a:t>
             </a:fld>
             <a:endParaRPr lang="en-US"/>
           </a:p>
@@ -2982,10 +2629,9 @@
           <a:lstStyle/>
           <a:p>
             <a:r>
-              <a:rPr lang="en-US" smtClean="0"/>
+              <a:rPr lang="en-US"/>
               <a:t>Click to edit Master title style</a:t>
             </a:r>
-            <a:endParaRPr lang="en-US"/>
           </a:p>
         </p:txBody>
       </p:sp>
@@ -3016,38 +2662,37 @@
           <a:p>
             <a:pPr lvl="0"/>
             <a:r>
-              <a:rPr lang="en-US" smtClean="0"/>
+              <a:rPr lang="en-US"/>
               <a:t>Click to edit Master text styles</a:t>
             </a:r>
           </a:p>
           <a:p>
             <a:pPr lvl="1"/>
             <a:r>
-              <a:rPr lang="en-US" smtClean="0"/>
+              <a:rPr lang="en-US"/>
               <a:t>Second level</a:t>
             </a:r>
           </a:p>
           <a:p>
             <a:pPr lvl="2"/>
             <a:r>
-              <a:rPr lang="en-US" smtClean="0"/>
+              <a:rPr lang="en-US"/>
               <a:t>Third level</a:t>
             </a:r>
           </a:p>
           <a:p>
             <a:pPr lvl="3"/>
             <a:r>
-              <a:rPr lang="en-US" smtClean="0"/>
+              <a:rPr lang="en-US"/>
               <a:t>Fourth level</a:t>
             </a:r>
           </a:p>
           <a:p>
             <a:pPr lvl="4"/>
             <a:r>
-              <a:rPr lang="en-US" smtClean="0"/>
+              <a:rPr lang="en-US"/>
               <a:t>Fifth level</a:t>
             </a:r>
-            <a:endParaRPr lang="en-US"/>
           </a:p>
         </p:txBody>
       </p:sp>
@@ -3086,7 +2731,7 @@
           <a:p>
             <a:fld id="{5BCAD085-E8A6-8845-BD4E-CB4CCA059FC4}" type="datetimeFigureOut">
               <a:rPr lang="en-US" smtClean="0"/>
-              <a:t>1/27/13</a:t>
+              <a:t>9/9/2026</a:t>
             </a:fld>
             <a:endParaRPr lang="en-US"/>
           </a:p>
@@ -3445,7 +3090,7 @@
 </file>
 
 <file path=ppt/slides/slide1.xml><?xml version="1.0" encoding="utf-8"?>
-<p:sld xmlns:a="http://schemas.openxmlformats.org/drawingml/2006/main" xmlns:p="http://schemas.openxmlformats.org/presentationml/2006/main" xmlns:r="http://schemas.openxmlformats.org/officeDocument/2006/relationships">
+<p:sld xmlns:a="http://schemas.openxmlformats.org/drawingml/2006/main" xmlns:r="http://schemas.openxmlformats.org/officeDocument/2006/relationships" xmlns:p="http://schemas.openxmlformats.org/presentationml/2006/main">
   <p:cSld>
     <p:bg>
       <p:bgPr>
@@ -3461,7 +3106,14 @@
         <p:cNvGrpSpPr/>
         <p:nvPr/>
       </p:nvGrpSpPr>
-      <p:grpSpPr/>
+      <p:grpSpPr>
+        <a:xfrm>
+          <a:off x="0" y="0"/>
+          <a:ext cx="0" cy="0"/>
+          <a:chOff x="0" y="0"/>
+          <a:chExt cx="0" cy="0"/>
+        </a:xfrm>
+      </p:grpSpPr>
       <p:sp>
         <p:nvSpPr>
           <p:cNvPr id="2" name="TextBox 1"/>
@@ -3514,11 +3166,17 @@
           <p:cNvGraphicFramePr>
             <a:graphicFrameLocks noGrp="1"/>
           </p:cNvGraphicFramePr>
-          <p:nvPr/>
+          <p:nvPr>
+            <p:extLst>
+              <p:ext uri="{D42A27DB-BD31-4B8C-83A1-F6EECF244321}">
+                <p14:modId xmlns:p14="http://schemas.microsoft.com/office/powerpoint/2010/main" val="2443340140"/>
+              </p:ext>
+            </p:extLst>
+          </p:nvPr>
         </p:nvGraphicFramePr>
         <p:xfrm>
           <a:off x="548640" y="2834640"/>
-          <a:ext cx="5669280" cy="1737360"/>
+          <a:ext cx="5669280" cy="1821180"/>
         </p:xfrm>
         <a:graphic>
           <a:graphicData uri="http://schemas.openxmlformats.org/drawingml/2006/table">
@@ -3527,13 +3185,25 @@
                 <a:tableStyleId>{5C22544A-7EE6-4342-B048-85BDC9FD1C3A}</a:tableStyleId>
               </a:tblPr>
               <a:tblGrid>
-                <a:gridCol w="3401568"/>
-                <a:gridCol w="2267712"/>
+                <a:gridCol w="3401568">
+                  <a:extLst>
+                    <a:ext uri="{9D8B030D-6E8A-4147-A177-3AD203B41FA5}">
+                      <a16:colId xmlns:a16="http://schemas.microsoft.com/office/drawing/2014/main" val="20000"/>
+                    </a:ext>
+                  </a:extLst>
+                </a:gridCol>
+                <a:gridCol w="2267712">
+                  <a:extLst>
+                    <a:ext uri="{9D8B030D-6E8A-4147-A177-3AD203B41FA5}">
+                      <a16:colId xmlns:a16="http://schemas.microsoft.com/office/drawing/2014/main" val="20001"/>
+                    </a:ext>
+                  </a:extLst>
+                </a:gridCol>
               </a:tblGrid>
               <a:tr h="434340">
                 <a:tc>
                   <a:txBody>
-                    <a:bodyPr wrap="square"/>
+                    <a:bodyPr/>
                     <a:lstStyle/>
                     <a:p>
                       <a:pPr algn="l"/>
@@ -3556,7 +3226,7 @@
                 </a:tc>
                 <a:tc>
                   <a:txBody>
-                    <a:bodyPr wrap="square"/>
+                    <a:bodyPr/>
                     <a:lstStyle/>
                     <a:p>
                       <a:pPr algn="ctr"/>
@@ -3577,150 +3247,236 @@
                     </a:solidFill>
                   </a:tcPr>
                 </a:tc>
+                <a:extLst>
+                  <a:ext uri="{0D108BD9-81ED-4DB2-BD59-A6C34878D82A}">
+                    <a16:rowId xmlns:a16="http://schemas.microsoft.com/office/drawing/2014/main" val="10000"/>
+                  </a:ext>
+                </a:extLst>
               </a:tr>
               <a:tr h="434340">
                 <a:tc>
                   <a:txBody>
-                    <a:bodyPr wrap="square"/>
-                    <a:lstStyle/>
-                    <a:p>
-                      <a:pPr algn="l"/>
-                      <a:r>
-                        <a:rPr sz="1400" b="0" i="0">
-                          <a:solidFill>
-                            <a:srgbClr val="000000"/>
-                          </a:solidFill>
-                          <a:latin typeface="Calibri"/>
-                        </a:rPr>
-                        <a:t>&lt;NAME 1&gt;</a:t>
-                      </a:r>
-                    </a:p>
-                  </a:txBody>
-                  <a:tcPr>
-                    <a:solidFill>
-                      <a:srgbClr val="FFFFFF"/>
-                    </a:solidFill>
-                  </a:tcPr>
-                </a:tc>
-                <a:tc>
-                  <a:txBody>
-                    <a:bodyPr wrap="square"/>
+                    <a:bodyPr/>
+                    <a:lstStyle/>
+                    <a:p>
+                      <a:pPr marL="0" marR="0" lvl="0" indent="0" algn="l" defTabSz="457200" rtl="0" eaLnBrk="1" fontAlgn="auto" latinLnBrk="0" hangingPunct="1">
+                        <a:lnSpc>
+                          <a:spcPct val="100000"/>
+                        </a:lnSpc>
+                        <a:spcBef>
+                          <a:spcPts val="0"/>
+                        </a:spcBef>
+                        <a:spcAft>
+                          <a:spcPts val="0"/>
+                        </a:spcAft>
+                        <a:buClrTx/>
+                        <a:buSzTx/>
+                        <a:buFontTx/>
+                        <a:buNone/>
+                        <a:tabLst/>
+                        <a:defRPr/>
+                      </a:pPr>
+                      <a:r>
+                        <a:rPr lang="en-US" sz="1400" dirty="0"/>
+                        <a:t>Ido Leibowitz</a:t>
+                      </a:r>
+                      <a:endParaRPr lang="en-US" sz="1400" b="0" i="0" dirty="0">
+                        <a:solidFill>
+                          <a:srgbClr val="000000"/>
+                        </a:solidFill>
+                        <a:latin typeface="+mn-lt"/>
+                      </a:endParaRPr>
+                    </a:p>
+                  </a:txBody>
+                  <a:tcPr>
+                    <a:solidFill>
+                      <a:srgbClr val="FFFFFF"/>
+                    </a:solidFill>
+                  </a:tcPr>
+                </a:tc>
+                <a:tc>
+                  <a:txBody>
+                    <a:bodyPr/>
                     <a:lstStyle/>
                     <a:p>
                       <a:pPr algn="ctr"/>
                       <a:r>
-                        <a:rPr sz="1400" b="0" i="0">
-                          <a:solidFill>
-                            <a:srgbClr val="000000"/>
-                          </a:solidFill>
-                          <a:latin typeface="Calibri"/>
-                        </a:rPr>
-                        <a:t>&lt;ID 1&gt;</a:t>
-                      </a:r>
-                    </a:p>
-                  </a:txBody>
-                  <a:tcPr>
-                    <a:solidFill>
-                      <a:srgbClr val="FFFFFF"/>
-                    </a:solidFill>
-                  </a:tcPr>
-                </a:tc>
+                        <a:rPr lang="en-US" sz="1400" b="0" i="0" dirty="0">
+                          <a:solidFill>
+                            <a:srgbClr val="000000"/>
+                          </a:solidFill>
+                          <a:latin typeface="Calibri"/>
+                        </a:rPr>
+                        <a:t>---</a:t>
+                      </a:r>
+                      <a:endParaRPr sz="1400" b="0" i="0" dirty="0">
+                        <a:solidFill>
+                          <a:srgbClr val="000000"/>
+                        </a:solidFill>
+                        <a:latin typeface="Calibri"/>
+                      </a:endParaRPr>
+                    </a:p>
+                  </a:txBody>
+                  <a:tcPr>
+                    <a:solidFill>
+                      <a:srgbClr val="FFFFFF"/>
+                    </a:solidFill>
+                  </a:tcPr>
+                </a:tc>
+                <a:extLst>
+                  <a:ext uri="{0D108BD9-81ED-4DB2-BD59-A6C34878D82A}">
+                    <a16:rowId xmlns:a16="http://schemas.microsoft.com/office/drawing/2014/main" val="10001"/>
+                  </a:ext>
+                </a:extLst>
               </a:tr>
               <a:tr h="434340">
                 <a:tc>
                   <a:txBody>
-                    <a:bodyPr wrap="square"/>
+                    <a:bodyPr/>
                     <a:lstStyle/>
                     <a:p>
                       <a:pPr algn="l"/>
                       <a:r>
-                        <a:rPr sz="1400" b="0" i="0">
-                          <a:solidFill>
-                            <a:srgbClr val="000000"/>
-                          </a:solidFill>
-                          <a:latin typeface="Calibri"/>
-                        </a:rPr>
-                        <a:t>&lt;NAME 2&gt;</a:t>
-                      </a:r>
-                    </a:p>
-                  </a:txBody>
-                  <a:tcPr>
-                    <a:solidFill>
-                      <a:srgbClr val="FFFFFF"/>
-                    </a:solidFill>
-                  </a:tcPr>
-                </a:tc>
-                <a:tc>
-                  <a:txBody>
-                    <a:bodyPr wrap="square"/>
+                        <a:rPr lang="en-US" sz="1400" dirty="0"/>
+                        <a:t>Ze'ev </a:t>
+                      </a:r>
+                      <a:r>
+                        <a:rPr lang="en-US" sz="1400" dirty="0" err="1"/>
+                        <a:t>Gastevert</a:t>
+                      </a:r>
+                      <a:endParaRPr lang="en-US" sz="1400" b="0" i="0" dirty="0">
+                        <a:solidFill>
+                          <a:srgbClr val="000000"/>
+                        </a:solidFill>
+                        <a:latin typeface="+mn-lt"/>
+                      </a:endParaRPr>
+                    </a:p>
+                  </a:txBody>
+                  <a:tcPr>
+                    <a:solidFill>
+                      <a:srgbClr val="FFFFFF"/>
+                    </a:solidFill>
+                  </a:tcPr>
+                </a:tc>
+                <a:tc>
+                  <a:txBody>
+                    <a:bodyPr/>
                     <a:lstStyle/>
                     <a:p>
                       <a:pPr algn="ctr"/>
                       <a:r>
-                        <a:rPr sz="1400" b="0" i="0">
-                          <a:solidFill>
-                            <a:srgbClr val="000000"/>
-                          </a:solidFill>
-                          <a:latin typeface="Calibri"/>
-                        </a:rPr>
-                        <a:t>&lt;ID 2&gt;</a:t>
-                      </a:r>
-                    </a:p>
-                  </a:txBody>
-                  <a:tcPr>
-                    <a:solidFill>
-                      <a:srgbClr val="FFFFFF"/>
-                    </a:solidFill>
-                  </a:tcPr>
-                </a:tc>
+                        <a:rPr lang="en-US" sz="1400" b="0" i="0" dirty="0">
+                          <a:solidFill>
+                            <a:srgbClr val="000000"/>
+                          </a:solidFill>
+                          <a:latin typeface="Calibri"/>
+                        </a:rPr>
+                        <a:t>---</a:t>
+                      </a:r>
+                      <a:endParaRPr sz="1400" b="0" i="0" dirty="0">
+                        <a:solidFill>
+                          <a:srgbClr val="000000"/>
+                        </a:solidFill>
+                        <a:latin typeface="Calibri"/>
+                      </a:endParaRPr>
+                    </a:p>
+                  </a:txBody>
+                  <a:tcPr>
+                    <a:solidFill>
+                      <a:srgbClr val="FFFFFF"/>
+                    </a:solidFill>
+                  </a:tcPr>
+                </a:tc>
+                <a:extLst>
+                  <a:ext uri="{0D108BD9-81ED-4DB2-BD59-A6C34878D82A}">
+                    <a16:rowId xmlns:a16="http://schemas.microsoft.com/office/drawing/2014/main" val="10002"/>
+                  </a:ext>
+                </a:extLst>
               </a:tr>
               <a:tr h="434340">
                 <a:tc>
                   <a:txBody>
-                    <a:bodyPr wrap="square"/>
-                    <a:lstStyle/>
+                    <a:bodyPr/>
+                    <a:lstStyle/>
+                    <a:p>
+                      <a:pPr marL="0" marR="0" lvl="0" indent="0" algn="l" defTabSz="457200" rtl="0" eaLnBrk="1" fontAlgn="auto" latinLnBrk="0" hangingPunct="1">
+                        <a:lnSpc>
+                          <a:spcPct val="100000"/>
+                        </a:lnSpc>
+                        <a:spcBef>
+                          <a:spcPts val="0"/>
+                        </a:spcBef>
+                        <a:spcAft>
+                          <a:spcPts val="0"/>
+                        </a:spcAft>
+                        <a:buClrTx/>
+                        <a:buSzTx/>
+                        <a:buFontTx/>
+                        <a:buNone/>
+                        <a:tabLst/>
+                        <a:defRPr/>
+                      </a:pPr>
+                      <a:r>
+                        <a:rPr lang="en-US" sz="1400" dirty="0"/>
+                        <a:t>David Sheinenzon</a:t>
+                      </a:r>
+                      <a:endParaRPr lang="en-US" sz="1400" b="0" i="0" dirty="0">
+                        <a:solidFill>
+                          <a:srgbClr val="000000"/>
+                        </a:solidFill>
+                        <a:latin typeface="+mn-lt"/>
+                      </a:endParaRPr>
+                    </a:p>
                     <a:p>
                       <a:pPr algn="l"/>
-                      <a:r>
-                        <a:rPr sz="1400" b="0" i="0">
-                          <a:solidFill>
-                            <a:srgbClr val="000000"/>
-                          </a:solidFill>
-                          <a:latin typeface="Calibri"/>
-                        </a:rPr>
-                        <a:t>&lt;NAME 3&gt;</a:t>
-                      </a:r>
-                    </a:p>
-                  </a:txBody>
-                  <a:tcPr>
-                    <a:solidFill>
-                      <a:srgbClr val="FFFFFF"/>
-                    </a:solidFill>
-                  </a:tcPr>
-                </a:tc>
-                <a:tc>
-                  <a:txBody>
-                    <a:bodyPr wrap="square"/>
+                      <a:endParaRPr sz="1400" b="0" i="0" dirty="0">
+                        <a:solidFill>
+                          <a:srgbClr val="000000"/>
+                        </a:solidFill>
+                        <a:latin typeface="Calibri"/>
+                      </a:endParaRPr>
+                    </a:p>
+                  </a:txBody>
+                  <a:tcPr>
+                    <a:solidFill>
+                      <a:srgbClr val="FFFFFF"/>
+                    </a:solidFill>
+                  </a:tcPr>
+                </a:tc>
+                <a:tc>
+                  <a:txBody>
+                    <a:bodyPr/>
                     <a:lstStyle/>
                     <a:p>
                       <a:pPr algn="ctr"/>
                       <a:r>
-                        <a:rPr sz="1400" b="0" i="0">
-                          <a:solidFill>
-                            <a:srgbClr val="000000"/>
-                          </a:solidFill>
-                          <a:latin typeface="Calibri"/>
-                        </a:rPr>
-                        <a:t>&lt;ID 3&gt;</a:t>
-                      </a:r>
-                    </a:p>
-                  </a:txBody>
-                  <a:tcPr>
-                    <a:solidFill>
-                      <a:srgbClr val="FFFFFF"/>
-                    </a:solidFill>
-                  </a:tcPr>
-                </a:tc>
+                        <a:rPr lang="en-US" sz="1400" b="0" i="0" dirty="0">
+                          <a:solidFill>
+                            <a:srgbClr val="000000"/>
+                          </a:solidFill>
+                          <a:latin typeface="Calibri"/>
+                        </a:rPr>
+                        <a:t>---</a:t>
+                      </a:r>
+                      <a:endParaRPr sz="1400" b="0" i="0" dirty="0">
+                        <a:solidFill>
+                          <a:srgbClr val="000000"/>
+                        </a:solidFill>
+                        <a:latin typeface="Calibri"/>
+                      </a:endParaRPr>
+                    </a:p>
+                  </a:txBody>
+                  <a:tcPr>
+                    <a:solidFill>
+                      <a:srgbClr val="FFFFFF"/>
+                    </a:solidFill>
+                  </a:tcPr>
+                </a:tc>
+                <a:extLst>
+                  <a:ext uri="{0D108BD9-81ED-4DB2-BD59-A6C34878D82A}">
+                    <a16:rowId xmlns:a16="http://schemas.microsoft.com/office/drawing/2014/main" val="10003"/>
+                  </a:ext>
+                </a:extLst>
               </a:tr>
             </a:tbl>
           </a:graphicData>
@@ -3735,7 +3491,7 @@
         <p:spPr>
           <a:xfrm>
             <a:off x="6766560" y="2834640"/>
-            <a:ext cx="4846320" cy="2011680"/>
+            <a:ext cx="4846320" cy="979755"/>
           </a:xfrm>
           <a:prstGeom prst="rect">
             <a:avLst/>
@@ -3747,7 +3503,9 @@
             <a:spAutoFit/>
           </a:bodyPr>
           <a:lstStyle/>
-          <a:p/>
+          <a:p>
+            <a:endParaRPr dirty="0"/>
+          </a:p>
           <a:p>
             <a:pPr>
               <a:spcAft>
@@ -3755,22 +3513,20 @@
               </a:spcAft>
             </a:pPr>
             <a:r>
-              <a:rPr sz="1400" b="1" i="0">
-                <a:solidFill>
-                  <a:srgbClr val="000000"/>
-                </a:solidFill>
-                <a:latin typeface="Calibri"/>
+              <a:rPr lang="en-US" sz="1400" b="1" dirty="0">
+                <a:solidFill>
+                  <a:srgbClr val="000000"/>
+                </a:solidFill>
               </a:rPr>
               <a:t>Code: </a:t>
             </a:r>
             <a:r>
-              <a:rPr sz="1400" b="0" i="0">
+              <a:rPr lang="en-US" sz="1400" dirty="0">
                 <a:solidFill>
                   <a:srgbClr val="555555"/>
                 </a:solidFill>
-                <a:latin typeface="Calibri"/>
-              </a:rPr>
-              <a:t>&lt;GITHUB / DRIVE LINK&gt;</a:t>
+              </a:rPr>
+              <a:t>https://github.com/DavidShenzi/unext-project</a:t>
             </a:r>
           </a:p>
           <a:p>
@@ -3780,7 +3536,7 @@
               </a:spcAft>
             </a:pPr>
             <a:r>
-              <a:rPr sz="1400" b="1" i="0">
+              <a:rPr sz="1400" b="1" i="0" dirty="0">
                 <a:solidFill>
                   <a:srgbClr val="000000"/>
                 </a:solidFill>
@@ -3789,48 +3545,19 @@
               <a:t>Video: </a:t>
             </a:r>
             <a:r>
-              <a:rPr sz="1400" b="0" i="0">
+              <a:rPr lang="en-US" sz="1400" dirty="0">
                 <a:solidFill>
                   <a:srgbClr val="555555"/>
                 </a:solidFill>
-                <a:latin typeface="Calibri"/>
-              </a:rPr>
-              <a:t>&lt;UNLISTED YOUTUBE LINK&gt;</a:t>
-            </a:r>
-          </a:p>
-        </p:txBody>
-      </p:sp>
-      <p:sp>
-        <p:nvSpPr>
-          <p:cNvPr id="5" name="TextBox 4"/>
-          <p:cNvSpPr txBox="1"/>
-          <p:nvPr/>
-        </p:nvSpPr>
-        <p:spPr>
-          <a:xfrm>
-            <a:off x="548640" y="6199632"/>
-            <a:ext cx="11094415" cy="457200"/>
-          </a:xfrm>
-          <a:prstGeom prst="rect">
-            <a:avLst/>
-          </a:prstGeom>
-          <a:noFill/>
-        </p:spPr>
-        <p:txBody>
-          <a:bodyPr wrap="square">
-            <a:spAutoFit/>
-          </a:bodyPr>
-          <a:lstStyle/>
-          <a:p>
-            <a:r>
-              <a:rPr sz="1200" b="0" i="1">
-                <a:solidFill>
-                  <a:srgbClr val="555555"/>
-                </a:solidFill>
-                <a:latin typeface="Calibri"/>
-              </a:rPr>
-              <a:t>Fill in all placeholders before submitting — missing items are penalised. Paste the video link in this slide's comment section as well.</a:t>
-            </a:r>
+              </a:rPr>
+              <a:t>https://youtu.be/1VO1uWPQsVE</a:t>
+            </a:r>
+            <a:endParaRPr sz="1400" b="0" i="0" dirty="0">
+              <a:solidFill>
+                <a:srgbClr val="555555"/>
+              </a:solidFill>
+              <a:latin typeface="Calibri"/>
+            </a:endParaRPr>
           </a:p>
         </p:txBody>
       </p:sp>
@@ -3843,7 +3570,7 @@
 </file>
 
 <file path=ppt/slides/slide10.xml><?xml version="1.0" encoding="utf-8"?>
-<p:sld xmlns:a="http://schemas.openxmlformats.org/drawingml/2006/main" xmlns:p="http://schemas.openxmlformats.org/presentationml/2006/main" xmlns:r="http://schemas.openxmlformats.org/officeDocument/2006/relationships">
+<p:sld xmlns:a="http://schemas.openxmlformats.org/drawingml/2006/main" xmlns:r="http://schemas.openxmlformats.org/officeDocument/2006/relationships" xmlns:p="http://schemas.openxmlformats.org/presentationml/2006/main">
   <p:cSld>
     <p:bg>
       <p:bgPr>
@@ -3859,7 +3586,14 @@
         <p:cNvGrpSpPr/>
         <p:nvPr/>
       </p:nvGrpSpPr>
-      <p:grpSpPr/>
+      <p:grpSpPr>
+        <a:xfrm>
+          <a:off x="0" y="0"/>
+          <a:ext cx="0" cy="0"/>
+          <a:chOff x="0" y="0"/>
+          <a:chExt cx="0" cy="0"/>
+        </a:xfrm>
+      </p:grpSpPr>
       <p:sp>
         <p:nvSpPr>
           <p:cNvPr id="2" name="TextBox 1"/>
@@ -3868,8 +3602,8 @@
         </p:nvSpPr>
         <p:spPr>
           <a:xfrm>
-            <a:off x="548640" y="320040"/>
-            <a:ext cx="11094415" cy="822960"/>
+            <a:off x="548640" y="320039"/>
+            <a:ext cx="11493287" cy="769441"/>
           </a:xfrm>
           <a:prstGeom prst="rect">
             <a:avLst/>
@@ -3911,11 +3645,17 @@
           <p:cNvGraphicFramePr>
             <a:graphicFrameLocks noGrp="1"/>
           </p:cNvGraphicFramePr>
-          <p:nvPr/>
+          <p:nvPr>
+            <p:extLst>
+              <p:ext uri="{D42A27DB-BD31-4B8C-83A1-F6EECF244321}">
+                <p14:modId xmlns:p14="http://schemas.microsoft.com/office/powerpoint/2010/main" val="190032181"/>
+              </p:ext>
+            </p:extLst>
+          </p:nvPr>
         </p:nvGraphicFramePr>
         <p:xfrm>
           <a:off x="548640" y="1463040"/>
-          <a:ext cx="10881360" cy="2286000"/>
+          <a:ext cx="11493288" cy="3061824"/>
         </p:xfrm>
         <a:graphic>
           <a:graphicData uri="http://schemas.openxmlformats.org/drawingml/2006/table">
@@ -3924,20 +3664,71 @@
                 <a:tableStyleId>{5C22544A-7EE6-4342-B048-85BDC9FD1C3A}</a:tableStyleId>
               </a:tblPr>
               <a:tblGrid>
-                <a:gridCol w="1920240"/>
-                <a:gridCol w="1691640"/>
-                <a:gridCol w="1691640"/>
-                <a:gridCol w="1691640"/>
-                <a:gridCol w="1920240"/>
-                <a:gridCol w="1965960"/>
+                <a:gridCol w="2028227">
+                  <a:extLst>
+                    <a:ext uri="{9D8B030D-6E8A-4147-A177-3AD203B41FA5}">
+                      <a16:colId xmlns:a16="http://schemas.microsoft.com/office/drawing/2014/main" val="20000"/>
+                    </a:ext>
+                  </a:extLst>
+                </a:gridCol>
+                <a:gridCol w="1786772">
+                  <a:extLst>
+                    <a:ext uri="{9D8B030D-6E8A-4147-A177-3AD203B41FA5}">
+                      <a16:colId xmlns:a16="http://schemas.microsoft.com/office/drawing/2014/main" val="20001"/>
+                    </a:ext>
+                  </a:extLst>
+                </a:gridCol>
+                <a:gridCol w="1786772">
+                  <a:extLst>
+                    <a:ext uri="{9D8B030D-6E8A-4147-A177-3AD203B41FA5}">
+                      <a16:colId xmlns:a16="http://schemas.microsoft.com/office/drawing/2014/main" val="20002"/>
+                    </a:ext>
+                  </a:extLst>
+                </a:gridCol>
+                <a:gridCol w="1786772">
+                  <a:extLst>
+                    <a:ext uri="{9D8B030D-6E8A-4147-A177-3AD203B41FA5}">
+                      <a16:colId xmlns:a16="http://schemas.microsoft.com/office/drawing/2014/main" val="20003"/>
+                    </a:ext>
+                  </a:extLst>
+                </a:gridCol>
+                <a:gridCol w="2028227">
+                  <a:extLst>
+                    <a:ext uri="{9D8B030D-6E8A-4147-A177-3AD203B41FA5}">
+                      <a16:colId xmlns:a16="http://schemas.microsoft.com/office/drawing/2014/main" val="20004"/>
+                    </a:ext>
+                  </a:extLst>
+                </a:gridCol>
+                <a:gridCol w="2076518">
+                  <a:extLst>
+                    <a:ext uri="{9D8B030D-6E8A-4147-A177-3AD203B41FA5}">
+                      <a16:colId xmlns:a16="http://schemas.microsoft.com/office/drawing/2014/main" val="20005"/>
+                    </a:ext>
+                  </a:extLst>
+                </a:gridCol>
               </a:tblGrid>
-              <a:tr h="381000">
-                <a:tc>
-                  <a:txBody>
-                    <a:bodyPr wrap="square"/>
+              <a:tr h="500298">
+                <a:tc>
+                  <a:txBody>
+                    <a:bodyPr/>
                     <a:lstStyle/>
                     <a:p>
                       <a:pPr algn="l"/>
+                      <a:endParaRPr/>
+                    </a:p>
+                  </a:txBody>
+                  <a:tcPr>
+                    <a:solidFill>
+                      <a:srgbClr val="FFFFFF"/>
+                    </a:solidFill>
+                  </a:tcPr>
+                </a:tc>
+                <a:tc>
+                  <a:txBody>
+                    <a:bodyPr/>
+                    <a:lstStyle/>
+                    <a:p>
+                      <a:pPr algn="ctr"/>
                       <a:r>
                         <a:rPr sz="1100" b="1" i="0">
                           <a:solidFill>
@@ -3945,19 +3736,19 @@
                           </a:solidFill>
                           <a:latin typeface="Calibri"/>
                         </a:rPr>
-                        <a:t/>
-                      </a:r>
-                    </a:p>
-                  </a:txBody>
-                  <a:tcPr>
-                    <a:solidFill>
-                      <a:srgbClr val="FFFFFF"/>
-                    </a:solidFill>
-                  </a:tcPr>
-                </a:tc>
-                <a:tc>
-                  <a:txBody>
-                    <a:bodyPr wrap="square"/>
+                        <a:t>SE attention</a:t>
+                      </a:r>
+                    </a:p>
+                  </a:txBody>
+                  <a:tcPr>
+                    <a:solidFill>
+                      <a:srgbClr val="FFFFFF"/>
+                    </a:solidFill>
+                  </a:tcPr>
+                </a:tc>
+                <a:tc>
+                  <a:txBody>
+                    <a:bodyPr/>
                     <a:lstStyle/>
                     <a:p>
                       <a:pPr algn="ctr"/>
@@ -3968,19 +3759,19 @@
                           </a:solidFill>
                           <a:latin typeface="Calibri"/>
                         </a:rPr>
-                        <a:t>SE attention</a:t>
-                      </a:r>
-                    </a:p>
-                  </a:txBody>
-                  <a:tcPr>
-                    <a:solidFill>
-                      <a:srgbClr val="FFFFFF"/>
-                    </a:solidFill>
-                  </a:tcPr>
-                </a:tc>
-                <a:tc>
-                  <a:txBody>
-                    <a:bodyPr wrap="square"/>
+                        <a:t>Skip-Fusion</a:t>
+                      </a:r>
+                    </a:p>
+                  </a:txBody>
+                  <a:tcPr>
+                    <a:solidFill>
+                      <a:srgbClr val="FFFFFF"/>
+                    </a:solidFill>
+                  </a:tcPr>
+                </a:tc>
+                <a:tc>
+                  <a:txBody>
+                    <a:bodyPr/>
                     <a:lstStyle/>
                     <a:p>
                       <a:pPr algn="ctr"/>
@@ -3991,19 +3782,19 @@
                           </a:solidFill>
                           <a:latin typeface="Calibri"/>
                         </a:rPr>
-                        <a:t>Skip-Fusion</a:t>
-                      </a:r>
-                    </a:p>
-                  </a:txBody>
-                  <a:tcPr>
-                    <a:solidFill>
-                      <a:srgbClr val="FFFFFF"/>
-                    </a:solidFill>
-                  </a:tcPr>
-                </a:tc>
-                <a:tc>
-                  <a:txBody>
-                    <a:bodyPr wrap="square"/>
+                        <a:t>Focal Tversky</a:t>
+                      </a:r>
+                    </a:p>
+                  </a:txBody>
+                  <a:tcPr>
+                    <a:solidFill>
+                      <a:srgbClr val="FFFFFF"/>
+                    </a:solidFill>
+                  </a:tcPr>
+                </a:tc>
+                <a:tc>
+                  <a:txBody>
+                    <a:bodyPr/>
                     <a:lstStyle/>
                     <a:p>
                       <a:pPr algn="ctr"/>
@@ -4014,19 +3805,19 @@
                           </a:solidFill>
                           <a:latin typeface="Calibri"/>
                         </a:rPr>
-                        <a:t>Focal Tversky</a:t>
-                      </a:r>
-                    </a:p>
-                  </a:txBody>
-                  <a:tcPr>
-                    <a:solidFill>
-                      <a:srgbClr val="FFFFFF"/>
-                    </a:solidFill>
-                  </a:tcPr>
-                </a:tc>
-                <a:tc>
-                  <a:txBody>
-                    <a:bodyPr wrap="square"/>
+                        <a:t>Boundary gate</a:t>
+                      </a:r>
+                    </a:p>
+                  </a:txBody>
+                  <a:tcPr>
+                    <a:solidFill>
+                      <a:srgbClr val="FFFFFF"/>
+                    </a:solidFill>
+                  </a:tcPr>
+                </a:tc>
+                <a:tc>
+                  <a:txBody>
+                    <a:bodyPr/>
                     <a:lstStyle/>
                     <a:p>
                       <a:pPr algn="ctr"/>
@@ -4037,67 +3828,72 @@
                           </a:solidFill>
                           <a:latin typeface="Calibri"/>
                         </a:rPr>
-                        <a:t>Boundary gate</a:t>
-                      </a:r>
-                    </a:p>
-                  </a:txBody>
-                  <a:tcPr>
-                    <a:solidFill>
-                      <a:srgbClr val="FFFFFF"/>
-                    </a:solidFill>
-                  </a:tcPr>
-                </a:tc>
-                <a:tc>
-                  <a:txBody>
-                    <a:bodyPr wrap="square"/>
+                        <a:t>Wavelet mixer</a:t>
+                      </a:r>
+                    </a:p>
+                  </a:txBody>
+                  <a:tcPr>
+                    <a:solidFill>
+                      <a:srgbClr val="FFFFFF"/>
+                    </a:solidFill>
+                  </a:tcPr>
+                </a:tc>
+                <a:extLst>
+                  <a:ext uri="{0D108BD9-81ED-4DB2-BD59-A6C34878D82A}">
+                    <a16:rowId xmlns:a16="http://schemas.microsoft.com/office/drawing/2014/main" val="10000"/>
+                  </a:ext>
+                </a:extLst>
+              </a:tr>
+              <a:tr h="560334">
+                <a:tc>
+                  <a:txBody>
+                    <a:bodyPr/>
+                    <a:lstStyle/>
+                    <a:p>
+                      <a:pPr algn="l"/>
+                      <a:r>
+                        <a:rPr sz="1100" b="0" i="0">
+                          <a:solidFill>
+                            <a:srgbClr val="000000"/>
+                          </a:solidFill>
+                          <a:latin typeface="Calibri"/>
+                        </a:rPr>
+                        <a:t>What it changes</a:t>
+                      </a:r>
+                    </a:p>
+                  </a:txBody>
+                  <a:tcPr>
+                    <a:solidFill>
+                      <a:srgbClr val="FFFFFF"/>
+                    </a:solidFill>
+                  </a:tcPr>
+                </a:tc>
+                <a:tc>
+                  <a:txBody>
+                    <a:bodyPr/>
                     <a:lstStyle/>
                     <a:p>
                       <a:pPr algn="ctr"/>
                       <a:r>
-                        <a:rPr sz="1100" b="1" i="0">
-                          <a:solidFill>
-                            <a:srgbClr val="000000"/>
-                          </a:solidFill>
-                          <a:latin typeface="Calibri"/>
-                        </a:rPr>
-                        <a:t>Wavelet mixer</a:t>
-                      </a:r>
-                    </a:p>
-                  </a:txBody>
-                  <a:tcPr>
-                    <a:solidFill>
-                      <a:srgbClr val="FFFFFF"/>
-                    </a:solidFill>
-                  </a:tcPr>
-                </a:tc>
-              </a:tr>
-              <a:tr h="381000">
-                <a:tc>
-                  <a:txBody>
-                    <a:bodyPr wrap="square"/>
-                    <a:lstStyle/>
-                    <a:p>
-                      <a:pPr algn="l"/>
-                      <a:r>
                         <a:rPr sz="1100" b="0" i="0">
                           <a:solidFill>
                             <a:srgbClr val="000000"/>
                           </a:solidFill>
                           <a:latin typeface="Calibri"/>
                         </a:rPr>
-                        <a:t>What it changes</a:t>
-                      </a:r>
-                    </a:p>
-                  </a:txBody>
-                  <a:tcPr>
-                    <a:solidFill>
-                      <a:srgbClr val="FFFFFF"/>
-                    </a:solidFill>
-                  </a:tcPr>
-                </a:tc>
-                <a:tc>
-                  <a:txBody>
-                    <a:bodyPr wrap="square"/>
+                        <a:t>channel gating</a:t>
+                      </a:r>
+                    </a:p>
+                  </a:txBody>
+                  <a:tcPr>
+                    <a:solidFill>
+                      <a:srgbClr val="FFFFFF"/>
+                    </a:solidFill>
+                  </a:tcPr>
+                </a:tc>
+                <a:tc>
+                  <a:txBody>
+                    <a:bodyPr/>
                     <a:lstStyle/>
                     <a:p>
                       <a:pPr algn="ctr"/>
@@ -4108,19 +3904,19 @@
                           </a:solidFill>
                           <a:latin typeface="Calibri"/>
                         </a:rPr>
-                        <a:t>channel gating</a:t>
-                      </a:r>
-                    </a:p>
-                  </a:txBody>
-                  <a:tcPr>
-                    <a:solidFill>
-                      <a:srgbClr val="FFFFFF"/>
-                    </a:solidFill>
-                  </a:tcPr>
-                </a:tc>
-                <a:tc>
-                  <a:txBody>
-                    <a:bodyPr wrap="square"/>
+                        <a:t>gate on skips</a:t>
+                      </a:r>
+                    </a:p>
+                  </a:txBody>
+                  <a:tcPr>
+                    <a:solidFill>
+                      <a:srgbClr val="FFFFFF"/>
+                    </a:solidFill>
+                  </a:tcPr>
+                </a:tc>
+                <a:tc>
+                  <a:txBody>
+                    <a:bodyPr/>
                     <a:lstStyle/>
                     <a:p>
                       <a:pPr algn="ctr"/>
@@ -4131,29 +3927,6 @@
                           </a:solidFill>
                           <a:latin typeface="Calibri"/>
                         </a:rPr>
-                        <a:t>gate on skips</a:t>
-                      </a:r>
-                    </a:p>
-                  </a:txBody>
-                  <a:tcPr>
-                    <a:solidFill>
-                      <a:srgbClr val="FFFFFF"/>
-                    </a:solidFill>
-                  </a:tcPr>
-                </a:tc>
-                <a:tc>
-                  <a:txBody>
-                    <a:bodyPr wrap="square"/>
-                    <a:lstStyle/>
-                    <a:p>
-                      <a:pPr algn="ctr"/>
-                      <a:r>
-                        <a:rPr sz="1100" b="0" i="0">
-                          <a:solidFill>
-                            <a:srgbClr val="000000"/>
-                          </a:solidFill>
-                          <a:latin typeface="Calibri"/>
-                        </a:rPr>
                         <a:t>the loss</a:t>
                       </a:r>
                     </a:p>
@@ -4166,7 +3939,7 @@
                 </a:tc>
                 <a:tc>
                   <a:txBody>
-                    <a:bodyPr wrap="square"/>
+                    <a:bodyPr/>
                     <a:lstStyle/>
                     <a:p>
                       <a:pPr algn="ctr"/>
@@ -4190,7 +3963,7 @@
                 </a:tc>
                 <a:tc>
                   <a:txBody>
-                    <a:bodyPr wrap="square"/>
+                    <a:bodyPr/>
                     <a:lstStyle/>
                     <a:p>
                       <a:pPr algn="ctr"/>
@@ -4211,11 +3984,16 @@
                     </a:solidFill>
                   </a:tcPr>
                 </a:tc>
+                <a:extLst>
+                  <a:ext uri="{0D108BD9-81ED-4DB2-BD59-A6C34878D82A}">
+                    <a16:rowId xmlns:a16="http://schemas.microsoft.com/office/drawing/2014/main" val="10001"/>
+                  </a:ext>
+                </a:extLst>
               </a:tr>
-              <a:tr h="381000">
-                <a:tc>
-                  <a:txBody>
-                    <a:bodyPr wrap="square"/>
+              <a:tr h="500298">
+                <a:tc>
+                  <a:txBody>
+                    <a:bodyPr/>
                     <a:lstStyle/>
                     <a:p>
                       <a:pPr algn="l"/>
@@ -4238,7 +4016,7 @@
                 </a:tc>
                 <a:tc>
                   <a:txBody>
-                    <a:bodyPr wrap="square"/>
+                    <a:bodyPr/>
                     <a:lstStyle/>
                     <a:p>
                       <a:pPr algn="ctr"/>
@@ -4261,7 +4039,7 @@
                 </a:tc>
                 <a:tc>
                   <a:txBody>
-                    <a:bodyPr wrap="square"/>
+                    <a:bodyPr/>
                     <a:lstStyle/>
                     <a:p>
                       <a:pPr algn="ctr"/>
@@ -4284,7 +4062,7 @@
                 </a:tc>
                 <a:tc>
                   <a:txBody>
-                    <a:bodyPr wrap="square"/>
+                    <a:bodyPr/>
                     <a:lstStyle/>
                     <a:p>
                       <a:pPr algn="ctr"/>
@@ -4307,7 +4085,7 @@
                 </a:tc>
                 <a:tc>
                   <a:txBody>
-                    <a:bodyPr wrap="square"/>
+                    <a:bodyPr/>
                     <a:lstStyle/>
                     <a:p>
                       <a:pPr algn="ctr"/>
@@ -4330,7 +4108,7 @@
                 </a:tc>
                 <a:tc>
                   <a:txBody>
-                    <a:bodyPr wrap="square"/>
+                    <a:bodyPr/>
                     <a:lstStyle/>
                     <a:p>
                       <a:pPr algn="ctr"/>
@@ -4351,11 +4129,16 @@
                     </a:solidFill>
                   </a:tcPr>
                 </a:tc>
+                <a:extLst>
+                  <a:ext uri="{0D108BD9-81ED-4DB2-BD59-A6C34878D82A}">
+                    <a16:rowId xmlns:a16="http://schemas.microsoft.com/office/drawing/2014/main" val="10002"/>
+                  </a:ext>
+                </a:extLst>
               </a:tr>
-              <a:tr h="381000">
-                <a:tc>
-                  <a:txBody>
-                    <a:bodyPr wrap="square"/>
+              <a:tr h="500298">
+                <a:tc>
+                  <a:txBody>
+                    <a:bodyPr/>
                     <a:lstStyle/>
                     <a:p>
                       <a:pPr algn="l"/>
@@ -4378,7 +4161,7 @@
                 </a:tc>
                 <a:tc>
                   <a:txBody>
-                    <a:bodyPr wrap="square"/>
+                    <a:bodyPr/>
                     <a:lstStyle/>
                     <a:p>
                       <a:pPr algn="ctr"/>
@@ -4401,7 +4184,7 @@
                 </a:tc>
                 <a:tc>
                   <a:txBody>
-                    <a:bodyPr wrap="square"/>
+                    <a:bodyPr/>
                     <a:lstStyle/>
                     <a:p>
                       <a:pPr algn="ctr"/>
@@ -4424,7 +4207,7 @@
                 </a:tc>
                 <a:tc>
                   <a:txBody>
-                    <a:bodyPr wrap="square"/>
+                    <a:bodyPr/>
                     <a:lstStyle/>
                     <a:p>
                       <a:pPr algn="ctr"/>
@@ -4447,7 +4230,7 @@
                 </a:tc>
                 <a:tc>
                   <a:txBody>
-                    <a:bodyPr wrap="square"/>
+                    <a:bodyPr/>
                     <a:lstStyle/>
                     <a:p>
                       <a:pPr algn="ctr"/>
@@ -4470,7 +4253,7 @@
                 </a:tc>
                 <a:tc>
                   <a:txBody>
-                    <a:bodyPr wrap="square"/>
+                    <a:bodyPr/>
                     <a:lstStyle/>
                     <a:p>
                       <a:pPr algn="ctr"/>
@@ -4491,11 +4274,16 @@
                     </a:solidFill>
                   </a:tcPr>
                 </a:tc>
+                <a:extLst>
+                  <a:ext uri="{0D108BD9-81ED-4DB2-BD59-A6C34878D82A}">
+                    <a16:rowId xmlns:a16="http://schemas.microsoft.com/office/drawing/2014/main" val="10003"/>
+                  </a:ext>
+                </a:extLst>
               </a:tr>
-              <a:tr h="381000">
-                <a:tc>
-                  <a:txBody>
-                    <a:bodyPr wrap="square"/>
+              <a:tr h="500298">
+                <a:tc>
+                  <a:txBody>
+                    <a:bodyPr/>
                     <a:lstStyle/>
                     <a:p>
                       <a:pPr algn="l"/>
@@ -4518,7 +4306,7 @@
                 </a:tc>
                 <a:tc>
                   <a:txBody>
-                    <a:bodyPr wrap="square"/>
+                    <a:bodyPr/>
                     <a:lstStyle/>
                     <a:p>
                       <a:pPr algn="ctr"/>
@@ -4541,7 +4329,7 @@
                 </a:tc>
                 <a:tc>
                   <a:txBody>
-                    <a:bodyPr wrap="square"/>
+                    <a:bodyPr/>
                     <a:lstStyle/>
                     <a:p>
                       <a:pPr algn="ctr"/>
@@ -4564,7 +4352,7 @@
                 </a:tc>
                 <a:tc>
                   <a:txBody>
-                    <a:bodyPr wrap="square"/>
+                    <a:bodyPr/>
                     <a:lstStyle/>
                     <a:p>
                       <a:pPr algn="ctr"/>
@@ -4587,78 +4375,106 @@
                 </a:tc>
                 <a:tc>
                   <a:txBody>
-                    <a:bodyPr wrap="square"/>
+                    <a:bodyPr/>
                     <a:lstStyle/>
                     <a:p>
                       <a:pPr algn="ctr"/>
                       <a:r>
+                        <a:rPr sz="1100" b="1" i="0" dirty="0">
+                          <a:solidFill>
+                            <a:srgbClr val="000000"/>
+                          </a:solidFill>
+                          <a:latin typeface="Calibri"/>
+                        </a:rPr>
+                        <a:t>+0.004</a:t>
+                      </a:r>
+                    </a:p>
+                  </a:txBody>
+                  <a:tcPr>
+                    <a:solidFill>
+                      <a:srgbClr val="FFFFFF"/>
+                    </a:solidFill>
+                  </a:tcPr>
+                </a:tc>
+                <a:tc>
+                  <a:txBody>
+                    <a:bodyPr/>
+                    <a:lstStyle/>
+                    <a:p>
+                      <a:pPr algn="ctr"/>
+                      <a:r>
                         <a:rPr sz="1100" b="1" i="0">
                           <a:solidFill>
                             <a:srgbClr val="000000"/>
                           </a:solidFill>
                           <a:latin typeface="Calibri"/>
                         </a:rPr>
-                        <a:t>+0.004</a:t>
-                      </a:r>
-                    </a:p>
-                  </a:txBody>
-                  <a:tcPr>
-                    <a:solidFill>
-                      <a:srgbClr val="FFFFFF"/>
-                    </a:solidFill>
-                  </a:tcPr>
-                </a:tc>
-                <a:tc>
-                  <a:txBody>
-                    <a:bodyPr wrap="square"/>
+                        <a:t>-0.001</a:t>
+                      </a:r>
+                    </a:p>
+                  </a:txBody>
+                  <a:tcPr>
+                    <a:solidFill>
+                      <a:srgbClr val="FFFFFF"/>
+                    </a:solidFill>
+                  </a:tcPr>
+                </a:tc>
+                <a:extLst>
+                  <a:ext uri="{0D108BD9-81ED-4DB2-BD59-A6C34878D82A}">
+                    <a16:rowId xmlns:a16="http://schemas.microsoft.com/office/drawing/2014/main" val="10004"/>
+                  </a:ext>
+                </a:extLst>
+              </a:tr>
+              <a:tr h="500298">
+                <a:tc>
+                  <a:txBody>
+                    <a:bodyPr/>
+                    <a:lstStyle/>
+                    <a:p>
+                      <a:pPr algn="l"/>
+                      <a:r>
+                        <a:rPr sz="1100" b="0" i="0">
+                          <a:solidFill>
+                            <a:srgbClr val="000000"/>
+                          </a:solidFill>
+                          <a:latin typeface="Calibri"/>
+                        </a:rPr>
+                        <a:t>Paired runs</a:t>
+                      </a:r>
+                    </a:p>
+                  </a:txBody>
+                  <a:tcPr>
+                    <a:solidFill>
+                      <a:srgbClr val="FFFFFF"/>
+                    </a:solidFill>
+                  </a:tcPr>
+                </a:tc>
+                <a:tc>
+                  <a:txBody>
+                    <a:bodyPr/>
                     <a:lstStyle/>
                     <a:p>
                       <a:pPr algn="ctr"/>
                       <a:r>
-                        <a:rPr sz="1100" b="1" i="0">
-                          <a:solidFill>
-                            <a:srgbClr val="000000"/>
-                          </a:solidFill>
-                          <a:latin typeface="Calibri"/>
-                        </a:rPr>
-                        <a:t>-0.001</a:t>
-                      </a:r>
-                    </a:p>
-                  </a:txBody>
-                  <a:tcPr>
-                    <a:solidFill>
-                      <a:srgbClr val="FFFFFF"/>
-                    </a:solidFill>
-                  </a:tcPr>
-                </a:tc>
-              </a:tr>
-              <a:tr h="381000">
-                <a:tc>
-                  <a:txBody>
-                    <a:bodyPr wrap="square"/>
-                    <a:lstStyle/>
-                    <a:p>
-                      <a:pPr algn="l"/>
-                      <a:r>
                         <a:rPr sz="1100" b="0" i="0">
                           <a:solidFill>
                             <a:srgbClr val="000000"/>
                           </a:solidFill>
                           <a:latin typeface="Calibri"/>
                         </a:rPr>
-                        <a:t>Paired runs</a:t>
-                      </a:r>
-                    </a:p>
-                  </a:txBody>
-                  <a:tcPr>
-                    <a:solidFill>
-                      <a:srgbClr val="FFFFFF"/>
-                    </a:solidFill>
-                  </a:tcPr>
-                </a:tc>
-                <a:tc>
-                  <a:txBody>
-                    <a:bodyPr wrap="square"/>
+                        <a:t>1</a:t>
+                      </a:r>
+                    </a:p>
+                  </a:txBody>
+                  <a:tcPr>
+                    <a:solidFill>
+                      <a:srgbClr val="FFFFFF"/>
+                    </a:solidFill>
+                  </a:tcPr>
+                </a:tc>
+                <a:tc>
+                  <a:txBody>
+                    <a:bodyPr/>
                     <a:lstStyle/>
                     <a:p>
                       <a:pPr algn="ctr"/>
@@ -4681,7 +4497,7 @@
                 </a:tc>
                 <a:tc>
                   <a:txBody>
-                    <a:bodyPr wrap="square"/>
+                    <a:bodyPr/>
                     <a:lstStyle/>
                     <a:p>
                       <a:pPr algn="ctr"/>
@@ -4692,19 +4508,19 @@
                           </a:solidFill>
                           <a:latin typeface="Calibri"/>
                         </a:rPr>
-                        <a:t>1</a:t>
-                      </a:r>
-                    </a:p>
-                  </a:txBody>
-                  <a:tcPr>
-                    <a:solidFill>
-                      <a:srgbClr val="FFFFFF"/>
-                    </a:solidFill>
-                  </a:tcPr>
-                </a:tc>
-                <a:tc>
-                  <a:txBody>
-                    <a:bodyPr wrap="square"/>
+                        <a:t>6</a:t>
+                      </a:r>
+                    </a:p>
+                  </a:txBody>
+                  <a:tcPr>
+                    <a:solidFill>
+                      <a:srgbClr val="FFFFFF"/>
+                    </a:solidFill>
+                  </a:tcPr>
+                </a:tc>
+                <a:tc>
+                  <a:txBody>
+                    <a:bodyPr/>
                     <a:lstStyle/>
                     <a:p>
                       <a:pPr algn="ctr"/>
@@ -4715,24 +4531,24 @@
                           </a:solidFill>
                           <a:latin typeface="Calibri"/>
                         </a:rPr>
-                        <a:t>6</a:t>
-                      </a:r>
-                    </a:p>
-                  </a:txBody>
-                  <a:tcPr>
-                    <a:solidFill>
-                      <a:srgbClr val="FFFFFF"/>
-                    </a:solidFill>
-                  </a:tcPr>
-                </a:tc>
-                <a:tc>
-                  <a:txBody>
-                    <a:bodyPr wrap="square"/>
+                        <a:t>3</a:t>
+                      </a:r>
+                    </a:p>
+                  </a:txBody>
+                  <a:tcPr>
+                    <a:solidFill>
+                      <a:srgbClr val="FFFFFF"/>
+                    </a:solidFill>
+                  </a:tcPr>
+                </a:tc>
+                <a:tc>
+                  <a:txBody>
+                    <a:bodyPr/>
                     <a:lstStyle/>
                     <a:p>
                       <a:pPr algn="ctr"/>
                       <a:r>
-                        <a:rPr sz="1100" b="0" i="0">
+                        <a:rPr sz="1100" b="0" i="0" dirty="0">
                           <a:solidFill>
                             <a:srgbClr val="000000"/>
                           </a:solidFill>
@@ -4748,29 +4564,11 @@
                     </a:solidFill>
                   </a:tcPr>
                 </a:tc>
-                <a:tc>
-                  <a:txBody>
-                    <a:bodyPr wrap="square"/>
-                    <a:lstStyle/>
-                    <a:p>
-                      <a:pPr algn="ctr"/>
-                      <a:r>
-                        <a:rPr sz="1100" b="0" i="0">
-                          <a:solidFill>
-                            <a:srgbClr val="000000"/>
-                          </a:solidFill>
-                          <a:latin typeface="Calibri"/>
-                        </a:rPr>
-                        <a:t>3</a:t>
-                      </a:r>
-                    </a:p>
-                  </a:txBody>
-                  <a:tcPr>
-                    <a:solidFill>
-                      <a:srgbClr val="FFFFFF"/>
-                    </a:solidFill>
-                  </a:tcPr>
-                </a:tc>
+                <a:extLst>
+                  <a:ext uri="{0D108BD9-81ED-4DB2-BD59-A6C34878D82A}">
+                    <a16:rowId xmlns:a16="http://schemas.microsoft.com/office/drawing/2014/main" val="10005"/>
+                  </a:ext>
+                </a:extLst>
               </a:tr>
             </a:tbl>
           </a:graphicData>
@@ -4784,8 +4582,8 @@
         </p:nvSpPr>
         <p:spPr>
           <a:xfrm>
-            <a:off x="548640" y="3977639"/>
-            <a:ext cx="11094415" cy="2423161"/>
+            <a:off x="548640" y="4656369"/>
+            <a:ext cx="11493287" cy="1723549"/>
           </a:xfrm>
           <a:prstGeom prst="rect">
             <a:avLst/>
@@ -4804,16 +4602,34 @@
               </a:spcAft>
             </a:pPr>
             <a:r>
-              <a:rPr sz="1300" b="1" i="0">
-                <a:solidFill>
-                  <a:srgbClr val="000000"/>
-                </a:solidFill>
-                <a:latin typeface="Calibri"/>
-              </a:rPr>
-              <a:t>Not one of them clears 0.011 IoU — and 0.011 is what we get by changing the random seed alone.</a:t>
-            </a:r>
-            <a:r>
-              <a:rPr sz="1300" b="0" i="0">
+              <a:rPr sz="1600" b="1" i="0" dirty="0">
+                <a:solidFill>
+                  <a:srgbClr val="000000"/>
+                </a:solidFill>
+                <a:latin typeface="Calibri"/>
+              </a:rPr>
+              <a:t>Not one of them clears 0.011 </a:t>
+            </a:r>
+            <a:r>
+              <a:rPr sz="1600" b="1" i="0" dirty="0" err="1">
+                <a:solidFill>
+                  <a:srgbClr val="000000"/>
+                </a:solidFill>
+                <a:latin typeface="Calibri"/>
+              </a:rPr>
+              <a:t>IoU</a:t>
+            </a:r>
+            <a:r>
+              <a:rPr sz="1600" b="1" i="0" dirty="0">
+                <a:solidFill>
+                  <a:srgbClr val="000000"/>
+                </a:solidFill>
+                <a:latin typeface="Calibri"/>
+              </a:rPr>
+              <a:t> — and 0.011 is what we get by changing the random seed alone.</a:t>
+            </a:r>
+            <a:r>
+              <a:rPr sz="1600" b="0" i="0" dirty="0">
                 <a:solidFill>
                   <a:srgbClr val="000000"/>
                 </a:solidFill>
@@ -4829,7 +4645,7 @@
               </a:spcAft>
             </a:pPr>
             <a:r>
-              <a:rPr sz="1300" b="1" i="0">
+              <a:rPr sz="1600" b="1" i="0" dirty="0">
                 <a:solidFill>
                   <a:srgbClr val="000000"/>
                 </a:solidFill>
@@ -4838,7 +4654,7 @@
               <a:t>So the honest verdict is: none of these architectural changes does anything we can measure.</a:t>
             </a:r>
             <a:r>
-              <a:rPr sz="1300" b="0" i="0">
+              <a:rPr sz="1600" b="0" i="0" dirty="0">
                 <a:solidFill>
                   <a:srgbClr val="000000"/>
                 </a:solidFill>
@@ -4854,7 +4670,7 @@
               </a:spcAft>
             </a:pPr>
             <a:r>
-              <a:rPr sz="1300" b="1" i="0">
+              <a:rPr sz="1600" b="1" i="0" dirty="0">
                 <a:solidFill>
                   <a:srgbClr val="000000"/>
                 </a:solidFill>
@@ -4863,7 +4679,7 @@
               <a:t>The exception is the wavelet mixer — it is the only one that makes the network cheaper.</a:t>
             </a:r>
             <a:r>
-              <a:rPr sz="1300" b="0" i="0">
+              <a:rPr sz="1600" b="0" i="0" dirty="0">
                 <a:solidFill>
                   <a:srgbClr val="000000"/>
                 </a:solidFill>
@@ -4883,7 +4699,7 @@
 </file>
 
 <file path=ppt/slides/slide11.xml><?xml version="1.0" encoding="utf-8"?>
-<p:sld xmlns:a="http://schemas.openxmlformats.org/drawingml/2006/main" xmlns:p="http://schemas.openxmlformats.org/presentationml/2006/main" xmlns:r="http://schemas.openxmlformats.org/officeDocument/2006/relationships">
+<p:sld xmlns:a="http://schemas.openxmlformats.org/drawingml/2006/main" xmlns:r="http://schemas.openxmlformats.org/officeDocument/2006/relationships" xmlns:p="http://schemas.openxmlformats.org/presentationml/2006/main">
   <p:cSld>
     <p:bg>
       <p:bgPr>
@@ -4899,7 +4715,14 @@
         <p:cNvGrpSpPr/>
         <p:nvPr/>
       </p:nvGrpSpPr>
-      <p:grpSpPr/>
+      <p:grpSpPr>
+        <a:xfrm>
+          <a:off x="0" y="0"/>
+          <a:ext cx="0" cy="0"/>
+          <a:chOff x="0" y="0"/>
+          <a:chExt cx="0" cy="0"/>
+        </a:xfrm>
+      </p:grpSpPr>
       <p:sp>
         <p:nvSpPr>
           <p:cNvPr id="2" name="TextBox 1"/>
@@ -5026,7 +4849,7 @@
 </file>
 
 <file path=ppt/slides/slide12.xml><?xml version="1.0" encoding="utf-8"?>
-<p:sld xmlns:a="http://schemas.openxmlformats.org/drawingml/2006/main" xmlns:p="http://schemas.openxmlformats.org/presentationml/2006/main" xmlns:r="http://schemas.openxmlformats.org/officeDocument/2006/relationships">
+<p:sld xmlns:a="http://schemas.openxmlformats.org/drawingml/2006/main" xmlns:r="http://schemas.openxmlformats.org/officeDocument/2006/relationships" xmlns:p="http://schemas.openxmlformats.org/presentationml/2006/main">
   <p:cSld>
     <p:bg>
       <p:bgPr>
@@ -5042,7 +4865,14 @@
         <p:cNvGrpSpPr/>
         <p:nvPr/>
       </p:nvGrpSpPr>
-      <p:grpSpPr/>
+      <p:grpSpPr>
+        <a:xfrm>
+          <a:off x="0" y="0"/>
+          <a:ext cx="0" cy="0"/>
+          <a:chOff x="0" y="0"/>
+          <a:chExt cx="0" cy="0"/>
+        </a:xfrm>
+      </p:grpSpPr>
       <p:sp>
         <p:nvSpPr>
           <p:cNvPr id="2" name="TextBox 1"/>
@@ -5107,17 +4937,50 @@
                 <a:tableStyleId>{5C22544A-7EE6-4342-B048-85BDC9FD1C3A}</a:tableStyleId>
               </a:tblPr>
               <a:tblGrid>
-                <a:gridCol w="3474720"/>
-                <a:gridCol w="3291840"/>
-                <a:gridCol w="3291840"/>
+                <a:gridCol w="3474720">
+                  <a:extLst>
+                    <a:ext uri="{9D8B030D-6E8A-4147-A177-3AD203B41FA5}">
+                      <a16:colId xmlns:a16="http://schemas.microsoft.com/office/drawing/2014/main" val="20000"/>
+                    </a:ext>
+                  </a:extLst>
+                </a:gridCol>
+                <a:gridCol w="3291840">
+                  <a:extLst>
+                    <a:ext uri="{9D8B030D-6E8A-4147-A177-3AD203B41FA5}">
+                      <a16:colId xmlns:a16="http://schemas.microsoft.com/office/drawing/2014/main" val="20001"/>
+                    </a:ext>
+                  </a:extLst>
+                </a:gridCol>
+                <a:gridCol w="3291840">
+                  <a:extLst>
+                    <a:ext uri="{9D8B030D-6E8A-4147-A177-3AD203B41FA5}">
+                      <a16:colId xmlns:a16="http://schemas.microsoft.com/office/drawing/2014/main" val="20002"/>
+                    </a:ext>
+                  </a:extLst>
+                </a:gridCol>
               </a:tblGrid>
               <a:tr h="384048">
                 <a:tc>
                   <a:txBody>
-                    <a:bodyPr wrap="square"/>
+                    <a:bodyPr/>
                     <a:lstStyle/>
                     <a:p>
                       <a:pPr algn="l"/>
+                      <a:endParaRPr/>
+                    </a:p>
+                  </a:txBody>
+                  <a:tcPr>
+                    <a:solidFill>
+                      <a:srgbClr val="FFFFFF"/>
+                    </a:solidFill>
+                  </a:tcPr>
+                </a:tc>
+                <a:tc>
+                  <a:txBody>
+                    <a:bodyPr/>
+                    <a:lstStyle/>
+                    <a:p>
+                      <a:pPr algn="ctr"/>
                       <a:r>
                         <a:rPr sz="1350" b="1" i="0">
                           <a:solidFill>
@@ -5125,19 +4988,19 @@
                           </a:solidFill>
                           <a:latin typeface="Calibri"/>
                         </a:rPr>
-                        <a:t/>
-                      </a:r>
-                    </a:p>
-                  </a:txBody>
-                  <a:tcPr>
-                    <a:solidFill>
-                      <a:srgbClr val="FFFFFF"/>
-                    </a:solidFill>
-                  </a:tcPr>
-                </a:tc>
-                <a:tc>
-                  <a:txBody>
-                    <a:bodyPr wrap="square"/>
+                        <a:t>Baseline (shifted MLP)</a:t>
+                      </a:r>
+                    </a:p>
+                  </a:txBody>
+                  <a:tcPr>
+                    <a:solidFill>
+                      <a:srgbClr val="FFFFFF"/>
+                    </a:solidFill>
+                  </a:tcPr>
+                </a:tc>
+                <a:tc>
+                  <a:txBody>
+                    <a:bodyPr/>
                     <a:lstStyle/>
                     <a:p>
                       <a:pPr algn="ctr"/>
@@ -5148,29 +5011,6 @@
                           </a:solidFill>
                           <a:latin typeface="Calibri"/>
                         </a:rPr>
-                        <a:t>Baseline (shifted MLP)</a:t>
-                      </a:r>
-                    </a:p>
-                  </a:txBody>
-                  <a:tcPr>
-                    <a:solidFill>
-                      <a:srgbClr val="FFFFFF"/>
-                    </a:solidFill>
-                  </a:tcPr>
-                </a:tc>
-                <a:tc>
-                  <a:txBody>
-                    <a:bodyPr wrap="square"/>
-                    <a:lstStyle/>
-                    <a:p>
-                      <a:pPr algn="ctr"/>
-                      <a:r>
-                        <a:rPr sz="1350" b="1" i="0">
-                          <a:solidFill>
-                            <a:srgbClr val="000000"/>
-                          </a:solidFill>
-                          <a:latin typeface="Calibri"/>
-                        </a:rPr>
                         <a:t>Wavelet mixer</a:t>
                       </a:r>
                     </a:p>
@@ -5181,11 +5021,16 @@
                     </a:solidFill>
                   </a:tcPr>
                 </a:tc>
+                <a:extLst>
+                  <a:ext uri="{0D108BD9-81ED-4DB2-BD59-A6C34878D82A}">
+                    <a16:rowId xmlns:a16="http://schemas.microsoft.com/office/drawing/2014/main" val="10000"/>
+                  </a:ext>
+                </a:extLst>
               </a:tr>
               <a:tr h="384048">
                 <a:tc>
                   <a:txBody>
-                    <a:bodyPr wrap="square"/>
+                    <a:bodyPr/>
                     <a:lstStyle/>
                     <a:p>
                       <a:pPr algn="l"/>
@@ -5208,7 +5053,7 @@
                 </a:tc>
                 <a:tc>
                   <a:txBody>
-                    <a:bodyPr wrap="square"/>
+                    <a:bodyPr/>
                     <a:lstStyle/>
                     <a:p>
                       <a:pPr algn="ctr"/>
@@ -5231,7 +5076,7 @@
                 </a:tc>
                 <a:tc>
                   <a:txBody>
-                    <a:bodyPr wrap="square"/>
+                    <a:bodyPr/>
                     <a:lstStyle/>
                     <a:p>
                       <a:pPr algn="ctr"/>
@@ -5252,11 +5097,16 @@
                     </a:solidFill>
                   </a:tcPr>
                 </a:tc>
+                <a:extLst>
+                  <a:ext uri="{0D108BD9-81ED-4DB2-BD59-A6C34878D82A}">
+                    <a16:rowId xmlns:a16="http://schemas.microsoft.com/office/drawing/2014/main" val="10001"/>
+                  </a:ext>
+                </a:extLst>
               </a:tr>
               <a:tr h="384048">
                 <a:tc>
                   <a:txBody>
-                    <a:bodyPr wrap="square"/>
+                    <a:bodyPr/>
                     <a:lstStyle/>
                     <a:p>
                       <a:pPr algn="l"/>
@@ -5279,7 +5129,7 @@
                 </a:tc>
                 <a:tc>
                   <a:txBody>
-                    <a:bodyPr wrap="square"/>
+                    <a:bodyPr/>
                     <a:lstStyle/>
                     <a:p>
                       <a:pPr algn="ctr"/>
@@ -5302,7 +5152,7 @@
                 </a:tc>
                 <a:tc>
                   <a:txBody>
-                    <a:bodyPr wrap="square"/>
+                    <a:bodyPr/>
                     <a:lstStyle/>
                     <a:p>
                       <a:pPr algn="ctr"/>
@@ -5323,11 +5173,16 @@
                     </a:solidFill>
                   </a:tcPr>
                 </a:tc>
+                <a:extLst>
+                  <a:ext uri="{0D108BD9-81ED-4DB2-BD59-A6C34878D82A}">
+                    <a16:rowId xmlns:a16="http://schemas.microsoft.com/office/drawing/2014/main" val="10002"/>
+                  </a:ext>
+                </a:extLst>
               </a:tr>
               <a:tr h="384048">
                 <a:tc>
                   <a:txBody>
-                    <a:bodyPr wrap="square"/>
+                    <a:bodyPr/>
                     <a:lstStyle/>
                     <a:p>
                       <a:pPr algn="l"/>
@@ -5350,7 +5205,7 @@
                 </a:tc>
                 <a:tc>
                   <a:txBody>
-                    <a:bodyPr wrap="square"/>
+                    <a:bodyPr/>
                     <a:lstStyle/>
                     <a:p>
                       <a:pPr algn="ctr"/>
@@ -5373,7 +5228,7 @@
                 </a:tc>
                 <a:tc>
                   <a:txBody>
-                    <a:bodyPr wrap="square"/>
+                    <a:bodyPr/>
                     <a:lstStyle/>
                     <a:p>
                       <a:pPr algn="ctr"/>
@@ -5394,11 +5249,16 @@
                     </a:solidFill>
                   </a:tcPr>
                 </a:tc>
+                <a:extLst>
+                  <a:ext uri="{0D108BD9-81ED-4DB2-BD59-A6C34878D82A}">
+                    <a16:rowId xmlns:a16="http://schemas.microsoft.com/office/drawing/2014/main" val="10003"/>
+                  </a:ext>
+                </a:extLst>
               </a:tr>
               <a:tr h="384048">
                 <a:tc>
                   <a:txBody>
-                    <a:bodyPr wrap="square"/>
+                    <a:bodyPr/>
                     <a:lstStyle/>
                     <a:p>
                       <a:pPr algn="l"/>
@@ -5421,7 +5281,7 @@
                 </a:tc>
                 <a:tc>
                   <a:txBody>
-                    <a:bodyPr wrap="square"/>
+                    <a:bodyPr/>
                     <a:lstStyle/>
                     <a:p>
                       <a:pPr algn="ctr"/>
@@ -5444,7 +5304,7 @@
                 </a:tc>
                 <a:tc>
                   <a:txBody>
-                    <a:bodyPr wrap="square"/>
+                    <a:bodyPr/>
                     <a:lstStyle/>
                     <a:p>
                       <a:pPr algn="ctr"/>
@@ -5465,6 +5325,11 @@
                     </a:solidFill>
                   </a:tcPr>
                 </a:tc>
+                <a:extLst>
+                  <a:ext uri="{0D108BD9-81ED-4DB2-BD59-A6C34878D82A}">
+                    <a16:rowId xmlns:a16="http://schemas.microsoft.com/office/drawing/2014/main" val="10004"/>
+                  </a:ext>
+                </a:extLst>
               </a:tr>
             </a:tbl>
           </a:graphicData>
@@ -5570,7 +5435,7 @@
 </file>
 
 <file path=ppt/slides/slide13.xml><?xml version="1.0" encoding="utf-8"?>
-<p:sld xmlns:a="http://schemas.openxmlformats.org/drawingml/2006/main" xmlns:p="http://schemas.openxmlformats.org/presentationml/2006/main" xmlns:r="http://schemas.openxmlformats.org/officeDocument/2006/relationships">
+<p:sld xmlns:a="http://schemas.openxmlformats.org/drawingml/2006/main" xmlns:r="http://schemas.openxmlformats.org/officeDocument/2006/relationships" xmlns:p="http://schemas.openxmlformats.org/presentationml/2006/main">
   <p:cSld>
     <p:bg>
       <p:bgPr>
@@ -5586,7 +5451,14 @@
         <p:cNvGrpSpPr/>
         <p:nvPr/>
       </p:nvGrpSpPr>
-      <p:grpSpPr/>
+      <p:grpSpPr>
+        <a:xfrm>
+          <a:off x="0" y="0"/>
+          <a:ext cx="0" cy="0"/>
+          <a:chOff x="0" y="0"/>
+          <a:chExt cx="0" cy="0"/>
+        </a:xfrm>
+      </p:grpSpPr>
       <p:sp>
         <p:nvSpPr>
           <p:cNvPr id="2" name="TextBox 1"/>
@@ -5722,7 +5594,7 @@
 </file>
 
 <file path=ppt/slides/slide14.xml><?xml version="1.0" encoding="utf-8"?>
-<p:sld xmlns:a="http://schemas.openxmlformats.org/drawingml/2006/main" xmlns:p="http://schemas.openxmlformats.org/presentationml/2006/main" xmlns:r="http://schemas.openxmlformats.org/officeDocument/2006/relationships">
+<p:sld xmlns:a="http://schemas.openxmlformats.org/drawingml/2006/main" xmlns:r="http://schemas.openxmlformats.org/officeDocument/2006/relationships" xmlns:p="http://schemas.openxmlformats.org/presentationml/2006/main">
   <p:cSld>
     <p:bg>
       <p:bgPr>
@@ -5738,7 +5610,14 @@
         <p:cNvGrpSpPr/>
         <p:nvPr/>
       </p:nvGrpSpPr>
-      <p:grpSpPr/>
+      <p:grpSpPr>
+        <a:xfrm>
+          <a:off x="0" y="0"/>
+          <a:ext cx="0" cy="0"/>
+          <a:chOff x="0" y="0"/>
+          <a:chExt cx="0" cy="0"/>
+        </a:xfrm>
+      </p:grpSpPr>
       <p:sp>
         <p:nvSpPr>
           <p:cNvPr id="2" name="TextBox 1"/>
@@ -5923,7 +5802,7 @@
 </file>
 
 <file path=ppt/slides/slide15.xml><?xml version="1.0" encoding="utf-8"?>
-<p:sld xmlns:a="http://schemas.openxmlformats.org/drawingml/2006/main" xmlns:p="http://schemas.openxmlformats.org/presentationml/2006/main" xmlns:r="http://schemas.openxmlformats.org/officeDocument/2006/relationships">
+<p:sld xmlns:a="http://schemas.openxmlformats.org/drawingml/2006/main" xmlns:r="http://schemas.openxmlformats.org/officeDocument/2006/relationships" xmlns:p="http://schemas.openxmlformats.org/presentationml/2006/main">
   <p:cSld>
     <p:bg>
       <p:bgPr>
@@ -5939,7 +5818,14 @@
         <p:cNvGrpSpPr/>
         <p:nvPr/>
       </p:nvGrpSpPr>
-      <p:grpSpPr/>
+      <p:grpSpPr>
+        <a:xfrm>
+          <a:off x="0" y="0"/>
+          <a:ext cx="0" cy="0"/>
+          <a:chOff x="0" y="0"/>
+          <a:chExt cx="0" cy="0"/>
+        </a:xfrm>
+      </p:grpSpPr>
       <p:sp>
         <p:nvSpPr>
           <p:cNvPr id="2" name="TextBox 1"/>
@@ -6219,7 +6105,7 @@
 </file>
 
 <file path=ppt/slides/slide16.xml><?xml version="1.0" encoding="utf-8"?>
-<p:sld xmlns:a="http://schemas.openxmlformats.org/drawingml/2006/main" xmlns:p="http://schemas.openxmlformats.org/presentationml/2006/main" xmlns:r="http://schemas.openxmlformats.org/officeDocument/2006/relationships">
+<p:sld xmlns:a="http://schemas.openxmlformats.org/drawingml/2006/main" xmlns:r="http://schemas.openxmlformats.org/officeDocument/2006/relationships" xmlns:p="http://schemas.openxmlformats.org/presentationml/2006/main">
   <p:cSld>
     <p:bg>
       <p:bgPr>
@@ -6235,7 +6121,14 @@
         <p:cNvGrpSpPr/>
         <p:nvPr/>
       </p:nvGrpSpPr>
-      <p:grpSpPr/>
+      <p:grpSpPr>
+        <a:xfrm>
+          <a:off x="0" y="0"/>
+          <a:ext cx="0" cy="0"/>
+          <a:chOff x="0" y="0"/>
+          <a:chExt cx="0" cy="0"/>
+        </a:xfrm>
+      </p:grpSpPr>
       <p:sp>
         <p:nvSpPr>
           <p:cNvPr id="2" name="TextBox 1"/>
@@ -6348,7 +6241,7 @@
 </file>
 
 <file path=ppt/slides/slide17.xml><?xml version="1.0" encoding="utf-8"?>
-<p:sld xmlns:a="http://schemas.openxmlformats.org/drawingml/2006/main" xmlns:p="http://schemas.openxmlformats.org/presentationml/2006/main" xmlns:r="http://schemas.openxmlformats.org/officeDocument/2006/relationships">
+<p:sld xmlns:a="http://schemas.openxmlformats.org/drawingml/2006/main" xmlns:r="http://schemas.openxmlformats.org/officeDocument/2006/relationships" xmlns:p="http://schemas.openxmlformats.org/presentationml/2006/main">
   <p:cSld>
     <p:bg>
       <p:bgPr>
@@ -6364,7 +6257,14 @@
         <p:cNvGrpSpPr/>
         <p:nvPr/>
       </p:nvGrpSpPr>
-      <p:grpSpPr/>
+      <p:grpSpPr>
+        <a:xfrm>
+          <a:off x="0" y="0"/>
+          <a:ext cx="0" cy="0"/>
+          <a:chOff x="0" y="0"/>
+          <a:chExt cx="0" cy="0"/>
+        </a:xfrm>
+      </p:grpSpPr>
       <p:sp>
         <p:nvSpPr>
           <p:cNvPr id="2" name="TextBox 1"/>
@@ -6477,7 +6377,7 @@
 </file>
 
 <file path=ppt/slides/slide2.xml><?xml version="1.0" encoding="utf-8"?>
-<p:sld xmlns:a="http://schemas.openxmlformats.org/drawingml/2006/main" xmlns:p="http://schemas.openxmlformats.org/presentationml/2006/main" xmlns:r="http://schemas.openxmlformats.org/officeDocument/2006/relationships">
+<p:sld xmlns:a="http://schemas.openxmlformats.org/drawingml/2006/main" xmlns:r="http://schemas.openxmlformats.org/officeDocument/2006/relationships" xmlns:p="http://schemas.openxmlformats.org/presentationml/2006/main">
   <p:cSld>
     <p:bg>
       <p:bgPr>
@@ -6493,7 +6393,14 @@
         <p:cNvGrpSpPr/>
         <p:nvPr/>
       </p:nvGrpSpPr>
-      <p:grpSpPr/>
+      <p:grpSpPr>
+        <a:xfrm>
+          <a:off x="0" y="0"/>
+          <a:ext cx="0" cy="0"/>
+          <a:chOff x="0" y="0"/>
+          <a:chExt cx="0" cy="0"/>
+        </a:xfrm>
+      </p:grpSpPr>
       <p:sp>
         <p:nvSpPr>
           <p:cNvPr id="2" name="TextBox 1"/>
@@ -6718,7 +6625,7 @@
 </file>
 
 <file path=ppt/slides/slide3.xml><?xml version="1.0" encoding="utf-8"?>
-<p:sld xmlns:a="http://schemas.openxmlformats.org/drawingml/2006/main" xmlns:p="http://schemas.openxmlformats.org/presentationml/2006/main" xmlns:r="http://schemas.openxmlformats.org/officeDocument/2006/relationships">
+<p:sld xmlns:a="http://schemas.openxmlformats.org/drawingml/2006/main" xmlns:r="http://schemas.openxmlformats.org/officeDocument/2006/relationships" xmlns:p="http://schemas.openxmlformats.org/presentationml/2006/main">
   <p:cSld>
     <p:bg>
       <p:bgPr>
@@ -6734,7 +6641,14 @@
         <p:cNvGrpSpPr/>
         <p:nvPr/>
       </p:nvGrpSpPr>
-      <p:grpSpPr/>
+      <p:grpSpPr>
+        <a:xfrm>
+          <a:off x="0" y="0"/>
+          <a:ext cx="0" cy="0"/>
+          <a:chOff x="0" y="0"/>
+          <a:chExt cx="0" cy="0"/>
+        </a:xfrm>
+      </p:grpSpPr>
       <p:sp>
         <p:nvSpPr>
           <p:cNvPr id="2" name="TextBox 1"/>
@@ -6776,6 +6690,294 @@
                 <a:latin typeface="Calibri"/>
               </a:rPr>
               <a:t>U-Net shape — but the deep layers use MLPs, not convolution or attention</a:t>
+            </a:r>
+          </a:p>
+        </p:txBody>
+      </p:sp>
+      <p:sp>
+        <p:nvSpPr>
+          <p:cNvPr id="3" name="TextBox 2"/>
+          <p:cNvSpPr txBox="1"/>
+          <p:nvPr/>
+        </p:nvSpPr>
+        <p:spPr>
+          <a:xfrm>
+            <a:off x="548641" y="1463040"/>
+            <a:ext cx="4183616" cy="3934410"/>
+          </a:xfrm>
+          <a:prstGeom prst="rect">
+            <a:avLst/>
+          </a:prstGeom>
+          <a:noFill/>
+        </p:spPr>
+        <p:txBody>
+          <a:bodyPr wrap="square">
+            <a:spAutoFit/>
+          </a:bodyPr>
+          <a:lstStyle/>
+          <a:p>
+            <a:pPr>
+              <a:spcAft>
+                <a:spcPts val="1000"/>
+              </a:spcAft>
+            </a:pPr>
+            <a:r>
+              <a:rPr sz="1600" b="1" i="0" dirty="0">
+                <a:solidFill>
+                  <a:srgbClr val="000000"/>
+                </a:solidFill>
+                <a:latin typeface="Calibri"/>
+              </a:rPr>
+              <a:t>Conv stage</a:t>
+            </a:r>
+            <a:r>
+              <a:rPr sz="1600" b="0" i="0" dirty="0">
+                <a:solidFill>
+                  <a:srgbClr val="000000"/>
+                </a:solidFill>
+                <a:latin typeface="Calibri"/>
+              </a:rPr>
+              <a:t> (3 shallow levels) — Conv3×3 → BN → </a:t>
+            </a:r>
+            <a:r>
+              <a:rPr sz="1600" b="0" i="0" dirty="0" err="1">
+                <a:solidFill>
+                  <a:srgbClr val="000000"/>
+                </a:solidFill>
+                <a:latin typeface="Calibri"/>
+              </a:rPr>
+              <a:t>ReLU</a:t>
+            </a:r>
+            <a:r>
+              <a:rPr sz="1600" b="0" i="0" dirty="0">
+                <a:solidFill>
+                  <a:srgbClr val="000000"/>
+                </a:solidFill>
+                <a:latin typeface="Calibri"/>
+              </a:rPr>
+              <a:t>, narrow channels (16/32/128)</a:t>
+            </a:r>
+          </a:p>
+          <a:p>
+            <a:pPr>
+              <a:spcAft>
+                <a:spcPts val="1000"/>
+              </a:spcAft>
+            </a:pPr>
+            <a:r>
+              <a:rPr sz="1600" b="1" i="0" dirty="0">
+                <a:solidFill>
+                  <a:srgbClr val="000000"/>
+                </a:solidFill>
+                <a:latin typeface="Calibri"/>
+              </a:rPr>
+              <a:t>Tokenized MLP stage</a:t>
+            </a:r>
+            <a:r>
+              <a:rPr sz="1600" b="0" i="0" dirty="0">
+                <a:solidFill>
+                  <a:srgbClr val="000000"/>
+                </a:solidFill>
+                <a:latin typeface="Calibri"/>
+              </a:rPr>
+              <a:t> (2 deep levels) — features are tokenized, then passed through shifted MLPs</a:t>
+            </a:r>
+          </a:p>
+          <a:p>
+            <a:pPr>
+              <a:spcAft>
+                <a:spcPts val="1000"/>
+              </a:spcAft>
+            </a:pPr>
+            <a:r>
+              <a:rPr sz="1600" b="1" i="0" dirty="0">
+                <a:solidFill>
+                  <a:srgbClr val="000000"/>
+                </a:solidFill>
+                <a:latin typeface="Calibri"/>
+              </a:rPr>
+              <a:t>Skip connections</a:t>
+            </a:r>
+            <a:r>
+              <a:rPr sz="1600" b="0" i="0" dirty="0">
+                <a:solidFill>
+                  <a:srgbClr val="000000"/>
+                </a:solidFill>
+                <a:latin typeface="Calibri"/>
+              </a:rPr>
+              <a:t> join matching encoder and decoder levels</a:t>
+            </a:r>
+          </a:p>
+          <a:p>
+            <a:pPr>
+              <a:spcAft>
+                <a:spcPts val="1000"/>
+              </a:spcAft>
+            </a:pPr>
+            <a:endParaRPr sz="1600" b="0" i="0" dirty="0">
+              <a:solidFill>
+                <a:srgbClr val="000000"/>
+              </a:solidFill>
+              <a:latin typeface="Calibri"/>
+            </a:endParaRPr>
+          </a:p>
+          <a:p>
+            <a:pPr>
+              <a:spcAft>
+                <a:spcPts val="1000"/>
+              </a:spcAft>
+            </a:pPr>
+            <a:r>
+              <a:rPr sz="1600" b="1" i="0" dirty="0">
+                <a:solidFill>
+                  <a:srgbClr val="000000"/>
+                </a:solidFill>
+                <a:latin typeface="Calibri"/>
+              </a:rPr>
+              <a:t>Why MLPs?</a:t>
+            </a:r>
+            <a:r>
+              <a:rPr sz="1600" b="0" i="0" dirty="0">
+                <a:solidFill>
+                  <a:srgbClr val="000000"/>
+                </a:solidFill>
+                <a:latin typeface="Calibri"/>
+              </a:rPr>
+              <a:t> Self-attention costs O(n²) in the number of tokens. MLPs are plain matrix multiplies — far cheaper.</a:t>
+            </a:r>
+          </a:p>
+          <a:p>
+            <a:pPr>
+              <a:spcAft>
+                <a:spcPts val="1000"/>
+              </a:spcAft>
+            </a:pPr>
+            <a:r>
+              <a:rPr sz="1600" b="1" i="0" dirty="0">
+                <a:solidFill>
+                  <a:srgbClr val="000000"/>
+                </a:solidFill>
+                <a:latin typeface="Calibri"/>
+              </a:rPr>
+              <a:t>The catch:</a:t>
+            </a:r>
+            <a:r>
+              <a:rPr sz="1600" b="0" i="0" dirty="0">
+                <a:solidFill>
+                  <a:srgbClr val="000000"/>
+                </a:solidFill>
+                <a:latin typeface="Calibri"/>
+              </a:rPr>
+              <a:t> an MLP is spatially blind. It has no notion of "adjacent pixel".</a:t>
+            </a:r>
+          </a:p>
+        </p:txBody>
+      </p:sp>
+      <p:pic>
+        <p:nvPicPr>
+          <p:cNvPr id="5" name="Picture 4">
+            <a:extLst>
+              <a:ext uri="{FF2B5EF4-FFF2-40B4-BE49-F238E27FC236}">
+                <a16:creationId xmlns:a16="http://schemas.microsoft.com/office/drawing/2014/main" id="{2DE48908-5637-2F3E-F04A-83FC05B9E2D6}"/>
+              </a:ext>
+            </a:extLst>
+          </p:cNvPr>
+          <p:cNvPicPr>
+            <a:picLocks noChangeAspect="1"/>
+          </p:cNvPicPr>
+          <p:nvPr/>
+        </p:nvPicPr>
+        <p:blipFill>
+          <a:blip r:embed="rId2"/>
+          <a:srcRect b="8242"/>
+          <a:stretch>
+            <a:fillRect/>
+          </a:stretch>
+        </p:blipFill>
+        <p:spPr>
+          <a:xfrm>
+            <a:off x="4868944" y="1395167"/>
+            <a:ext cx="6862713" cy="4722829"/>
+          </a:xfrm>
+          <a:prstGeom prst="rect">
+            <a:avLst/>
+          </a:prstGeom>
+        </p:spPr>
+      </p:pic>
+    </p:spTree>
+  </p:cSld>
+  <p:clrMapOvr>
+    <a:masterClrMapping/>
+  </p:clrMapOvr>
+</p:sld>
+</file>
+
+<file path=ppt/slides/slide4.xml><?xml version="1.0" encoding="utf-8"?>
+<p:sld xmlns:a="http://schemas.openxmlformats.org/drawingml/2006/main" xmlns:r="http://schemas.openxmlformats.org/officeDocument/2006/relationships" xmlns:p="http://schemas.openxmlformats.org/presentationml/2006/main">
+  <p:cSld>
+    <p:bg>
+      <p:bgPr>
+        <a:solidFill>
+          <a:srgbClr val="FFFFFF"/>
+        </a:solidFill>
+        <a:effectLst/>
+      </p:bgPr>
+    </p:bg>
+    <p:spTree>
+      <p:nvGrpSpPr>
+        <p:cNvPr id="1" name=""/>
+        <p:cNvGrpSpPr/>
+        <p:nvPr/>
+      </p:nvGrpSpPr>
+      <p:grpSpPr>
+        <a:xfrm>
+          <a:off x="0" y="0"/>
+          <a:ext cx="0" cy="0"/>
+          <a:chOff x="0" y="0"/>
+          <a:chExt cx="0" cy="0"/>
+        </a:xfrm>
+      </p:grpSpPr>
+      <p:sp>
+        <p:nvSpPr>
+          <p:cNvPr id="2" name="TextBox 1"/>
+          <p:cNvSpPr txBox="1"/>
+          <p:nvPr/>
+        </p:nvSpPr>
+        <p:spPr>
+          <a:xfrm>
+            <a:off x="548640" y="320040"/>
+            <a:ext cx="11094415" cy="822960"/>
+          </a:xfrm>
+          <a:prstGeom prst="rect">
+            <a:avLst/>
+          </a:prstGeom>
+          <a:noFill/>
+        </p:spPr>
+        <p:txBody>
+          <a:bodyPr wrap="square">
+            <a:spAutoFit/>
+          </a:bodyPr>
+          <a:lstStyle/>
+          <a:p>
+            <a:r>
+              <a:rPr sz="3000" b="1" i="0">
+                <a:solidFill>
+                  <a:srgbClr val="000000"/>
+                </a:solidFill>
+                <a:latin typeface="Calibri"/>
+              </a:rPr>
+              <a:t>The key trick: shifted MLPs</a:t>
+            </a:r>
+          </a:p>
+          <a:p>
+            <a:r>
+              <a:rPr sz="1400" b="0" i="1">
+                <a:solidFill>
+                  <a:srgbClr val="555555"/>
+                </a:solidFill>
+                <a:latin typeface="Calibri"/>
+              </a:rPr>
+              <a:t>How UNeXt gives an MLP a sense of locality — for free</a:t>
             </a:r>
           </a:p>
         </p:txBody>
@@ -6808,22 +7010,31 @@
               </a:spcAft>
             </a:pPr>
             <a:r>
-              <a:rPr sz="1600" b="1" i="0">
-                <a:solidFill>
-                  <a:srgbClr val="000000"/>
-                </a:solidFill>
-                <a:latin typeface="Calibri"/>
-              </a:rPr>
-              <a:t>Conv stage</a:t>
-            </a:r>
-            <a:r>
-              <a:rPr sz="1600" b="0" i="0">
-                <a:solidFill>
-                  <a:srgbClr val="000000"/>
-                </a:solidFill>
-                <a:latin typeface="Calibri"/>
-              </a:rPr>
-              <a:t> (3 shallow levels) — Conv3×3 → BN → ReLU, narrow channels (16/32/128)</a:t>
+              <a:rPr sz="1500" b="0" i="0">
+                <a:solidFill>
+                  <a:srgbClr val="000000"/>
+                </a:solidFill>
+                <a:latin typeface="Calibri"/>
+              </a:rPr>
+              <a:t>Before each Linear layer, feature-map chunks are </a:t>
+            </a:r>
+            <a:r>
+              <a:rPr sz="1500" b="1" i="0">
+                <a:solidFill>
+                  <a:srgbClr val="000000"/>
+                </a:solidFill>
+                <a:latin typeface="Calibri"/>
+              </a:rPr>
+              <a:t>cyclically shifted</a:t>
+            </a:r>
+            <a:r>
+              <a:rPr sz="1500" b="0" i="0">
+                <a:solidFill>
+                  <a:srgbClr val="000000"/>
+                </a:solidFill>
+                <a:latin typeface="Calibri"/>
+              </a:rPr>
+              <a:t> (torch.roll, ±2 px) along height, then width</a:t>
             </a:r>
           </a:p>
           <a:p>
@@ -6833,22 +7044,13 @@
               </a:spcAft>
             </a:pPr>
             <a:r>
-              <a:rPr sz="1600" b="1" i="0">
-                <a:solidFill>
-                  <a:srgbClr val="000000"/>
-                </a:solidFill>
-                <a:latin typeface="Calibri"/>
-              </a:rPr>
-              <a:t>Tokenized MLP stage</a:t>
-            </a:r>
-            <a:r>
-              <a:rPr sz="1600" b="0" i="0">
-                <a:solidFill>
-                  <a:srgbClr val="000000"/>
-                </a:solidFill>
-                <a:latin typeface="Calibri"/>
-              </a:rPr>
-              <a:t> (2 deep levels) — features are tokenized, then passed through shifted MLPs</a:t>
+              <a:rPr sz="1500" b="0" i="0">
+                <a:solidFill>
+                  <a:srgbClr val="000000"/>
+                </a:solidFill>
+                <a:latin typeface="Calibri"/>
+              </a:rPr>
+              <a:t>A depthwise convolution sits between the two Linear layers as positional encoding</a:t>
             </a:r>
           </a:p>
           <a:p>
@@ -6858,22 +7060,22 @@
               </a:spcAft>
             </a:pPr>
             <a:r>
-              <a:rPr sz="1600" b="1" i="0">
-                <a:solidFill>
-                  <a:srgbClr val="000000"/>
-                </a:solidFill>
-                <a:latin typeface="Calibri"/>
-              </a:rPr>
-              <a:t>Skip connections</a:t>
-            </a:r>
-            <a:r>
-              <a:rPr sz="1600" b="0" i="0">
-                <a:solidFill>
-                  <a:srgbClr val="000000"/>
-                </a:solidFill>
-                <a:latin typeface="Calibri"/>
-              </a:rPr>
-              <a:t> join matching encoder and decoder levels</a:t>
+              <a:rPr sz="1500" b="1" i="0">
+                <a:solidFill>
+                  <a:srgbClr val="000000"/>
+                </a:solidFill>
+                <a:latin typeface="Calibri"/>
+              </a:rPr>
+              <a:t>Each token now mixes with its actual spatial neighbours</a:t>
+            </a:r>
+            <a:r>
+              <a:rPr sz="1500" b="0" i="0">
+                <a:solidFill>
+                  <a:srgbClr val="000000"/>
+                </a:solidFill>
+                <a:latin typeface="Calibri"/>
+              </a:rPr>
+              <a:t> before projection</a:t>
             </a:r>
           </a:p>
           <a:p>
@@ -6882,93 +7084,592 @@
                 <a:spcPts val="1000"/>
               </a:spcAft>
             </a:pPr>
-          </a:p>
-          <a:p>
-            <a:pPr>
-              <a:spcAft>
-                <a:spcPts val="1000"/>
-              </a:spcAft>
-            </a:pPr>
-            <a:r>
-              <a:rPr sz="1600" b="1" i="0">
-                <a:solidFill>
-                  <a:srgbClr val="000000"/>
-                </a:solidFill>
-                <a:latin typeface="Calibri"/>
-              </a:rPr>
-              <a:t>Why MLPs?</a:t>
-            </a:r>
-            <a:r>
-              <a:rPr sz="1600" b="0" i="0">
-                <a:solidFill>
-                  <a:srgbClr val="000000"/>
-                </a:solidFill>
-                <a:latin typeface="Calibri"/>
-              </a:rPr>
-              <a:t> Self-attention costs O(n²) in the number of tokens. MLPs are plain matrix multiplies — far cheaper.</a:t>
-            </a:r>
-          </a:p>
-          <a:p>
-            <a:pPr>
-              <a:spcAft>
-                <a:spcPts val="1000"/>
-              </a:spcAft>
-            </a:pPr>
-            <a:r>
-              <a:rPr sz="1600" b="1" i="0">
-                <a:solidFill>
-                  <a:srgbClr val="000000"/>
-                </a:solidFill>
-                <a:latin typeface="Calibri"/>
-              </a:rPr>
-              <a:t>The catch:</a:t>
-            </a:r>
-            <a:r>
-              <a:rPr sz="1600" b="0" i="0">
-                <a:solidFill>
-                  <a:srgbClr val="000000"/>
-                </a:solidFill>
-                <a:latin typeface="Calibri"/>
-              </a:rPr>
-              <a:t> an MLP is spatially blind. It has no notion of "adjacent pixel".</a:t>
+            <a:r>
+              <a:rPr sz="1500" b="1" i="0">
+                <a:solidFill>
+                  <a:srgbClr val="000000"/>
+                </a:solidFill>
+                <a:latin typeface="Calibri"/>
+              </a:rPr>
+              <a:t>Cost: zero extra parameters, zero extra FLOPs</a:t>
+            </a:r>
+            <a:r>
+              <a:rPr sz="1500" b="0" i="0">
+                <a:solidFill>
+                  <a:srgbClr val="000000"/>
+                </a:solidFill>
+                <a:latin typeface="Calibri"/>
+              </a:rPr>
+              <a:t> — it is pure indexing</a:t>
             </a:r>
           </a:p>
         </p:txBody>
       </p:sp>
-      <p:sp>
-        <p:nvSpPr>
-          <p:cNvPr id="4" name="TextBox 3"/>
-          <p:cNvSpPr txBox="1"/>
-          <p:nvPr/>
-        </p:nvSpPr>
-        <p:spPr>
-          <a:xfrm>
-            <a:off x="548640" y="6199632"/>
-            <a:ext cx="11094415" cy="457200"/>
-          </a:xfrm>
-          <a:prstGeom prst="rect">
-            <a:avLst/>
-          </a:prstGeom>
-          <a:noFill/>
-        </p:spPr>
-        <p:txBody>
-          <a:bodyPr wrap="square">
-            <a:spAutoFit/>
-          </a:bodyPr>
-          <a:lstStyle/>
-          <a:p>
-            <a:r>
-              <a:rPr sz="1200" b="0" i="1">
-                <a:solidFill>
-                  <a:srgbClr val="555555"/>
-                </a:solidFill>
-                <a:latin typeface="Calibri"/>
-              </a:rPr>
-              <a:t>Architecture figure: insert unext/imgs/unext.png from the official repository here.</a:t>
-            </a:r>
-          </a:p>
-        </p:txBody>
-      </p:sp>
+      <p:graphicFrame>
+        <p:nvGraphicFramePr>
+          <p:cNvPr id="4" name="Table 3"/>
+          <p:cNvGraphicFramePr>
+            <a:graphicFrameLocks noGrp="1"/>
+          </p:cNvGraphicFramePr>
+          <p:nvPr>
+            <p:extLst>
+              <p:ext uri="{D42A27DB-BD31-4B8C-83A1-F6EECF244321}">
+                <p14:modId xmlns:p14="http://schemas.microsoft.com/office/powerpoint/2010/main" val="2661609277"/>
+              </p:ext>
+            </p:extLst>
+          </p:nvPr>
+        </p:nvGraphicFramePr>
+        <p:xfrm>
+          <a:off x="548640" y="3566160"/>
+          <a:ext cx="11094413" cy="2194560"/>
+        </p:xfrm>
+        <a:graphic>
+          <a:graphicData uri="http://schemas.openxmlformats.org/drawingml/2006/table">
+            <a:tbl>
+              <a:tblPr firstRow="1" bandRow="1">
+                <a:tableStyleId>{5C22544A-7EE6-4342-B048-85BDC9FD1C3A}</a:tableStyleId>
+              </a:tblPr>
+              <a:tblGrid>
+                <a:gridCol w="3698138">
+                  <a:extLst>
+                    <a:ext uri="{9D8B030D-6E8A-4147-A177-3AD203B41FA5}">
+                      <a16:colId xmlns:a16="http://schemas.microsoft.com/office/drawing/2014/main" val="20000"/>
+                    </a:ext>
+                  </a:extLst>
+                </a:gridCol>
+                <a:gridCol w="2465425">
+                  <a:extLst>
+                    <a:ext uri="{9D8B030D-6E8A-4147-A177-3AD203B41FA5}">
+                      <a16:colId xmlns:a16="http://schemas.microsoft.com/office/drawing/2014/main" val="20001"/>
+                    </a:ext>
+                  </a:extLst>
+                </a:gridCol>
+                <a:gridCol w="2465425">
+                  <a:extLst>
+                    <a:ext uri="{9D8B030D-6E8A-4147-A177-3AD203B41FA5}">
+                      <a16:colId xmlns:a16="http://schemas.microsoft.com/office/drawing/2014/main" val="20002"/>
+                    </a:ext>
+                  </a:extLst>
+                </a:gridCol>
+                <a:gridCol w="2465425">
+                  <a:extLst>
+                    <a:ext uri="{9D8B030D-6E8A-4147-A177-3AD203B41FA5}">
+                      <a16:colId xmlns:a16="http://schemas.microsoft.com/office/drawing/2014/main" val="20003"/>
+                    </a:ext>
+                  </a:extLst>
+                </a:gridCol>
+              </a:tblGrid>
+              <a:tr h="438912">
+                <a:tc>
+                  <a:txBody>
+                    <a:bodyPr/>
+                    <a:lstStyle/>
+                    <a:p>
+                      <a:pPr algn="l"/>
+                      <a:r>
+                        <a:rPr sz="1400" b="1" i="0">
+                          <a:solidFill>
+                            <a:srgbClr val="000000"/>
+                          </a:solidFill>
+                          <a:latin typeface="Calibri"/>
+                        </a:rPr>
+                        <a:t>Paper's reported results (BUSI)</a:t>
+                      </a:r>
+                    </a:p>
+                  </a:txBody>
+                  <a:tcPr>
+                    <a:solidFill>
+                      <a:srgbClr val="FFFFFF"/>
+                    </a:solidFill>
+                  </a:tcPr>
+                </a:tc>
+                <a:tc>
+                  <a:txBody>
+                    <a:bodyPr/>
+                    <a:lstStyle/>
+                    <a:p>
+                      <a:pPr algn="ctr"/>
+                      <a:r>
+                        <a:rPr sz="1400" b="1" i="0">
+                          <a:solidFill>
+                            <a:srgbClr val="000000"/>
+                          </a:solidFill>
+                          <a:latin typeface="Calibri"/>
+                        </a:rPr>
+                        <a:t>UNeXt</a:t>
+                      </a:r>
+                    </a:p>
+                  </a:txBody>
+                  <a:tcPr>
+                    <a:solidFill>
+                      <a:srgbClr val="FFFFFF"/>
+                    </a:solidFill>
+                  </a:tcPr>
+                </a:tc>
+                <a:tc>
+                  <a:txBody>
+                    <a:bodyPr/>
+                    <a:lstStyle/>
+                    <a:p>
+                      <a:pPr algn="ctr"/>
+                      <a:r>
+                        <a:rPr sz="1400" b="1" i="0">
+                          <a:solidFill>
+                            <a:srgbClr val="000000"/>
+                          </a:solidFill>
+                          <a:latin typeface="Calibri"/>
+                        </a:rPr>
+                        <a:t>TransUNet</a:t>
+                      </a:r>
+                    </a:p>
+                  </a:txBody>
+                  <a:tcPr>
+                    <a:solidFill>
+                      <a:srgbClr val="FFFFFF"/>
+                    </a:solidFill>
+                  </a:tcPr>
+                </a:tc>
+                <a:tc>
+                  <a:txBody>
+                    <a:bodyPr/>
+                    <a:lstStyle/>
+                    <a:p>
+                      <a:pPr algn="ctr"/>
+                      <a:r>
+                        <a:rPr sz="1400" b="1" i="0">
+                          <a:solidFill>
+                            <a:srgbClr val="000000"/>
+                          </a:solidFill>
+                          <a:latin typeface="Calibri"/>
+                        </a:rPr>
+                        <a:t>Factor</a:t>
+                      </a:r>
+                    </a:p>
+                  </a:txBody>
+                  <a:tcPr>
+                    <a:solidFill>
+                      <a:srgbClr val="FFFFFF"/>
+                    </a:solidFill>
+                  </a:tcPr>
+                </a:tc>
+                <a:extLst>
+                  <a:ext uri="{0D108BD9-81ED-4DB2-BD59-A6C34878D82A}">
+                    <a16:rowId xmlns:a16="http://schemas.microsoft.com/office/drawing/2014/main" val="10000"/>
+                  </a:ext>
+                </a:extLst>
+              </a:tr>
+              <a:tr h="438912">
+                <a:tc>
+                  <a:txBody>
+                    <a:bodyPr/>
+                    <a:lstStyle/>
+                    <a:p>
+                      <a:pPr algn="l"/>
+                      <a:r>
+                        <a:rPr sz="1400" b="0" i="0">
+                          <a:solidFill>
+                            <a:srgbClr val="000000"/>
+                          </a:solidFill>
+                          <a:latin typeface="Calibri"/>
+                        </a:rPr>
+                        <a:t>Parameters</a:t>
+                      </a:r>
+                    </a:p>
+                  </a:txBody>
+                  <a:tcPr>
+                    <a:solidFill>
+                      <a:srgbClr val="FFFFFF"/>
+                    </a:solidFill>
+                  </a:tcPr>
+                </a:tc>
+                <a:tc>
+                  <a:txBody>
+                    <a:bodyPr/>
+                    <a:lstStyle/>
+                    <a:p>
+                      <a:pPr algn="ctr"/>
+                      <a:r>
+                        <a:rPr sz="1400" b="0" i="0">
+                          <a:solidFill>
+                            <a:srgbClr val="000000"/>
+                          </a:solidFill>
+                          <a:latin typeface="Calibri"/>
+                        </a:rPr>
+                        <a:t>1.47 M</a:t>
+                      </a:r>
+                    </a:p>
+                  </a:txBody>
+                  <a:tcPr>
+                    <a:solidFill>
+                      <a:srgbClr val="FFFFFF"/>
+                    </a:solidFill>
+                  </a:tcPr>
+                </a:tc>
+                <a:tc>
+                  <a:txBody>
+                    <a:bodyPr/>
+                    <a:lstStyle/>
+                    <a:p>
+                      <a:pPr algn="ctr"/>
+                      <a:r>
+                        <a:rPr sz="1400" b="0" i="0">
+                          <a:solidFill>
+                            <a:srgbClr val="000000"/>
+                          </a:solidFill>
+                          <a:latin typeface="Calibri"/>
+                        </a:rPr>
+                        <a:t>105.32 M</a:t>
+                      </a:r>
+                    </a:p>
+                  </a:txBody>
+                  <a:tcPr>
+                    <a:solidFill>
+                      <a:srgbClr val="FFFFFF"/>
+                    </a:solidFill>
+                  </a:tcPr>
+                </a:tc>
+                <a:tc>
+                  <a:txBody>
+                    <a:bodyPr/>
+                    <a:lstStyle/>
+                    <a:p>
+                      <a:pPr algn="ctr"/>
+                      <a:r>
+                        <a:rPr sz="1400" b="1" i="0">
+                          <a:solidFill>
+                            <a:srgbClr val="000000"/>
+                          </a:solidFill>
+                          <a:latin typeface="Calibri"/>
+                        </a:rPr>
+                        <a:t>72× fewer</a:t>
+                      </a:r>
+                    </a:p>
+                  </a:txBody>
+                  <a:tcPr>
+                    <a:solidFill>
+                      <a:srgbClr val="FFFFFF"/>
+                    </a:solidFill>
+                  </a:tcPr>
+                </a:tc>
+                <a:extLst>
+                  <a:ext uri="{0D108BD9-81ED-4DB2-BD59-A6C34878D82A}">
+                    <a16:rowId xmlns:a16="http://schemas.microsoft.com/office/drawing/2014/main" val="10001"/>
+                  </a:ext>
+                </a:extLst>
+              </a:tr>
+              <a:tr h="438912">
+                <a:tc>
+                  <a:txBody>
+                    <a:bodyPr/>
+                    <a:lstStyle/>
+                    <a:p>
+                      <a:pPr algn="l"/>
+                      <a:r>
+                        <a:rPr sz="1400" b="0" i="0">
+                          <a:solidFill>
+                            <a:srgbClr val="000000"/>
+                          </a:solidFill>
+                          <a:latin typeface="Calibri"/>
+                        </a:rPr>
+                        <a:t>GFLOPs</a:t>
+                      </a:r>
+                    </a:p>
+                  </a:txBody>
+                  <a:tcPr>
+                    <a:solidFill>
+                      <a:srgbClr val="FFFFFF"/>
+                    </a:solidFill>
+                  </a:tcPr>
+                </a:tc>
+                <a:tc>
+                  <a:txBody>
+                    <a:bodyPr/>
+                    <a:lstStyle/>
+                    <a:p>
+                      <a:pPr algn="ctr"/>
+                      <a:r>
+                        <a:rPr sz="1400" b="0" i="0">
+                          <a:solidFill>
+                            <a:srgbClr val="000000"/>
+                          </a:solidFill>
+                          <a:latin typeface="Calibri"/>
+                        </a:rPr>
+                        <a:t>0.57</a:t>
+                      </a:r>
+                    </a:p>
+                  </a:txBody>
+                  <a:tcPr>
+                    <a:solidFill>
+                      <a:srgbClr val="FFFFFF"/>
+                    </a:solidFill>
+                  </a:tcPr>
+                </a:tc>
+                <a:tc>
+                  <a:txBody>
+                    <a:bodyPr/>
+                    <a:lstStyle/>
+                    <a:p>
+                      <a:pPr algn="ctr"/>
+                      <a:r>
+                        <a:rPr sz="1400" b="0" i="0">
+                          <a:solidFill>
+                            <a:srgbClr val="000000"/>
+                          </a:solidFill>
+                          <a:latin typeface="Calibri"/>
+                        </a:rPr>
+                        <a:t>38.52</a:t>
+                      </a:r>
+                    </a:p>
+                  </a:txBody>
+                  <a:tcPr>
+                    <a:solidFill>
+                      <a:srgbClr val="FFFFFF"/>
+                    </a:solidFill>
+                  </a:tcPr>
+                </a:tc>
+                <a:tc>
+                  <a:txBody>
+                    <a:bodyPr/>
+                    <a:lstStyle/>
+                    <a:p>
+                      <a:pPr algn="ctr"/>
+                      <a:r>
+                        <a:rPr sz="1400" b="1" i="0">
+                          <a:solidFill>
+                            <a:srgbClr val="000000"/>
+                          </a:solidFill>
+                          <a:latin typeface="Calibri"/>
+                        </a:rPr>
+                        <a:t>68× less</a:t>
+                      </a:r>
+                    </a:p>
+                  </a:txBody>
+                  <a:tcPr>
+                    <a:solidFill>
+                      <a:srgbClr val="FFFFFF"/>
+                    </a:solidFill>
+                  </a:tcPr>
+                </a:tc>
+                <a:extLst>
+                  <a:ext uri="{0D108BD9-81ED-4DB2-BD59-A6C34878D82A}">
+                    <a16:rowId xmlns:a16="http://schemas.microsoft.com/office/drawing/2014/main" val="10002"/>
+                  </a:ext>
+                </a:extLst>
+              </a:tr>
+              <a:tr h="438912">
+                <a:tc>
+                  <a:txBody>
+                    <a:bodyPr/>
+                    <a:lstStyle/>
+                    <a:p>
+                      <a:pPr algn="l"/>
+                      <a:r>
+                        <a:rPr sz="1400" b="0" i="0">
+                          <a:solidFill>
+                            <a:srgbClr val="000000"/>
+                          </a:solidFill>
+                          <a:latin typeface="Calibri"/>
+                        </a:rPr>
+                        <a:t>CPU inference</a:t>
+                      </a:r>
+                    </a:p>
+                  </a:txBody>
+                  <a:tcPr>
+                    <a:solidFill>
+                      <a:srgbClr val="FFFFFF"/>
+                    </a:solidFill>
+                  </a:tcPr>
+                </a:tc>
+                <a:tc>
+                  <a:txBody>
+                    <a:bodyPr/>
+                    <a:lstStyle/>
+                    <a:p>
+                      <a:pPr algn="ctr"/>
+                      <a:r>
+                        <a:rPr sz="1400" b="0" i="0">
+                          <a:solidFill>
+                            <a:srgbClr val="000000"/>
+                          </a:solidFill>
+                          <a:latin typeface="Calibri"/>
+                        </a:rPr>
+                        <a:t>25 ms</a:t>
+                      </a:r>
+                    </a:p>
+                  </a:txBody>
+                  <a:tcPr>
+                    <a:solidFill>
+                      <a:srgbClr val="FFFFFF"/>
+                    </a:solidFill>
+                  </a:tcPr>
+                </a:tc>
+                <a:tc>
+                  <a:txBody>
+                    <a:bodyPr/>
+                    <a:lstStyle/>
+                    <a:p>
+                      <a:pPr algn="ctr"/>
+                      <a:r>
+                        <a:rPr sz="1400" b="0" i="0">
+                          <a:solidFill>
+                            <a:srgbClr val="000000"/>
+                          </a:solidFill>
+                          <a:latin typeface="Calibri"/>
+                        </a:rPr>
+                        <a:t>246 ms</a:t>
+                      </a:r>
+                    </a:p>
+                  </a:txBody>
+                  <a:tcPr>
+                    <a:solidFill>
+                      <a:srgbClr val="FFFFFF"/>
+                    </a:solidFill>
+                  </a:tcPr>
+                </a:tc>
+                <a:tc>
+                  <a:txBody>
+                    <a:bodyPr/>
+                    <a:lstStyle/>
+                    <a:p>
+                      <a:pPr algn="ctr"/>
+                      <a:r>
+                        <a:rPr sz="1400" b="1" i="0">
+                          <a:solidFill>
+                            <a:srgbClr val="000000"/>
+                          </a:solidFill>
+                          <a:latin typeface="Calibri"/>
+                        </a:rPr>
+                        <a:t>10× faster</a:t>
+                      </a:r>
+                    </a:p>
+                  </a:txBody>
+                  <a:tcPr>
+                    <a:solidFill>
+                      <a:srgbClr val="FFFFFF"/>
+                    </a:solidFill>
+                  </a:tcPr>
+                </a:tc>
+                <a:extLst>
+                  <a:ext uri="{0D108BD9-81ED-4DB2-BD59-A6C34878D82A}">
+                    <a16:rowId xmlns:a16="http://schemas.microsoft.com/office/drawing/2014/main" val="10003"/>
+                  </a:ext>
+                </a:extLst>
+              </a:tr>
+              <a:tr h="438912">
+                <a:tc>
+                  <a:txBody>
+                    <a:bodyPr/>
+                    <a:lstStyle/>
+                    <a:p>
+                      <a:pPr algn="l"/>
+                      <a:r>
+                        <a:rPr sz="1400" b="0" i="0">
+                          <a:solidFill>
+                            <a:srgbClr val="000000"/>
+                          </a:solidFill>
+                          <a:latin typeface="Calibri"/>
+                        </a:rPr>
+                        <a:t>IoU / F1</a:t>
+                      </a:r>
+                    </a:p>
+                  </a:txBody>
+                  <a:tcPr>
+                    <a:solidFill>
+                      <a:srgbClr val="FFFFFF"/>
+                    </a:solidFill>
+                  </a:tcPr>
+                </a:tc>
+                <a:tc>
+                  <a:txBody>
+                    <a:bodyPr/>
+                    <a:lstStyle/>
+                    <a:p>
+                      <a:pPr algn="ctr"/>
+                      <a:r>
+                        <a:rPr sz="1400" b="0" i="0">
+                          <a:solidFill>
+                            <a:srgbClr val="000000"/>
+                          </a:solidFill>
+                          <a:latin typeface="Calibri"/>
+                        </a:rPr>
+                        <a:t>0.6695 / 0.7937</a:t>
+                      </a:r>
+                    </a:p>
+                  </a:txBody>
+                  <a:tcPr>
+                    <a:solidFill>
+                      <a:srgbClr val="FFFFFF"/>
+                    </a:solidFill>
+                  </a:tcPr>
+                </a:tc>
+                <a:tc>
+                  <a:txBody>
+                    <a:bodyPr/>
+                    <a:lstStyle/>
+                    <a:p>
+                      <a:pPr algn="ctr"/>
+                      <a:r>
+                        <a:rPr lang="en-US" sz="1400" b="0" i="0" dirty="0">
+                          <a:solidFill>
+                            <a:srgbClr val="000000"/>
+                          </a:solidFill>
+                          <a:latin typeface="Calibri"/>
+                        </a:rPr>
+                        <a:t>0.6692/0.7930</a:t>
+                      </a:r>
+                      <a:endParaRPr sz="1400" b="0" i="0" dirty="0">
+                        <a:solidFill>
+                          <a:srgbClr val="000000"/>
+                        </a:solidFill>
+                        <a:latin typeface="Calibri"/>
+                      </a:endParaRPr>
+                    </a:p>
+                  </a:txBody>
+                  <a:tcPr>
+                    <a:solidFill>
+                      <a:srgbClr val="FFFFFF"/>
+                    </a:solidFill>
+                  </a:tcPr>
+                </a:tc>
+                <a:tc>
+                  <a:txBody>
+                    <a:bodyPr/>
+                    <a:lstStyle/>
+                    <a:p>
+                      <a:pPr algn="ctr"/>
+                      <a:r>
+                        <a:rPr lang="en-US" sz="1400" b="1" i="0" dirty="0">
+                          <a:solidFill>
+                            <a:srgbClr val="000000"/>
+                          </a:solidFill>
+                          <a:latin typeface="Calibri"/>
+                        </a:rPr>
+                        <a:t>~1</a:t>
+                      </a:r>
+                      <a:endParaRPr sz="1400" b="1" i="0" dirty="0">
+                        <a:solidFill>
+                          <a:srgbClr val="000000"/>
+                        </a:solidFill>
+                        <a:latin typeface="Calibri"/>
+                      </a:endParaRPr>
+                    </a:p>
+                  </a:txBody>
+                  <a:tcPr>
+                    <a:solidFill>
+                      <a:srgbClr val="FFFFFF"/>
+                    </a:solidFill>
+                  </a:tcPr>
+                </a:tc>
+                <a:extLst>
+                  <a:ext uri="{0D108BD9-81ED-4DB2-BD59-A6C34878D82A}">
+                    <a16:rowId xmlns:a16="http://schemas.microsoft.com/office/drawing/2014/main" val="10004"/>
+                  </a:ext>
+                </a:extLst>
+              </a:tr>
+            </a:tbl>
+          </a:graphicData>
+        </a:graphic>
+      </p:graphicFrame>
     </p:spTree>
   </p:cSld>
   <p:clrMapOvr>
@@ -6977,8 +7678,8 @@
 </p:sld>
 </file>
 
-<file path=ppt/slides/slide4.xml><?xml version="1.0" encoding="utf-8"?>
-<p:sld xmlns:a="http://schemas.openxmlformats.org/drawingml/2006/main" xmlns:p="http://schemas.openxmlformats.org/presentationml/2006/main" xmlns:r="http://schemas.openxmlformats.org/officeDocument/2006/relationships">
+<file path=ppt/slides/slide5.xml><?xml version="1.0" encoding="utf-8"?>
+<p:sld xmlns:a="http://schemas.openxmlformats.org/drawingml/2006/main" xmlns:r="http://schemas.openxmlformats.org/officeDocument/2006/relationships" xmlns:p="http://schemas.openxmlformats.org/presentationml/2006/main">
   <p:cSld>
     <p:bg>
       <p:bgPr>
@@ -6994,733 +7695,14 @@
         <p:cNvGrpSpPr/>
         <p:nvPr/>
       </p:nvGrpSpPr>
-      <p:grpSpPr/>
-      <p:sp>
-        <p:nvSpPr>
-          <p:cNvPr id="2" name="TextBox 1"/>
-          <p:cNvSpPr txBox="1"/>
-          <p:nvPr/>
-        </p:nvSpPr>
-        <p:spPr>
-          <a:xfrm>
-            <a:off x="548640" y="320040"/>
-            <a:ext cx="11094415" cy="822960"/>
-          </a:xfrm>
-          <a:prstGeom prst="rect">
-            <a:avLst/>
-          </a:prstGeom>
-          <a:noFill/>
-        </p:spPr>
-        <p:txBody>
-          <a:bodyPr wrap="square">
-            <a:spAutoFit/>
-          </a:bodyPr>
-          <a:lstStyle/>
-          <a:p>
-            <a:r>
-              <a:rPr sz="3000" b="1" i="0">
-                <a:solidFill>
-                  <a:srgbClr val="000000"/>
-                </a:solidFill>
-                <a:latin typeface="Calibri"/>
-              </a:rPr>
-              <a:t>The key trick: shifted MLPs</a:t>
-            </a:r>
-          </a:p>
-          <a:p>
-            <a:r>
-              <a:rPr sz="1400" b="0" i="1">
-                <a:solidFill>
-                  <a:srgbClr val="555555"/>
-                </a:solidFill>
-                <a:latin typeface="Calibri"/>
-              </a:rPr>
-              <a:t>How UNeXt gives an MLP a sense of locality — for free</a:t>
-            </a:r>
-          </a:p>
-        </p:txBody>
-      </p:sp>
-      <p:sp>
-        <p:nvSpPr>
-          <p:cNvPr id="3" name="TextBox 2"/>
-          <p:cNvSpPr txBox="1"/>
-          <p:nvPr/>
-        </p:nvSpPr>
-        <p:spPr>
-          <a:xfrm>
-            <a:off x="548640" y="1463040"/>
-            <a:ext cx="11094415" cy="4937760"/>
-          </a:xfrm>
-          <a:prstGeom prst="rect">
-            <a:avLst/>
-          </a:prstGeom>
-          <a:noFill/>
-        </p:spPr>
-        <p:txBody>
-          <a:bodyPr wrap="square">
-            <a:spAutoFit/>
-          </a:bodyPr>
-          <a:lstStyle/>
-          <a:p>
-            <a:pPr>
-              <a:spcAft>
-                <a:spcPts val="1000"/>
-              </a:spcAft>
-            </a:pPr>
-            <a:r>
-              <a:rPr sz="1500" b="0" i="0">
-                <a:solidFill>
-                  <a:srgbClr val="000000"/>
-                </a:solidFill>
-                <a:latin typeface="Calibri"/>
-              </a:rPr>
-              <a:t>Before each Linear layer, feature-map chunks are </a:t>
-            </a:r>
-            <a:r>
-              <a:rPr sz="1500" b="1" i="0">
-                <a:solidFill>
-                  <a:srgbClr val="000000"/>
-                </a:solidFill>
-                <a:latin typeface="Calibri"/>
-              </a:rPr>
-              <a:t>cyclically shifted</a:t>
-            </a:r>
-            <a:r>
-              <a:rPr sz="1500" b="0" i="0">
-                <a:solidFill>
-                  <a:srgbClr val="000000"/>
-                </a:solidFill>
-                <a:latin typeface="Calibri"/>
-              </a:rPr>
-              <a:t> (torch.roll, ±2 px) along height, then width</a:t>
-            </a:r>
-          </a:p>
-          <a:p>
-            <a:pPr>
-              <a:spcAft>
-                <a:spcPts val="1000"/>
-              </a:spcAft>
-            </a:pPr>
-            <a:r>
-              <a:rPr sz="1500" b="0" i="0">
-                <a:solidFill>
-                  <a:srgbClr val="000000"/>
-                </a:solidFill>
-                <a:latin typeface="Calibri"/>
-              </a:rPr>
-              <a:t>A depthwise convolution sits between the two Linear layers as positional encoding</a:t>
-            </a:r>
-          </a:p>
-          <a:p>
-            <a:pPr>
-              <a:spcAft>
-                <a:spcPts val="1000"/>
-              </a:spcAft>
-            </a:pPr>
-            <a:r>
-              <a:rPr sz="1500" b="1" i="0">
-                <a:solidFill>
-                  <a:srgbClr val="000000"/>
-                </a:solidFill>
-                <a:latin typeface="Calibri"/>
-              </a:rPr>
-              <a:t>Each token now mixes with its actual spatial neighbours</a:t>
-            </a:r>
-            <a:r>
-              <a:rPr sz="1500" b="0" i="0">
-                <a:solidFill>
-                  <a:srgbClr val="000000"/>
-                </a:solidFill>
-                <a:latin typeface="Calibri"/>
-              </a:rPr>
-              <a:t> before projection</a:t>
-            </a:r>
-          </a:p>
-          <a:p>
-            <a:pPr>
-              <a:spcAft>
-                <a:spcPts val="1000"/>
-              </a:spcAft>
-            </a:pPr>
-            <a:r>
-              <a:rPr sz="1500" b="1" i="0">
-                <a:solidFill>
-                  <a:srgbClr val="000000"/>
-                </a:solidFill>
-                <a:latin typeface="Calibri"/>
-              </a:rPr>
-              <a:t>Cost: zero extra parameters, zero extra FLOPs</a:t>
-            </a:r>
-            <a:r>
-              <a:rPr sz="1500" b="0" i="0">
-                <a:solidFill>
-                  <a:srgbClr val="000000"/>
-                </a:solidFill>
-                <a:latin typeface="Calibri"/>
-              </a:rPr>
-              <a:t> — it is pure indexing</a:t>
-            </a:r>
-          </a:p>
-        </p:txBody>
-      </p:sp>
-      <p:graphicFrame>
-        <p:nvGraphicFramePr>
-          <p:cNvPr id="4" name="Table 3"/>
-          <p:cNvGraphicFramePr>
-            <a:graphicFrameLocks noGrp="1"/>
-          </p:cNvGraphicFramePr>
-          <p:nvPr/>
-        </p:nvGraphicFramePr>
-        <p:xfrm>
-          <a:off x="548640" y="3566160"/>
-          <a:ext cx="11094413" cy="2194560"/>
-        </p:xfrm>
-        <a:graphic>
-          <a:graphicData uri="http://schemas.openxmlformats.org/drawingml/2006/table">
-            <a:tbl>
-              <a:tblPr firstRow="1" bandRow="1">
-                <a:tableStyleId>{5C22544A-7EE6-4342-B048-85BDC9FD1C3A}</a:tableStyleId>
-              </a:tblPr>
-              <a:tblGrid>
-                <a:gridCol w="3698138"/>
-                <a:gridCol w="2465425"/>
-                <a:gridCol w="2465425"/>
-                <a:gridCol w="2465425"/>
-              </a:tblGrid>
-              <a:tr h="438912">
-                <a:tc>
-                  <a:txBody>
-                    <a:bodyPr wrap="square"/>
-                    <a:lstStyle/>
-                    <a:p>
-                      <a:pPr algn="l"/>
-                      <a:r>
-                        <a:rPr sz="1400" b="1" i="0">
-                          <a:solidFill>
-                            <a:srgbClr val="000000"/>
-                          </a:solidFill>
-                          <a:latin typeface="Calibri"/>
-                        </a:rPr>
-                        <a:t>Paper's reported results (BUSI)</a:t>
-                      </a:r>
-                    </a:p>
-                  </a:txBody>
-                  <a:tcPr>
-                    <a:solidFill>
-                      <a:srgbClr val="FFFFFF"/>
-                    </a:solidFill>
-                  </a:tcPr>
-                </a:tc>
-                <a:tc>
-                  <a:txBody>
-                    <a:bodyPr wrap="square"/>
-                    <a:lstStyle/>
-                    <a:p>
-                      <a:pPr algn="ctr"/>
-                      <a:r>
-                        <a:rPr sz="1400" b="1" i="0">
-                          <a:solidFill>
-                            <a:srgbClr val="000000"/>
-                          </a:solidFill>
-                          <a:latin typeface="Calibri"/>
-                        </a:rPr>
-                        <a:t>UNeXt</a:t>
-                      </a:r>
-                    </a:p>
-                  </a:txBody>
-                  <a:tcPr>
-                    <a:solidFill>
-                      <a:srgbClr val="FFFFFF"/>
-                    </a:solidFill>
-                  </a:tcPr>
-                </a:tc>
-                <a:tc>
-                  <a:txBody>
-                    <a:bodyPr wrap="square"/>
-                    <a:lstStyle/>
-                    <a:p>
-                      <a:pPr algn="ctr"/>
-                      <a:r>
-                        <a:rPr sz="1400" b="1" i="0">
-                          <a:solidFill>
-                            <a:srgbClr val="000000"/>
-                          </a:solidFill>
-                          <a:latin typeface="Calibri"/>
-                        </a:rPr>
-                        <a:t>TransUNet</a:t>
-                      </a:r>
-                    </a:p>
-                  </a:txBody>
-                  <a:tcPr>
-                    <a:solidFill>
-                      <a:srgbClr val="FFFFFF"/>
-                    </a:solidFill>
-                  </a:tcPr>
-                </a:tc>
-                <a:tc>
-                  <a:txBody>
-                    <a:bodyPr wrap="square"/>
-                    <a:lstStyle/>
-                    <a:p>
-                      <a:pPr algn="ctr"/>
-                      <a:r>
-                        <a:rPr sz="1400" b="1" i="0">
-                          <a:solidFill>
-                            <a:srgbClr val="000000"/>
-                          </a:solidFill>
-                          <a:latin typeface="Calibri"/>
-                        </a:rPr>
-                        <a:t>Factor</a:t>
-                      </a:r>
-                    </a:p>
-                  </a:txBody>
-                  <a:tcPr>
-                    <a:solidFill>
-                      <a:srgbClr val="FFFFFF"/>
-                    </a:solidFill>
-                  </a:tcPr>
-                </a:tc>
-              </a:tr>
-              <a:tr h="438912">
-                <a:tc>
-                  <a:txBody>
-                    <a:bodyPr wrap="square"/>
-                    <a:lstStyle/>
-                    <a:p>
-                      <a:pPr algn="l"/>
-                      <a:r>
-                        <a:rPr sz="1400" b="0" i="0">
-                          <a:solidFill>
-                            <a:srgbClr val="000000"/>
-                          </a:solidFill>
-                          <a:latin typeface="Calibri"/>
-                        </a:rPr>
-                        <a:t>Parameters</a:t>
-                      </a:r>
-                    </a:p>
-                  </a:txBody>
-                  <a:tcPr>
-                    <a:solidFill>
-                      <a:srgbClr val="FFFFFF"/>
-                    </a:solidFill>
-                  </a:tcPr>
-                </a:tc>
-                <a:tc>
-                  <a:txBody>
-                    <a:bodyPr wrap="square"/>
-                    <a:lstStyle/>
-                    <a:p>
-                      <a:pPr algn="ctr"/>
-                      <a:r>
-                        <a:rPr sz="1400" b="0" i="0">
-                          <a:solidFill>
-                            <a:srgbClr val="000000"/>
-                          </a:solidFill>
-                          <a:latin typeface="Calibri"/>
-                        </a:rPr>
-                        <a:t>1.47 M</a:t>
-                      </a:r>
-                    </a:p>
-                  </a:txBody>
-                  <a:tcPr>
-                    <a:solidFill>
-                      <a:srgbClr val="FFFFFF"/>
-                    </a:solidFill>
-                  </a:tcPr>
-                </a:tc>
-                <a:tc>
-                  <a:txBody>
-                    <a:bodyPr wrap="square"/>
-                    <a:lstStyle/>
-                    <a:p>
-                      <a:pPr algn="ctr"/>
-                      <a:r>
-                        <a:rPr sz="1400" b="0" i="0">
-                          <a:solidFill>
-                            <a:srgbClr val="000000"/>
-                          </a:solidFill>
-                          <a:latin typeface="Calibri"/>
-                        </a:rPr>
-                        <a:t>105.32 M</a:t>
-                      </a:r>
-                    </a:p>
-                  </a:txBody>
-                  <a:tcPr>
-                    <a:solidFill>
-                      <a:srgbClr val="FFFFFF"/>
-                    </a:solidFill>
-                  </a:tcPr>
-                </a:tc>
-                <a:tc>
-                  <a:txBody>
-                    <a:bodyPr wrap="square"/>
-                    <a:lstStyle/>
-                    <a:p>
-                      <a:pPr algn="ctr"/>
-                      <a:r>
-                        <a:rPr sz="1400" b="1" i="0">
-                          <a:solidFill>
-                            <a:srgbClr val="000000"/>
-                          </a:solidFill>
-                          <a:latin typeface="Calibri"/>
-                        </a:rPr>
-                        <a:t>72× fewer</a:t>
-                      </a:r>
-                    </a:p>
-                  </a:txBody>
-                  <a:tcPr>
-                    <a:solidFill>
-                      <a:srgbClr val="FFFFFF"/>
-                    </a:solidFill>
-                  </a:tcPr>
-                </a:tc>
-              </a:tr>
-              <a:tr h="438912">
-                <a:tc>
-                  <a:txBody>
-                    <a:bodyPr wrap="square"/>
-                    <a:lstStyle/>
-                    <a:p>
-                      <a:pPr algn="l"/>
-                      <a:r>
-                        <a:rPr sz="1400" b="0" i="0">
-                          <a:solidFill>
-                            <a:srgbClr val="000000"/>
-                          </a:solidFill>
-                          <a:latin typeface="Calibri"/>
-                        </a:rPr>
-                        <a:t>GFLOPs</a:t>
-                      </a:r>
-                    </a:p>
-                  </a:txBody>
-                  <a:tcPr>
-                    <a:solidFill>
-                      <a:srgbClr val="FFFFFF"/>
-                    </a:solidFill>
-                  </a:tcPr>
-                </a:tc>
-                <a:tc>
-                  <a:txBody>
-                    <a:bodyPr wrap="square"/>
-                    <a:lstStyle/>
-                    <a:p>
-                      <a:pPr algn="ctr"/>
-                      <a:r>
-                        <a:rPr sz="1400" b="0" i="0">
-                          <a:solidFill>
-                            <a:srgbClr val="000000"/>
-                          </a:solidFill>
-                          <a:latin typeface="Calibri"/>
-                        </a:rPr>
-                        <a:t>0.57</a:t>
-                      </a:r>
-                    </a:p>
-                  </a:txBody>
-                  <a:tcPr>
-                    <a:solidFill>
-                      <a:srgbClr val="FFFFFF"/>
-                    </a:solidFill>
-                  </a:tcPr>
-                </a:tc>
-                <a:tc>
-                  <a:txBody>
-                    <a:bodyPr wrap="square"/>
-                    <a:lstStyle/>
-                    <a:p>
-                      <a:pPr algn="ctr"/>
-                      <a:r>
-                        <a:rPr sz="1400" b="0" i="0">
-                          <a:solidFill>
-                            <a:srgbClr val="000000"/>
-                          </a:solidFill>
-                          <a:latin typeface="Calibri"/>
-                        </a:rPr>
-                        <a:t>38.52</a:t>
-                      </a:r>
-                    </a:p>
-                  </a:txBody>
-                  <a:tcPr>
-                    <a:solidFill>
-                      <a:srgbClr val="FFFFFF"/>
-                    </a:solidFill>
-                  </a:tcPr>
-                </a:tc>
-                <a:tc>
-                  <a:txBody>
-                    <a:bodyPr wrap="square"/>
-                    <a:lstStyle/>
-                    <a:p>
-                      <a:pPr algn="ctr"/>
-                      <a:r>
-                        <a:rPr sz="1400" b="1" i="0">
-                          <a:solidFill>
-                            <a:srgbClr val="000000"/>
-                          </a:solidFill>
-                          <a:latin typeface="Calibri"/>
-                        </a:rPr>
-                        <a:t>68× less</a:t>
-                      </a:r>
-                    </a:p>
-                  </a:txBody>
-                  <a:tcPr>
-                    <a:solidFill>
-                      <a:srgbClr val="FFFFFF"/>
-                    </a:solidFill>
-                  </a:tcPr>
-                </a:tc>
-              </a:tr>
-              <a:tr h="438912">
-                <a:tc>
-                  <a:txBody>
-                    <a:bodyPr wrap="square"/>
-                    <a:lstStyle/>
-                    <a:p>
-                      <a:pPr algn="l"/>
-                      <a:r>
-                        <a:rPr sz="1400" b="0" i="0">
-                          <a:solidFill>
-                            <a:srgbClr val="000000"/>
-                          </a:solidFill>
-                          <a:latin typeface="Calibri"/>
-                        </a:rPr>
-                        <a:t>CPU inference</a:t>
-                      </a:r>
-                    </a:p>
-                  </a:txBody>
-                  <a:tcPr>
-                    <a:solidFill>
-                      <a:srgbClr val="FFFFFF"/>
-                    </a:solidFill>
-                  </a:tcPr>
-                </a:tc>
-                <a:tc>
-                  <a:txBody>
-                    <a:bodyPr wrap="square"/>
-                    <a:lstStyle/>
-                    <a:p>
-                      <a:pPr algn="ctr"/>
-                      <a:r>
-                        <a:rPr sz="1400" b="0" i="0">
-                          <a:solidFill>
-                            <a:srgbClr val="000000"/>
-                          </a:solidFill>
-                          <a:latin typeface="Calibri"/>
-                        </a:rPr>
-                        <a:t>25 ms</a:t>
-                      </a:r>
-                    </a:p>
-                  </a:txBody>
-                  <a:tcPr>
-                    <a:solidFill>
-                      <a:srgbClr val="FFFFFF"/>
-                    </a:solidFill>
-                  </a:tcPr>
-                </a:tc>
-                <a:tc>
-                  <a:txBody>
-                    <a:bodyPr wrap="square"/>
-                    <a:lstStyle/>
-                    <a:p>
-                      <a:pPr algn="ctr"/>
-                      <a:r>
-                        <a:rPr sz="1400" b="0" i="0">
-                          <a:solidFill>
-                            <a:srgbClr val="000000"/>
-                          </a:solidFill>
-                          <a:latin typeface="Calibri"/>
-                        </a:rPr>
-                        <a:t>246 ms</a:t>
-                      </a:r>
-                    </a:p>
-                  </a:txBody>
-                  <a:tcPr>
-                    <a:solidFill>
-                      <a:srgbClr val="FFFFFF"/>
-                    </a:solidFill>
-                  </a:tcPr>
-                </a:tc>
-                <a:tc>
-                  <a:txBody>
-                    <a:bodyPr wrap="square"/>
-                    <a:lstStyle/>
-                    <a:p>
-                      <a:pPr algn="ctr"/>
-                      <a:r>
-                        <a:rPr sz="1400" b="1" i="0">
-                          <a:solidFill>
-                            <a:srgbClr val="000000"/>
-                          </a:solidFill>
-                          <a:latin typeface="Calibri"/>
-                        </a:rPr>
-                        <a:t>10× faster</a:t>
-                      </a:r>
-                    </a:p>
-                  </a:txBody>
-                  <a:tcPr>
-                    <a:solidFill>
-                      <a:srgbClr val="FFFFFF"/>
-                    </a:solidFill>
-                  </a:tcPr>
-                </a:tc>
-              </a:tr>
-              <a:tr h="438912">
-                <a:tc>
-                  <a:txBody>
-                    <a:bodyPr wrap="square"/>
-                    <a:lstStyle/>
-                    <a:p>
-                      <a:pPr algn="l"/>
-                      <a:r>
-                        <a:rPr sz="1400" b="0" i="0">
-                          <a:solidFill>
-                            <a:srgbClr val="000000"/>
-                          </a:solidFill>
-                          <a:latin typeface="Calibri"/>
-                        </a:rPr>
-                        <a:t>IoU / F1</a:t>
-                      </a:r>
-                    </a:p>
-                  </a:txBody>
-                  <a:tcPr>
-                    <a:solidFill>
-                      <a:srgbClr val="FFFFFF"/>
-                    </a:solidFill>
-                  </a:tcPr>
-                </a:tc>
-                <a:tc>
-                  <a:txBody>
-                    <a:bodyPr wrap="square"/>
-                    <a:lstStyle/>
-                    <a:p>
-                      <a:pPr algn="ctr"/>
-                      <a:r>
-                        <a:rPr sz="1400" b="0" i="0">
-                          <a:solidFill>
-                            <a:srgbClr val="000000"/>
-                          </a:solidFill>
-                          <a:latin typeface="Calibri"/>
-                        </a:rPr>
-                        <a:t>0.6695 / 0.7937</a:t>
-                      </a:r>
-                    </a:p>
-                  </a:txBody>
-                  <a:tcPr>
-                    <a:solidFill>
-                      <a:srgbClr val="FFFFFF"/>
-                    </a:solidFill>
-                  </a:tcPr>
-                </a:tc>
-                <a:tc>
-                  <a:txBody>
-                    <a:bodyPr wrap="square"/>
-                    <a:lstStyle/>
-                    <a:p>
-                      <a:pPr algn="ctr"/>
-                      <a:r>
-                        <a:rPr sz="1400" b="0" i="0">
-                          <a:solidFill>
-                            <a:srgbClr val="000000"/>
-                          </a:solidFill>
-                          <a:latin typeface="Calibri"/>
-                        </a:rPr>
-                        <a:t>lower</a:t>
-                      </a:r>
-                    </a:p>
-                  </a:txBody>
-                  <a:tcPr>
-                    <a:solidFill>
-                      <a:srgbClr val="FFFFFF"/>
-                    </a:solidFill>
-                  </a:tcPr>
-                </a:tc>
-                <a:tc>
-                  <a:txBody>
-                    <a:bodyPr wrap="square"/>
-                    <a:lstStyle/>
-                    <a:p>
-                      <a:pPr algn="ctr"/>
-                      <a:r>
-                        <a:rPr sz="1400" b="0" i="0">
-                          <a:solidFill>
-                            <a:srgbClr val="000000"/>
-                          </a:solidFill>
-                          <a:latin typeface="Calibri"/>
-                        </a:rPr>
-                        <a:t>p &lt; 10⁻⁵</a:t>
-                      </a:r>
-                    </a:p>
-                  </a:txBody>
-                  <a:tcPr>
-                    <a:solidFill>
-                      <a:srgbClr val="FFFFFF"/>
-                    </a:solidFill>
-                  </a:tcPr>
-                </a:tc>
-              </a:tr>
-            </a:tbl>
-          </a:graphicData>
-        </a:graphic>
-      </p:graphicFrame>
-      <p:sp>
-        <p:nvSpPr>
-          <p:cNvPr id="5" name="TextBox 4"/>
-          <p:cNvSpPr txBox="1"/>
-          <p:nvPr/>
-        </p:nvSpPr>
-        <p:spPr>
-          <a:xfrm>
-            <a:off x="548640" y="6199632"/>
-            <a:ext cx="11094415" cy="457200"/>
-          </a:xfrm>
-          <a:prstGeom prst="rect">
-            <a:avLst/>
-          </a:prstGeom>
-          <a:noFill/>
-        </p:spPr>
-        <p:txBody>
-          <a:bodyPr wrap="square">
-            <a:spAutoFit/>
-          </a:bodyPr>
-          <a:lstStyle/>
-          <a:p>
-            <a:r>
-              <a:rPr sz="1200" b="0" i="1">
-                <a:solidFill>
-                  <a:srgbClr val="555555"/>
-                </a:solidFill>
-                <a:latin typeface="Calibri"/>
-              </a:rPr>
-              <a:t>This locality bias is why UNeXt trains from scratch without ImageNet pretraining, unlike ViT-based medical models.</a:t>
-            </a:r>
-          </a:p>
-        </p:txBody>
-      </p:sp>
-    </p:spTree>
-  </p:cSld>
-  <p:clrMapOvr>
-    <a:masterClrMapping/>
-  </p:clrMapOvr>
-</p:sld>
-</file>
-
-<file path=ppt/slides/slide5.xml><?xml version="1.0" encoding="utf-8"?>
-<p:sld xmlns:a="http://schemas.openxmlformats.org/drawingml/2006/main" xmlns:p="http://schemas.openxmlformats.org/presentationml/2006/main" xmlns:r="http://schemas.openxmlformats.org/officeDocument/2006/relationships">
-  <p:cSld>
-    <p:bg>
-      <p:bgPr>
-        <a:solidFill>
-          <a:srgbClr val="FFFFFF"/>
-        </a:solidFill>
-        <a:effectLst/>
-      </p:bgPr>
-    </p:bg>
-    <p:spTree>
-      <p:nvGrpSpPr>
-        <p:cNvPr id="1" name=""/>
-        <p:cNvGrpSpPr/>
-        <p:nvPr/>
-      </p:nvGrpSpPr>
-      <p:grpSpPr/>
+      <p:grpSpPr>
+        <a:xfrm>
+          <a:off x="0" y="0"/>
+          <a:ext cx="0" cy="0"/>
+          <a:chOff x="0" y="0"/>
+          <a:chExt cx="0" cy="0"/>
+        </a:xfrm>
+      </p:grpSpPr>
       <p:sp>
         <p:nvSpPr>
           <p:cNvPr id="2" name="TextBox 1"/>
@@ -7888,11 +7870,17 @@
           <p:cNvGraphicFramePr>
             <a:graphicFrameLocks noGrp="1"/>
           </p:cNvGraphicFramePr>
-          <p:nvPr/>
+          <p:nvPr>
+            <p:extLst>
+              <p:ext uri="{D42A27DB-BD31-4B8C-83A1-F6EECF244321}">
+                <p14:modId xmlns:p14="http://schemas.microsoft.com/office/powerpoint/2010/main" val="3756412635"/>
+              </p:ext>
+            </p:extLst>
+          </p:nvPr>
         </p:nvGraphicFramePr>
         <p:xfrm>
           <a:off x="548640" y="3200400"/>
-          <a:ext cx="7680960" cy="1828800"/>
+          <a:ext cx="9443772" cy="3200400"/>
         </p:xfrm>
         <a:graphic>
           <a:graphicData uri="http://schemas.openxmlformats.org/drawingml/2006/table">
@@ -7901,19 +7889,37 @@
                 <a:tableStyleId>{5C22544A-7EE6-4342-B048-85BDC9FD1C3A}</a:tableStyleId>
               </a:tblPr>
               <a:tblGrid>
-                <a:gridCol w="3840480"/>
-                <a:gridCol w="1920240"/>
-                <a:gridCol w="1920240"/>
+                <a:gridCol w="4721886">
+                  <a:extLst>
+                    <a:ext uri="{9D8B030D-6E8A-4147-A177-3AD203B41FA5}">
+                      <a16:colId xmlns:a16="http://schemas.microsoft.com/office/drawing/2014/main" val="20000"/>
+                    </a:ext>
+                  </a:extLst>
+                </a:gridCol>
+                <a:gridCol w="2360943">
+                  <a:extLst>
+                    <a:ext uri="{9D8B030D-6E8A-4147-A177-3AD203B41FA5}">
+                      <a16:colId xmlns:a16="http://schemas.microsoft.com/office/drawing/2014/main" val="20001"/>
+                    </a:ext>
+                  </a:extLst>
+                </a:gridCol>
+                <a:gridCol w="2360943">
+                  <a:extLst>
+                    <a:ext uri="{9D8B030D-6E8A-4147-A177-3AD203B41FA5}">
+                      <a16:colId xmlns:a16="http://schemas.microsoft.com/office/drawing/2014/main" val="20002"/>
+                    </a:ext>
+                  </a:extLst>
+                </a:gridCol>
               </a:tblGrid>
-              <a:tr h="457200">
-                <a:tc>
-                  <a:txBody>
-                    <a:bodyPr wrap="square"/>
+              <a:tr h="800100">
+                <a:tc>
+                  <a:txBody>
+                    <a:bodyPr/>
                     <a:lstStyle/>
                     <a:p>
                       <a:pPr algn="l"/>
                       <a:r>
-                        <a:rPr sz="1400" b="1" i="0">
+                        <a:rPr sz="1800" b="1" i="0">
                           <a:solidFill>
                             <a:srgbClr val="000000"/>
                           </a:solidFill>
@@ -7931,12 +7937,12 @@
                 </a:tc>
                 <a:tc>
                   <a:txBody>
-                    <a:bodyPr wrap="square"/>
+                    <a:bodyPr/>
                     <a:lstStyle/>
                     <a:p>
                       <a:pPr algn="ctr"/>
                       <a:r>
-                        <a:rPr sz="1400" b="1" i="0">
+                        <a:rPr sz="1800" b="1" i="0">
                           <a:solidFill>
                             <a:srgbClr val="000000"/>
                           </a:solidFill>
@@ -7954,12 +7960,12 @@
                 </a:tc>
                 <a:tc>
                   <a:txBody>
-                    <a:bodyPr wrap="square"/>
+                    <a:bodyPr/>
                     <a:lstStyle/>
                     <a:p>
                       <a:pPr algn="ctr"/>
                       <a:r>
-                        <a:rPr sz="1400" b="1" i="0">
+                        <a:rPr sz="1800" b="1" i="0">
                           <a:solidFill>
                             <a:srgbClr val="000000"/>
                           </a:solidFill>
@@ -7975,16 +7981,21 @@
                     </a:solidFill>
                   </a:tcPr>
                 </a:tc>
+                <a:extLst>
+                  <a:ext uri="{0D108BD9-81ED-4DB2-BD59-A6C34878D82A}">
+                    <a16:rowId xmlns:a16="http://schemas.microsoft.com/office/drawing/2014/main" val="10000"/>
+                  </a:ext>
+                </a:extLst>
               </a:tr>
-              <a:tr h="457200">
-                <a:tc>
-                  <a:txBody>
-                    <a:bodyPr wrap="square"/>
+              <a:tr h="800100">
+                <a:tc>
+                  <a:txBody>
+                    <a:bodyPr/>
                     <a:lstStyle/>
                     <a:p>
                       <a:pPr algn="l"/>
                       <a:r>
-                        <a:rPr sz="1400" b="0" i="0">
+                        <a:rPr sz="1800" b="0" i="0">
                           <a:solidFill>
                             <a:srgbClr val="000000"/>
                           </a:solidFill>
@@ -8002,12 +8013,12 @@
                 </a:tc>
                 <a:tc>
                   <a:txBody>
-                    <a:bodyPr wrap="square"/>
+                    <a:bodyPr/>
                     <a:lstStyle/>
                     <a:p>
                       <a:pPr algn="ctr"/>
                       <a:r>
-                        <a:rPr sz="1400" b="0" i="0">
+                        <a:rPr sz="1800" b="0" i="0">
                           <a:solidFill>
                             <a:srgbClr val="000000"/>
                           </a:solidFill>
@@ -8025,12 +8036,12 @@
                 </a:tc>
                 <a:tc>
                   <a:txBody>
-                    <a:bodyPr wrap="square"/>
+                    <a:bodyPr/>
                     <a:lstStyle/>
                     <a:p>
                       <a:pPr algn="ctr"/>
                       <a:r>
-                        <a:rPr sz="1400" b="0" i="0">
+                        <a:rPr sz="1800" b="0" i="0">
                           <a:solidFill>
                             <a:srgbClr val="000000"/>
                           </a:solidFill>
@@ -8046,16 +8057,21 @@
                     </a:solidFill>
                   </a:tcPr>
                 </a:tc>
+                <a:extLst>
+                  <a:ext uri="{0D108BD9-81ED-4DB2-BD59-A6C34878D82A}">
+                    <a16:rowId xmlns:a16="http://schemas.microsoft.com/office/drawing/2014/main" val="10001"/>
+                  </a:ext>
+                </a:extLst>
               </a:tr>
-              <a:tr h="457200">
-                <a:tc>
-                  <a:txBody>
-                    <a:bodyPr wrap="square"/>
+              <a:tr h="800100">
+                <a:tc>
+                  <a:txBody>
+                    <a:bodyPr/>
                     <a:lstStyle/>
                     <a:p>
                       <a:pPr algn="l"/>
                       <a:r>
-                        <a:rPr sz="1400" b="0" i="0">
+                        <a:rPr sz="1800" b="0" i="0">
                           <a:solidFill>
                             <a:srgbClr val="000000"/>
                           </a:solidFill>
@@ -8073,12 +8089,12 @@
                 </a:tc>
                 <a:tc>
                   <a:txBody>
-                    <a:bodyPr wrap="square"/>
+                    <a:bodyPr/>
                     <a:lstStyle/>
                     <a:p>
                       <a:pPr algn="ctr"/>
                       <a:r>
-                        <a:rPr sz="1400" b="0" i="0">
+                        <a:rPr sz="1800" b="0" i="0" dirty="0">
                           <a:solidFill>
                             <a:srgbClr val="000000"/>
                           </a:solidFill>
@@ -8096,12 +8112,12 @@
                 </a:tc>
                 <a:tc>
                   <a:txBody>
-                    <a:bodyPr wrap="square"/>
+                    <a:bodyPr/>
                     <a:lstStyle/>
                     <a:p>
                       <a:pPr algn="ctr"/>
                       <a:r>
-                        <a:rPr sz="1400" b="0" i="0">
+                        <a:rPr sz="1800" b="0" i="0" dirty="0">
                           <a:solidFill>
                             <a:srgbClr val="000000"/>
                           </a:solidFill>
@@ -8117,16 +8133,21 @@
                     </a:solidFill>
                   </a:tcPr>
                 </a:tc>
+                <a:extLst>
+                  <a:ext uri="{0D108BD9-81ED-4DB2-BD59-A6C34878D82A}">
+                    <a16:rowId xmlns:a16="http://schemas.microsoft.com/office/drawing/2014/main" val="10002"/>
+                  </a:ext>
+                </a:extLst>
               </a:tr>
-              <a:tr h="457200">
-                <a:tc>
-                  <a:txBody>
-                    <a:bodyPr wrap="square"/>
+              <a:tr h="800100">
+                <a:tc>
+                  <a:txBody>
+                    <a:bodyPr/>
                     <a:lstStyle/>
                     <a:p>
                       <a:pPr algn="l"/>
                       <a:r>
-                        <a:rPr sz="1400" b="0" i="0">
+                        <a:rPr sz="1800" b="0" i="0">
                           <a:solidFill>
                             <a:srgbClr val="000000"/>
                           </a:solidFill>
@@ -8144,12 +8165,12 @@
                 </a:tc>
                 <a:tc>
                   <a:txBody>
-                    <a:bodyPr wrap="square"/>
+                    <a:bodyPr/>
                     <a:lstStyle/>
                     <a:p>
                       <a:pPr algn="ctr"/>
                       <a:r>
-                        <a:rPr sz="1400" b="0" i="0">
+                        <a:rPr sz="1800" b="0" i="0">
                           <a:solidFill>
                             <a:srgbClr val="000000"/>
                           </a:solidFill>
@@ -8167,66 +8188,55 @@
                 </a:tc>
                 <a:tc>
                   <a:txBody>
-                    <a:bodyPr wrap="square"/>
+                    <a:bodyPr/>
                     <a:lstStyle/>
                     <a:p>
                       <a:pPr algn="ctr"/>
                       <a:r>
-                        <a:rPr sz="1400" b="0" i="0">
-                          <a:solidFill>
-                            <a:srgbClr val="000000"/>
-                          </a:solidFill>
-                          <a:latin typeface="Calibri"/>
-                        </a:rPr>
-                        <a:t>25 ms ✓</a:t>
-                      </a:r>
-                    </a:p>
-                  </a:txBody>
-                  <a:tcPr>
-                    <a:solidFill>
-                      <a:srgbClr val="FFFFFF"/>
-                    </a:solidFill>
-                  </a:tcPr>
-                </a:tc>
+                        <a:rPr sz="1800" b="0" i="0" dirty="0">
+                          <a:solidFill>
+                            <a:srgbClr val="000000"/>
+                          </a:solidFill>
+                          <a:latin typeface="Calibri"/>
+                        </a:rPr>
+                        <a:t>25 </a:t>
+                      </a:r>
+                      <a:r>
+                        <a:rPr sz="1800" b="0" i="0" dirty="0" err="1">
+                          <a:solidFill>
+                            <a:srgbClr val="000000"/>
+                          </a:solidFill>
+                          <a:latin typeface="Calibri"/>
+                        </a:rPr>
+                        <a:t>ms</a:t>
+                      </a:r>
+                      <a:r>
+                        <a:rPr sz="1800" b="0" i="0" dirty="0">
+                          <a:solidFill>
+                            <a:srgbClr val="000000"/>
+                          </a:solidFill>
+                          <a:latin typeface="Calibri"/>
+                        </a:rPr>
+                        <a:t> ✓</a:t>
+                      </a:r>
+                    </a:p>
+                  </a:txBody>
+                  <a:tcPr>
+                    <a:solidFill>
+                      <a:srgbClr val="FFFFFF"/>
+                    </a:solidFill>
+                  </a:tcPr>
+                </a:tc>
+                <a:extLst>
+                  <a:ext uri="{0D108BD9-81ED-4DB2-BD59-A6C34878D82A}">
+                    <a16:rowId xmlns:a16="http://schemas.microsoft.com/office/drawing/2014/main" val="10003"/>
+                  </a:ext>
+                </a:extLst>
               </a:tr>
             </a:tbl>
           </a:graphicData>
         </a:graphic>
       </p:graphicFrame>
-      <p:sp>
-        <p:nvSpPr>
-          <p:cNvPr id="5" name="TextBox 4"/>
-          <p:cNvSpPr txBox="1"/>
-          <p:nvPr/>
-        </p:nvSpPr>
-        <p:spPr>
-          <a:xfrm>
-            <a:off x="548640" y="6199632"/>
-            <a:ext cx="11094415" cy="457200"/>
-          </a:xfrm>
-          <a:prstGeom prst="rect">
-            <a:avLst/>
-          </a:prstGeom>
-          <a:noFill/>
-        </p:spPr>
-        <p:txBody>
-          <a:bodyPr wrap="square">
-            <a:spAutoFit/>
-          </a:bodyPr>
-          <a:lstStyle/>
-          <a:p>
-            <a:r>
-              <a:rPr sz="1200" b="0" i="1">
-                <a:solidFill>
-                  <a:srgbClr val="555555"/>
-                </a:solidFill>
-                <a:latin typeface="Calibri"/>
-              </a:rPr>
-              <a:t>This matters: the architecture reproduces exactly, so any accuracy gap that follows is NOT a broken implementation.</a:t>
-            </a:r>
-          </a:p>
-        </p:txBody>
-      </p:sp>
     </p:spTree>
   </p:cSld>
   <p:clrMapOvr>
@@ -8236,7 +8246,7 @@
 </file>
 
 <file path=ppt/slides/slide6.xml><?xml version="1.0" encoding="utf-8"?>
-<p:sld xmlns:a="http://schemas.openxmlformats.org/drawingml/2006/main" xmlns:p="http://schemas.openxmlformats.org/presentationml/2006/main" xmlns:r="http://schemas.openxmlformats.org/officeDocument/2006/relationships">
+<p:sld xmlns:a="http://schemas.openxmlformats.org/drawingml/2006/main" xmlns:r="http://schemas.openxmlformats.org/officeDocument/2006/relationships" xmlns:p="http://schemas.openxmlformats.org/presentationml/2006/main">
   <p:cSld>
     <p:bg>
       <p:bgPr>
@@ -8252,7 +8262,14 @@
         <p:cNvGrpSpPr/>
         <p:nvPr/>
       </p:nvGrpSpPr>
-      <p:grpSpPr/>
+      <p:grpSpPr>
+        <a:xfrm>
+          <a:off x="0" y="0"/>
+          <a:ext cx="0" cy="0"/>
+          <a:chOff x="0" y="0"/>
+          <a:chExt cx="0" cy="0"/>
+        </a:xfrm>
+      </p:grpSpPr>
       <p:sp>
         <p:nvSpPr>
           <p:cNvPr id="2" name="TextBox 1"/>
@@ -8463,7 +8480,7 @@
         <p:spPr>
           <a:xfrm>
             <a:off x="548640" y="6199632"/>
-            <a:ext cx="11094415" cy="457200"/>
+            <a:ext cx="11094415" cy="276999"/>
           </a:xfrm>
           <a:prstGeom prst="rect">
             <a:avLst/>
@@ -8477,13 +8494,22 @@
           <a:lstStyle/>
           <a:p>
             <a:r>
-              <a:rPr sz="1200" b="0" i="1">
+              <a:rPr lang="en-US" sz="1200" b="0" i="1" dirty="0">
                 <a:solidFill>
                   <a:srgbClr val="555555"/>
                 </a:solidFill>
                 <a:latin typeface="Calibri"/>
               </a:rPr>
-              <a:t>And there are no official weights to check against: the repo ships none, and GitHub issues #11 (Apr 2022) and #21 (Jul 2022) requesting them are still open and unanswered.</a:t>
+              <a:t>No </a:t>
+            </a:r>
+            <a:r>
+              <a:rPr sz="1200" b="0" i="1" dirty="0">
+                <a:solidFill>
+                  <a:srgbClr val="555555"/>
+                </a:solidFill>
+                <a:latin typeface="Calibri"/>
+              </a:rPr>
+              <a:t>official weights to check against: the repo ships none, and GitHub issues #11 (Apr 2022) and #21 (Jul 2022) requesting them are still open and unanswered.</a:t>
             </a:r>
           </a:p>
         </p:txBody>
@@ -8497,7 +8523,7 @@
 </file>
 
 <file path=ppt/slides/slide7.xml><?xml version="1.0" encoding="utf-8"?>
-<p:sld xmlns:a="http://schemas.openxmlformats.org/drawingml/2006/main" xmlns:p="http://schemas.openxmlformats.org/presentationml/2006/main" xmlns:r="http://schemas.openxmlformats.org/officeDocument/2006/relationships">
+<p:sld xmlns:a="http://schemas.openxmlformats.org/drawingml/2006/main" xmlns:r="http://schemas.openxmlformats.org/officeDocument/2006/relationships" xmlns:p="http://schemas.openxmlformats.org/presentationml/2006/main">
   <p:cSld>
     <p:bg>
       <p:bgPr>
@@ -8513,7 +8539,14 @@
         <p:cNvGrpSpPr/>
         <p:nvPr/>
       </p:nvGrpSpPr>
-      <p:grpSpPr/>
+      <p:grpSpPr>
+        <a:xfrm>
+          <a:off x="0" y="0"/>
+          <a:ext cx="0" cy="0"/>
+          <a:chOff x="0" y="0"/>
+          <a:chExt cx="0" cy="0"/>
+        </a:xfrm>
+      </p:grpSpPr>
       <p:sp>
         <p:nvSpPr>
           <p:cNvPr id="2" name="TextBox 1"/>
@@ -8567,15 +8600,39 @@
                 <a:tableStyleId>{5C22544A-7EE6-4342-B048-85BDC9FD1C3A}</a:tableStyleId>
               </a:tblPr>
               <a:tblGrid>
-                <a:gridCol w="560323"/>
-                <a:gridCol w="3586073"/>
-                <a:gridCol w="2465425"/>
-                <a:gridCol w="4482591"/>
+                <a:gridCol w="560323">
+                  <a:extLst>
+                    <a:ext uri="{9D8B030D-6E8A-4147-A177-3AD203B41FA5}">
+                      <a16:colId xmlns:a16="http://schemas.microsoft.com/office/drawing/2014/main" val="20000"/>
+                    </a:ext>
+                  </a:extLst>
+                </a:gridCol>
+                <a:gridCol w="3586073">
+                  <a:extLst>
+                    <a:ext uri="{9D8B030D-6E8A-4147-A177-3AD203B41FA5}">
+                      <a16:colId xmlns:a16="http://schemas.microsoft.com/office/drawing/2014/main" val="20001"/>
+                    </a:ext>
+                  </a:extLst>
+                </a:gridCol>
+                <a:gridCol w="2465425">
+                  <a:extLst>
+                    <a:ext uri="{9D8B030D-6E8A-4147-A177-3AD203B41FA5}">
+                      <a16:colId xmlns:a16="http://schemas.microsoft.com/office/drawing/2014/main" val="20002"/>
+                    </a:ext>
+                  </a:extLst>
+                </a:gridCol>
+                <a:gridCol w="4482591">
+                  <a:extLst>
+                    <a:ext uri="{9D8B030D-6E8A-4147-A177-3AD203B41FA5}">
+                      <a16:colId xmlns:a16="http://schemas.microsoft.com/office/drawing/2014/main" val="20003"/>
+                    </a:ext>
+                  </a:extLst>
+                </a:gridCol>
               </a:tblGrid>
               <a:tr h="487680">
                 <a:tc>
                   <a:txBody>
-                    <a:bodyPr wrap="square"/>
+                    <a:bodyPr/>
                     <a:lstStyle/>
                     <a:p>
                       <a:pPr algn="l"/>
@@ -8598,7 +8655,7 @@
                 </a:tc>
                 <a:tc>
                   <a:txBody>
-                    <a:bodyPr wrap="square"/>
+                    <a:bodyPr/>
                     <a:lstStyle/>
                     <a:p>
                       <a:pPr algn="ctr"/>
@@ -8621,7 +8678,7 @@
                 </a:tc>
                 <a:tc>
                   <a:txBody>
-                    <a:bodyPr wrap="square"/>
+                    <a:bodyPr/>
                     <a:lstStyle/>
                     <a:p>
                       <a:pPr algn="ctr"/>
@@ -8644,7 +8701,7 @@
                 </a:tc>
                 <a:tc>
                   <a:txBody>
-                    <a:bodyPr wrap="square"/>
+                    <a:bodyPr/>
                     <a:lstStyle/>
                     <a:p>
                       <a:pPr algn="ctr"/>
@@ -8665,11 +8722,16 @@
                     </a:solidFill>
                   </a:tcPr>
                 </a:tc>
+                <a:extLst>
+                  <a:ext uri="{0D108BD9-81ED-4DB2-BD59-A6C34878D82A}">
+                    <a16:rowId xmlns:a16="http://schemas.microsoft.com/office/drawing/2014/main" val="10000"/>
+                  </a:ext>
+                </a:extLst>
               </a:tr>
               <a:tr h="487680">
                 <a:tc>
                   <a:txBody>
-                    <a:bodyPr wrap="square"/>
+                    <a:bodyPr/>
                     <a:lstStyle/>
                     <a:p>
                       <a:pPr algn="l"/>
@@ -8692,7 +8754,7 @@
                 </a:tc>
                 <a:tc>
                   <a:txBody>
-                    <a:bodyPr wrap="square"/>
+                    <a:bodyPr/>
                     <a:lstStyle/>
                     <a:p>
                       <a:pPr algn="ctr"/>
@@ -8715,7 +8777,7 @@
                 </a:tc>
                 <a:tc>
                   <a:txBody>
-                    <a:bodyPr wrap="square"/>
+                    <a:bodyPr/>
                     <a:lstStyle/>
                     <a:p>
                       <a:pPr algn="ctr"/>
@@ -8738,7 +8800,7 @@
                 </a:tc>
                 <a:tc>
                   <a:txBody>
-                    <a:bodyPr wrap="square"/>
+                    <a:bodyPr/>
                     <a:lstStyle/>
                     <a:p>
                       <a:pPr algn="ctr"/>
@@ -8759,11 +8821,16 @@
                     </a:solidFill>
                   </a:tcPr>
                 </a:tc>
+                <a:extLst>
+                  <a:ext uri="{0D108BD9-81ED-4DB2-BD59-A6C34878D82A}">
+                    <a16:rowId xmlns:a16="http://schemas.microsoft.com/office/drawing/2014/main" val="10001"/>
+                  </a:ext>
+                </a:extLst>
               </a:tr>
               <a:tr h="487680">
                 <a:tc>
                   <a:txBody>
-                    <a:bodyPr wrap="square"/>
+                    <a:bodyPr/>
                     <a:lstStyle/>
                     <a:p>
                       <a:pPr algn="l"/>
@@ -8786,7 +8853,7 @@
                 </a:tc>
                 <a:tc>
                   <a:txBody>
-                    <a:bodyPr wrap="square"/>
+                    <a:bodyPr/>
                     <a:lstStyle/>
                     <a:p>
                       <a:pPr algn="ctr"/>
@@ -8809,7 +8876,7 @@
                 </a:tc>
                 <a:tc>
                   <a:txBody>
-                    <a:bodyPr wrap="square"/>
+                    <a:bodyPr/>
                     <a:lstStyle/>
                     <a:p>
                       <a:pPr algn="ctr"/>
@@ -8832,7 +8899,7 @@
                 </a:tc>
                 <a:tc>
                   <a:txBody>
-                    <a:bodyPr wrap="square"/>
+                    <a:bodyPr/>
                     <a:lstStyle/>
                     <a:p>
                       <a:pPr algn="ctr"/>
@@ -8853,11 +8920,16 @@
                     </a:solidFill>
                   </a:tcPr>
                 </a:tc>
+                <a:extLst>
+                  <a:ext uri="{0D108BD9-81ED-4DB2-BD59-A6C34878D82A}">
+                    <a16:rowId xmlns:a16="http://schemas.microsoft.com/office/drawing/2014/main" val="10002"/>
+                  </a:ext>
+                </a:extLst>
               </a:tr>
               <a:tr h="487680">
                 <a:tc>
                   <a:txBody>
-                    <a:bodyPr wrap="square"/>
+                    <a:bodyPr/>
                     <a:lstStyle/>
                     <a:p>
                       <a:pPr algn="l"/>
@@ -8880,7 +8952,7 @@
                 </a:tc>
                 <a:tc>
                   <a:txBody>
-                    <a:bodyPr wrap="square"/>
+                    <a:bodyPr/>
                     <a:lstStyle/>
                     <a:p>
                       <a:pPr algn="ctr"/>
@@ -8903,7 +8975,7 @@
                 </a:tc>
                 <a:tc>
                   <a:txBody>
-                    <a:bodyPr wrap="square"/>
+                    <a:bodyPr/>
                     <a:lstStyle/>
                     <a:p>
                       <a:pPr algn="ctr"/>
@@ -8926,7 +8998,7 @@
                 </a:tc>
                 <a:tc>
                   <a:txBody>
-                    <a:bodyPr wrap="square"/>
+                    <a:bodyPr/>
                     <a:lstStyle/>
                     <a:p>
                       <a:pPr algn="ctr"/>
@@ -8947,11 +9019,16 @@
                     </a:solidFill>
                   </a:tcPr>
                 </a:tc>
+                <a:extLst>
+                  <a:ext uri="{0D108BD9-81ED-4DB2-BD59-A6C34878D82A}">
+                    <a16:rowId xmlns:a16="http://schemas.microsoft.com/office/drawing/2014/main" val="10003"/>
+                  </a:ext>
+                </a:extLst>
               </a:tr>
               <a:tr h="487680">
                 <a:tc>
                   <a:txBody>
-                    <a:bodyPr wrap="square"/>
+                    <a:bodyPr/>
                     <a:lstStyle/>
                     <a:p>
                       <a:pPr algn="l"/>
@@ -8974,7 +9051,7 @@
                 </a:tc>
                 <a:tc>
                   <a:txBody>
-                    <a:bodyPr wrap="square"/>
+                    <a:bodyPr/>
                     <a:lstStyle/>
                     <a:p>
                       <a:pPr algn="ctr"/>
@@ -8997,7 +9074,7 @@
                 </a:tc>
                 <a:tc>
                   <a:txBody>
-                    <a:bodyPr wrap="square"/>
+                    <a:bodyPr/>
                     <a:lstStyle/>
                     <a:p>
                       <a:pPr algn="ctr"/>
@@ -9020,7 +9097,7 @@
                 </a:tc>
                 <a:tc>
                   <a:txBody>
-                    <a:bodyPr wrap="square"/>
+                    <a:bodyPr/>
                     <a:lstStyle/>
                     <a:p>
                       <a:pPr algn="ctr"/>
@@ -9041,11 +9118,16 @@
                     </a:solidFill>
                   </a:tcPr>
                 </a:tc>
+                <a:extLst>
+                  <a:ext uri="{0D108BD9-81ED-4DB2-BD59-A6C34878D82A}">
+                    <a16:rowId xmlns:a16="http://schemas.microsoft.com/office/drawing/2014/main" val="10004"/>
+                  </a:ext>
+                </a:extLst>
               </a:tr>
               <a:tr h="487680">
                 <a:tc>
                   <a:txBody>
-                    <a:bodyPr wrap="square"/>
+                    <a:bodyPr/>
                     <a:lstStyle/>
                     <a:p>
                       <a:pPr algn="l"/>
@@ -9068,7 +9150,7 @@
                 </a:tc>
                 <a:tc>
                   <a:txBody>
-                    <a:bodyPr wrap="square"/>
+                    <a:bodyPr/>
                     <a:lstStyle/>
                     <a:p>
                       <a:pPr algn="ctr"/>
@@ -9091,7 +9173,7 @@
                 </a:tc>
                 <a:tc>
                   <a:txBody>
-                    <a:bodyPr wrap="square"/>
+                    <a:bodyPr/>
                     <a:lstStyle/>
                     <a:p>
                       <a:pPr algn="ctr"/>
@@ -9114,7 +9196,7 @@
                 </a:tc>
                 <a:tc>
                   <a:txBody>
-                    <a:bodyPr wrap="square"/>
+                    <a:bodyPr/>
                     <a:lstStyle/>
                     <a:p>
                       <a:pPr algn="ctr"/>
@@ -9135,6 +9217,11 @@
                     </a:solidFill>
                   </a:tcPr>
                 </a:tc>
+                <a:extLst>
+                  <a:ext uri="{0D108BD9-81ED-4DB2-BD59-A6C34878D82A}">
+                    <a16:rowId xmlns:a16="http://schemas.microsoft.com/office/drawing/2014/main" val="10005"/>
+                  </a:ext>
+                </a:extLst>
               </a:tr>
             </a:tbl>
           </a:graphicData>
@@ -9222,7 +9309,7 @@
 </file>
 
 <file path=ppt/slides/slide8.xml><?xml version="1.0" encoding="utf-8"?>
-<p:sld xmlns:a="http://schemas.openxmlformats.org/drawingml/2006/main" xmlns:p="http://schemas.openxmlformats.org/presentationml/2006/main" xmlns:r="http://schemas.openxmlformats.org/officeDocument/2006/relationships">
+<p:sld xmlns:a="http://schemas.openxmlformats.org/drawingml/2006/main" xmlns:r="http://schemas.openxmlformats.org/officeDocument/2006/relationships" xmlns:p="http://schemas.openxmlformats.org/presentationml/2006/main">
   <p:cSld>
     <p:bg>
       <p:bgPr>
@@ -9238,7 +9325,14 @@
         <p:cNvGrpSpPr/>
         <p:nvPr/>
       </p:nvGrpSpPr>
-      <p:grpSpPr/>
+      <p:grpSpPr>
+        <a:xfrm>
+          <a:off x="0" y="0"/>
+          <a:ext cx="0" cy="0"/>
+          <a:chOff x="0" y="0"/>
+          <a:chExt cx="0" cy="0"/>
+        </a:xfrm>
+      </p:grpSpPr>
       <p:sp>
         <p:nvSpPr>
           <p:cNvPr id="2" name="TextBox 1"/>
@@ -9458,7 +9552,7 @@
 </file>
 
 <file path=ppt/slides/slide9.xml><?xml version="1.0" encoding="utf-8"?>
-<p:sld xmlns:a="http://schemas.openxmlformats.org/drawingml/2006/main" xmlns:p="http://schemas.openxmlformats.org/presentationml/2006/main" xmlns:r="http://schemas.openxmlformats.org/officeDocument/2006/relationships">
+<p:sld xmlns:a="http://schemas.openxmlformats.org/drawingml/2006/main" xmlns:r="http://schemas.openxmlformats.org/officeDocument/2006/relationships" xmlns:p="http://schemas.openxmlformats.org/presentationml/2006/main">
   <p:cSld>
     <p:bg>
       <p:bgPr>
@@ -9474,7 +9568,14 @@
         <p:cNvGrpSpPr/>
         <p:nvPr/>
       </p:nvGrpSpPr>
-      <p:grpSpPr/>
+      <p:grpSpPr>
+        <a:xfrm>
+          <a:off x="0" y="0"/>
+          <a:ext cx="0" cy="0"/>
+          <a:chOff x="0" y="0"/>
+          <a:chExt cx="0" cy="0"/>
+        </a:xfrm>
+      </p:grpSpPr>
       <p:sp>
         <p:nvSpPr>
           <p:cNvPr id="2" name="TextBox 1"/>
@@ -9552,7 +9653,7 @@
         </p:nvSpPr>
         <p:spPr>
           <a:xfrm>
-            <a:off x="548640" y="4114800"/>
+            <a:off x="548640" y="5400779"/>
             <a:ext cx="11094415" cy="2286000"/>
           </a:xfrm>
           <a:prstGeom prst="rect">
@@ -9572,16 +9673,34 @@
               </a:spcAft>
             </a:pPr>
             <a:r>
-              <a:rPr sz="1400" b="1" i="0">
-                <a:solidFill>
-                  <a:srgbClr val="000000"/>
-                </a:solidFill>
-                <a:latin typeface="Calibri"/>
-              </a:rPr>
-              <a:t>Mean IoU 0.5931 → 0.6328 (+0.040).</a:t>
-            </a:r>
-            <a:r>
-              <a:rPr sz="1400" b="0" i="0">
+              <a:rPr sz="1400" b="1" i="0" dirty="0">
+                <a:solidFill>
+                  <a:srgbClr val="000000"/>
+                </a:solidFill>
+                <a:latin typeface="Calibri"/>
+              </a:rPr>
+              <a:t>Mean </a:t>
+            </a:r>
+            <a:r>
+              <a:rPr sz="1400" b="1" i="0" dirty="0" err="1">
+                <a:solidFill>
+                  <a:srgbClr val="000000"/>
+                </a:solidFill>
+                <a:latin typeface="Calibri"/>
+              </a:rPr>
+              <a:t>IoU</a:t>
+            </a:r>
+            <a:r>
+              <a:rPr sz="1400" b="1" i="0" dirty="0">
+                <a:solidFill>
+                  <a:srgbClr val="000000"/>
+                </a:solidFill>
+                <a:latin typeface="Calibri"/>
+              </a:rPr>
+              <a:t> 0.5931 → 0.6328 (+0.040).</a:t>
+            </a:r>
+            <a:r>
+              <a:rPr sz="1400" b="0" i="0" dirty="0">
                 <a:solidFill>
                   <a:srgbClr val="000000"/>
                 </a:solidFill>
@@ -9597,7 +9716,7 @@
               </a:spcAft>
             </a:pPr>
             <a:r>
-              <a:rPr sz="1400" b="0" i="0">
+              <a:rPr sz="1400" b="0" i="0" dirty="0">
                 <a:solidFill>
                   <a:srgbClr val="000000"/>
                 </a:solidFill>
@@ -9606,7 +9725,7 @@
               <a:t>Overfitting gap cut </a:t>
             </a:r>
             <a:r>
-              <a:rPr sz="1400" b="1" i="0">
+              <a:rPr sz="1400" b="1" i="0" dirty="0">
                 <a:solidFill>
                   <a:srgbClr val="000000"/>
                 </a:solidFill>
@@ -9615,7 +9734,7 @@
               <a:t>60%</a:t>
             </a:r>
             <a:r>
-              <a:rPr sz="1400" b="0" i="0">
+              <a:rPr sz="1400" b="0" i="0" dirty="0">
                 <a:solidFill>
                   <a:srgbClr val="000000"/>
                 </a:solidFill>
@@ -9624,7 +9743,7 @@
               <a:t>; split-to-split Dice spread cut </a:t>
             </a:r>
             <a:r>
-              <a:rPr sz="1400" b="1" i="0">
+              <a:rPr sz="1400" b="1" i="0" dirty="0">
                 <a:solidFill>
                   <a:srgbClr val="000000"/>
                 </a:solidFill>
@@ -9633,7 +9752,7 @@
               <a:t>4.4×</a:t>
             </a:r>
             <a:r>
-              <a:rPr sz="1400" b="0" i="0">
+              <a:rPr sz="1400" b="0" i="0" dirty="0">
                 <a:solidFill>
                   <a:srgbClr val="000000"/>
                 </a:solidFill>
@@ -9649,7 +9768,7 @@
               </a:spcAft>
             </a:pPr>
             <a:r>
-              <a:rPr sz="1400" b="1" i="0">
+              <a:rPr sz="1400" b="1" i="0" dirty="0">
                 <a:solidFill>
                   <a:srgbClr val="000000"/>
                 </a:solidFill>
@@ -9658,7 +9777,7 @@
               <a:t>Honest caveat:</a:t>
             </a:r>
             <a:r>
-              <a:rPr sz="1400" b="0" i="0">
+              <a:rPr sz="1400" b="0" i="0" dirty="0">
                 <a:solidFill>
                   <a:srgbClr val="000000"/>
                 </a:solidFill>
@@ -9667,7 +9786,7 @@
               <a:t> compared at the *same* number of epochs the gain shrinks to </a:t>
             </a:r>
             <a:r>
-              <a:rPr sz="1400" b="1" i="0">
+              <a:rPr sz="1400" b="1" i="0" dirty="0">
                 <a:solidFill>
                   <a:srgbClr val="000000"/>
                 </a:solidFill>
@@ -9676,7 +9795,7 @@
               <a:t>+0.023</a:t>
             </a:r>
             <a:r>
-              <a:rPr sz="1400" b="0" i="0">
+              <a:rPr sz="1400" b="0" i="0" dirty="0">
                 <a:solidFill>
                   <a:srgbClr val="000000"/>
                 </a:solidFill>
@@ -9685,7 +9804,7 @@
               <a:t>. Augmentation does not converge faster — it </a:t>
             </a:r>
             <a:r>
-              <a:rPr sz="1400" b="1" i="0">
+              <a:rPr sz="1400" b="1" i="0" dirty="0">
                 <a:solidFill>
                   <a:srgbClr val="000000"/>
                 </a:solidFill>
@@ -9694,7 +9813,7 @@
               <a:t>removes the ceiling</a:t>
             </a:r>
             <a:r>
-              <a:rPr sz="1400" b="0" i="0">
+              <a:rPr sz="1400" b="0" i="0" dirty="0">
                 <a:solidFill>
                   <a:srgbClr val="000000"/>
                 </a:solidFill>
@@ -10031,324 +10150,4 @@
   </a:objectDefaults>
   <a:extraClrSchemeLst/>
 </a:theme>
-</file>
-
-<file path=ppt/theme/theme2.xml><?xml version="1.0" encoding="utf-8"?>
-<a:theme xmlns:a="http://schemas.openxmlformats.org/drawingml/2006/main" name="Office Theme">
-  <a:themeElements>
-    <a:clrScheme name="Office">
-      <a:dk1>
-        <a:sysClr val="windowText" lastClr="000000"/>
-      </a:dk1>
-      <a:lt1>
-        <a:sysClr val="window" lastClr="FFFFFF"/>
-      </a:lt1>
-      <a:dk2>
-        <a:srgbClr val="1F497D"/>
-      </a:dk2>
-      <a:lt2>
-        <a:srgbClr val="EEECE1"/>
-      </a:lt2>
-      <a:accent1>
-        <a:srgbClr val="4F81BD"/>
-      </a:accent1>
-      <a:accent2>
-        <a:srgbClr val="C0504D"/>
-      </a:accent2>
-      <a:accent3>
-        <a:srgbClr val="9BBB59"/>
-      </a:accent3>
-      <a:accent4>
-        <a:srgbClr val="8064A2"/>
-      </a:accent4>
-      <a:accent5>
-        <a:srgbClr val="4BACC6"/>
-      </a:accent5>
-      <a:accent6>
-        <a:srgbClr val="F79646"/>
-      </a:accent6>
-      <a:hlink>
-        <a:srgbClr val="0000FF"/>
-      </a:hlink>
-      <a:folHlink>
-        <a:srgbClr val="800080"/>
-      </a:folHlink>
-    </a:clrScheme>
-    <a:fontScheme name="Office">
-      <a:majorFont>
-        <a:latin typeface="Calibri"/>
-        <a:ea typeface=""/>
-        <a:cs typeface=""/>
-        <a:font script="Jpan" typeface="ＭＳ Ｐゴシック"/>
-        <a:font script="Hang" typeface="맑은 고딕"/>
-        <a:font script="Hans" typeface="宋体"/>
-        <a:font script="Hant" typeface="新細明體"/>
-        <a:font script="Arab" typeface="Times New Roman"/>
-        <a:font script="Hebr" typeface="Times New Roman"/>
-        <a:font script="Thai" typeface="Angsana New"/>
-        <a:font script="Ethi" typeface="Nyala"/>
-        <a:font script="Beng" typeface="Vrinda"/>
-        <a:font script="Gujr" typeface="Shruti"/>
-        <a:font script="Khmr" typeface="MoolBoran"/>
-        <a:font script="Knda" typeface="Tunga"/>
-        <a:font script="Guru" typeface="Raavi"/>
-        <a:font script="Cans" typeface="Euphemia"/>
-        <a:font script="Cher" typeface="Plantagenet Cherokee"/>
-        <a:font script="Yiii" typeface="Microsoft Yi Baiti"/>
-        <a:font script="Tibt" typeface="Microsoft Himalaya"/>
-        <a:font script="Thaa" typeface="MV Boli"/>
-        <a:font script="Deva" typeface="Mangal"/>
-        <a:font script="Telu" typeface="Gautami"/>
-        <a:font script="Taml" typeface="Latha"/>
-        <a:font script="Syrc" typeface="Estrangelo Edessa"/>
-        <a:font script="Orya" typeface="Kalinga"/>
-        <a:font script="Mlym" typeface="Kartika"/>
-        <a:font script="Laoo" typeface="DokChampa"/>
-        <a:font script="Sinh" typeface="Iskoola Pota"/>
-        <a:font script="Mong" typeface="Mongolian Baiti"/>
-        <a:font script="Viet" typeface="Times New Roman"/>
-        <a:font script="Uigh" typeface="Microsoft Uighur"/>
-        <a:font script="Geor" typeface="Sylfaen"/>
-      </a:majorFont>
-      <a:minorFont>
-        <a:latin typeface="Calibri"/>
-        <a:ea typeface=""/>
-        <a:cs typeface=""/>
-        <a:font script="Jpan" typeface="ＭＳ Ｐゴシック"/>
-        <a:font script="Hang" typeface="맑은 고딕"/>
-        <a:font script="Hans" typeface="宋体"/>
-        <a:font script="Hant" typeface="新細明體"/>
-        <a:font script="Arab" typeface="Arial"/>
-        <a:font script="Hebr" typeface="Arial"/>
-        <a:font script="Thai" typeface="Cordia New"/>
-        <a:font script="Ethi" typeface="Nyala"/>
-        <a:font script="Beng" typeface="Vrinda"/>
-        <a:font script="Gujr" typeface="Shruti"/>
-        <a:font script="Khmr" typeface="DaunPenh"/>
-        <a:font script="Knda" typeface="Tunga"/>
-        <a:font script="Guru" typeface="Raavi"/>
-        <a:font script="Cans" typeface="Euphemia"/>
-        <a:font script="Cher" typeface="Plantagenet Cherokee"/>
-        <a:font script="Yiii" typeface="Microsoft Yi Baiti"/>
-        <a:font script="Tibt" typeface="Microsoft Himalaya"/>
-        <a:font script="Thaa" typeface="MV Boli"/>
-        <a:font script="Deva" typeface="Mangal"/>
-        <a:font script="Telu" typeface="Gautami"/>
-        <a:font script="Taml" typeface="Latha"/>
-        <a:font script="Syrc" typeface="Estrangelo Edessa"/>
-        <a:font script="Orya" typeface="Kalinga"/>
-        <a:font script="Mlym" typeface="Kartika"/>
-        <a:font script="Laoo" typeface="DokChampa"/>
-        <a:font script="Sinh" typeface="Iskoola Pota"/>
-        <a:font script="Mong" typeface="Mongolian Baiti"/>
-        <a:font script="Viet" typeface="Arial"/>
-        <a:font script="Uigh" typeface="Microsoft Uighur"/>
-        <a:font script="Geor" typeface="Sylfaen"/>
-      </a:minorFont>
-    </a:fontScheme>
-    <a:fmtScheme name="Office">
-      <a:fillStyleLst>
-        <a:solidFill>
-          <a:schemeClr val="phClr"/>
-        </a:solidFill>
-        <a:gradFill rotWithShape="1">
-          <a:gsLst>
-            <a:gs pos="0">
-              <a:schemeClr val="phClr">
-                <a:tint val="50000"/>
-                <a:satMod val="300000"/>
-              </a:schemeClr>
-            </a:gs>
-            <a:gs pos="35000">
-              <a:schemeClr val="phClr">
-                <a:tint val="37000"/>
-                <a:satMod val="300000"/>
-              </a:schemeClr>
-            </a:gs>
-            <a:gs pos="100000">
-              <a:schemeClr val="phClr">
-                <a:tint val="15000"/>
-                <a:satMod val="350000"/>
-              </a:schemeClr>
-            </a:gs>
-          </a:gsLst>
-          <a:lin ang="16200000" scaled="1"/>
-        </a:gradFill>
-        <a:gradFill rotWithShape="1">
-          <a:gsLst>
-            <a:gs pos="0">
-              <a:schemeClr val="phClr">
-                <a:tint val="100000"/>
-                <a:shade val="100000"/>
-                <a:satMod val="130000"/>
-              </a:schemeClr>
-            </a:gs>
-            <a:gs pos="100000">
-              <a:schemeClr val="phClr">
-                <a:tint val="50000"/>
-                <a:shade val="100000"/>
-                <a:satMod val="350000"/>
-              </a:schemeClr>
-            </a:gs>
-          </a:gsLst>
-          <a:lin ang="16200000" scaled="0"/>
-        </a:gradFill>
-      </a:fillStyleLst>
-      <a:lnStyleLst>
-        <a:ln w="9525" cap="flat" cmpd="sng" algn="ctr">
-          <a:solidFill>
-            <a:schemeClr val="phClr">
-              <a:shade val="95000"/>
-              <a:satMod val="105000"/>
-            </a:schemeClr>
-          </a:solidFill>
-          <a:prstDash val="solid"/>
-        </a:ln>
-        <a:ln w="25400" cap="flat" cmpd="sng" algn="ctr">
-          <a:solidFill>
-            <a:schemeClr val="phClr"/>
-          </a:solidFill>
-          <a:prstDash val="solid"/>
-        </a:ln>
-        <a:ln w="38100" cap="flat" cmpd="sng" algn="ctr">
-          <a:solidFill>
-            <a:schemeClr val="phClr"/>
-          </a:solidFill>
-          <a:prstDash val="solid"/>
-        </a:ln>
-      </a:lnStyleLst>
-      <a:effectStyleLst>
-        <a:effectStyle>
-          <a:effectLst>
-            <a:outerShdw blurRad="40000" dist="20000" dir="5400000" rotWithShape="0">
-              <a:srgbClr val="000000">
-                <a:alpha val="38000"/>
-              </a:srgbClr>
-            </a:outerShdw>
-          </a:effectLst>
-        </a:effectStyle>
-        <a:effectStyle>
-          <a:effectLst>
-            <a:outerShdw blurRad="40000" dist="23000" dir="5400000" rotWithShape="0">
-              <a:srgbClr val="000000">
-                <a:alpha val="35000"/>
-              </a:srgbClr>
-            </a:outerShdw>
-          </a:effectLst>
-        </a:effectStyle>
-        <a:effectStyle>
-          <a:effectLst>
-            <a:outerShdw blurRad="40000" dist="23000" dir="5400000" rotWithShape="0">
-              <a:srgbClr val="000000">
-                <a:alpha val="35000"/>
-              </a:srgbClr>
-            </a:outerShdw>
-          </a:effectLst>
-          <a:scene3d>
-            <a:camera prst="orthographicFront">
-              <a:rot lat="0" lon="0" rev="0"/>
-            </a:camera>
-            <a:lightRig rig="threePt" dir="t">
-              <a:rot lat="0" lon="0" rev="1200000"/>
-            </a:lightRig>
-          </a:scene3d>
-          <a:sp3d>
-            <a:bevelT w="63500" h="25400"/>
-          </a:sp3d>
-        </a:effectStyle>
-      </a:effectStyleLst>
-      <a:bgFillStyleLst>
-        <a:solidFill>
-          <a:schemeClr val="phClr"/>
-        </a:solidFill>
-        <a:gradFill rotWithShape="1">
-          <a:gsLst>
-            <a:gs pos="0">
-              <a:schemeClr val="phClr">
-                <a:tint val="40000"/>
-                <a:satMod val="350000"/>
-              </a:schemeClr>
-            </a:gs>
-            <a:gs pos="40000">
-              <a:schemeClr val="phClr">
-                <a:tint val="45000"/>
-                <a:shade val="99000"/>
-                <a:satMod val="350000"/>
-              </a:schemeClr>
-            </a:gs>
-            <a:gs pos="100000">
-              <a:schemeClr val="phClr">
-                <a:shade val="20000"/>
-                <a:satMod val="255000"/>
-              </a:schemeClr>
-            </a:gs>
-          </a:gsLst>
-          <a:path path="circle">
-            <a:fillToRect l="50000" t="-80000" r="50000" b="180000"/>
-          </a:path>
-        </a:gradFill>
-        <a:gradFill rotWithShape="1">
-          <a:gsLst>
-            <a:gs pos="0">
-              <a:schemeClr val="phClr">
-                <a:tint val="80000"/>
-                <a:satMod val="300000"/>
-              </a:schemeClr>
-            </a:gs>
-            <a:gs pos="100000">
-              <a:schemeClr val="phClr">
-                <a:shade val="30000"/>
-                <a:satMod val="200000"/>
-              </a:schemeClr>
-            </a:gs>
-          </a:gsLst>
-          <a:path path="circle">
-            <a:fillToRect l="50000" t="50000" r="50000" b="50000"/>
-          </a:path>
-        </a:gradFill>
-      </a:bgFillStyleLst>
-    </a:fmtScheme>
-  </a:themeElements>
-  <a:objectDefaults>
-    <a:spDef>
-      <a:spPr/>
-      <a:bodyPr/>
-      <a:lstStyle/>
-      <a:style>
-        <a:lnRef idx="1">
-          <a:schemeClr val="accent1"/>
-        </a:lnRef>
-        <a:fillRef idx="3">
-          <a:schemeClr val="accent1"/>
-        </a:fillRef>
-        <a:effectRef idx="2">
-          <a:schemeClr val="accent1"/>
-        </a:effectRef>
-        <a:fontRef idx="minor">
-          <a:schemeClr val="lt1"/>
-        </a:fontRef>
-      </a:style>
-    </a:spDef>
-    <a:lnDef>
-      <a:spPr/>
-      <a:bodyPr/>
-      <a:lstStyle/>
-      <a:style>
-        <a:lnRef idx="2">
-          <a:schemeClr val="accent1"/>
-        </a:lnRef>
-        <a:fillRef idx="0">
-          <a:schemeClr val="accent1"/>
-        </a:fillRef>
-        <a:effectRef idx="1">
-          <a:schemeClr val="accent1"/>
-        </a:effectRef>
-        <a:fontRef idx="minor">
-          <a:schemeClr val="tx1"/>
-        </a:fontRef>
-      </a:style>
-    </a:lnDef>
-  </a:objectDefaults>
-  <a:extraClrSchemeLst/>
-</a:theme>
 </file>